--- a/ppt/FE Assignment-1 Template.pptx
+++ b/ppt/FE Assignment-1 Template.pptx
@@ -5,10 +5,10 @@
     <p:sldMasterId id="2147483648" r:id="rId1"/>
   </p:sldMasterIdLst>
   <p:sldIdLst>
-    <p:sldId id="256" r:id="rId6"/>
-    <p:sldId id="257" r:id="rId7"/>
-    <p:sldId id="258" r:id="rId8"/>
-    <p:sldId id="259" r:id="rId9"/>
+    <p:sldId id="256" r:id="rId2"/>
+    <p:sldId id="257" r:id="rId3"/>
+    <p:sldId id="258" r:id="rId4"/>
+    <p:sldId id="259" r:id="rId5"/>
   </p:sldIdLst>
   <p:sldSz cx="7569200" cy="10693400"/>
   <p:notesSz cx="7569200" cy="10693400"/>
@@ -17,11 +17,27 @@
       <a:defRPr kern="0"/>
     </a:defPPr>
   </p:defaultTextStyle>
+  <p:extLst>
+    <p:ext uri="{EFAFB233-063F-42B5-8137-9DF3F51BA10A}">
+      <p15:sldGuideLst xmlns:p15="http://schemas.microsoft.com/office/powerpoint/2012/main">
+        <p15:guide id="1" orient="horz" pos="2880">
+          <p15:clr>
+            <a:srgbClr val="A4A3A4"/>
+          </p15:clr>
+        </p15:guide>
+        <p15:guide id="2" pos="2160">
+          <p15:clr>
+            <a:srgbClr val="A4A3A4"/>
+          </p15:clr>
+        </p15:guide>
+      </p15:sldGuideLst>
+    </p:ext>
+  </p:extLst>
 </p:presentation>
 </file>
 
 <file path=ppt/slideLayouts/slideLayout1.xml><?xml version="1.0" encoding="utf-8"?>
-<p:sldLayout xmlns:a="http://schemas.openxmlformats.org/drawingml/2006/main" xmlns:r="http://schemas.openxmlformats.org/officeDocument/2006/relationships" xmlns:p="http://schemas.openxmlformats.org/presentationml/2006/main" preserve="1" type="obj">
+<p:sldLayout xmlns:a="http://schemas.openxmlformats.org/drawingml/2006/main" xmlns:r="http://schemas.openxmlformats.org/officeDocument/2006/relationships" xmlns:p="http://schemas.openxmlformats.org/presentationml/2006/main" type="obj" preserve="1">
   <p:cSld name="Title Slide">
     <p:spTree>
       <p:nvGrpSpPr>
@@ -71,7 +87,9 @@
               </a:defRPr>
             </a:lvl1pPr>
           </a:lstStyle>
-          <a:p/>
+          <a:p>
+            <a:endParaRPr/>
+          </a:p>
         </p:txBody>
       </p:sp>
       <p:sp>
@@ -108,7 +126,9 @@
               </a:defRPr>
             </a:lvl1pPr>
           </a:lstStyle>
-          <a:p/>
+          <a:p>
+            <a:endParaRPr/>
+          </a:p>
         </p:txBody>
       </p:sp>
       <p:sp>
@@ -118,7 +138,7 @@
             <a:spLocks noGrp="1"/>
           </p:cNvSpPr>
           <p:nvPr>
-            <p:ph type="ftr" idx="5" sz="quarter"/>
+            <p:ph type="ftr" sz="quarter" idx="5"/>
           </p:nvPr>
         </p:nvSpPr>
         <p:spPr/>
@@ -135,7 +155,9 @@
               </a:defRPr>
             </a:lvl1pPr>
           </a:lstStyle>
-          <a:p/>
+          <a:p>
+            <a:endParaRPr/>
+          </a:p>
         </p:txBody>
       </p:sp>
       <p:sp>
@@ -145,7 +167,7 @@
             <a:spLocks noGrp="1"/>
           </p:cNvSpPr>
           <p:nvPr>
-            <p:ph type="dt" idx="6" sz="half"/>
+            <p:ph type="dt" sz="half" idx="6"/>
           </p:nvPr>
         </p:nvSpPr>
         <p:spPr/>
@@ -165,7 +187,9 @@
           <a:p>
             <a:fld id="{1D8BD707-D9CF-40AE-B4C6-C98DA3205C09}" type="datetimeFigureOut">
               <a:rPr lang="en-US"/>
+              <a:t>3/4/2026</a:t>
             </a:fld>
+            <a:endParaRPr lang="en-US"/>
           </a:p>
         </p:txBody>
       </p:sp>
@@ -176,7 +200,7 @@
             <a:spLocks noGrp="1"/>
           </p:cNvSpPr>
           <p:nvPr>
-            <p:ph type="sldNum" idx="7" sz="quarter"/>
+            <p:ph type="sldNum" sz="quarter" idx="7"/>
           </p:nvPr>
         </p:nvSpPr>
         <p:spPr/>
@@ -195,8 +219,9 @@
           </a:lstStyle>
           <a:p>
             <a:fld id="{B6F15528-21DE-4FAA-801E-634DDDAF4B2B}" type="slidenum">
-              <a:t>#</a:t>
+              <a:t>‹#›</a:t>
             </a:fld>
+            <a:endParaRPr/>
           </a:p>
         </p:txBody>
       </p:sp>
@@ -209,7 +234,7 @@
 </file>
 
 <file path=ppt/slideLayouts/slideLayout2.xml><?xml version="1.0" encoding="utf-8"?>
-<p:sldLayout xmlns:a="http://schemas.openxmlformats.org/drawingml/2006/main" xmlns:r="http://schemas.openxmlformats.org/officeDocument/2006/relationships" xmlns:p="http://schemas.openxmlformats.org/presentationml/2006/main" preserve="1" type="obj">
+<p:sldLayout xmlns:a="http://schemas.openxmlformats.org/drawingml/2006/main" xmlns:r="http://schemas.openxmlformats.org/officeDocument/2006/relationships" xmlns:p="http://schemas.openxmlformats.org/presentationml/2006/main" type="obj" preserve="1">
   <p:cSld name="Title and Content">
     <p:spTree>
       <p:nvGrpSpPr>
@@ -249,7 +274,9 @@
               </a:defRPr>
             </a:lvl1pPr>
           </a:lstStyle>
-          <a:p/>
+          <a:p>
+            <a:endParaRPr/>
+          </a:p>
         </p:txBody>
       </p:sp>
       <p:sp>
@@ -276,7 +303,9 @@
               </a:defRPr>
             </a:lvl1pPr>
           </a:lstStyle>
-          <a:p/>
+          <a:p>
+            <a:endParaRPr/>
+          </a:p>
         </p:txBody>
       </p:sp>
       <p:sp>
@@ -286,7 +315,7 @@
             <a:spLocks noGrp="1"/>
           </p:cNvSpPr>
           <p:nvPr>
-            <p:ph type="ftr" idx="5" sz="quarter"/>
+            <p:ph type="ftr" sz="quarter" idx="5"/>
           </p:nvPr>
         </p:nvSpPr>
         <p:spPr/>
@@ -303,7 +332,9 @@
               </a:defRPr>
             </a:lvl1pPr>
           </a:lstStyle>
-          <a:p/>
+          <a:p>
+            <a:endParaRPr/>
+          </a:p>
         </p:txBody>
       </p:sp>
       <p:sp>
@@ -313,7 +344,7 @@
             <a:spLocks noGrp="1"/>
           </p:cNvSpPr>
           <p:nvPr>
-            <p:ph type="dt" idx="6" sz="half"/>
+            <p:ph type="dt" sz="half" idx="6"/>
           </p:nvPr>
         </p:nvSpPr>
         <p:spPr/>
@@ -333,7 +364,9 @@
           <a:p>
             <a:fld id="{1D8BD707-D9CF-40AE-B4C6-C98DA3205C09}" type="datetimeFigureOut">
               <a:rPr lang="en-US"/>
+              <a:t>3/4/2026</a:t>
             </a:fld>
+            <a:endParaRPr lang="en-US"/>
           </a:p>
         </p:txBody>
       </p:sp>
@@ -344,7 +377,7 @@
             <a:spLocks noGrp="1"/>
           </p:cNvSpPr>
           <p:nvPr>
-            <p:ph type="sldNum" idx="7" sz="quarter"/>
+            <p:ph type="sldNum" sz="quarter" idx="7"/>
           </p:nvPr>
         </p:nvSpPr>
         <p:spPr/>
@@ -363,8 +396,9 @@
           </a:lstStyle>
           <a:p>
             <a:fld id="{B6F15528-21DE-4FAA-801E-634DDDAF4B2B}" type="slidenum">
-              <a:t>#</a:t>
+              <a:t>‹#›</a:t>
             </a:fld>
+            <a:endParaRPr/>
           </a:p>
         </p:txBody>
       </p:sp>
@@ -377,7 +411,7 @@
 </file>
 
 <file path=ppt/slideLayouts/slideLayout3.xml><?xml version="1.0" encoding="utf-8"?>
-<p:sldLayout xmlns:a="http://schemas.openxmlformats.org/drawingml/2006/main" xmlns:r="http://schemas.openxmlformats.org/officeDocument/2006/relationships" xmlns:p="http://schemas.openxmlformats.org/presentationml/2006/main" preserve="1" type="obj">
+<p:sldLayout xmlns:a="http://schemas.openxmlformats.org/drawingml/2006/main" xmlns:r="http://schemas.openxmlformats.org/officeDocument/2006/relationships" xmlns:p="http://schemas.openxmlformats.org/presentationml/2006/main" type="obj" preserve="1">
   <p:cSld name="Two Content">
     <p:spTree>
       <p:nvGrpSpPr>
@@ -417,7 +451,9 @@
               </a:defRPr>
             </a:lvl1pPr>
           </a:lstStyle>
-          <a:p/>
+          <a:p>
+            <a:endParaRPr/>
+          </a:p>
         </p:txBody>
       </p:sp>
       <p:sp>
@@ -427,7 +463,7 @@
             <a:spLocks noGrp="1"/>
           </p:cNvSpPr>
           <p:nvPr>
-            <p:ph idx="2" sz="half"/>
+            <p:ph sz="half" idx="2"/>
           </p:nvPr>
         </p:nvSpPr>
         <p:spPr>
@@ -448,7 +484,9 @@
               <a:defRPr/>
             </a:lvl1pPr>
           </a:lstStyle>
-          <a:p/>
+          <a:p>
+            <a:endParaRPr/>
+          </a:p>
         </p:txBody>
       </p:sp>
       <p:sp>
@@ -458,7 +496,7 @@
             <a:spLocks noGrp="1"/>
           </p:cNvSpPr>
           <p:nvPr>
-            <p:ph idx="3" sz="half"/>
+            <p:ph sz="half" idx="3"/>
           </p:nvPr>
         </p:nvSpPr>
         <p:spPr>
@@ -479,7 +517,9 @@
               <a:defRPr/>
             </a:lvl1pPr>
           </a:lstStyle>
-          <a:p/>
+          <a:p>
+            <a:endParaRPr/>
+          </a:p>
         </p:txBody>
       </p:sp>
       <p:sp>
@@ -489,7 +529,7 @@
             <a:spLocks noGrp="1"/>
           </p:cNvSpPr>
           <p:nvPr>
-            <p:ph type="ftr" idx="5" sz="quarter"/>
+            <p:ph type="ftr" sz="quarter" idx="5"/>
           </p:nvPr>
         </p:nvSpPr>
         <p:spPr/>
@@ -506,7 +546,9 @@
               </a:defRPr>
             </a:lvl1pPr>
           </a:lstStyle>
-          <a:p/>
+          <a:p>
+            <a:endParaRPr/>
+          </a:p>
         </p:txBody>
       </p:sp>
       <p:sp>
@@ -516,7 +558,7 @@
             <a:spLocks noGrp="1"/>
           </p:cNvSpPr>
           <p:nvPr>
-            <p:ph type="dt" idx="6" sz="half"/>
+            <p:ph type="dt" sz="half" idx="6"/>
           </p:nvPr>
         </p:nvSpPr>
         <p:spPr/>
@@ -536,7 +578,9 @@
           <a:p>
             <a:fld id="{1D8BD707-D9CF-40AE-B4C6-C98DA3205C09}" type="datetimeFigureOut">
               <a:rPr lang="en-US"/>
+              <a:t>3/4/2026</a:t>
             </a:fld>
+            <a:endParaRPr lang="en-US"/>
           </a:p>
         </p:txBody>
       </p:sp>
@@ -547,7 +591,7 @@
             <a:spLocks noGrp="1"/>
           </p:cNvSpPr>
           <p:nvPr>
-            <p:ph type="sldNum" idx="7" sz="quarter"/>
+            <p:ph type="sldNum" sz="quarter" idx="7"/>
           </p:nvPr>
         </p:nvSpPr>
         <p:spPr/>
@@ -566,8 +610,9 @@
           </a:lstStyle>
           <a:p>
             <a:fld id="{B6F15528-21DE-4FAA-801E-634DDDAF4B2B}" type="slidenum">
-              <a:t>#</a:t>
+              <a:t>‹#›</a:t>
             </a:fld>
+            <a:endParaRPr/>
           </a:p>
         </p:txBody>
       </p:sp>
@@ -580,7 +625,7 @@
 </file>
 
 <file path=ppt/slideLayouts/slideLayout4.xml><?xml version="1.0" encoding="utf-8"?>
-<p:sldLayout xmlns:a="http://schemas.openxmlformats.org/drawingml/2006/main" xmlns:r="http://schemas.openxmlformats.org/officeDocument/2006/relationships" xmlns:p="http://schemas.openxmlformats.org/presentationml/2006/main" preserve="1" type="obj">
+<p:sldLayout xmlns:a="http://schemas.openxmlformats.org/drawingml/2006/main" xmlns:r="http://schemas.openxmlformats.org/officeDocument/2006/relationships" xmlns:p="http://schemas.openxmlformats.org/presentationml/2006/main" type="obj" preserve="1">
   <p:cSld name="Title Only">
     <p:spTree>
       <p:nvGrpSpPr>
@@ -620,7 +665,9 @@
               </a:defRPr>
             </a:lvl1pPr>
           </a:lstStyle>
-          <a:p/>
+          <a:p>
+            <a:endParaRPr/>
+          </a:p>
         </p:txBody>
       </p:sp>
       <p:sp>
@@ -630,7 +677,7 @@
             <a:spLocks noGrp="1"/>
           </p:cNvSpPr>
           <p:nvPr>
-            <p:ph type="ftr" idx="5" sz="quarter"/>
+            <p:ph type="ftr" sz="quarter" idx="5"/>
           </p:nvPr>
         </p:nvSpPr>
         <p:spPr/>
@@ -647,7 +694,9 @@
               </a:defRPr>
             </a:lvl1pPr>
           </a:lstStyle>
-          <a:p/>
+          <a:p>
+            <a:endParaRPr/>
+          </a:p>
         </p:txBody>
       </p:sp>
       <p:sp>
@@ -657,7 +706,7 @@
             <a:spLocks noGrp="1"/>
           </p:cNvSpPr>
           <p:nvPr>
-            <p:ph type="dt" idx="6" sz="half"/>
+            <p:ph type="dt" sz="half" idx="6"/>
           </p:nvPr>
         </p:nvSpPr>
         <p:spPr/>
@@ -677,7 +726,9 @@
           <a:p>
             <a:fld id="{1D8BD707-D9CF-40AE-B4C6-C98DA3205C09}" type="datetimeFigureOut">
               <a:rPr lang="en-US"/>
+              <a:t>3/4/2026</a:t>
             </a:fld>
+            <a:endParaRPr lang="en-US"/>
           </a:p>
         </p:txBody>
       </p:sp>
@@ -688,7 +739,7 @@
             <a:spLocks noGrp="1"/>
           </p:cNvSpPr>
           <p:nvPr>
-            <p:ph type="sldNum" idx="7" sz="quarter"/>
+            <p:ph type="sldNum" sz="quarter" idx="7"/>
           </p:nvPr>
         </p:nvSpPr>
         <p:spPr/>
@@ -707,8 +758,9 @@
           </a:lstStyle>
           <a:p>
             <a:fld id="{B6F15528-21DE-4FAA-801E-634DDDAF4B2B}" type="slidenum">
-              <a:t>#</a:t>
+              <a:t>‹#›</a:t>
             </a:fld>
+            <a:endParaRPr/>
           </a:p>
         </p:txBody>
       </p:sp>
@@ -721,7 +773,7 @@
 </file>
 
 <file path=ppt/slideLayouts/slideLayout5.xml><?xml version="1.0" encoding="utf-8"?>
-<p:sldLayout xmlns:a="http://schemas.openxmlformats.org/drawingml/2006/main" xmlns:r="http://schemas.openxmlformats.org/officeDocument/2006/relationships" xmlns:p="http://schemas.openxmlformats.org/presentationml/2006/main" preserve="1" type="obj">
+<p:sldLayout xmlns:a="http://schemas.openxmlformats.org/drawingml/2006/main" xmlns:r="http://schemas.openxmlformats.org/officeDocument/2006/relationships" xmlns:p="http://schemas.openxmlformats.org/presentationml/2006/main" type="obj" preserve="1">
   <p:cSld name="Blank">
     <p:spTree>
       <p:nvGrpSpPr>
@@ -744,7 +796,7 @@
             <a:spLocks noGrp="1"/>
           </p:cNvSpPr>
           <p:nvPr>
-            <p:ph type="ftr" idx="5" sz="quarter"/>
+            <p:ph type="ftr" sz="quarter" idx="5"/>
           </p:nvPr>
         </p:nvSpPr>
         <p:spPr/>
@@ -761,7 +813,9 @@
               </a:defRPr>
             </a:lvl1pPr>
           </a:lstStyle>
-          <a:p/>
+          <a:p>
+            <a:endParaRPr/>
+          </a:p>
         </p:txBody>
       </p:sp>
       <p:sp>
@@ -771,7 +825,7 @@
             <a:spLocks noGrp="1"/>
           </p:cNvSpPr>
           <p:nvPr>
-            <p:ph type="dt" idx="6" sz="half"/>
+            <p:ph type="dt" sz="half" idx="6"/>
           </p:nvPr>
         </p:nvSpPr>
         <p:spPr/>
@@ -791,7 +845,9 @@
           <a:p>
             <a:fld id="{1D8BD707-D9CF-40AE-B4C6-C98DA3205C09}" type="datetimeFigureOut">
               <a:rPr lang="en-US"/>
+              <a:t>3/4/2026</a:t>
             </a:fld>
+            <a:endParaRPr lang="en-US"/>
           </a:p>
         </p:txBody>
       </p:sp>
@@ -802,7 +858,7 @@
             <a:spLocks noGrp="1"/>
           </p:cNvSpPr>
           <p:nvPr>
-            <p:ph type="sldNum" idx="7" sz="quarter"/>
+            <p:ph type="sldNum" sz="quarter" idx="7"/>
           </p:nvPr>
         </p:nvSpPr>
         <p:spPr/>
@@ -821,8 +877,9 @@
           </a:lstStyle>
           <a:p>
             <a:fld id="{B6F15528-21DE-4FAA-801E-634DDDAF4B2B}" type="slidenum">
-              <a:t>#</a:t>
+              <a:t>‹#›</a:t>
             </a:fld>
+            <a:endParaRPr/>
           </a:p>
         </p:txBody>
       </p:sp>
@@ -893,7 +950,9 @@
               </a:defRPr>
             </a:lvl1pPr>
           </a:lstStyle>
-          <a:p/>
+          <a:p>
+            <a:endParaRPr/>
+          </a:p>
         </p:txBody>
       </p:sp>
       <p:sp>
@@ -930,7 +989,9 @@
               </a:defRPr>
             </a:lvl1pPr>
           </a:lstStyle>
-          <a:p/>
+          <a:p>
+            <a:endParaRPr/>
+          </a:p>
         </p:txBody>
       </p:sp>
       <p:sp>
@@ -940,7 +1001,7 @@
             <a:spLocks noGrp="1"/>
           </p:cNvSpPr>
           <p:nvPr>
-            <p:ph type="ftr" idx="5" sz="quarter"/>
+            <p:ph type="ftr" sz="quarter" idx="5"/>
           </p:nvPr>
         </p:nvSpPr>
         <p:spPr>
@@ -967,7 +1028,9 @@
               </a:defRPr>
             </a:lvl1pPr>
           </a:lstStyle>
-          <a:p/>
+          <a:p>
+            <a:endParaRPr/>
+          </a:p>
         </p:txBody>
       </p:sp>
       <p:sp>
@@ -977,7 +1040,7 @@
             <a:spLocks noGrp="1"/>
           </p:cNvSpPr>
           <p:nvPr>
-            <p:ph type="dt" idx="6" sz="half"/>
+            <p:ph type="dt" sz="half" idx="6"/>
           </p:nvPr>
         </p:nvSpPr>
         <p:spPr>
@@ -1007,7 +1070,9 @@
           <a:p>
             <a:fld id="{1D8BD707-D9CF-40AE-B4C6-C98DA3205C09}" type="datetimeFigureOut">
               <a:rPr lang="en-US"/>
+              <a:t>3/4/2026</a:t>
             </a:fld>
+            <a:endParaRPr lang="en-US"/>
           </a:p>
         </p:txBody>
       </p:sp>
@@ -1018,7 +1083,7 @@
             <a:spLocks noGrp="1"/>
           </p:cNvSpPr>
           <p:nvPr>
-            <p:ph type="sldNum" idx="7" sz="quarter"/>
+            <p:ph type="sldNum" sz="quarter" idx="7"/>
           </p:nvPr>
         </p:nvSpPr>
         <p:spPr>
@@ -1047,14 +1112,15 @@
           </a:lstStyle>
           <a:p>
             <a:fld id="{B6F15528-21DE-4FAA-801E-634DDDAF4B2B}" type="slidenum">
-              <a:t>#</a:t>
+              <a:t>‹#›</a:t>
             </a:fld>
+            <a:endParaRPr/>
           </a:p>
         </p:txBody>
       </p:sp>
     </p:spTree>
   </p:cSld>
-  <p:clrMap folHlink="folHlink" hlink="hlink" accent1="accent1" accent2="accent2" accent3="accent3" accent4="accent4" accent5="accent5" accent6="accent6" tx2="dk2" bg2="lt2" tx1="dk1" bg1="lt1"/>
+  <p:clrMap bg1="lt1" tx1="dk1" bg2="lt2" tx2="dk2" accent1="accent1" accent2="accent2" accent3="accent3" accent4="accent4" accent5="accent5" accent6="accent6" hlink="hlink" folHlink="folHlink"/>
   <p:sldLayoutIdLst>
     <p:sldLayoutId id="2147483661" r:id="rId1"/>
     <p:sldLayoutId id="2147483662" r:id="rId2"/>
@@ -1234,10 +1300,12 @@
           </p:nvPr>
         </p:nvSpPr>
         <p:spPr>
-          <a:prstGeom prst="rect"/>
+          <a:prstGeom prst="rect">
+            <a:avLst/>
+          </a:prstGeom>
         </p:spPr>
         <p:txBody>
-          <a:bodyPr wrap="square" lIns="0" tIns="12700" rIns="0" bIns="0" rtlCol="0" vert="horz">
+          <a:bodyPr vert="horz" wrap="square" lIns="0" tIns="12700" rIns="0" bIns="0" rtlCol="0">
             <a:spAutoFit/>
           </a:bodyPr>
           <a:lstStyle/>
@@ -1251,7 +1319,7 @@
               </a:spcBef>
             </a:pPr>
             <a:r>
-              <a:rPr dirty="0" spc="-55"/>
+              <a:rPr spc="-55" dirty="0"/>
               <a:t>FRONT-</a:t>
             </a:r>
             <a:r>
@@ -1259,11 +1327,11 @@
               <a:t>END</a:t>
             </a:r>
             <a:r>
-              <a:rPr dirty="0" spc="-25"/>
-              <a:t> </a:t>
-            </a:r>
-            <a:r>
-              <a:rPr dirty="0" spc="-10"/>
+              <a:rPr spc="-25" dirty="0"/>
+              <a:t> </a:t>
+            </a:r>
+            <a:r>
+              <a:rPr spc="-10" dirty="0"/>
               <a:t>DEVELOPMENT</a:t>
             </a:r>
           </a:p>
@@ -1271,7 +1339,7 @@
       </p:sp>
       <p:sp>
         <p:nvSpPr>
-          <p:cNvPr id="3" name="object 3" descr=""/>
+          <p:cNvPr id="3" name="object 3"/>
           <p:cNvSpPr/>
           <p:nvPr/>
         </p:nvSpPr>
@@ -1287,7 +1355,7 @@
             <a:cxnLst/>
             <a:rect l="l" t="t" r="r" b="b"/>
             <a:pathLst>
-              <a:path w="6502400" h="0">
+              <a:path w="6502400">
                 <a:moveTo>
                   <a:pt x="0" y="0"/>
                 </a:moveTo>
@@ -1306,12 +1374,14 @@
         <p:txBody>
           <a:bodyPr wrap="square" lIns="0" tIns="0" rIns="0" bIns="0" rtlCol="0"/>
           <a:lstStyle/>
-          <a:p/>
+          <a:p>
+            <a:endParaRPr/>
+          </a:p>
         </p:txBody>
       </p:sp>
       <p:sp>
         <p:nvSpPr>
-          <p:cNvPr id="4" name="object 4" descr=""/>
+          <p:cNvPr id="4" name="object 4"/>
           <p:cNvSpPr txBox="1">
             <a:spLocks noGrp="1"/>
           </p:cNvSpPr>
@@ -1320,15 +1390,17 @@
           </p:nvPr>
         </p:nvSpPr>
         <p:spPr>
-          <a:prstGeom prst="rect"/>
+          <a:prstGeom prst="rect">
+            <a:avLst/>
+          </a:prstGeom>
         </p:spPr>
         <p:txBody>
-          <a:bodyPr wrap="square" lIns="0" tIns="12700" rIns="0" bIns="0" rtlCol="0" vert="horz">
+          <a:bodyPr vert="horz" wrap="square" lIns="0" tIns="12700" rIns="0" bIns="0" rtlCol="0">
             <a:spAutoFit/>
           </a:bodyPr>
           <a:lstStyle/>
           <a:p>
-            <a:pPr algn="ctr" marL="10795" marR="12065">
+            <a:pPr marL="10795" marR="12065" algn="ctr">
               <a:lnSpc>
                 <a:spcPct val="100000"/>
               </a:lnSpc>
@@ -1337,7 +1409,7 @@
               </a:spcBef>
             </a:pPr>
             <a:r>
-              <a:rPr dirty="0" spc="-10"/>
+              <a:rPr spc="-10" dirty="0"/>
               <a:t>ASSIGNMENT </a:t>
             </a:r>
             <a:r>
@@ -1345,7 +1417,7 @@
               <a:t>1</a:t>
             </a:r>
             <a:r>
-              <a:rPr dirty="0" spc="-10"/>
+              <a:rPr spc="-10" dirty="0"/>
               <a:t> TEMPLATE</a:t>
             </a:r>
           </a:p>
@@ -1358,6 +1430,7 @@
                 <a:spcPts val="585"/>
               </a:spcBef>
             </a:pPr>
+            <a:endParaRPr spc="-10" dirty="0"/>
           </a:p>
           <a:p>
             <a:pPr marL="360045">
@@ -1366,11 +1439,11 @@
               </a:lnSpc>
             </a:pPr>
             <a:r>
-              <a:rPr dirty="0" sz="1200"/>
+              <a:rPr sz="1200" dirty="0"/>
               <a:t>STUDENT </a:t>
             </a:r>
             <a:r>
-              <a:rPr dirty="0" sz="1200" spc="-10"/>
+              <a:rPr sz="1200" spc="-10" dirty="0"/>
               <a:t>NAME:</a:t>
             </a:r>
             <a:endParaRPr sz="1200"/>
@@ -1385,7 +1458,7 @@
               </a:spcBef>
             </a:pPr>
             <a:r>
-              <a:rPr dirty="0" sz="1200" spc="-10"/>
+              <a:rPr sz="1200" spc="-10" dirty="0"/>
               <a:t>YEAR:</a:t>
             </a:r>
             <a:endParaRPr sz="1200"/>
@@ -1400,15 +1473,15 @@
               </a:spcBef>
             </a:pPr>
             <a:r>
-              <a:rPr dirty="0" sz="1200"/>
+              <a:rPr sz="1200" dirty="0"/>
               <a:t>COLLEGE</a:t>
             </a:r>
             <a:r>
-              <a:rPr dirty="0" sz="1200" spc="-60"/>
-              <a:t> </a:t>
-            </a:r>
-            <a:r>
-              <a:rPr dirty="0" sz="1200" spc="-10"/>
+              <a:rPr sz="1200" spc="-60" dirty="0"/>
+              <a:t> </a:t>
+            </a:r>
+            <a:r>
+              <a:rPr sz="1200" spc="-10" dirty="0"/>
               <a:t>CODE:</a:t>
             </a:r>
             <a:endParaRPr sz="1200"/>
@@ -1423,15 +1496,15 @@
               </a:spcBef>
             </a:pPr>
             <a:r>
-              <a:rPr dirty="0" sz="1200"/>
+              <a:rPr sz="1200" dirty="0"/>
               <a:t>COLLEGE</a:t>
             </a:r>
             <a:r>
-              <a:rPr dirty="0" sz="1200" spc="-60"/>
-              <a:t> </a:t>
-            </a:r>
-            <a:r>
-              <a:rPr dirty="0" sz="1200" spc="-10"/>
+              <a:rPr sz="1200" spc="-60" dirty="0"/>
+              <a:t> </a:t>
+            </a:r>
+            <a:r>
+              <a:rPr sz="1200" spc="-10" dirty="0"/>
               <a:t>NAME:</a:t>
             </a:r>
             <a:endParaRPr sz="1200"/>
@@ -1446,7 +1519,7 @@
               </a:spcBef>
             </a:pPr>
             <a:r>
-              <a:rPr dirty="0" sz="1200" spc="-10"/>
+              <a:rPr sz="1200" spc="-10" dirty="0"/>
               <a:t>DEPARTMENT:</a:t>
             </a:r>
             <a:endParaRPr sz="1200"/>
@@ -1461,7 +1534,7 @@
               </a:spcBef>
             </a:pPr>
             <a:r>
-              <a:rPr dirty="0" sz="1200" spc="-10"/>
+              <a:rPr sz="1200" spc="-10" dirty="0"/>
               <a:t>SEMESTER:</a:t>
             </a:r>
             <a:endParaRPr sz="1200"/>
@@ -1476,11 +1549,11 @@
               </a:spcBef>
             </a:pPr>
             <a:r>
-              <a:rPr dirty="0" sz="1200"/>
+              <a:rPr sz="1200" dirty="0"/>
               <a:t>ROLL </a:t>
             </a:r>
             <a:r>
-              <a:rPr dirty="0" sz="1200" spc="-25"/>
+              <a:rPr sz="1200" spc="-25" dirty="0"/>
               <a:t>NO:</a:t>
             </a:r>
             <a:endParaRPr sz="1200"/>
@@ -1495,7 +1568,7 @@
               </a:spcBef>
             </a:pPr>
             <a:r>
-              <a:rPr dirty="0" sz="1200" spc="-10"/>
+              <a:rPr sz="1200" spc="-10" dirty="0"/>
               <a:t>NMID:</a:t>
             </a:r>
             <a:endParaRPr sz="1200"/>
@@ -1510,7 +1583,7 @@
               </a:spcBef>
             </a:pPr>
             <a:r>
-              <a:rPr dirty="0" sz="1200" spc="-10"/>
+              <a:rPr sz="1200" spc="-10" dirty="0"/>
               <a:t>DATE:</a:t>
             </a:r>
             <a:endParaRPr sz="1200"/>
@@ -1525,11 +1598,11 @@
               </a:spcBef>
             </a:pPr>
             <a:r>
-              <a:rPr dirty="0" sz="1200"/>
+              <a:rPr sz="1200" dirty="0"/>
               <a:t>PROJECT </a:t>
             </a:r>
             <a:r>
-              <a:rPr dirty="0" sz="1200" spc="-10"/>
+              <a:rPr sz="1200" spc="-10" dirty="0"/>
               <a:t>TITLE:</a:t>
             </a:r>
             <a:endParaRPr sz="1200"/>
@@ -1565,7 +1638,7 @@
               </a:tabLst>
             </a:pPr>
             <a:r>
-              <a:rPr dirty="0" sz="2300">
+              <a:rPr sz="2300" dirty="0">
                 <a:solidFill>
                   <a:srgbClr val="6D9DEB"/>
                 </a:solidFill>
@@ -1573,7 +1646,7 @@
               <a:t>Assignment</a:t>
             </a:r>
             <a:r>
-              <a:rPr dirty="0" sz="2300" spc="-55">
+              <a:rPr sz="2300" spc="-55" dirty="0">
                 <a:solidFill>
                   <a:srgbClr val="6D9DEB"/>
                 </a:solidFill>
@@ -1581,7 +1654,7 @@
               <a:t> </a:t>
             </a:r>
             <a:r>
-              <a:rPr dirty="0" sz="2300">
+              <a:rPr sz="2300" dirty="0">
                 <a:solidFill>
                   <a:srgbClr val="6D9DEB"/>
                 </a:solidFill>
@@ -1589,7 +1662,7 @@
               <a:t>and</a:t>
             </a:r>
             <a:r>
-              <a:rPr dirty="0" sz="2300" spc="-55">
+              <a:rPr sz="2300" spc="-55" dirty="0">
                 <a:solidFill>
                   <a:srgbClr val="6D9DEB"/>
                 </a:solidFill>
@@ -1597,7 +1670,7 @@
               <a:t> </a:t>
             </a:r>
             <a:r>
-              <a:rPr dirty="0" sz="2300" spc="-10">
+              <a:rPr sz="2300" spc="-10" dirty="0">
                 <a:solidFill>
                   <a:srgbClr val="6D9DEB"/>
                 </a:solidFill>
@@ -1616,203 +1689,203 @@
               </a:spcBef>
             </a:pPr>
             <a:r>
-              <a:rPr dirty="0" sz="1300" b="0" i="1">
+              <a:rPr sz="1300" b="0" i="1" dirty="0">
                 <a:latin typeface="Times New Roman"/>
                 <a:cs typeface="Times New Roman"/>
               </a:rPr>
               <a:t>(This</a:t>
             </a:r>
             <a:r>
-              <a:rPr dirty="0" sz="1300" spc="-25" b="0" i="1">
-                <a:latin typeface="Times New Roman"/>
-                <a:cs typeface="Times New Roman"/>
-              </a:rPr>
-              <a:t> </a:t>
-            </a:r>
-            <a:r>
-              <a:rPr dirty="0" sz="1300" b="0" i="1">
+              <a:rPr sz="1300" b="0" i="1" spc="-25" dirty="0">
+                <a:latin typeface="Times New Roman"/>
+                <a:cs typeface="Times New Roman"/>
+              </a:rPr>
+              <a:t> </a:t>
+            </a:r>
+            <a:r>
+              <a:rPr sz="1300" b="0" i="1" dirty="0">
                 <a:latin typeface="Times New Roman"/>
                 <a:cs typeface="Times New Roman"/>
               </a:rPr>
               <a:t>section</a:t>
             </a:r>
             <a:r>
-              <a:rPr dirty="0" sz="1300" spc="-25" b="0" i="1">
-                <a:latin typeface="Times New Roman"/>
-                <a:cs typeface="Times New Roman"/>
-              </a:rPr>
-              <a:t> </a:t>
-            </a:r>
-            <a:r>
-              <a:rPr dirty="0" sz="1300" b="0" i="1">
+              <a:rPr sz="1300" b="0" i="1" spc="-25" dirty="0">
+                <a:latin typeface="Times New Roman"/>
+                <a:cs typeface="Times New Roman"/>
+              </a:rPr>
+              <a:t> </a:t>
+            </a:r>
+            <a:r>
+              <a:rPr sz="1300" b="0" i="1" dirty="0">
                 <a:latin typeface="Times New Roman"/>
                 <a:cs typeface="Times New Roman"/>
               </a:rPr>
               <a:t>gives</a:t>
             </a:r>
             <a:r>
-              <a:rPr dirty="0" sz="1300" spc="-25" b="0" i="1">
-                <a:latin typeface="Times New Roman"/>
-                <a:cs typeface="Times New Roman"/>
-              </a:rPr>
-              <a:t> </a:t>
-            </a:r>
-            <a:r>
-              <a:rPr dirty="0" sz="1300" b="0" i="1">
+              <a:rPr sz="1300" b="0" i="1" spc="-25" dirty="0">
+                <a:latin typeface="Times New Roman"/>
+                <a:cs typeface="Times New Roman"/>
+              </a:rPr>
+              <a:t> </a:t>
+            </a:r>
+            <a:r>
+              <a:rPr sz="1300" b="0" i="1" dirty="0">
                 <a:latin typeface="Times New Roman"/>
                 <a:cs typeface="Times New Roman"/>
               </a:rPr>
               <a:t>an</a:t>
             </a:r>
             <a:r>
-              <a:rPr dirty="0" sz="1300" spc="-25" b="0" i="1">
-                <a:latin typeface="Times New Roman"/>
-                <a:cs typeface="Times New Roman"/>
-              </a:rPr>
-              <a:t> </a:t>
-            </a:r>
-            <a:r>
-              <a:rPr dirty="0" sz="1300" b="0" i="1">
+              <a:rPr sz="1300" b="0" i="1" spc="-25" dirty="0">
+                <a:latin typeface="Times New Roman"/>
+                <a:cs typeface="Times New Roman"/>
+              </a:rPr>
+              <a:t> </a:t>
+            </a:r>
+            <a:r>
+              <a:rPr sz="1300" b="0" i="1" dirty="0">
                 <a:latin typeface="Times New Roman"/>
                 <a:cs typeface="Times New Roman"/>
               </a:rPr>
               <a:t>overview</a:t>
             </a:r>
             <a:r>
-              <a:rPr dirty="0" sz="1300" spc="-25" b="0" i="1">
-                <a:latin typeface="Times New Roman"/>
-                <a:cs typeface="Times New Roman"/>
-              </a:rPr>
-              <a:t> </a:t>
-            </a:r>
-            <a:r>
-              <a:rPr dirty="0" sz="1300" b="0" i="1">
+              <a:rPr sz="1300" b="0" i="1" spc="-25" dirty="0">
+                <a:latin typeface="Times New Roman"/>
+                <a:cs typeface="Times New Roman"/>
+              </a:rPr>
+              <a:t> </a:t>
+            </a:r>
+            <a:r>
+              <a:rPr sz="1300" b="0" i="1" dirty="0">
                 <a:latin typeface="Times New Roman"/>
                 <a:cs typeface="Times New Roman"/>
               </a:rPr>
               <a:t>of</a:t>
             </a:r>
             <a:r>
-              <a:rPr dirty="0" sz="1300" spc="-25" b="0" i="1">
-                <a:latin typeface="Times New Roman"/>
-                <a:cs typeface="Times New Roman"/>
-              </a:rPr>
-              <a:t> </a:t>
-            </a:r>
-            <a:r>
-              <a:rPr dirty="0" sz="1300" b="0" i="1">
+              <a:rPr sz="1300" b="0" i="1" spc="-25" dirty="0">
+                <a:latin typeface="Times New Roman"/>
+                <a:cs typeface="Times New Roman"/>
+              </a:rPr>
+              <a:t> </a:t>
+            </a:r>
+            <a:r>
+              <a:rPr sz="1300" b="0" i="1" dirty="0">
                 <a:latin typeface="Times New Roman"/>
                 <a:cs typeface="Times New Roman"/>
               </a:rPr>
               <a:t>the</a:t>
             </a:r>
             <a:r>
-              <a:rPr dirty="0" sz="1300" spc="-25" b="0" i="1">
-                <a:latin typeface="Times New Roman"/>
-                <a:cs typeface="Times New Roman"/>
-              </a:rPr>
-              <a:t> </a:t>
-            </a:r>
-            <a:r>
-              <a:rPr dirty="0" sz="1300" b="0" i="1">
+              <a:rPr sz="1300" b="0" i="1" spc="-25" dirty="0">
+                <a:latin typeface="Times New Roman"/>
+                <a:cs typeface="Times New Roman"/>
+              </a:rPr>
+              <a:t> </a:t>
+            </a:r>
+            <a:r>
+              <a:rPr sz="1300" b="0" i="1" dirty="0">
                 <a:latin typeface="Times New Roman"/>
                 <a:cs typeface="Times New Roman"/>
               </a:rPr>
               <a:t>assignment</a:t>
             </a:r>
             <a:r>
-              <a:rPr dirty="0" sz="1300" spc="-25" b="0" i="1">
-                <a:latin typeface="Times New Roman"/>
-                <a:cs typeface="Times New Roman"/>
-              </a:rPr>
-              <a:t> </a:t>
-            </a:r>
-            <a:r>
-              <a:rPr dirty="0" sz="1300" b="0" i="1">
+              <a:rPr sz="1300" b="0" i="1" spc="-25" dirty="0">
+                <a:latin typeface="Times New Roman"/>
+                <a:cs typeface="Times New Roman"/>
+              </a:rPr>
+              <a:t> </a:t>
+            </a:r>
+            <a:r>
+              <a:rPr sz="1300" b="0" i="1" dirty="0">
                 <a:latin typeface="Times New Roman"/>
                 <a:cs typeface="Times New Roman"/>
               </a:rPr>
               <a:t>and</a:t>
             </a:r>
             <a:r>
-              <a:rPr dirty="0" sz="1300" spc="-25" b="0" i="1">
-                <a:latin typeface="Times New Roman"/>
-                <a:cs typeface="Times New Roman"/>
-              </a:rPr>
-              <a:t> </a:t>
-            </a:r>
-            <a:r>
-              <a:rPr dirty="0" sz="1300" b="0" i="1">
+              <a:rPr sz="1300" b="0" i="1" spc="-25" dirty="0">
+                <a:latin typeface="Times New Roman"/>
+                <a:cs typeface="Times New Roman"/>
+              </a:rPr>
+              <a:t> </a:t>
+            </a:r>
+            <a:r>
+              <a:rPr sz="1300" b="0" i="1" dirty="0">
                 <a:latin typeface="Times New Roman"/>
                 <a:cs typeface="Times New Roman"/>
               </a:rPr>
               <a:t>explains</a:t>
             </a:r>
             <a:r>
-              <a:rPr dirty="0" sz="1300" spc="-25" b="0" i="1">
-                <a:latin typeface="Times New Roman"/>
-                <a:cs typeface="Times New Roman"/>
-              </a:rPr>
-              <a:t> </a:t>
-            </a:r>
-            <a:r>
-              <a:rPr dirty="0" sz="1300" b="0" i="1">
+              <a:rPr sz="1300" b="0" i="1" spc="-25" dirty="0">
+                <a:latin typeface="Times New Roman"/>
+                <a:cs typeface="Times New Roman"/>
+              </a:rPr>
+              <a:t> </a:t>
+            </a:r>
+            <a:r>
+              <a:rPr sz="1300" b="0" i="1" dirty="0">
                 <a:latin typeface="Times New Roman"/>
                 <a:cs typeface="Times New Roman"/>
               </a:rPr>
               <a:t>what</a:t>
             </a:r>
             <a:r>
-              <a:rPr dirty="0" sz="1300" spc="-25" b="0" i="1">
-                <a:latin typeface="Times New Roman"/>
-                <a:cs typeface="Times New Roman"/>
-              </a:rPr>
-              <a:t> </a:t>
-            </a:r>
-            <a:r>
-              <a:rPr dirty="0" sz="1300" b="0" i="1">
+              <a:rPr sz="1300" b="0" i="1" spc="-25" dirty="0">
+                <a:latin typeface="Times New Roman"/>
+                <a:cs typeface="Times New Roman"/>
+              </a:rPr>
+              <a:t> </a:t>
+            </a:r>
+            <a:r>
+              <a:rPr sz="1300" b="0" i="1" dirty="0">
                 <a:latin typeface="Times New Roman"/>
                 <a:cs typeface="Times New Roman"/>
               </a:rPr>
               <a:t>the</a:t>
             </a:r>
             <a:r>
-              <a:rPr dirty="0" sz="1300" spc="-25" b="0" i="1">
-                <a:latin typeface="Times New Roman"/>
-                <a:cs typeface="Times New Roman"/>
-              </a:rPr>
-              <a:t> </a:t>
-            </a:r>
-            <a:r>
-              <a:rPr dirty="0" sz="1300" spc="-10" b="0" i="1">
+              <a:rPr sz="1300" b="0" i="1" spc="-25" dirty="0">
+                <a:latin typeface="Times New Roman"/>
+                <a:cs typeface="Times New Roman"/>
+              </a:rPr>
+              <a:t> </a:t>
+            </a:r>
+            <a:r>
+              <a:rPr sz="1300" b="0" i="1" spc="-10" dirty="0">
                 <a:latin typeface="Times New Roman"/>
                 <a:cs typeface="Times New Roman"/>
               </a:rPr>
               <a:t>project</a:t>
             </a:r>
             <a:r>
-              <a:rPr dirty="0" sz="1300" spc="-25" b="0" i="1">
-                <a:latin typeface="Times New Roman"/>
-                <a:cs typeface="Times New Roman"/>
-              </a:rPr>
-              <a:t> </a:t>
-            </a:r>
-            <a:r>
-              <a:rPr dirty="0" sz="1300" b="0" i="1">
+              <a:rPr sz="1300" b="0" i="1" spc="-25" dirty="0">
+                <a:latin typeface="Times New Roman"/>
+                <a:cs typeface="Times New Roman"/>
+              </a:rPr>
+              <a:t> </a:t>
+            </a:r>
+            <a:r>
+              <a:rPr sz="1300" b="0" i="1" dirty="0">
                 <a:latin typeface="Times New Roman"/>
                 <a:cs typeface="Times New Roman"/>
               </a:rPr>
               <a:t>is</a:t>
             </a:r>
             <a:r>
-              <a:rPr dirty="0" sz="1300" spc="-25" b="0" i="1">
-                <a:latin typeface="Times New Roman"/>
-                <a:cs typeface="Times New Roman"/>
-              </a:rPr>
-              <a:t> </a:t>
-            </a:r>
-            <a:r>
-              <a:rPr dirty="0" sz="1300" spc="-10" b="0" i="1">
+              <a:rPr sz="1300" b="0" i="1" spc="-25" dirty="0">
+                <a:latin typeface="Times New Roman"/>
+                <a:cs typeface="Times New Roman"/>
+              </a:rPr>
+              <a:t> </a:t>
+            </a:r>
+            <a:r>
+              <a:rPr sz="1300" b="0" i="1" spc="-10" dirty="0">
                 <a:latin typeface="Times New Roman"/>
                 <a:cs typeface="Times New Roman"/>
               </a:rPr>
@@ -1824,7 +1897,7 @@
             </a:endParaRPr>
           </a:p>
           <a:p>
-            <a:pPr lvl="1" marL="344805" indent="-321310">
+            <a:pPr marL="344805" lvl="1" indent="-321310">
               <a:lnSpc>
                 <a:spcPct val="100000"/>
               </a:lnSpc>
@@ -1838,7 +1911,7 @@
               </a:tabLst>
             </a:pPr>
             <a:r>
-              <a:rPr dirty="0" sz="1700" spc="-10" b="1">
+              <a:rPr sz="1700" b="1" spc="-10" dirty="0">
                 <a:latin typeface="Times New Roman"/>
                 <a:cs typeface="Times New Roman"/>
               </a:rPr>
@@ -1859,483 +1932,483 @@
               </a:spcBef>
             </a:pPr>
             <a:r>
-              <a:rPr dirty="0" sz="1200" b="0">
+              <a:rPr sz="1200" b="0" dirty="0">
                 <a:latin typeface="Times New Roman"/>
                 <a:cs typeface="Times New Roman"/>
               </a:rPr>
               <a:t>(</a:t>
             </a:r>
             <a:r>
-              <a:rPr dirty="0" sz="1200" b="0" i="1">
+              <a:rPr sz="1200" b="0" i="1" dirty="0">
                 <a:latin typeface="Times New Roman"/>
                 <a:cs typeface="Times New Roman"/>
               </a:rPr>
               <a:t>In</a:t>
             </a:r>
             <a:r>
-              <a:rPr dirty="0" sz="1200" spc="-25" b="0" i="1">
-                <a:latin typeface="Times New Roman"/>
-                <a:cs typeface="Times New Roman"/>
-              </a:rPr>
-              <a:t> </a:t>
-            </a:r>
-            <a:r>
-              <a:rPr dirty="0" sz="1200" b="0" i="1">
+              <a:rPr sz="1200" b="0" i="1" spc="-25" dirty="0">
+                <a:latin typeface="Times New Roman"/>
+                <a:cs typeface="Times New Roman"/>
+              </a:rPr>
+              <a:t> </a:t>
+            </a:r>
+            <a:r>
+              <a:rPr sz="1200" b="0" i="1" dirty="0">
                 <a:latin typeface="Times New Roman"/>
                 <a:cs typeface="Times New Roman"/>
               </a:rPr>
               <a:t>this</a:t>
             </a:r>
             <a:r>
-              <a:rPr dirty="0" sz="1200" spc="-25" b="0" i="1">
-                <a:latin typeface="Times New Roman"/>
-                <a:cs typeface="Times New Roman"/>
-              </a:rPr>
-              <a:t> </a:t>
-            </a:r>
-            <a:r>
-              <a:rPr dirty="0" sz="1200" b="0" i="1">
+              <a:rPr sz="1200" b="0" i="1" spc="-25" dirty="0">
+                <a:latin typeface="Times New Roman"/>
+                <a:cs typeface="Times New Roman"/>
+              </a:rPr>
+              <a:t> </a:t>
+            </a:r>
+            <a:r>
+              <a:rPr sz="1200" b="0" i="1" dirty="0">
                 <a:latin typeface="Times New Roman"/>
                 <a:cs typeface="Times New Roman"/>
               </a:rPr>
               <a:t>section,</a:t>
             </a:r>
             <a:r>
-              <a:rPr dirty="0" sz="1200" spc="-20" b="0" i="1">
-                <a:latin typeface="Times New Roman"/>
-                <a:cs typeface="Times New Roman"/>
-              </a:rPr>
-              <a:t> </a:t>
-            </a:r>
-            <a:r>
-              <a:rPr dirty="0" sz="1200" b="0" i="1">
+              <a:rPr sz="1200" b="0" i="1" spc="-20" dirty="0">
+                <a:latin typeface="Times New Roman"/>
+                <a:cs typeface="Times New Roman"/>
+              </a:rPr>
+              <a:t> </a:t>
+            </a:r>
+            <a:r>
+              <a:rPr sz="1200" b="0" i="1" dirty="0">
                 <a:latin typeface="Times New Roman"/>
                 <a:cs typeface="Times New Roman"/>
               </a:rPr>
               <a:t>briefly</a:t>
             </a:r>
             <a:r>
-              <a:rPr dirty="0" sz="1200" spc="-25" b="0" i="1">
-                <a:latin typeface="Times New Roman"/>
-                <a:cs typeface="Times New Roman"/>
-              </a:rPr>
-              <a:t> </a:t>
-            </a:r>
-            <a:r>
-              <a:rPr dirty="0" sz="1200" b="0" i="1">
+              <a:rPr sz="1200" b="0" i="1" spc="-25" dirty="0">
+                <a:latin typeface="Times New Roman"/>
+                <a:cs typeface="Times New Roman"/>
+              </a:rPr>
+              <a:t> </a:t>
+            </a:r>
+            <a:r>
+              <a:rPr sz="1200" b="0" i="1" dirty="0">
                 <a:latin typeface="Times New Roman"/>
                 <a:cs typeface="Times New Roman"/>
               </a:rPr>
               <a:t>describe</a:t>
             </a:r>
             <a:r>
-              <a:rPr dirty="0" sz="1200" spc="-20" b="0" i="1">
-                <a:latin typeface="Times New Roman"/>
-                <a:cs typeface="Times New Roman"/>
-              </a:rPr>
-              <a:t> </a:t>
-            </a:r>
-            <a:r>
-              <a:rPr dirty="0" sz="1200" b="0" i="1">
+              <a:rPr sz="1200" b="0" i="1" spc="-20" dirty="0">
+                <a:latin typeface="Times New Roman"/>
+                <a:cs typeface="Times New Roman"/>
+              </a:rPr>
+              <a:t> </a:t>
+            </a:r>
+            <a:r>
+              <a:rPr sz="1200" b="0" i="1" dirty="0">
                 <a:latin typeface="Times New Roman"/>
                 <a:cs typeface="Times New Roman"/>
               </a:rPr>
               <a:t>the</a:t>
             </a:r>
             <a:r>
-              <a:rPr dirty="0" sz="1200" spc="-25" b="0" i="1">
-                <a:latin typeface="Times New Roman"/>
-                <a:cs typeface="Times New Roman"/>
-              </a:rPr>
-              <a:t> </a:t>
-            </a:r>
-            <a:r>
-              <a:rPr dirty="0" sz="1200" b="0" i="1">
+              <a:rPr sz="1200" b="0" i="1" spc="-25" dirty="0">
+                <a:latin typeface="Times New Roman"/>
+                <a:cs typeface="Times New Roman"/>
+              </a:rPr>
+              <a:t> </a:t>
+            </a:r>
+            <a:r>
+              <a:rPr sz="1200" b="0" i="1" dirty="0">
                 <a:latin typeface="Times New Roman"/>
                 <a:cs typeface="Times New Roman"/>
               </a:rPr>
               <a:t>application</a:t>
             </a:r>
             <a:r>
-              <a:rPr dirty="0" sz="1200" spc="-25" b="0" i="1">
-                <a:latin typeface="Times New Roman"/>
-                <a:cs typeface="Times New Roman"/>
-              </a:rPr>
-              <a:t> </a:t>
-            </a:r>
-            <a:r>
-              <a:rPr dirty="0" sz="1200" b="0" i="1">
+              <a:rPr sz="1200" b="0" i="1" spc="-25" dirty="0">
+                <a:latin typeface="Times New Roman"/>
+                <a:cs typeface="Times New Roman"/>
+              </a:rPr>
+              <a:t> </a:t>
+            </a:r>
+            <a:r>
+              <a:rPr sz="1200" b="0" i="1" dirty="0">
                 <a:latin typeface="Times New Roman"/>
                 <a:cs typeface="Times New Roman"/>
               </a:rPr>
               <a:t>you</a:t>
             </a:r>
             <a:r>
-              <a:rPr dirty="0" sz="1200" spc="-20" b="0" i="1">
-                <a:latin typeface="Times New Roman"/>
-                <a:cs typeface="Times New Roman"/>
-              </a:rPr>
-              <a:t> </a:t>
-            </a:r>
-            <a:r>
-              <a:rPr dirty="0" sz="1200" b="0" i="1">
+              <a:rPr sz="1200" b="0" i="1" spc="-20" dirty="0">
+                <a:latin typeface="Times New Roman"/>
+                <a:cs typeface="Times New Roman"/>
+              </a:rPr>
+              <a:t> </a:t>
+            </a:r>
+            <a:r>
+              <a:rPr sz="1200" b="0" i="1" dirty="0">
                 <a:latin typeface="Times New Roman"/>
                 <a:cs typeface="Times New Roman"/>
               </a:rPr>
               <a:t>are</a:t>
             </a:r>
             <a:r>
-              <a:rPr dirty="0" sz="1200" spc="-25" b="0" i="1">
-                <a:latin typeface="Times New Roman"/>
-                <a:cs typeface="Times New Roman"/>
-              </a:rPr>
-              <a:t> </a:t>
-            </a:r>
-            <a:r>
-              <a:rPr dirty="0" sz="1200" b="0" i="1">
+              <a:rPr sz="1200" b="0" i="1" spc="-25" dirty="0">
+                <a:latin typeface="Times New Roman"/>
+                <a:cs typeface="Times New Roman"/>
+              </a:rPr>
+              <a:t> </a:t>
+            </a:r>
+            <a:r>
+              <a:rPr sz="1200" b="0" i="1" dirty="0">
                 <a:latin typeface="Times New Roman"/>
                 <a:cs typeface="Times New Roman"/>
               </a:rPr>
               <a:t>developing</a:t>
             </a:r>
             <a:r>
-              <a:rPr dirty="0" sz="1200" spc="-20" b="0" i="1">
-                <a:latin typeface="Times New Roman"/>
-                <a:cs typeface="Times New Roman"/>
-              </a:rPr>
-              <a:t> </a:t>
-            </a:r>
-            <a:r>
-              <a:rPr dirty="0" sz="1200" b="0" i="1">
+              <a:rPr sz="1200" b="0" i="1" spc="-20" dirty="0">
+                <a:latin typeface="Times New Roman"/>
+                <a:cs typeface="Times New Roman"/>
+              </a:rPr>
+              <a:t> </a:t>
+            </a:r>
+            <a:r>
+              <a:rPr sz="1200" b="0" i="1" dirty="0">
                 <a:latin typeface="Times New Roman"/>
                 <a:cs typeface="Times New Roman"/>
               </a:rPr>
               <a:t>and</a:t>
             </a:r>
             <a:r>
-              <a:rPr dirty="0" sz="1200" spc="-25" b="0" i="1">
-                <a:latin typeface="Times New Roman"/>
-                <a:cs typeface="Times New Roman"/>
-              </a:rPr>
-              <a:t> </a:t>
-            </a:r>
-            <a:r>
-              <a:rPr dirty="0" sz="1200" b="0" i="1">
+              <a:rPr sz="1200" b="0" i="1" spc="-25" dirty="0">
+                <a:latin typeface="Times New Roman"/>
+                <a:cs typeface="Times New Roman"/>
+              </a:rPr>
+              <a:t> </a:t>
+            </a:r>
+            <a:r>
+              <a:rPr sz="1200" b="0" i="1" dirty="0">
                 <a:latin typeface="Times New Roman"/>
                 <a:cs typeface="Times New Roman"/>
               </a:rPr>
               <a:t>the</a:t>
             </a:r>
             <a:r>
-              <a:rPr dirty="0" sz="1200" spc="-20" b="0" i="1">
-                <a:latin typeface="Times New Roman"/>
-                <a:cs typeface="Times New Roman"/>
-              </a:rPr>
-              <a:t> </a:t>
-            </a:r>
-            <a:r>
-              <a:rPr dirty="0" sz="1200" b="0" i="1">
+              <a:rPr sz="1200" b="0" i="1" spc="-20" dirty="0">
+                <a:latin typeface="Times New Roman"/>
+                <a:cs typeface="Times New Roman"/>
+              </a:rPr>
+              <a:t> </a:t>
+            </a:r>
+            <a:r>
+              <a:rPr sz="1200" b="0" i="1" dirty="0">
                 <a:latin typeface="Times New Roman"/>
                 <a:cs typeface="Times New Roman"/>
               </a:rPr>
               <a:t>main</a:t>
             </a:r>
             <a:r>
-              <a:rPr dirty="0" sz="1200" spc="-25" b="0" i="1">
-                <a:latin typeface="Times New Roman"/>
-                <a:cs typeface="Times New Roman"/>
-              </a:rPr>
-              <a:t> </a:t>
-            </a:r>
-            <a:r>
-              <a:rPr dirty="0" sz="1200" b="0" i="1">
+              <a:rPr sz="1200" b="0" i="1" spc="-25" dirty="0">
+                <a:latin typeface="Times New Roman"/>
+                <a:cs typeface="Times New Roman"/>
+              </a:rPr>
+              <a:t> </a:t>
+            </a:r>
+            <a:r>
+              <a:rPr sz="1200" b="0" i="1" dirty="0">
                 <a:latin typeface="Times New Roman"/>
                 <a:cs typeface="Times New Roman"/>
               </a:rPr>
               <a:t>tasks</a:t>
             </a:r>
             <a:r>
-              <a:rPr dirty="0" sz="1200" spc="-25" b="0" i="1">
-                <a:latin typeface="Times New Roman"/>
-                <a:cs typeface="Times New Roman"/>
-              </a:rPr>
-              <a:t> </a:t>
-            </a:r>
-            <a:r>
-              <a:rPr dirty="0" sz="1200" b="0" i="1">
+              <a:rPr sz="1200" b="0" i="1" spc="-25" dirty="0">
+                <a:latin typeface="Times New Roman"/>
+                <a:cs typeface="Times New Roman"/>
+              </a:rPr>
+              <a:t> </a:t>
+            </a:r>
+            <a:r>
+              <a:rPr sz="1200" b="0" i="1" dirty="0">
                 <a:latin typeface="Times New Roman"/>
                 <a:cs typeface="Times New Roman"/>
               </a:rPr>
               <a:t>to</a:t>
             </a:r>
             <a:r>
-              <a:rPr dirty="0" sz="1200" spc="-20" b="0" i="1">
-                <a:latin typeface="Times New Roman"/>
-                <a:cs typeface="Times New Roman"/>
-              </a:rPr>
-              <a:t> </a:t>
-            </a:r>
-            <a:r>
-              <a:rPr dirty="0" sz="1200" b="0" i="1">
+              <a:rPr sz="1200" b="0" i="1" spc="-20" dirty="0">
+                <a:latin typeface="Times New Roman"/>
+                <a:cs typeface="Times New Roman"/>
+              </a:rPr>
+              <a:t> </a:t>
+            </a:r>
+            <a:r>
+              <a:rPr sz="1200" b="0" i="1" dirty="0">
                 <a:latin typeface="Times New Roman"/>
                 <a:cs typeface="Times New Roman"/>
               </a:rPr>
               <a:t>be</a:t>
             </a:r>
             <a:r>
-              <a:rPr dirty="0" sz="1200" spc="-25" b="0" i="1">
-                <a:latin typeface="Times New Roman"/>
-                <a:cs typeface="Times New Roman"/>
-              </a:rPr>
-              <a:t> </a:t>
-            </a:r>
-            <a:r>
-              <a:rPr dirty="0" sz="1200" spc="-10" b="0" i="1">
+              <a:rPr sz="1200" b="0" i="1" spc="-25" dirty="0">
+                <a:latin typeface="Times New Roman"/>
+                <a:cs typeface="Times New Roman"/>
+              </a:rPr>
+              <a:t> </a:t>
+            </a:r>
+            <a:r>
+              <a:rPr sz="1200" b="0" i="1" spc="-10" dirty="0">
                 <a:latin typeface="Times New Roman"/>
                 <a:cs typeface="Times New Roman"/>
               </a:rPr>
               <a:t>completed.</a:t>
             </a:r>
             <a:r>
-              <a:rPr dirty="0" sz="1200" spc="-10" b="0">
+              <a:rPr sz="1200" b="0" spc="-10" dirty="0">
                 <a:latin typeface="Times New Roman"/>
                 <a:cs typeface="Times New Roman"/>
               </a:rPr>
               <a:t>) </a:t>
             </a:r>
             <a:r>
-              <a:rPr dirty="0" sz="1200" b="0">
+              <a:rPr sz="1200" b="0" dirty="0">
                 <a:latin typeface="Times New Roman"/>
                 <a:cs typeface="Times New Roman"/>
               </a:rPr>
               <a:t>The</a:t>
             </a:r>
             <a:r>
-              <a:rPr dirty="0" sz="1200" spc="-30" b="0">
-                <a:latin typeface="Times New Roman"/>
-                <a:cs typeface="Times New Roman"/>
-              </a:rPr>
-              <a:t> </a:t>
-            </a:r>
-            <a:r>
-              <a:rPr dirty="0" sz="1200" b="0">
+              <a:rPr sz="1200" b="0" spc="-30" dirty="0">
+                <a:latin typeface="Times New Roman"/>
+                <a:cs typeface="Times New Roman"/>
+              </a:rPr>
+              <a:t> </a:t>
+            </a:r>
+            <a:r>
+              <a:rPr sz="1200" b="0" dirty="0">
                 <a:latin typeface="Times New Roman"/>
                 <a:cs typeface="Times New Roman"/>
               </a:rPr>
               <a:t>proposed</a:t>
             </a:r>
             <a:r>
-              <a:rPr dirty="0" sz="1200" spc="-25" b="0">
-                <a:latin typeface="Times New Roman"/>
-                <a:cs typeface="Times New Roman"/>
-              </a:rPr>
-              <a:t> </a:t>
-            </a:r>
-            <a:r>
-              <a:rPr dirty="0" sz="1200" b="0">
+              <a:rPr sz="1200" b="0" spc="-25" dirty="0">
+                <a:latin typeface="Times New Roman"/>
+                <a:cs typeface="Times New Roman"/>
+              </a:rPr>
+              <a:t> </a:t>
+            </a:r>
+            <a:r>
+              <a:rPr sz="1200" b="0" dirty="0">
                 <a:latin typeface="Times New Roman"/>
                 <a:cs typeface="Times New Roman"/>
               </a:rPr>
               <a:t>assignment</a:t>
             </a:r>
             <a:r>
-              <a:rPr dirty="0" sz="1200" spc="-25" b="0">
-                <a:latin typeface="Times New Roman"/>
-                <a:cs typeface="Times New Roman"/>
-              </a:rPr>
-              <a:t> </a:t>
-            </a:r>
-            <a:r>
-              <a:rPr dirty="0" sz="1200" b="0">
+              <a:rPr sz="1200" b="0" spc="-25" dirty="0">
+                <a:latin typeface="Times New Roman"/>
+                <a:cs typeface="Times New Roman"/>
+              </a:rPr>
+              <a:t> </a:t>
+            </a:r>
+            <a:r>
+              <a:rPr sz="1200" b="0" dirty="0">
                 <a:latin typeface="Times New Roman"/>
                 <a:cs typeface="Times New Roman"/>
               </a:rPr>
               <a:t>is</a:t>
             </a:r>
             <a:r>
-              <a:rPr dirty="0" sz="1200" spc="-30" b="0">
-                <a:latin typeface="Times New Roman"/>
-                <a:cs typeface="Times New Roman"/>
-              </a:rPr>
-              <a:t> </a:t>
-            </a:r>
-            <a:r>
-              <a:rPr dirty="0" sz="1200" b="0">
+              <a:rPr sz="1200" b="0" spc="-30" dirty="0">
+                <a:latin typeface="Times New Roman"/>
+                <a:cs typeface="Times New Roman"/>
+              </a:rPr>
+              <a:t> </a:t>
+            </a:r>
+            <a:r>
+              <a:rPr sz="1200" b="0" dirty="0">
                 <a:latin typeface="Times New Roman"/>
                 <a:cs typeface="Times New Roman"/>
               </a:rPr>
               <a:t>to</a:t>
             </a:r>
             <a:r>
-              <a:rPr dirty="0" sz="1200" spc="-25" b="0">
-                <a:latin typeface="Times New Roman"/>
-                <a:cs typeface="Times New Roman"/>
-              </a:rPr>
-              <a:t> </a:t>
-            </a:r>
-            <a:r>
-              <a:rPr dirty="0" sz="1200" b="0">
+              <a:rPr sz="1200" b="0" spc="-25" dirty="0">
+                <a:latin typeface="Times New Roman"/>
+                <a:cs typeface="Times New Roman"/>
+              </a:rPr>
+              <a:t> </a:t>
+            </a:r>
+            <a:r>
+              <a:rPr sz="1200" b="0" dirty="0">
                 <a:latin typeface="Times New Roman"/>
                 <a:cs typeface="Times New Roman"/>
               </a:rPr>
               <a:t>design</a:t>
             </a:r>
             <a:r>
-              <a:rPr dirty="0" sz="1200" spc="-25" b="0">
-                <a:latin typeface="Times New Roman"/>
-                <a:cs typeface="Times New Roman"/>
-              </a:rPr>
-              <a:t> </a:t>
-            </a:r>
-            <a:r>
-              <a:rPr dirty="0" sz="1200" b="0">
+              <a:rPr sz="1200" b="0" spc="-25" dirty="0">
+                <a:latin typeface="Times New Roman"/>
+                <a:cs typeface="Times New Roman"/>
+              </a:rPr>
+              <a:t> </a:t>
+            </a:r>
+            <a:r>
+              <a:rPr sz="1200" b="0" dirty="0">
                 <a:latin typeface="Times New Roman"/>
                 <a:cs typeface="Times New Roman"/>
               </a:rPr>
               <a:t>and</a:t>
             </a:r>
             <a:r>
-              <a:rPr dirty="0" sz="1200" spc="-30" b="0">
-                <a:latin typeface="Times New Roman"/>
-                <a:cs typeface="Times New Roman"/>
-              </a:rPr>
-              <a:t> </a:t>
-            </a:r>
-            <a:r>
-              <a:rPr dirty="0" sz="1200" b="0">
+              <a:rPr sz="1200" b="0" spc="-30" dirty="0">
+                <a:latin typeface="Times New Roman"/>
+                <a:cs typeface="Times New Roman"/>
+              </a:rPr>
+              <a:t> </a:t>
+            </a:r>
+            <a:r>
+              <a:rPr sz="1200" b="0" dirty="0">
                 <a:latin typeface="Times New Roman"/>
                 <a:cs typeface="Times New Roman"/>
               </a:rPr>
               <a:t>develop</a:t>
             </a:r>
             <a:r>
-              <a:rPr dirty="0" sz="1200" spc="-25" b="0">
-                <a:latin typeface="Times New Roman"/>
-                <a:cs typeface="Times New Roman"/>
-              </a:rPr>
-              <a:t> </a:t>
-            </a:r>
-            <a:r>
-              <a:rPr dirty="0" sz="1200" b="0">
+              <a:rPr sz="1200" b="0" spc="-25" dirty="0">
+                <a:latin typeface="Times New Roman"/>
+                <a:cs typeface="Times New Roman"/>
+              </a:rPr>
+              <a:t> </a:t>
+            </a:r>
+            <a:r>
+              <a:rPr sz="1200" b="0" dirty="0">
                 <a:latin typeface="Times New Roman"/>
                 <a:cs typeface="Times New Roman"/>
               </a:rPr>
               <a:t>a</a:t>
             </a:r>
             <a:r>
-              <a:rPr dirty="0" sz="1200" spc="-25" b="0">
-                <a:latin typeface="Times New Roman"/>
-                <a:cs typeface="Times New Roman"/>
-              </a:rPr>
-              <a:t> </a:t>
-            </a:r>
-            <a:r>
-              <a:rPr dirty="0" sz="1200" b="0">
+              <a:rPr sz="1200" b="0" spc="-25" dirty="0">
+                <a:latin typeface="Times New Roman"/>
+                <a:cs typeface="Times New Roman"/>
+              </a:rPr>
+              <a:t> </a:t>
+            </a:r>
+            <a:r>
+              <a:rPr sz="1200" b="0" dirty="0">
                 <a:latin typeface="Times New Roman"/>
                 <a:cs typeface="Times New Roman"/>
               </a:rPr>
               <a:t>Simple</a:t>
             </a:r>
             <a:r>
-              <a:rPr dirty="0" sz="1200" spc="-30" b="0">
-                <a:latin typeface="Times New Roman"/>
-                <a:cs typeface="Times New Roman"/>
-              </a:rPr>
-              <a:t> </a:t>
-            </a:r>
-            <a:r>
-              <a:rPr dirty="0" sz="1200" b="0">
+              <a:rPr sz="1200" b="0" spc="-30" dirty="0">
+                <a:latin typeface="Times New Roman"/>
+                <a:cs typeface="Times New Roman"/>
+              </a:rPr>
+              <a:t> </a:t>
+            </a:r>
+            <a:r>
+              <a:rPr sz="1200" b="0" dirty="0">
                 <a:latin typeface="Times New Roman"/>
                 <a:cs typeface="Times New Roman"/>
               </a:rPr>
               <a:t>Event</a:t>
             </a:r>
             <a:r>
-              <a:rPr dirty="0" sz="1200" spc="-25" b="0">
-                <a:latin typeface="Times New Roman"/>
-                <a:cs typeface="Times New Roman"/>
-              </a:rPr>
-              <a:t> </a:t>
-            </a:r>
-            <a:r>
-              <a:rPr dirty="0" sz="1200" b="0">
+              <a:rPr sz="1200" b="0" spc="-25" dirty="0">
+                <a:latin typeface="Times New Roman"/>
+                <a:cs typeface="Times New Roman"/>
+              </a:rPr>
+              <a:t> </a:t>
+            </a:r>
+            <a:r>
+              <a:rPr sz="1200" b="0" dirty="0">
                 <a:latin typeface="Times New Roman"/>
                 <a:cs typeface="Times New Roman"/>
               </a:rPr>
               <a:t>Registration</a:t>
             </a:r>
             <a:r>
-              <a:rPr dirty="0" sz="1200" spc="-25" b="0">
-                <a:latin typeface="Times New Roman"/>
-                <a:cs typeface="Times New Roman"/>
-              </a:rPr>
-              <a:t> </a:t>
-            </a:r>
-            <a:r>
-              <a:rPr dirty="0" sz="1200" b="0">
+              <a:rPr sz="1200" b="0" spc="-25" dirty="0">
+                <a:latin typeface="Times New Roman"/>
+                <a:cs typeface="Times New Roman"/>
+              </a:rPr>
+              <a:t> </a:t>
+            </a:r>
+            <a:r>
+              <a:rPr sz="1200" b="0" dirty="0">
                 <a:latin typeface="Times New Roman"/>
                 <a:cs typeface="Times New Roman"/>
               </a:rPr>
               <a:t>Page</a:t>
             </a:r>
             <a:r>
-              <a:rPr dirty="0" sz="1200" spc="-30" b="0">
-                <a:latin typeface="Times New Roman"/>
-                <a:cs typeface="Times New Roman"/>
-              </a:rPr>
-              <a:t> </a:t>
-            </a:r>
-            <a:r>
-              <a:rPr dirty="0" sz="1200" b="0">
+              <a:rPr sz="1200" b="0" spc="-30" dirty="0">
+                <a:latin typeface="Times New Roman"/>
+                <a:cs typeface="Times New Roman"/>
+              </a:rPr>
+              <a:t> </a:t>
+            </a:r>
+            <a:r>
+              <a:rPr sz="1200" b="0" dirty="0">
                 <a:latin typeface="Times New Roman"/>
                 <a:cs typeface="Times New Roman"/>
               </a:rPr>
               <a:t>using</a:t>
             </a:r>
             <a:r>
-              <a:rPr dirty="0" sz="1200" spc="-25" b="0">
-                <a:latin typeface="Times New Roman"/>
-                <a:cs typeface="Times New Roman"/>
-              </a:rPr>
-              <a:t> </a:t>
-            </a:r>
-            <a:r>
-              <a:rPr dirty="0" sz="1200" b="0">
+              <a:rPr sz="1200" b="0" spc="-25" dirty="0">
+                <a:latin typeface="Times New Roman"/>
+                <a:cs typeface="Times New Roman"/>
+              </a:rPr>
+              <a:t> </a:t>
+            </a:r>
+            <a:r>
+              <a:rPr sz="1200" b="0" dirty="0">
                 <a:latin typeface="Times New Roman"/>
                 <a:cs typeface="Times New Roman"/>
               </a:rPr>
               <a:t>HTML,</a:t>
             </a:r>
             <a:r>
-              <a:rPr dirty="0" sz="1200" spc="-25" b="0">
-                <a:latin typeface="Times New Roman"/>
-                <a:cs typeface="Times New Roman"/>
-              </a:rPr>
-              <a:t> </a:t>
-            </a:r>
-            <a:r>
-              <a:rPr dirty="0" sz="1200" spc="-20" b="0">
+              <a:rPr sz="1200" b="0" spc="-25" dirty="0">
+                <a:latin typeface="Times New Roman"/>
+                <a:cs typeface="Times New Roman"/>
+              </a:rPr>
+              <a:t> </a:t>
+            </a:r>
+            <a:r>
+              <a:rPr sz="1200" b="0" spc="-20" dirty="0">
                 <a:latin typeface="Times New Roman"/>
                 <a:cs typeface="Times New Roman"/>
               </a:rPr>
               <a:t>CSS, </a:t>
             </a:r>
             <a:r>
-              <a:rPr dirty="0" sz="1200" b="0">
+              <a:rPr sz="1200" b="0" dirty="0">
                 <a:latin typeface="Times New Roman"/>
                 <a:cs typeface="Times New Roman"/>
               </a:rPr>
               <a:t>and</a:t>
             </a:r>
             <a:r>
-              <a:rPr dirty="0" sz="1200" spc="-20" b="0">
-                <a:latin typeface="Times New Roman"/>
-                <a:cs typeface="Times New Roman"/>
-              </a:rPr>
-              <a:t> </a:t>
-            </a:r>
-            <a:r>
-              <a:rPr dirty="0" sz="1200" spc="-10" b="0">
+              <a:rPr sz="1200" b="0" spc="-20" dirty="0">
+                <a:latin typeface="Times New Roman"/>
+                <a:cs typeface="Times New Roman"/>
+              </a:rPr>
+              <a:t> </a:t>
+            </a:r>
+            <a:r>
+              <a:rPr sz="1200" b="0" spc="-10" dirty="0">
                 <a:latin typeface="Times New Roman"/>
                 <a:cs typeface="Times New Roman"/>
               </a:rPr>
@@ -2356,91 +2429,91 @@
               </a:spcBef>
             </a:pPr>
             <a:r>
-              <a:rPr dirty="0" sz="1200" b="0">
+              <a:rPr sz="1200" b="0" dirty="0">
                 <a:latin typeface="Times New Roman"/>
                 <a:cs typeface="Times New Roman"/>
               </a:rPr>
               <a:t>The</a:t>
             </a:r>
             <a:r>
-              <a:rPr dirty="0" sz="1200" spc="-15" b="0">
-                <a:latin typeface="Times New Roman"/>
-                <a:cs typeface="Times New Roman"/>
-              </a:rPr>
-              <a:t> </a:t>
-            </a:r>
-            <a:r>
-              <a:rPr dirty="0" sz="1200" b="0">
+              <a:rPr sz="1200" b="0" spc="-15" dirty="0">
+                <a:latin typeface="Times New Roman"/>
+                <a:cs typeface="Times New Roman"/>
+              </a:rPr>
+              <a:t> </a:t>
+            </a:r>
+            <a:r>
+              <a:rPr sz="1200" b="0" dirty="0">
                 <a:latin typeface="Times New Roman"/>
                 <a:cs typeface="Times New Roman"/>
               </a:rPr>
               <a:t>web</a:t>
             </a:r>
             <a:r>
-              <a:rPr dirty="0" sz="1200" spc="-15" b="0">
-                <a:latin typeface="Times New Roman"/>
-                <a:cs typeface="Times New Roman"/>
-              </a:rPr>
-              <a:t> </a:t>
-            </a:r>
-            <a:r>
-              <a:rPr dirty="0" sz="1200" b="0">
+              <a:rPr sz="1200" b="0" spc="-15" dirty="0">
+                <a:latin typeface="Times New Roman"/>
+                <a:cs typeface="Times New Roman"/>
+              </a:rPr>
+              <a:t> </a:t>
+            </a:r>
+            <a:r>
+              <a:rPr sz="1200" b="0" dirty="0">
                 <a:latin typeface="Times New Roman"/>
                 <a:cs typeface="Times New Roman"/>
               </a:rPr>
               <a:t>page</a:t>
             </a:r>
             <a:r>
-              <a:rPr dirty="0" sz="1200" spc="-15" b="0">
-                <a:latin typeface="Times New Roman"/>
-                <a:cs typeface="Times New Roman"/>
-              </a:rPr>
-              <a:t> </a:t>
-            </a:r>
-            <a:r>
-              <a:rPr dirty="0" sz="1200" b="0">
+              <a:rPr sz="1200" b="0" spc="-15" dirty="0">
+                <a:latin typeface="Times New Roman"/>
+                <a:cs typeface="Times New Roman"/>
+              </a:rPr>
+              <a:t> </a:t>
+            </a:r>
+            <a:r>
+              <a:rPr sz="1200" b="0" dirty="0">
                 <a:latin typeface="Times New Roman"/>
                 <a:cs typeface="Times New Roman"/>
               </a:rPr>
               <a:t>should</a:t>
             </a:r>
             <a:r>
-              <a:rPr dirty="0" sz="1200" spc="-15" b="0">
-                <a:latin typeface="Times New Roman"/>
-                <a:cs typeface="Times New Roman"/>
-              </a:rPr>
-              <a:t> </a:t>
-            </a:r>
-            <a:r>
-              <a:rPr dirty="0" sz="1200" b="0">
+              <a:rPr sz="1200" b="0" spc="-15" dirty="0">
+                <a:latin typeface="Times New Roman"/>
+                <a:cs typeface="Times New Roman"/>
+              </a:rPr>
+              <a:t> </a:t>
+            </a:r>
+            <a:r>
+              <a:rPr sz="1200" b="0" dirty="0">
                 <a:latin typeface="Times New Roman"/>
                 <a:cs typeface="Times New Roman"/>
               </a:rPr>
               <a:t>allow</a:t>
             </a:r>
             <a:r>
-              <a:rPr dirty="0" sz="1200" spc="-15" b="0">
-                <a:latin typeface="Times New Roman"/>
-                <a:cs typeface="Times New Roman"/>
-              </a:rPr>
-              <a:t> </a:t>
-            </a:r>
-            <a:r>
-              <a:rPr dirty="0" sz="1200" b="0">
+              <a:rPr sz="1200" b="0" spc="-15" dirty="0">
+                <a:latin typeface="Times New Roman"/>
+                <a:cs typeface="Times New Roman"/>
+              </a:rPr>
+              <a:t> </a:t>
+            </a:r>
+            <a:r>
+              <a:rPr sz="1200" b="0" dirty="0">
                 <a:latin typeface="Times New Roman"/>
                 <a:cs typeface="Times New Roman"/>
               </a:rPr>
               <a:t>users</a:t>
             </a:r>
             <a:r>
-              <a:rPr dirty="0" sz="1200" spc="-15" b="0">
-                <a:latin typeface="Times New Roman"/>
-                <a:cs typeface="Times New Roman"/>
-              </a:rPr>
-              <a:t> </a:t>
-            </a:r>
-            <a:r>
-              <a:rPr dirty="0" sz="1200" spc="-25" b="0">
+              <a:rPr sz="1200" b="0" spc="-15" dirty="0">
+                <a:latin typeface="Times New Roman"/>
+                <a:cs typeface="Times New Roman"/>
+              </a:rPr>
+              <a:t> </a:t>
+            </a:r>
+            <a:r>
+              <a:rPr sz="1200" b="0" spc="-25" dirty="0">
                 <a:latin typeface="Times New Roman"/>
                 <a:cs typeface="Times New Roman"/>
               </a:rPr>
@@ -2452,7 +2525,7 @@
             </a:endParaRPr>
           </a:p>
           <a:p>
-            <a:pPr lvl="2" marL="241935" indent="-91440">
+            <a:pPr marL="241935" lvl="2" indent="-91440">
               <a:lnSpc>
                 <a:spcPts val="1410"/>
               </a:lnSpc>
@@ -2466,35 +2539,35 @@
               </a:tabLst>
             </a:pPr>
             <a:r>
-              <a:rPr dirty="0" sz="1200" spc="-10">
+              <a:rPr sz="1200" spc="-10" dirty="0">
                 <a:latin typeface="Times New Roman"/>
                 <a:cs typeface="Times New Roman"/>
               </a:rPr>
               <a:t>View</a:t>
             </a:r>
             <a:r>
-              <a:rPr dirty="0" sz="1200" spc="-40">
-                <a:latin typeface="Times New Roman"/>
-                <a:cs typeface="Times New Roman"/>
-              </a:rPr>
-              <a:t> </a:t>
-            </a:r>
-            <a:r>
-              <a:rPr dirty="0" sz="1200">
+              <a:rPr sz="1200" spc="-40" dirty="0">
+                <a:latin typeface="Times New Roman"/>
+                <a:cs typeface="Times New Roman"/>
+              </a:rPr>
+              <a:t> </a:t>
+            </a:r>
+            <a:r>
+              <a:rPr sz="1200" dirty="0">
                 <a:latin typeface="Times New Roman"/>
                 <a:cs typeface="Times New Roman"/>
               </a:rPr>
               <a:t>event</a:t>
             </a:r>
             <a:r>
-              <a:rPr dirty="0" sz="1200" spc="-40">
-                <a:latin typeface="Times New Roman"/>
-                <a:cs typeface="Times New Roman"/>
-              </a:rPr>
-              <a:t> </a:t>
-            </a:r>
-            <a:r>
-              <a:rPr dirty="0" sz="1200" spc="-10">
+              <a:rPr sz="1200" spc="-40" dirty="0">
+                <a:latin typeface="Times New Roman"/>
+                <a:cs typeface="Times New Roman"/>
+              </a:rPr>
+              <a:t> </a:t>
+            </a:r>
+            <a:r>
+              <a:rPr sz="1200" spc="-10" dirty="0">
                 <a:latin typeface="Times New Roman"/>
                 <a:cs typeface="Times New Roman"/>
               </a:rPr>
@@ -2506,7 +2579,7 @@
             </a:endParaRPr>
           </a:p>
           <a:p>
-            <a:pPr lvl="2" marL="241935" indent="-91440">
+            <a:pPr marL="241935" lvl="2" indent="-91440">
               <a:lnSpc>
                 <a:spcPts val="1380"/>
               </a:lnSpc>
@@ -2516,35 +2589,35 @@
               </a:tabLst>
             </a:pPr>
             <a:r>
-              <a:rPr dirty="0" sz="1200">
+              <a:rPr sz="1200" dirty="0">
                 <a:latin typeface="Times New Roman"/>
                 <a:cs typeface="Times New Roman"/>
               </a:rPr>
               <a:t>Enter</a:t>
             </a:r>
             <a:r>
-              <a:rPr dirty="0" sz="1200" spc="-35">
-                <a:latin typeface="Times New Roman"/>
-                <a:cs typeface="Times New Roman"/>
-              </a:rPr>
-              <a:t> </a:t>
-            </a:r>
-            <a:r>
-              <a:rPr dirty="0" sz="1200">
+              <a:rPr sz="1200" spc="-35" dirty="0">
+                <a:latin typeface="Times New Roman"/>
+                <a:cs typeface="Times New Roman"/>
+              </a:rPr>
+              <a:t> </a:t>
+            </a:r>
+            <a:r>
+              <a:rPr sz="1200" dirty="0">
                 <a:latin typeface="Times New Roman"/>
                 <a:cs typeface="Times New Roman"/>
               </a:rPr>
               <a:t>personal</a:t>
             </a:r>
             <a:r>
-              <a:rPr dirty="0" sz="1200" spc="-35">
-                <a:latin typeface="Times New Roman"/>
-                <a:cs typeface="Times New Roman"/>
-              </a:rPr>
-              <a:t> </a:t>
-            </a:r>
-            <a:r>
-              <a:rPr dirty="0" sz="1200" spc="-10">
+              <a:rPr sz="1200" spc="-35" dirty="0">
+                <a:latin typeface="Times New Roman"/>
+                <a:cs typeface="Times New Roman"/>
+              </a:rPr>
+              <a:t> </a:t>
+            </a:r>
+            <a:r>
+              <a:rPr sz="1200" spc="-10" dirty="0">
                 <a:latin typeface="Times New Roman"/>
                 <a:cs typeface="Times New Roman"/>
               </a:rPr>
@@ -2556,7 +2629,7 @@
             </a:endParaRPr>
           </a:p>
           <a:p>
-            <a:pPr lvl="2" marL="241935" indent="-91440">
+            <a:pPr marL="241935" lvl="2" indent="-91440">
               <a:lnSpc>
                 <a:spcPts val="1380"/>
               </a:lnSpc>
@@ -2566,35 +2639,35 @@
               </a:tabLst>
             </a:pPr>
             <a:r>
-              <a:rPr dirty="0" sz="1200">
+              <a:rPr sz="1200" dirty="0">
                 <a:latin typeface="Times New Roman"/>
                 <a:cs typeface="Times New Roman"/>
               </a:rPr>
               <a:t>Select</a:t>
             </a:r>
             <a:r>
-              <a:rPr dirty="0" sz="1200" spc="-30">
-                <a:latin typeface="Times New Roman"/>
-                <a:cs typeface="Times New Roman"/>
-              </a:rPr>
-              <a:t> </a:t>
-            </a:r>
-            <a:r>
-              <a:rPr dirty="0" sz="1200">
+              <a:rPr sz="1200" spc="-30" dirty="0">
+                <a:latin typeface="Times New Roman"/>
+                <a:cs typeface="Times New Roman"/>
+              </a:rPr>
+              <a:t> </a:t>
+            </a:r>
+            <a:r>
+              <a:rPr sz="1200" dirty="0">
                 <a:latin typeface="Times New Roman"/>
                 <a:cs typeface="Times New Roman"/>
               </a:rPr>
               <a:t>event</a:t>
             </a:r>
             <a:r>
-              <a:rPr dirty="0" sz="1200" spc="-30">
-                <a:latin typeface="Times New Roman"/>
-                <a:cs typeface="Times New Roman"/>
-              </a:rPr>
-              <a:t> </a:t>
-            </a:r>
-            <a:r>
-              <a:rPr dirty="0" sz="1200" spc="-10">
+              <a:rPr sz="1200" spc="-30" dirty="0">
+                <a:latin typeface="Times New Roman"/>
+                <a:cs typeface="Times New Roman"/>
+              </a:rPr>
+              <a:t> </a:t>
+            </a:r>
+            <a:r>
+              <a:rPr sz="1200" spc="-10" dirty="0">
                 <a:latin typeface="Times New Roman"/>
                 <a:cs typeface="Times New Roman"/>
               </a:rPr>
@@ -2606,7 +2679,7 @@
             </a:endParaRPr>
           </a:p>
           <a:p>
-            <a:pPr lvl="2" marL="241935" indent="-91440">
+            <a:pPr marL="241935" lvl="2" indent="-91440">
               <a:lnSpc>
                 <a:spcPts val="1380"/>
               </a:lnSpc>
@@ -2616,35 +2689,35 @@
               </a:tabLst>
             </a:pPr>
             <a:r>
-              <a:rPr dirty="0" sz="1200">
+              <a:rPr sz="1200" dirty="0">
                 <a:latin typeface="Times New Roman"/>
                 <a:cs typeface="Times New Roman"/>
               </a:rPr>
               <a:t>Submit</a:t>
             </a:r>
             <a:r>
-              <a:rPr dirty="0" sz="1200" spc="-45">
-                <a:latin typeface="Times New Roman"/>
-                <a:cs typeface="Times New Roman"/>
-              </a:rPr>
-              <a:t> </a:t>
-            </a:r>
-            <a:r>
-              <a:rPr dirty="0" sz="1200">
+              <a:rPr sz="1200" spc="-45" dirty="0">
+                <a:latin typeface="Times New Roman"/>
+                <a:cs typeface="Times New Roman"/>
+              </a:rPr>
+              <a:t> </a:t>
+            </a:r>
+            <a:r>
+              <a:rPr sz="1200" dirty="0">
                 <a:latin typeface="Times New Roman"/>
                 <a:cs typeface="Times New Roman"/>
               </a:rPr>
               <a:t>registration</a:t>
             </a:r>
             <a:r>
-              <a:rPr dirty="0" sz="1200" spc="-45">
-                <a:latin typeface="Times New Roman"/>
-                <a:cs typeface="Times New Roman"/>
-              </a:rPr>
-              <a:t> </a:t>
-            </a:r>
-            <a:r>
-              <a:rPr dirty="0" sz="1200" spc="-10">
+              <a:rPr sz="1200" spc="-45" dirty="0">
+                <a:latin typeface="Times New Roman"/>
+                <a:cs typeface="Times New Roman"/>
+              </a:rPr>
+              <a:t> </a:t>
+            </a:r>
+            <a:r>
+              <a:rPr sz="1200" spc="-10" dirty="0">
                 <a:latin typeface="Times New Roman"/>
                 <a:cs typeface="Times New Roman"/>
               </a:rPr>
@@ -2656,7 +2729,7 @@
             </a:endParaRPr>
           </a:p>
           <a:p>
-            <a:pPr lvl="2" marL="241935" indent="-91440">
+            <a:pPr marL="241935" lvl="2" indent="-91440">
               <a:lnSpc>
                 <a:spcPts val="1410"/>
               </a:lnSpc>
@@ -2666,63 +2739,63 @@
               </a:tabLst>
             </a:pPr>
             <a:r>
-              <a:rPr dirty="0" sz="1200" spc="-10">
+              <a:rPr sz="1200" spc="-10" dirty="0">
                 <a:latin typeface="Times New Roman"/>
                 <a:cs typeface="Times New Roman"/>
               </a:rPr>
               <a:t>View</a:t>
             </a:r>
             <a:r>
-              <a:rPr dirty="0" sz="1200" spc="-50">
-                <a:latin typeface="Times New Roman"/>
-                <a:cs typeface="Times New Roman"/>
-              </a:rPr>
-              <a:t> </a:t>
-            </a:r>
-            <a:r>
-              <a:rPr dirty="0" sz="1200">
+              <a:rPr sz="1200" spc="-50" dirty="0">
+                <a:latin typeface="Times New Roman"/>
+                <a:cs typeface="Times New Roman"/>
+              </a:rPr>
+              <a:t> </a:t>
+            </a:r>
+            <a:r>
+              <a:rPr sz="1200" dirty="0">
                 <a:latin typeface="Times New Roman"/>
                 <a:cs typeface="Times New Roman"/>
               </a:rPr>
               <a:t>registered</a:t>
             </a:r>
             <a:r>
-              <a:rPr dirty="0" sz="1200" spc="-45">
-                <a:latin typeface="Times New Roman"/>
-                <a:cs typeface="Times New Roman"/>
-              </a:rPr>
-              <a:t> </a:t>
-            </a:r>
-            <a:r>
-              <a:rPr dirty="0" sz="1200">
+              <a:rPr sz="1200" spc="-45" dirty="0">
+                <a:latin typeface="Times New Roman"/>
+                <a:cs typeface="Times New Roman"/>
+              </a:rPr>
+              <a:t> </a:t>
+            </a:r>
+            <a:r>
+              <a:rPr sz="1200" dirty="0">
                 <a:latin typeface="Times New Roman"/>
                 <a:cs typeface="Times New Roman"/>
               </a:rPr>
               <a:t>participants</a:t>
             </a:r>
             <a:r>
-              <a:rPr dirty="0" sz="1200" spc="-45">
-                <a:latin typeface="Times New Roman"/>
-                <a:cs typeface="Times New Roman"/>
-              </a:rPr>
-              <a:t> </a:t>
-            </a:r>
-            <a:r>
-              <a:rPr dirty="0" sz="1200">
+              <a:rPr sz="1200" spc="-45" dirty="0">
+                <a:latin typeface="Times New Roman"/>
+                <a:cs typeface="Times New Roman"/>
+              </a:rPr>
+              <a:t> </a:t>
+            </a:r>
+            <a:r>
+              <a:rPr sz="1200" dirty="0">
                 <a:latin typeface="Times New Roman"/>
                 <a:cs typeface="Times New Roman"/>
               </a:rPr>
               <a:t>(static</a:t>
             </a:r>
             <a:r>
-              <a:rPr dirty="0" sz="1200" spc="-55">
-                <a:latin typeface="Times New Roman"/>
-                <a:cs typeface="Times New Roman"/>
-              </a:rPr>
-              <a:t> </a:t>
-            </a:r>
-            <a:r>
-              <a:rPr dirty="0" sz="1200" spc="-10">
+              <a:rPr sz="1200" spc="-55" dirty="0">
+                <a:latin typeface="Times New Roman"/>
+                <a:cs typeface="Times New Roman"/>
+              </a:rPr>
+              <a:t> </a:t>
+            </a:r>
+            <a:r>
+              <a:rPr sz="1200" spc="-10" dirty="0">
                 <a:latin typeface="Times New Roman"/>
                 <a:cs typeface="Times New Roman"/>
               </a:rPr>
@@ -2737,7 +2810,7 @@
       </p:sp>
       <p:sp>
         <p:nvSpPr>
-          <p:cNvPr id="5" name="object 5" descr=""/>
+          <p:cNvPr id="5" name="object 5"/>
           <p:cNvSpPr/>
           <p:nvPr/>
         </p:nvSpPr>
@@ -2753,7 +2826,7 @@
             <a:cxnLst/>
             <a:rect l="l" t="t" r="r" b="b"/>
             <a:pathLst>
-              <a:path w="6502400" h="0">
+              <a:path w="6502400">
                 <a:moveTo>
                   <a:pt x="0" y="0"/>
                 </a:moveTo>
@@ -2772,12 +2845,14 @@
         <p:txBody>
           <a:bodyPr wrap="square" lIns="0" tIns="0" rIns="0" bIns="0" rtlCol="0"/>
           <a:lstStyle/>
-          <a:p/>
+          <a:p>
+            <a:endParaRPr/>
+          </a:p>
         </p:txBody>
       </p:sp>
       <p:pic>
         <p:nvPicPr>
-          <p:cNvPr id="6" name="object 6" descr=""/>
+          <p:cNvPr id="6" name="object 6"/>
           <p:cNvPicPr/>
           <p:nvPr/>
         </p:nvPicPr>
@@ -2799,7 +2874,7 @@
       </p:pic>
       <p:pic>
         <p:nvPicPr>
-          <p:cNvPr id="7" name="object 7" descr=""/>
+          <p:cNvPr id="7" name="object 7"/>
           <p:cNvPicPr/>
           <p:nvPr/>
         </p:nvPicPr>
@@ -2821,7 +2896,7 @@
       </p:pic>
       <p:pic>
         <p:nvPicPr>
-          <p:cNvPr id="8" name="object 8" descr=""/>
+          <p:cNvPr id="8" name="object 8"/>
           <p:cNvPicPr/>
           <p:nvPr/>
         </p:nvPicPr>
@@ -2843,7 +2918,7 @@
       </p:pic>
       <p:pic>
         <p:nvPicPr>
-          <p:cNvPr id="9" name="object 9" descr=""/>
+          <p:cNvPr id="9" name="object 9"/>
           <p:cNvPicPr/>
           <p:nvPr/>
         </p:nvPicPr>
@@ -2890,7 +2965,7 @@
       </p:grpSpPr>
       <p:pic>
         <p:nvPicPr>
-          <p:cNvPr id="2" name="object 2" descr=""/>
+          <p:cNvPr id="2" name="object 2"/>
           <p:cNvPicPr/>
           <p:nvPr/>
         </p:nvPicPr>
@@ -2912,7 +2987,7 @@
       </p:pic>
       <p:pic>
         <p:nvPicPr>
-          <p:cNvPr id="3" name="object 3" descr=""/>
+          <p:cNvPr id="3" name="object 3"/>
           <p:cNvPicPr/>
           <p:nvPr/>
         </p:nvPicPr>
@@ -2934,21 +3009,21 @@
       </p:pic>
       <p:sp>
         <p:nvSpPr>
-          <p:cNvPr id="4" name="object 4" descr=""/>
+          <p:cNvPr id="4" name="object 4"/>
           <p:cNvSpPr txBox="1"/>
           <p:nvPr/>
         </p:nvSpPr>
         <p:spPr>
           <a:xfrm>
             <a:off x="613409" y="1756702"/>
-            <a:ext cx="5252720" cy="613410"/>
+            <a:ext cx="5252720" cy="784830"/>
           </a:xfrm>
           <a:prstGeom prst="rect">
             <a:avLst/>
           </a:prstGeom>
         </p:spPr>
         <p:txBody>
-          <a:bodyPr wrap="square" lIns="0" tIns="12700" rIns="0" bIns="0" rtlCol="0" vert="horz">
+          <a:bodyPr vert="horz" wrap="square" lIns="0" tIns="12700" rIns="0" bIns="0" rtlCol="0">
             <a:spAutoFit/>
           </a:bodyPr>
           <a:lstStyle/>
@@ -2962,13 +3037,13 @@
               </a:spcBef>
             </a:pPr>
             <a:r>
-              <a:rPr dirty="0" sz="1700" spc="-10" b="1">
+              <a:rPr sz="1700" b="1" spc="-10" dirty="0">
                 <a:latin typeface="Times New Roman"/>
                 <a:cs typeface="Times New Roman"/>
               </a:rPr>
               <a:t>1.2.Purpose:</a:t>
             </a:r>
-            <a:endParaRPr sz="1700">
+            <a:endParaRPr sz="1700" dirty="0">
               <a:latin typeface="Times New Roman"/>
               <a:cs typeface="Times New Roman"/>
             </a:endParaRPr>
@@ -2983,216 +3058,10 @@
               </a:spcBef>
             </a:pPr>
             <a:r>
-              <a:rPr dirty="0" sz="1200">
-                <a:latin typeface="Times New Roman"/>
-                <a:cs typeface="Times New Roman"/>
-              </a:rPr>
-              <a:t>(</a:t>
-            </a:r>
-            <a:r>
-              <a:rPr dirty="0" sz="1200" i="1">
-                <a:latin typeface="Times New Roman"/>
-                <a:cs typeface="Times New Roman"/>
-              </a:rPr>
-              <a:t>Explain</a:t>
-            </a:r>
-            <a:r>
-              <a:rPr dirty="0" sz="1200" spc="-20" i="1">
-                <a:latin typeface="Times New Roman"/>
-                <a:cs typeface="Times New Roman"/>
-              </a:rPr>
-              <a:t> </a:t>
-            </a:r>
-            <a:r>
-              <a:rPr dirty="0" sz="1200" i="1">
-                <a:latin typeface="Times New Roman"/>
-                <a:cs typeface="Times New Roman"/>
-              </a:rPr>
-              <a:t>the</a:t>
-            </a:r>
-            <a:r>
-              <a:rPr dirty="0" sz="1200" spc="-20" i="1">
-                <a:latin typeface="Times New Roman"/>
-                <a:cs typeface="Times New Roman"/>
-              </a:rPr>
-              <a:t> </a:t>
-            </a:r>
-            <a:r>
-              <a:rPr dirty="0" sz="1200" i="1">
-                <a:latin typeface="Times New Roman"/>
-                <a:cs typeface="Times New Roman"/>
-              </a:rPr>
-              <a:t>objective</a:t>
-            </a:r>
-            <a:r>
-              <a:rPr dirty="0" sz="1200" spc="-20" i="1">
-                <a:latin typeface="Times New Roman"/>
-                <a:cs typeface="Times New Roman"/>
-              </a:rPr>
-              <a:t> </a:t>
-            </a:r>
-            <a:r>
-              <a:rPr dirty="0" sz="1200" i="1">
-                <a:latin typeface="Times New Roman"/>
-                <a:cs typeface="Times New Roman"/>
-              </a:rPr>
-              <a:t>of</a:t>
-            </a:r>
-            <a:r>
-              <a:rPr dirty="0" sz="1200" spc="-20" i="1">
-                <a:latin typeface="Times New Roman"/>
-                <a:cs typeface="Times New Roman"/>
-              </a:rPr>
-              <a:t> </a:t>
-            </a:r>
-            <a:r>
-              <a:rPr dirty="0" sz="1200" i="1">
-                <a:latin typeface="Times New Roman"/>
-                <a:cs typeface="Times New Roman"/>
-              </a:rPr>
-              <a:t>this</a:t>
-            </a:r>
-            <a:r>
-              <a:rPr dirty="0" sz="1200" spc="-20" i="1">
-                <a:latin typeface="Times New Roman"/>
-                <a:cs typeface="Times New Roman"/>
-              </a:rPr>
-              <a:t> </a:t>
-            </a:r>
-            <a:r>
-              <a:rPr dirty="0" sz="1200" i="1">
-                <a:latin typeface="Times New Roman"/>
-                <a:cs typeface="Times New Roman"/>
-              </a:rPr>
-              <a:t>assignment</a:t>
-            </a:r>
-            <a:r>
-              <a:rPr dirty="0" sz="1200" spc="-15" i="1">
-                <a:latin typeface="Times New Roman"/>
-                <a:cs typeface="Times New Roman"/>
-              </a:rPr>
-              <a:t> </a:t>
-            </a:r>
-            <a:r>
-              <a:rPr dirty="0" sz="1200" i="1">
-                <a:latin typeface="Times New Roman"/>
-                <a:cs typeface="Times New Roman"/>
-              </a:rPr>
-              <a:t>and</a:t>
-            </a:r>
-            <a:r>
-              <a:rPr dirty="0" sz="1200" spc="-20" i="1">
-                <a:latin typeface="Times New Roman"/>
-                <a:cs typeface="Times New Roman"/>
-              </a:rPr>
-              <a:t> </a:t>
-            </a:r>
-            <a:r>
-              <a:rPr dirty="0" sz="1200" i="1">
-                <a:latin typeface="Times New Roman"/>
-                <a:cs typeface="Times New Roman"/>
-              </a:rPr>
-              <a:t>what</a:t>
-            </a:r>
-            <a:r>
-              <a:rPr dirty="0" sz="1200" spc="-20" i="1">
-                <a:latin typeface="Times New Roman"/>
-                <a:cs typeface="Times New Roman"/>
-              </a:rPr>
-              <a:t> </a:t>
-            </a:r>
-            <a:r>
-              <a:rPr dirty="0" sz="1200" i="1">
-                <a:latin typeface="Times New Roman"/>
-                <a:cs typeface="Times New Roman"/>
-              </a:rPr>
-              <a:t>you</a:t>
-            </a:r>
-            <a:r>
-              <a:rPr dirty="0" sz="1200" spc="-20" i="1">
-                <a:latin typeface="Times New Roman"/>
-                <a:cs typeface="Times New Roman"/>
-              </a:rPr>
-              <a:t> </a:t>
-            </a:r>
-            <a:r>
-              <a:rPr dirty="0" sz="1200" i="1">
-                <a:latin typeface="Times New Roman"/>
-                <a:cs typeface="Times New Roman"/>
-              </a:rPr>
-              <a:t>aim</a:t>
-            </a:r>
-            <a:r>
-              <a:rPr dirty="0" sz="1200" spc="-20" i="1">
-                <a:latin typeface="Times New Roman"/>
-                <a:cs typeface="Times New Roman"/>
-              </a:rPr>
-              <a:t> </a:t>
-            </a:r>
-            <a:r>
-              <a:rPr dirty="0" sz="1200" i="1">
-                <a:latin typeface="Times New Roman"/>
-                <a:cs typeface="Times New Roman"/>
-              </a:rPr>
-              <a:t>to</a:t>
-            </a:r>
-            <a:r>
-              <a:rPr dirty="0" sz="1200" spc="-15" i="1">
-                <a:latin typeface="Times New Roman"/>
-                <a:cs typeface="Times New Roman"/>
-              </a:rPr>
-              <a:t> </a:t>
-            </a:r>
-            <a:r>
-              <a:rPr dirty="0" sz="1200" i="1">
-                <a:latin typeface="Times New Roman"/>
-                <a:cs typeface="Times New Roman"/>
-              </a:rPr>
-              <a:t>learn</a:t>
-            </a:r>
-            <a:r>
-              <a:rPr dirty="0" sz="1200" spc="-20" i="1">
-                <a:latin typeface="Times New Roman"/>
-                <a:cs typeface="Times New Roman"/>
-              </a:rPr>
-              <a:t> </a:t>
-            </a:r>
-            <a:r>
-              <a:rPr dirty="0" sz="1200" i="1">
-                <a:latin typeface="Times New Roman"/>
-                <a:cs typeface="Times New Roman"/>
-              </a:rPr>
-              <a:t>by</a:t>
-            </a:r>
-            <a:r>
-              <a:rPr dirty="0" sz="1200" spc="-20" i="1">
-                <a:latin typeface="Times New Roman"/>
-                <a:cs typeface="Times New Roman"/>
-              </a:rPr>
-              <a:t> </a:t>
-            </a:r>
-            <a:r>
-              <a:rPr dirty="0" sz="1200" i="1">
-                <a:latin typeface="Times New Roman"/>
-                <a:cs typeface="Times New Roman"/>
-              </a:rPr>
-              <a:t>completing</a:t>
-            </a:r>
-            <a:r>
-              <a:rPr dirty="0" sz="1200" spc="-20" i="1">
-                <a:latin typeface="Times New Roman"/>
-                <a:cs typeface="Times New Roman"/>
-              </a:rPr>
-              <a:t> it.</a:t>
-            </a:r>
-            <a:r>
-              <a:rPr dirty="0" sz="1200" spc="-20">
-                <a:latin typeface="Times New Roman"/>
-                <a:cs typeface="Times New Roman"/>
-              </a:rPr>
-              <a:t>)</a:t>
-            </a:r>
-            <a:endParaRPr sz="1200">
+              <a:rPr lang="en-US" sz="1200" dirty="0"/>
+              <a:t>To understand the fundamental structure of a webpage using HTML5 and to create a functional data collection form for event management</a:t>
+            </a:r>
+            <a:endParaRPr sz="1200" dirty="0">
               <a:latin typeface="Times New Roman"/>
               <a:cs typeface="Times New Roman"/>
             </a:endParaRPr>
@@ -3201,7 +3070,7 @@
       </p:sp>
       <p:sp>
         <p:nvSpPr>
-          <p:cNvPr id="5" name="object 5" descr=""/>
+          <p:cNvPr id="5" name="object 5"/>
           <p:cNvSpPr/>
           <p:nvPr/>
         </p:nvSpPr>
@@ -3217,7 +3086,7 @@
             <a:cxnLst/>
             <a:rect l="l" t="t" r="r" b="b"/>
             <a:pathLst>
-              <a:path w="6502400" h="0">
+              <a:path w="6502400">
                 <a:moveTo>
                   <a:pt x="0" y="0"/>
                 </a:moveTo>
@@ -3236,18 +3105,20 @@
         <p:txBody>
           <a:bodyPr wrap="square" lIns="0" tIns="0" rIns="0" bIns="0" rtlCol="0"/>
           <a:lstStyle/>
-          <a:p/>
+          <a:p>
+            <a:endParaRPr/>
+          </a:p>
         </p:txBody>
       </p:sp>
       <p:sp>
         <p:nvSpPr>
-          <p:cNvPr id="6" name="object 6" descr=""/>
+          <p:cNvPr id="6" name="object 6"/>
           <p:cNvSpPr/>
           <p:nvPr/>
         </p:nvSpPr>
         <p:spPr>
           <a:xfrm>
-            <a:off x="660400" y="3930643"/>
+            <a:off x="660400" y="4127500"/>
             <a:ext cx="6502400" cy="0"/>
           </a:xfrm>
           <a:custGeom>
@@ -3257,7 +3128,7 @@
             <a:cxnLst/>
             <a:rect l="l" t="t" r="r" b="b"/>
             <a:pathLst>
-              <a:path w="6502400" h="0">
+              <a:path w="6502400">
                 <a:moveTo>
                   <a:pt x="0" y="0"/>
                 </a:moveTo>
@@ -3276,26 +3147,28 @@
         <p:txBody>
           <a:bodyPr wrap="square" lIns="0" tIns="0" rIns="0" bIns="0" rtlCol="0"/>
           <a:lstStyle/>
-          <a:p/>
+          <a:p>
+            <a:endParaRPr/>
+          </a:p>
         </p:txBody>
       </p:sp>
       <p:sp>
         <p:nvSpPr>
-          <p:cNvPr id="7" name="object 7" descr=""/>
+          <p:cNvPr id="7" name="object 7"/>
           <p:cNvSpPr txBox="1"/>
           <p:nvPr/>
         </p:nvSpPr>
         <p:spPr>
           <a:xfrm>
             <a:off x="565710" y="2959997"/>
-            <a:ext cx="5879465" cy="2377440"/>
+            <a:ext cx="5879465" cy="3011081"/>
           </a:xfrm>
           <a:prstGeom prst="rect">
             <a:avLst/>
           </a:prstGeom>
         </p:spPr>
         <p:txBody>
-          <a:bodyPr wrap="square" lIns="0" tIns="12700" rIns="0" bIns="0" rtlCol="0" vert="horz">
+          <a:bodyPr vert="horz" wrap="square" lIns="0" tIns="12700" rIns="0" bIns="0" rtlCol="0">
             <a:spAutoFit/>
           </a:bodyPr>
           <a:lstStyle/>
@@ -3318,7 +3191,7 @@
               </a:tabLst>
             </a:pPr>
             <a:r>
-              <a:rPr dirty="0" sz="2300" b="1">
+              <a:rPr sz="2300" b="1" dirty="0">
                 <a:solidFill>
                   <a:srgbClr val="3C78D8"/>
                 </a:solidFill>
@@ -3328,7 +3201,7 @@
               <a:t>Problem</a:t>
             </a:r>
             <a:r>
-              <a:rPr dirty="0" sz="2300" spc="-100" b="1">
+              <a:rPr sz="2300" b="1" spc="-100" dirty="0">
                 <a:solidFill>
                   <a:srgbClr val="3C78D8"/>
                 </a:solidFill>
@@ -3338,7 +3211,7 @@
               <a:t> </a:t>
             </a:r>
             <a:r>
-              <a:rPr dirty="0" sz="2300" spc="-10" b="1">
+              <a:rPr sz="2300" b="1" spc="-10" dirty="0">
                 <a:solidFill>
                   <a:srgbClr val="3C78D8"/>
                 </a:solidFill>
@@ -3347,7 +3220,7 @@
               </a:rPr>
               <a:t>Statement:</a:t>
             </a:r>
-            <a:endParaRPr sz="2300">
+            <a:endParaRPr sz="2300" dirty="0">
               <a:latin typeface="Times New Roman"/>
               <a:cs typeface="Times New Roman"/>
             </a:endParaRPr>
@@ -3362,245 +3235,10 @@
               </a:spcBef>
             </a:pPr>
             <a:r>
-              <a:rPr dirty="0" sz="1200">
-                <a:latin typeface="Times New Roman"/>
-                <a:cs typeface="Times New Roman"/>
-              </a:rPr>
-              <a:t>(</a:t>
-            </a:r>
-            <a:r>
-              <a:rPr dirty="0" sz="1200" i="1">
-                <a:latin typeface="Times New Roman"/>
-                <a:cs typeface="Times New Roman"/>
-              </a:rPr>
-              <a:t>Clearly</a:t>
-            </a:r>
-            <a:r>
-              <a:rPr dirty="0" sz="1200" spc="-30" i="1">
-                <a:latin typeface="Times New Roman"/>
-                <a:cs typeface="Times New Roman"/>
-              </a:rPr>
-              <a:t> </a:t>
-            </a:r>
-            <a:r>
-              <a:rPr dirty="0" sz="1200" i="1">
-                <a:latin typeface="Times New Roman"/>
-                <a:cs typeface="Times New Roman"/>
-              </a:rPr>
-              <a:t>describe</a:t>
-            </a:r>
-            <a:r>
-              <a:rPr dirty="0" sz="1200" spc="-25" i="1">
-                <a:latin typeface="Times New Roman"/>
-                <a:cs typeface="Times New Roman"/>
-              </a:rPr>
-              <a:t> </a:t>
-            </a:r>
-            <a:r>
-              <a:rPr dirty="0" sz="1200" i="1">
-                <a:latin typeface="Times New Roman"/>
-                <a:cs typeface="Times New Roman"/>
-              </a:rPr>
-              <a:t>the</a:t>
-            </a:r>
-            <a:r>
-              <a:rPr dirty="0" sz="1200" spc="-30" i="1">
-                <a:latin typeface="Times New Roman"/>
-                <a:cs typeface="Times New Roman"/>
-              </a:rPr>
-              <a:t> </a:t>
-            </a:r>
-            <a:r>
-              <a:rPr dirty="0" sz="1200" i="1">
-                <a:latin typeface="Times New Roman"/>
-                <a:cs typeface="Times New Roman"/>
-              </a:rPr>
-              <a:t>problem</a:t>
-            </a:r>
-            <a:r>
-              <a:rPr dirty="0" sz="1200" spc="-25" i="1">
-                <a:latin typeface="Times New Roman"/>
-                <a:cs typeface="Times New Roman"/>
-              </a:rPr>
-              <a:t> </a:t>
-            </a:r>
-            <a:r>
-              <a:rPr dirty="0" sz="1200" i="1">
-                <a:latin typeface="Times New Roman"/>
-                <a:cs typeface="Times New Roman"/>
-              </a:rPr>
-              <a:t>that</a:t>
-            </a:r>
-            <a:r>
-              <a:rPr dirty="0" sz="1200" spc="-25" i="1">
-                <a:latin typeface="Times New Roman"/>
-                <a:cs typeface="Times New Roman"/>
-              </a:rPr>
-              <a:t> </a:t>
-            </a:r>
-            <a:r>
-              <a:rPr dirty="0" sz="1200" i="1">
-                <a:latin typeface="Times New Roman"/>
-                <a:cs typeface="Times New Roman"/>
-              </a:rPr>
-              <a:t>your</a:t>
-            </a:r>
-            <a:r>
-              <a:rPr dirty="0" sz="1200" spc="-30" i="1">
-                <a:latin typeface="Times New Roman"/>
-                <a:cs typeface="Times New Roman"/>
-              </a:rPr>
-              <a:t> </a:t>
-            </a:r>
-            <a:r>
-              <a:rPr dirty="0" sz="1200" i="1">
-                <a:latin typeface="Times New Roman"/>
-                <a:cs typeface="Times New Roman"/>
-              </a:rPr>
-              <a:t>application</a:t>
-            </a:r>
-            <a:r>
-              <a:rPr dirty="0" sz="1200" spc="-25" i="1">
-                <a:latin typeface="Times New Roman"/>
-                <a:cs typeface="Times New Roman"/>
-              </a:rPr>
-              <a:t> </a:t>
-            </a:r>
-            <a:r>
-              <a:rPr dirty="0" sz="1200" i="1">
-                <a:latin typeface="Times New Roman"/>
-                <a:cs typeface="Times New Roman"/>
-              </a:rPr>
-              <a:t>is</a:t>
-            </a:r>
-            <a:r>
-              <a:rPr dirty="0" sz="1200" spc="-25" i="1">
-                <a:latin typeface="Times New Roman"/>
-                <a:cs typeface="Times New Roman"/>
-              </a:rPr>
-              <a:t> </a:t>
-            </a:r>
-            <a:r>
-              <a:rPr dirty="0" sz="1200" i="1">
-                <a:latin typeface="Times New Roman"/>
-                <a:cs typeface="Times New Roman"/>
-              </a:rPr>
-              <a:t>solving</a:t>
-            </a:r>
-            <a:r>
-              <a:rPr dirty="0" sz="1200" spc="-30" i="1">
-                <a:latin typeface="Times New Roman"/>
-                <a:cs typeface="Times New Roman"/>
-              </a:rPr>
-              <a:t> </a:t>
-            </a:r>
-            <a:r>
-              <a:rPr dirty="0" sz="1200" i="1">
-                <a:latin typeface="Times New Roman"/>
-                <a:cs typeface="Times New Roman"/>
-              </a:rPr>
-              <a:t>and</a:t>
-            </a:r>
-            <a:r>
-              <a:rPr dirty="0" sz="1200" spc="-25" i="1">
-                <a:latin typeface="Times New Roman"/>
-                <a:cs typeface="Times New Roman"/>
-              </a:rPr>
-              <a:t> </a:t>
-            </a:r>
-            <a:r>
-              <a:rPr dirty="0" sz="1200" i="1">
-                <a:latin typeface="Times New Roman"/>
-                <a:cs typeface="Times New Roman"/>
-              </a:rPr>
-              <a:t>why</a:t>
-            </a:r>
-            <a:r>
-              <a:rPr dirty="0" sz="1200" spc="-30" i="1">
-                <a:latin typeface="Times New Roman"/>
-                <a:cs typeface="Times New Roman"/>
-              </a:rPr>
-              <a:t> </a:t>
-            </a:r>
-            <a:r>
-              <a:rPr dirty="0" sz="1200" i="1">
-                <a:latin typeface="Times New Roman"/>
-                <a:cs typeface="Times New Roman"/>
-              </a:rPr>
-              <a:t>this</a:t>
-            </a:r>
-            <a:r>
-              <a:rPr dirty="0" sz="1200" spc="-25" i="1">
-                <a:latin typeface="Times New Roman"/>
-                <a:cs typeface="Times New Roman"/>
-              </a:rPr>
-              <a:t> </a:t>
-            </a:r>
-            <a:r>
-              <a:rPr dirty="0" sz="1200" i="1">
-                <a:latin typeface="Times New Roman"/>
-                <a:cs typeface="Times New Roman"/>
-              </a:rPr>
-              <a:t>solution</a:t>
-            </a:r>
-            <a:r>
-              <a:rPr dirty="0" sz="1200" spc="-25" i="1">
-                <a:latin typeface="Times New Roman"/>
-                <a:cs typeface="Times New Roman"/>
-              </a:rPr>
-              <a:t> </a:t>
-            </a:r>
-            <a:r>
-              <a:rPr dirty="0" sz="1200" i="1">
-                <a:latin typeface="Times New Roman"/>
-                <a:cs typeface="Times New Roman"/>
-              </a:rPr>
-              <a:t>is</a:t>
-            </a:r>
-            <a:r>
-              <a:rPr dirty="0" sz="1200" spc="-30" i="1">
-                <a:latin typeface="Times New Roman"/>
-                <a:cs typeface="Times New Roman"/>
-              </a:rPr>
-              <a:t> </a:t>
-            </a:r>
-            <a:r>
-              <a:rPr dirty="0" sz="1200" spc="-10" i="1">
-                <a:latin typeface="Times New Roman"/>
-                <a:cs typeface="Times New Roman"/>
-              </a:rPr>
-              <a:t>needed</a:t>
-            </a:r>
-            <a:r>
-              <a:rPr dirty="0" sz="1200" spc="-10">
-                <a:latin typeface="Times New Roman"/>
-                <a:cs typeface="Times New Roman"/>
-              </a:rPr>
-              <a:t>.)</a:t>
-            </a:r>
-            <a:endParaRPr sz="1200">
-              <a:latin typeface="Times New Roman"/>
-              <a:cs typeface="Times New Roman"/>
-            </a:endParaRPr>
-          </a:p>
-          <a:p>
-            <a:pPr>
-              <a:lnSpc>
-                <a:spcPct val="100000"/>
-              </a:lnSpc>
-            </a:pPr>
-            <a:endParaRPr sz="1200">
-              <a:latin typeface="Times New Roman"/>
-              <a:cs typeface="Times New Roman"/>
-            </a:endParaRPr>
-          </a:p>
-          <a:p>
-            <a:pPr>
-              <a:lnSpc>
-                <a:spcPct val="100000"/>
-              </a:lnSpc>
-            </a:pPr>
-            <a:endParaRPr sz="1200">
+              <a:rPr lang="en-US" sz="1200" dirty="0"/>
+              <a:t>Manual event registration is prone to errors and difficult to manage. This application provides a digital interface to collect participant details systematically and display them in a structured table.</a:t>
+            </a:r>
+            <a:endParaRPr sz="1200" dirty="0">
               <a:latin typeface="Times New Roman"/>
               <a:cs typeface="Times New Roman"/>
             </a:endParaRPr>
@@ -3614,7 +3252,7 @@
                 <a:spcPts val="705"/>
               </a:spcBef>
             </a:pPr>
-            <a:endParaRPr sz="1200">
+            <a:endParaRPr sz="1200" dirty="0">
               <a:latin typeface="Times New Roman"/>
               <a:cs typeface="Times New Roman"/>
             </a:endParaRPr>
@@ -3638,7 +3276,7 @@
               </a:tabLst>
             </a:pPr>
             <a:r>
-              <a:rPr dirty="0" sz="2300" b="1">
+              <a:rPr sz="2300" b="1" dirty="0">
                 <a:solidFill>
                   <a:srgbClr val="3C78D8"/>
                 </a:solidFill>
@@ -3648,7 +3286,7 @@
               <a:t>Expected</a:t>
             </a:r>
             <a:r>
-              <a:rPr dirty="0" sz="2300" spc="-90" b="1">
+              <a:rPr sz="2300" b="1" spc="-90" dirty="0">
                 <a:solidFill>
                   <a:srgbClr val="3C78D8"/>
                 </a:solidFill>
@@ -3658,7 +3296,7 @@
               <a:t> </a:t>
             </a:r>
             <a:r>
-              <a:rPr dirty="0" sz="2300" spc="-10" b="1">
+              <a:rPr sz="2300" b="1" spc="-10" dirty="0">
                 <a:solidFill>
                   <a:srgbClr val="3C78D8"/>
                 </a:solidFill>
@@ -3667,306 +3305,167 @@
               </a:rPr>
               <a:t>Features:</a:t>
             </a:r>
-            <a:endParaRPr sz="2300">
+            <a:endParaRPr lang="en-US" sz="2300" spc="-10" dirty="0">
+              <a:solidFill>
+                <a:srgbClr val="3C78D8"/>
+              </a:solidFill>
               <a:latin typeface="Times New Roman"/>
               <a:cs typeface="Times New Roman"/>
             </a:endParaRPr>
           </a:p>
           <a:p>
-            <a:pPr lvl="1" marL="435609" indent="-375285">
+            <a:pPr marL="8254">
               <a:lnSpc>
                 <a:spcPct val="100000"/>
               </a:lnSpc>
               <a:spcBef>
-                <a:spcPts val="1725"/>
+                <a:spcPts val="5"/>
               </a:spcBef>
-              <a:buFont typeface="Times New Roman"/>
-              <a:buAutoNum type="arabicPeriod"/>
+              <a:buClr>
+                <a:srgbClr val="3C78D8"/>
+              </a:buClr>
+              <a:buSzPct val="95652"/>
               <a:tabLst>
-                <a:tab pos="435609" algn="l"/>
+                <a:tab pos="230504" algn="l"/>
               </a:tabLst>
             </a:pPr>
             <a:r>
-              <a:rPr dirty="0" sz="1700" b="1">
+              <a:rPr lang="en-US" sz="1700" b="1" dirty="0">
+                <a:latin typeface="Times New Roman"/>
+                <a:cs typeface="Times New Roman"/>
+              </a:rPr>
+              <a:t>1.  </a:t>
+            </a:r>
+            <a:r>
+              <a:rPr sz="1700" b="1" dirty="0">
                 <a:latin typeface="Times New Roman"/>
                 <a:cs typeface="Times New Roman"/>
               </a:rPr>
               <a:t>Event</a:t>
             </a:r>
             <a:r>
-              <a:rPr dirty="0" sz="1700" spc="-55" b="1">
-                <a:latin typeface="Times New Roman"/>
-                <a:cs typeface="Times New Roman"/>
-              </a:rPr>
-              <a:t> </a:t>
-            </a:r>
-            <a:r>
-              <a:rPr dirty="0" sz="1700" b="1">
+              <a:rPr sz="1700" b="1" spc="-55" dirty="0">
+                <a:latin typeface="Times New Roman"/>
+                <a:cs typeface="Times New Roman"/>
+              </a:rPr>
+              <a:t> </a:t>
+            </a:r>
+            <a:r>
+              <a:rPr sz="1700" b="1" dirty="0">
                 <a:latin typeface="Times New Roman"/>
                 <a:cs typeface="Times New Roman"/>
               </a:rPr>
               <a:t>Title</a:t>
             </a:r>
             <a:r>
-              <a:rPr dirty="0" sz="1700" spc="-50" b="1">
-                <a:latin typeface="Times New Roman"/>
-                <a:cs typeface="Times New Roman"/>
-              </a:rPr>
-              <a:t> </a:t>
-            </a:r>
-            <a:r>
-              <a:rPr dirty="0" sz="1700" b="1">
+              <a:rPr sz="1700" b="1" spc="-50" dirty="0">
+                <a:latin typeface="Times New Roman"/>
+                <a:cs typeface="Times New Roman"/>
+              </a:rPr>
+              <a:t> </a:t>
+            </a:r>
+            <a:r>
+              <a:rPr sz="1700" b="1" dirty="0">
                 <a:latin typeface="Times New Roman"/>
                 <a:cs typeface="Times New Roman"/>
               </a:rPr>
               <a:t>and</a:t>
             </a:r>
             <a:r>
-              <a:rPr dirty="0" sz="1700" spc="-55" b="1">
-                <a:latin typeface="Times New Roman"/>
-                <a:cs typeface="Times New Roman"/>
-              </a:rPr>
-              <a:t> </a:t>
-            </a:r>
-            <a:r>
-              <a:rPr dirty="0" sz="1700" spc="-10" b="1">
+              <a:rPr sz="1700" b="1" spc="-55" dirty="0">
+                <a:latin typeface="Times New Roman"/>
+                <a:cs typeface="Times New Roman"/>
+              </a:rPr>
+              <a:t> </a:t>
+            </a:r>
+            <a:r>
+              <a:rPr sz="1700" b="1" spc="-10" dirty="0">
                 <a:latin typeface="Times New Roman"/>
                 <a:cs typeface="Times New Roman"/>
               </a:rPr>
               <a:t>Description:</a:t>
             </a:r>
-            <a:endParaRPr sz="1700">
+            <a:endParaRPr lang="en-US" sz="1700" b="1" spc="-10" dirty="0">
               <a:latin typeface="Times New Roman"/>
               <a:cs typeface="Times New Roman"/>
             </a:endParaRPr>
           </a:p>
           <a:p>
-            <a:pPr marL="22225">
+            <a:pPr marL="8254">
               <a:lnSpc>
                 <a:spcPct val="100000"/>
               </a:lnSpc>
               <a:spcBef>
-                <a:spcPts val="345"/>
+                <a:spcPts val="5"/>
               </a:spcBef>
+              <a:buClr>
+                <a:srgbClr val="3C78D8"/>
+              </a:buClr>
+              <a:buSzPct val="95652"/>
+              <a:tabLst>
+                <a:tab pos="230504" algn="l"/>
+              </a:tabLst>
             </a:pPr>
             <a:r>
-              <a:rPr dirty="0" sz="1200" spc="-10" i="1">
-                <a:latin typeface="Times New Roman"/>
-                <a:cs typeface="Times New Roman"/>
-              </a:rPr>
-              <a:t>(Provide</a:t>
-            </a:r>
-            <a:r>
-              <a:rPr dirty="0" sz="1200" spc="-20" i="1">
-                <a:latin typeface="Times New Roman"/>
-                <a:cs typeface="Times New Roman"/>
-              </a:rPr>
-              <a:t> </a:t>
-            </a:r>
-            <a:r>
-              <a:rPr dirty="0" sz="1200" i="1">
-                <a:latin typeface="Times New Roman"/>
-                <a:cs typeface="Times New Roman"/>
-              </a:rPr>
-              <a:t>the</a:t>
-            </a:r>
-            <a:r>
-              <a:rPr dirty="0" sz="1200" spc="-15" i="1">
-                <a:latin typeface="Times New Roman"/>
-                <a:cs typeface="Times New Roman"/>
-              </a:rPr>
-              <a:t> </a:t>
-            </a:r>
-            <a:r>
-              <a:rPr dirty="0" sz="1200" i="1">
-                <a:latin typeface="Times New Roman"/>
-                <a:cs typeface="Times New Roman"/>
-              </a:rPr>
-              <a:t>name</a:t>
-            </a:r>
-            <a:r>
-              <a:rPr dirty="0" sz="1200" spc="-15" i="1">
-                <a:latin typeface="Times New Roman"/>
-                <a:cs typeface="Times New Roman"/>
-              </a:rPr>
-              <a:t> </a:t>
-            </a:r>
-            <a:r>
-              <a:rPr dirty="0" sz="1200" i="1">
-                <a:latin typeface="Times New Roman"/>
-                <a:cs typeface="Times New Roman"/>
-              </a:rPr>
-              <a:t>of</a:t>
-            </a:r>
-            <a:r>
-              <a:rPr dirty="0" sz="1200" spc="-15" i="1">
-                <a:latin typeface="Times New Roman"/>
-                <a:cs typeface="Times New Roman"/>
-              </a:rPr>
-              <a:t> </a:t>
-            </a:r>
-            <a:r>
-              <a:rPr dirty="0" sz="1200" i="1">
-                <a:latin typeface="Times New Roman"/>
-                <a:cs typeface="Times New Roman"/>
-              </a:rPr>
-              <a:t>the</a:t>
-            </a:r>
-            <a:r>
-              <a:rPr dirty="0" sz="1200" spc="-20" i="1">
-                <a:latin typeface="Times New Roman"/>
-                <a:cs typeface="Times New Roman"/>
-              </a:rPr>
-              <a:t> </a:t>
-            </a:r>
-            <a:r>
-              <a:rPr dirty="0" sz="1200" i="1">
-                <a:latin typeface="Times New Roman"/>
-                <a:cs typeface="Times New Roman"/>
-              </a:rPr>
-              <a:t>event</a:t>
-            </a:r>
-            <a:r>
-              <a:rPr dirty="0" sz="1200" spc="-15" i="1">
-                <a:latin typeface="Times New Roman"/>
-                <a:cs typeface="Times New Roman"/>
-              </a:rPr>
-              <a:t> </a:t>
-            </a:r>
-            <a:r>
-              <a:rPr dirty="0" sz="1200" i="1">
-                <a:latin typeface="Times New Roman"/>
-                <a:cs typeface="Times New Roman"/>
-              </a:rPr>
-              <a:t>and</a:t>
-            </a:r>
-            <a:r>
-              <a:rPr dirty="0" sz="1200" spc="-15" i="1">
-                <a:latin typeface="Times New Roman"/>
-                <a:cs typeface="Times New Roman"/>
-              </a:rPr>
-              <a:t> </a:t>
-            </a:r>
-            <a:r>
-              <a:rPr dirty="0" sz="1200" i="1">
-                <a:latin typeface="Times New Roman"/>
-                <a:cs typeface="Times New Roman"/>
-              </a:rPr>
-              <a:t>a</a:t>
-            </a:r>
-            <a:r>
-              <a:rPr dirty="0" sz="1200" spc="-15" i="1">
-                <a:latin typeface="Times New Roman"/>
-                <a:cs typeface="Times New Roman"/>
-              </a:rPr>
-              <a:t> </a:t>
-            </a:r>
-            <a:r>
-              <a:rPr dirty="0" sz="1200" i="1">
-                <a:latin typeface="Times New Roman"/>
-                <a:cs typeface="Times New Roman"/>
-              </a:rPr>
-              <a:t>short</a:t>
-            </a:r>
-            <a:r>
-              <a:rPr dirty="0" sz="1200" spc="-15" i="1">
-                <a:latin typeface="Times New Roman"/>
-                <a:cs typeface="Times New Roman"/>
-              </a:rPr>
-              <a:t> </a:t>
-            </a:r>
-            <a:r>
-              <a:rPr dirty="0" sz="1200" i="1">
-                <a:latin typeface="Times New Roman"/>
-                <a:cs typeface="Times New Roman"/>
-              </a:rPr>
-              <a:t>description</a:t>
-            </a:r>
-            <a:r>
-              <a:rPr dirty="0" sz="1200" spc="-20" i="1">
-                <a:latin typeface="Times New Roman"/>
-                <a:cs typeface="Times New Roman"/>
-              </a:rPr>
-              <a:t> </a:t>
-            </a:r>
-            <a:r>
-              <a:rPr dirty="0" sz="1200" i="1">
-                <a:latin typeface="Times New Roman"/>
-                <a:cs typeface="Times New Roman"/>
-              </a:rPr>
-              <a:t>explaining</a:t>
-            </a:r>
-            <a:r>
-              <a:rPr dirty="0" sz="1200" spc="-15" i="1">
-                <a:latin typeface="Times New Roman"/>
-                <a:cs typeface="Times New Roman"/>
-              </a:rPr>
-              <a:t> </a:t>
-            </a:r>
-            <a:r>
-              <a:rPr dirty="0" sz="1200" i="1">
-                <a:latin typeface="Times New Roman"/>
-                <a:cs typeface="Times New Roman"/>
-              </a:rPr>
-              <a:t>the</a:t>
-            </a:r>
-            <a:r>
-              <a:rPr dirty="0" sz="1200" spc="-15" i="1">
-                <a:latin typeface="Times New Roman"/>
-                <a:cs typeface="Times New Roman"/>
-              </a:rPr>
-              <a:t> </a:t>
-            </a:r>
-            <a:r>
-              <a:rPr dirty="0" sz="1200" i="1">
-                <a:latin typeface="Times New Roman"/>
-                <a:cs typeface="Times New Roman"/>
-              </a:rPr>
-              <a:t>purpose</a:t>
-            </a:r>
-            <a:r>
-              <a:rPr dirty="0" sz="1200" spc="-20" i="1">
-                <a:latin typeface="Times New Roman"/>
-                <a:cs typeface="Times New Roman"/>
-              </a:rPr>
-              <a:t> </a:t>
-            </a:r>
-            <a:r>
-              <a:rPr dirty="0" sz="1200" i="1">
-                <a:latin typeface="Times New Roman"/>
-                <a:cs typeface="Times New Roman"/>
-              </a:rPr>
-              <a:t>of</a:t>
-            </a:r>
-            <a:r>
-              <a:rPr dirty="0" sz="1200" spc="-20" i="1">
-                <a:latin typeface="Times New Roman"/>
-                <a:cs typeface="Times New Roman"/>
-              </a:rPr>
-              <a:t> </a:t>
-            </a:r>
-            <a:r>
-              <a:rPr dirty="0" sz="1200" i="1">
-                <a:latin typeface="Times New Roman"/>
-                <a:cs typeface="Times New Roman"/>
-              </a:rPr>
-              <a:t>the</a:t>
-            </a:r>
-            <a:r>
-              <a:rPr dirty="0" sz="1200" spc="-15" i="1">
-                <a:latin typeface="Times New Roman"/>
-                <a:cs typeface="Times New Roman"/>
-              </a:rPr>
-              <a:t> </a:t>
-            </a:r>
-            <a:r>
-              <a:rPr dirty="0" sz="1200" spc="-10" i="1">
-                <a:latin typeface="Times New Roman"/>
-                <a:cs typeface="Times New Roman"/>
-              </a:rPr>
-              <a:t>event.)</a:t>
-            </a:r>
-            <a:endParaRPr sz="1200">
+              <a:rPr lang="en-US" sz="1700" dirty="0">
+                <a:latin typeface="Times New Roman"/>
+                <a:cs typeface="Times New Roman"/>
+              </a:rPr>
+              <a:t>	</a:t>
+            </a:r>
+            <a:r>
+              <a:rPr lang="en-US" sz="1700" b="1" dirty="0">
+                <a:latin typeface="Times New Roman"/>
+                <a:cs typeface="Times New Roman"/>
+              </a:rPr>
+              <a:t>Title:</a:t>
+            </a:r>
+            <a:r>
+              <a:rPr lang="en-US" sz="1700" dirty="0">
+                <a:latin typeface="Times New Roman"/>
+                <a:cs typeface="Times New Roman"/>
+              </a:rPr>
+              <a:t> College Workshop Registration</a:t>
+            </a:r>
+          </a:p>
+          <a:p>
+            <a:pPr marL="8254">
+              <a:lnSpc>
+                <a:spcPct val="100000"/>
+              </a:lnSpc>
+              <a:spcBef>
+                <a:spcPts val="5"/>
+              </a:spcBef>
+              <a:buClr>
+                <a:srgbClr val="3C78D8"/>
+              </a:buClr>
+              <a:buSzPct val="95652"/>
+              <a:tabLst>
+                <a:tab pos="230504" algn="l"/>
+              </a:tabLst>
+            </a:pPr>
+            <a:r>
+              <a:rPr lang="en-US" sz="1700" dirty="0">
+                <a:latin typeface="Times New Roman"/>
+                <a:cs typeface="Times New Roman"/>
+              </a:rPr>
+              <a:t>     </a:t>
+            </a:r>
+            <a:r>
+              <a:rPr lang="en-US" sz="1700" b="1" dirty="0">
+                <a:latin typeface="Times New Roman"/>
+                <a:cs typeface="Times New Roman"/>
+              </a:rPr>
+              <a:t>Description:</a:t>
+            </a:r>
+            <a:r>
+              <a:rPr lang="en-US" sz="1700" dirty="0">
+                <a:latin typeface="Times New Roman"/>
+                <a:cs typeface="Times New Roman"/>
+              </a:rPr>
+              <a:t> A technical seminar designed to provide students 	with hands-on experience in modern programming languages     	like Java and Python.</a:t>
+            </a:r>
+            <a:endParaRPr sz="1700" dirty="0">
               <a:latin typeface="Times New Roman"/>
               <a:cs typeface="Times New Roman"/>
             </a:endParaRPr>
@@ -3975,13 +3474,13 @@
       </p:sp>
       <p:sp>
         <p:nvSpPr>
-          <p:cNvPr id="8" name="object 8" descr=""/>
+          <p:cNvPr id="8" name="object 8"/>
           <p:cNvSpPr/>
           <p:nvPr/>
         </p:nvSpPr>
         <p:spPr>
           <a:xfrm>
-            <a:off x="660400" y="5772148"/>
+            <a:off x="660400" y="6000457"/>
             <a:ext cx="6502400" cy="0"/>
           </a:xfrm>
           <a:custGeom>
@@ -3991,7 +3490,7 @@
             <a:cxnLst/>
             <a:rect l="l" t="t" r="r" b="b"/>
             <a:pathLst>
-              <a:path w="6502400" h="0">
+              <a:path w="6502400">
                 <a:moveTo>
                   <a:pt x="0" y="0"/>
                 </a:moveTo>
@@ -4010,12 +3509,14 @@
         <p:txBody>
           <a:bodyPr wrap="square" lIns="0" tIns="0" rIns="0" bIns="0" rtlCol="0"/>
           <a:lstStyle/>
-          <a:p/>
+          <a:p>
+            <a:endParaRPr/>
+          </a:p>
         </p:txBody>
       </p:sp>
       <p:sp>
         <p:nvSpPr>
-          <p:cNvPr id="9" name="object 9" descr=""/>
+          <p:cNvPr id="9" name="object 9"/>
           <p:cNvSpPr txBox="1"/>
           <p:nvPr/>
         </p:nvSpPr>
@@ -4029,12 +3530,12 @@
           </a:prstGeom>
         </p:spPr>
         <p:txBody>
-          <a:bodyPr wrap="square" lIns="0" tIns="74930" rIns="0" bIns="0" rtlCol="0" vert="horz">
+          <a:bodyPr vert="horz" wrap="square" lIns="0" tIns="74930" rIns="0" bIns="0" rtlCol="0">
             <a:spAutoFit/>
           </a:bodyPr>
           <a:lstStyle/>
           <a:p>
-            <a:pPr lvl="1" marL="387985" indent="-375285">
+            <a:pPr marL="387985" lvl="1" indent="-375285">
               <a:lnSpc>
                 <a:spcPct val="100000"/>
               </a:lnSpc>
@@ -4048,77 +3549,77 @@
               </a:tabLst>
             </a:pPr>
             <a:r>
-              <a:rPr dirty="0" sz="1700" b="1">
+              <a:rPr sz="1700" b="1" dirty="0">
                 <a:latin typeface="Times New Roman"/>
                 <a:cs typeface="Times New Roman"/>
               </a:rPr>
               <a:t>Event</a:t>
             </a:r>
             <a:r>
-              <a:rPr dirty="0" sz="1700" spc="-50" b="1">
-                <a:latin typeface="Times New Roman"/>
-                <a:cs typeface="Times New Roman"/>
-              </a:rPr>
-              <a:t> </a:t>
-            </a:r>
-            <a:r>
-              <a:rPr dirty="0" sz="1700" b="1">
+              <a:rPr sz="1700" b="1" spc="-50" dirty="0">
+                <a:latin typeface="Times New Roman"/>
+                <a:cs typeface="Times New Roman"/>
+              </a:rPr>
+              <a:t> </a:t>
+            </a:r>
+            <a:r>
+              <a:rPr sz="1700" b="1" dirty="0">
                 <a:latin typeface="Times New Roman"/>
                 <a:cs typeface="Times New Roman"/>
               </a:rPr>
               <a:t>Information</a:t>
             </a:r>
             <a:r>
-              <a:rPr dirty="0" sz="1700" spc="-50" b="1">
-                <a:latin typeface="Times New Roman"/>
-                <a:cs typeface="Times New Roman"/>
-              </a:rPr>
-              <a:t> </a:t>
-            </a:r>
-            <a:r>
-              <a:rPr dirty="0" sz="1700" b="1">
+              <a:rPr sz="1700" b="1" spc="-50" dirty="0">
+                <a:latin typeface="Times New Roman"/>
+                <a:cs typeface="Times New Roman"/>
+              </a:rPr>
+              <a:t> </a:t>
+            </a:r>
+            <a:r>
+              <a:rPr sz="1700" b="1" dirty="0">
                 <a:latin typeface="Times New Roman"/>
                 <a:cs typeface="Times New Roman"/>
               </a:rPr>
               <a:t>&amp;</a:t>
             </a:r>
             <a:r>
-              <a:rPr dirty="0" sz="1700" spc="-50" b="1">
-                <a:latin typeface="Times New Roman"/>
-                <a:cs typeface="Times New Roman"/>
-              </a:rPr>
-              <a:t> </a:t>
-            </a:r>
-            <a:r>
-              <a:rPr dirty="0" sz="1700" b="1">
+              <a:rPr sz="1700" b="1" spc="-50" dirty="0">
+                <a:latin typeface="Times New Roman"/>
+                <a:cs typeface="Times New Roman"/>
+              </a:rPr>
+              <a:t> </a:t>
+            </a:r>
+            <a:r>
+              <a:rPr sz="1700" b="1" dirty="0">
                 <a:latin typeface="Times New Roman"/>
                 <a:cs typeface="Times New Roman"/>
               </a:rPr>
               <a:t>Registration</a:t>
             </a:r>
             <a:r>
-              <a:rPr dirty="0" sz="1700" spc="-45" b="1">
-                <a:latin typeface="Times New Roman"/>
-                <a:cs typeface="Times New Roman"/>
-              </a:rPr>
-              <a:t> </a:t>
-            </a:r>
-            <a:r>
-              <a:rPr dirty="0" sz="1700" b="1">
+              <a:rPr sz="1700" b="1" spc="-45" dirty="0">
+                <a:latin typeface="Times New Roman"/>
+                <a:cs typeface="Times New Roman"/>
+              </a:rPr>
+              <a:t> </a:t>
+            </a:r>
+            <a:r>
+              <a:rPr sz="1700" b="1" dirty="0">
                 <a:latin typeface="Times New Roman"/>
                 <a:cs typeface="Times New Roman"/>
               </a:rPr>
               <a:t>Form</a:t>
             </a:r>
             <a:r>
-              <a:rPr dirty="0" sz="1700" spc="-50" b="1">
-                <a:latin typeface="Times New Roman"/>
-                <a:cs typeface="Times New Roman"/>
-              </a:rPr>
-              <a:t> </a:t>
-            </a:r>
-            <a:r>
-              <a:rPr dirty="0" sz="1700" spc="-10" b="1">
+              <a:rPr sz="1700" b="1" spc="-50" dirty="0">
+                <a:latin typeface="Times New Roman"/>
+                <a:cs typeface="Times New Roman"/>
+              </a:rPr>
+              <a:t> </a:t>
+            </a:r>
+            <a:r>
+              <a:rPr sz="1700" b="1" spc="-10" dirty="0">
                 <a:latin typeface="Times New Roman"/>
                 <a:cs typeface="Times New Roman"/>
               </a:rPr>
@@ -4139,175 +3640,175 @@
               </a:spcBef>
             </a:pPr>
             <a:r>
-              <a:rPr dirty="0" sz="1200" i="1">
+              <a:rPr sz="1200" i="1" dirty="0">
                 <a:latin typeface="Times New Roman"/>
                 <a:cs typeface="Times New Roman"/>
               </a:rPr>
               <a:t>(Include</a:t>
             </a:r>
             <a:r>
-              <a:rPr dirty="0" sz="1200" spc="-15" i="1">
-                <a:latin typeface="Times New Roman"/>
-                <a:cs typeface="Times New Roman"/>
-              </a:rPr>
-              <a:t> </a:t>
-            </a:r>
-            <a:r>
-              <a:rPr dirty="0" sz="1200" i="1">
+              <a:rPr sz="1200" i="1" spc="-15" dirty="0">
+                <a:latin typeface="Times New Roman"/>
+                <a:cs typeface="Times New Roman"/>
+              </a:rPr>
+              <a:t> </a:t>
+            </a:r>
+            <a:r>
+              <a:rPr sz="1200" i="1" dirty="0">
                 <a:latin typeface="Times New Roman"/>
                 <a:cs typeface="Times New Roman"/>
               </a:rPr>
               <a:t>complete</a:t>
             </a:r>
             <a:r>
-              <a:rPr dirty="0" sz="1200" spc="-15" i="1">
-                <a:latin typeface="Times New Roman"/>
-                <a:cs typeface="Times New Roman"/>
-              </a:rPr>
-              <a:t> </a:t>
-            </a:r>
-            <a:r>
-              <a:rPr dirty="0" sz="1200" i="1">
+              <a:rPr sz="1200" i="1" spc="-15" dirty="0">
+                <a:latin typeface="Times New Roman"/>
+                <a:cs typeface="Times New Roman"/>
+              </a:rPr>
+              <a:t> </a:t>
+            </a:r>
+            <a:r>
+              <a:rPr sz="1200" i="1" dirty="0">
                 <a:latin typeface="Times New Roman"/>
                 <a:cs typeface="Times New Roman"/>
               </a:rPr>
               <a:t>event</a:t>
             </a:r>
             <a:r>
-              <a:rPr dirty="0" sz="1200" spc="-15" i="1">
-                <a:latin typeface="Times New Roman"/>
-                <a:cs typeface="Times New Roman"/>
-              </a:rPr>
-              <a:t> </a:t>
-            </a:r>
-            <a:r>
-              <a:rPr dirty="0" sz="1200" i="1">
+              <a:rPr sz="1200" i="1" spc="-15" dirty="0">
+                <a:latin typeface="Times New Roman"/>
+                <a:cs typeface="Times New Roman"/>
+              </a:rPr>
+              <a:t> </a:t>
+            </a:r>
+            <a:r>
+              <a:rPr sz="1200" i="1" dirty="0">
                 <a:latin typeface="Times New Roman"/>
                 <a:cs typeface="Times New Roman"/>
               </a:rPr>
               <a:t>details</a:t>
             </a:r>
             <a:r>
-              <a:rPr dirty="0" sz="1200" spc="-15" i="1">
-                <a:latin typeface="Times New Roman"/>
-                <a:cs typeface="Times New Roman"/>
-              </a:rPr>
-              <a:t> </a:t>
-            </a:r>
-            <a:r>
-              <a:rPr dirty="0" sz="1200" i="1">
+              <a:rPr sz="1200" i="1" spc="-15" dirty="0">
+                <a:latin typeface="Times New Roman"/>
+                <a:cs typeface="Times New Roman"/>
+              </a:rPr>
+              <a:t> </a:t>
+            </a:r>
+            <a:r>
+              <a:rPr sz="1200" i="1" dirty="0">
                 <a:latin typeface="Times New Roman"/>
                 <a:cs typeface="Times New Roman"/>
               </a:rPr>
               <a:t>and</a:t>
             </a:r>
             <a:r>
-              <a:rPr dirty="0" sz="1200" spc="-15" i="1">
-                <a:latin typeface="Times New Roman"/>
-                <a:cs typeface="Times New Roman"/>
-              </a:rPr>
-              <a:t> </a:t>
-            </a:r>
-            <a:r>
-              <a:rPr dirty="0" sz="1200" spc="-10" i="1">
+              <a:rPr sz="1200" i="1" spc="-15" dirty="0">
+                <a:latin typeface="Times New Roman"/>
+                <a:cs typeface="Times New Roman"/>
+              </a:rPr>
+              <a:t> </a:t>
+            </a:r>
+            <a:r>
+              <a:rPr sz="1200" i="1" spc="-10" dirty="0">
                 <a:latin typeface="Times New Roman"/>
                 <a:cs typeface="Times New Roman"/>
               </a:rPr>
               <a:t>create</a:t>
             </a:r>
             <a:r>
-              <a:rPr dirty="0" sz="1200" spc="-15" i="1">
-                <a:latin typeface="Times New Roman"/>
-                <a:cs typeface="Times New Roman"/>
-              </a:rPr>
-              <a:t> </a:t>
-            </a:r>
-            <a:r>
-              <a:rPr dirty="0" sz="1200" i="1">
+              <a:rPr sz="1200" i="1" spc="-15" dirty="0">
+                <a:latin typeface="Times New Roman"/>
+                <a:cs typeface="Times New Roman"/>
+              </a:rPr>
+              <a:t> </a:t>
+            </a:r>
+            <a:r>
+              <a:rPr sz="1200" i="1" dirty="0">
                 <a:latin typeface="Times New Roman"/>
                 <a:cs typeface="Times New Roman"/>
               </a:rPr>
               <a:t>a</a:t>
             </a:r>
             <a:r>
-              <a:rPr dirty="0" sz="1200" spc="-15" i="1">
-                <a:latin typeface="Times New Roman"/>
-                <a:cs typeface="Times New Roman"/>
-              </a:rPr>
-              <a:t> </a:t>
-            </a:r>
-            <a:r>
-              <a:rPr dirty="0" sz="1200" spc="-10" i="1">
+              <a:rPr sz="1200" i="1" spc="-15" dirty="0">
+                <a:latin typeface="Times New Roman"/>
+                <a:cs typeface="Times New Roman"/>
+              </a:rPr>
+              <a:t> </a:t>
+            </a:r>
+            <a:r>
+              <a:rPr sz="1200" i="1" spc="-10" dirty="0">
                 <a:latin typeface="Times New Roman"/>
                 <a:cs typeface="Times New Roman"/>
               </a:rPr>
               <a:t>registration</a:t>
             </a:r>
             <a:r>
-              <a:rPr dirty="0" sz="1200" spc="-20" i="1">
-                <a:latin typeface="Times New Roman"/>
-                <a:cs typeface="Times New Roman"/>
-              </a:rPr>
-              <a:t> </a:t>
-            </a:r>
-            <a:r>
-              <a:rPr dirty="0" sz="1200" i="1">
+              <a:rPr sz="1200" i="1" spc="-20" dirty="0">
+                <a:latin typeface="Times New Roman"/>
+                <a:cs typeface="Times New Roman"/>
+              </a:rPr>
+              <a:t> </a:t>
+            </a:r>
+            <a:r>
+              <a:rPr sz="1200" i="1" dirty="0">
                 <a:latin typeface="Times New Roman"/>
                 <a:cs typeface="Times New Roman"/>
               </a:rPr>
               <a:t>form</a:t>
             </a:r>
             <a:r>
-              <a:rPr dirty="0" sz="1200" spc="-15" i="1">
-                <a:latin typeface="Times New Roman"/>
-                <a:cs typeface="Times New Roman"/>
-              </a:rPr>
-              <a:t> </a:t>
-            </a:r>
-            <a:r>
-              <a:rPr dirty="0" sz="1200" i="1">
+              <a:rPr sz="1200" i="1" spc="-15" dirty="0">
+                <a:latin typeface="Times New Roman"/>
+                <a:cs typeface="Times New Roman"/>
+              </a:rPr>
+              <a:t> </a:t>
+            </a:r>
+            <a:r>
+              <a:rPr sz="1200" i="1" dirty="0">
                 <a:latin typeface="Times New Roman"/>
                 <a:cs typeface="Times New Roman"/>
               </a:rPr>
               <a:t>to</a:t>
             </a:r>
             <a:r>
-              <a:rPr dirty="0" sz="1200" spc="-15" i="1">
-                <a:latin typeface="Times New Roman"/>
-                <a:cs typeface="Times New Roman"/>
-              </a:rPr>
-              <a:t> </a:t>
-            </a:r>
-            <a:r>
-              <a:rPr dirty="0" sz="1200" i="1">
+              <a:rPr sz="1200" i="1" spc="-15" dirty="0">
+                <a:latin typeface="Times New Roman"/>
+                <a:cs typeface="Times New Roman"/>
+              </a:rPr>
+              <a:t> </a:t>
+            </a:r>
+            <a:r>
+              <a:rPr sz="1200" i="1" dirty="0">
                 <a:latin typeface="Times New Roman"/>
                 <a:cs typeface="Times New Roman"/>
               </a:rPr>
               <a:t>collect</a:t>
             </a:r>
             <a:r>
-              <a:rPr dirty="0" sz="1200" spc="-15" i="1">
-                <a:latin typeface="Times New Roman"/>
-                <a:cs typeface="Times New Roman"/>
-              </a:rPr>
-              <a:t> </a:t>
-            </a:r>
-            <a:r>
-              <a:rPr dirty="0" sz="1200" i="1">
+              <a:rPr sz="1200" i="1" spc="-15" dirty="0">
+                <a:latin typeface="Times New Roman"/>
+                <a:cs typeface="Times New Roman"/>
+              </a:rPr>
+              <a:t> </a:t>
+            </a:r>
+            <a:r>
+              <a:rPr sz="1200" i="1" dirty="0">
                 <a:latin typeface="Times New Roman"/>
                 <a:cs typeface="Times New Roman"/>
               </a:rPr>
               <a:t>user</a:t>
             </a:r>
             <a:r>
-              <a:rPr dirty="0" sz="1200" spc="-20" i="1">
-                <a:latin typeface="Times New Roman"/>
-                <a:cs typeface="Times New Roman"/>
-              </a:rPr>
-              <a:t> </a:t>
-            </a:r>
-            <a:r>
-              <a:rPr dirty="0" sz="1200" spc="-10" i="1">
+              <a:rPr sz="1200" i="1" spc="-20" dirty="0">
+                <a:latin typeface="Times New Roman"/>
+                <a:cs typeface="Times New Roman"/>
+              </a:rPr>
+              <a:t> </a:t>
+            </a:r>
+            <a:r>
+              <a:rPr sz="1200" i="1" spc="-10" dirty="0">
                 <a:latin typeface="Times New Roman"/>
                 <a:cs typeface="Times New Roman"/>
               </a:rPr>
@@ -4339,35 +3840,35 @@
               </a:lnSpc>
             </a:pPr>
             <a:r>
-              <a:rPr dirty="0" sz="1200">
+              <a:rPr sz="1200" dirty="0">
                 <a:latin typeface="Times New Roman"/>
                 <a:cs typeface="Times New Roman"/>
               </a:rPr>
               <a:t>This</a:t>
             </a:r>
             <a:r>
-              <a:rPr dirty="0" sz="1200" spc="-30">
-                <a:latin typeface="Times New Roman"/>
-                <a:cs typeface="Times New Roman"/>
-              </a:rPr>
-              <a:t> </a:t>
-            </a:r>
-            <a:r>
-              <a:rPr dirty="0" sz="1200">
+              <a:rPr sz="1200" spc="-30" dirty="0">
+                <a:latin typeface="Times New Roman"/>
+                <a:cs typeface="Times New Roman"/>
+              </a:rPr>
+              <a:t> </a:t>
+            </a:r>
+            <a:r>
+              <a:rPr sz="1200" dirty="0">
                 <a:latin typeface="Times New Roman"/>
                 <a:cs typeface="Times New Roman"/>
               </a:rPr>
               <a:t>section</a:t>
             </a:r>
             <a:r>
-              <a:rPr dirty="0" sz="1200" spc="-30">
-                <a:latin typeface="Times New Roman"/>
-                <a:cs typeface="Times New Roman"/>
-              </a:rPr>
-              <a:t> </a:t>
-            </a:r>
-            <a:r>
-              <a:rPr dirty="0" sz="1200" spc="-10">
+              <a:rPr sz="1200" spc="-30" dirty="0">
+                <a:latin typeface="Times New Roman"/>
+                <a:cs typeface="Times New Roman"/>
+              </a:rPr>
+              <a:t> </a:t>
+            </a:r>
+            <a:r>
+              <a:rPr sz="1200" spc="-10" dirty="0">
                 <a:latin typeface="Times New Roman"/>
                 <a:cs typeface="Times New Roman"/>
               </a:rPr>
@@ -4379,7 +3880,7 @@
             </a:endParaRPr>
           </a:p>
           <a:p>
-            <a:pPr lvl="2" marL="288925" indent="-180975">
+            <a:pPr marL="288925" lvl="2" indent="-180975">
               <a:lnSpc>
                 <a:spcPct val="100000"/>
               </a:lnSpc>
@@ -4393,21 +3894,21 @@
               </a:tabLst>
             </a:pPr>
             <a:r>
-              <a:rPr dirty="0" sz="1200">
+              <a:rPr sz="1200" dirty="0">
                 <a:latin typeface="Times New Roman"/>
                 <a:cs typeface="Times New Roman"/>
               </a:rPr>
               <a:t>Event</a:t>
             </a:r>
             <a:r>
-              <a:rPr dirty="0" sz="1200" spc="-30">
-                <a:latin typeface="Times New Roman"/>
-                <a:cs typeface="Times New Roman"/>
-              </a:rPr>
-              <a:t> </a:t>
-            </a:r>
-            <a:r>
-              <a:rPr dirty="0" sz="1200" spc="-10">
+              <a:rPr sz="1200" spc="-30" dirty="0">
+                <a:latin typeface="Times New Roman"/>
+                <a:cs typeface="Times New Roman"/>
+              </a:rPr>
+              <a:t> </a:t>
+            </a:r>
+            <a:r>
+              <a:rPr sz="1200" spc="-10" dirty="0">
                 <a:latin typeface="Times New Roman"/>
                 <a:cs typeface="Times New Roman"/>
               </a:rPr>
@@ -4419,7 +3920,7 @@
             </a:endParaRPr>
           </a:p>
           <a:p>
-            <a:pPr lvl="2" marL="288925" indent="-180975">
+            <a:pPr marL="288925" lvl="2" indent="-180975">
               <a:lnSpc>
                 <a:spcPct val="100000"/>
               </a:lnSpc>
@@ -4433,21 +3934,21 @@
               </a:tabLst>
             </a:pPr>
             <a:r>
-              <a:rPr dirty="0" sz="1200">
+              <a:rPr sz="1200" dirty="0">
                 <a:latin typeface="Times New Roman"/>
                 <a:cs typeface="Times New Roman"/>
               </a:rPr>
               <a:t>Registration</a:t>
             </a:r>
             <a:r>
-              <a:rPr dirty="0" sz="1200" spc="-60">
-                <a:latin typeface="Times New Roman"/>
-                <a:cs typeface="Times New Roman"/>
-              </a:rPr>
-              <a:t> </a:t>
-            </a:r>
-            <a:r>
-              <a:rPr dirty="0" sz="1200" spc="-20">
+              <a:rPr sz="1200" spc="-60" dirty="0">
+                <a:latin typeface="Times New Roman"/>
+                <a:cs typeface="Times New Roman"/>
+              </a:rPr>
+              <a:t> </a:t>
+            </a:r>
+            <a:r>
+              <a:rPr sz="1200" spc="-20" dirty="0">
                 <a:latin typeface="Times New Roman"/>
                 <a:cs typeface="Times New Roman"/>
               </a:rPr>
@@ -4459,7 +3960,7 @@
             </a:endParaRPr>
           </a:p>
           <a:p>
-            <a:pPr lvl="2" marL="288925" indent="-180975">
+            <a:pPr marL="288925" lvl="2" indent="-180975">
               <a:lnSpc>
                 <a:spcPct val="100000"/>
               </a:lnSpc>
@@ -4473,21 +3974,21 @@
               </a:tabLst>
             </a:pPr>
             <a:r>
-              <a:rPr dirty="0" sz="1200">
+              <a:rPr sz="1200" dirty="0">
                 <a:latin typeface="Times New Roman"/>
                 <a:cs typeface="Times New Roman"/>
               </a:rPr>
               <a:t>Personal</a:t>
             </a:r>
             <a:r>
-              <a:rPr dirty="0" sz="1200" spc="-45">
-                <a:latin typeface="Times New Roman"/>
-                <a:cs typeface="Times New Roman"/>
-              </a:rPr>
-              <a:t> </a:t>
-            </a:r>
-            <a:r>
-              <a:rPr dirty="0" sz="1200" spc="-10">
+              <a:rPr sz="1200" spc="-45" dirty="0">
+                <a:latin typeface="Times New Roman"/>
+                <a:cs typeface="Times New Roman"/>
+              </a:rPr>
+              <a:t> </a:t>
+            </a:r>
+            <a:r>
+              <a:rPr sz="1200" spc="-10" dirty="0">
                 <a:latin typeface="Times New Roman"/>
                 <a:cs typeface="Times New Roman"/>
               </a:rPr>
@@ -4499,7 +4000,7 @@
             </a:endParaRPr>
           </a:p>
           <a:p>
-            <a:pPr lvl="2" marL="288925" indent="-180975">
+            <a:pPr marL="288925" lvl="2" indent="-180975">
               <a:lnSpc>
                 <a:spcPct val="100000"/>
               </a:lnSpc>
@@ -4513,21 +4014,21 @@
               </a:tabLst>
             </a:pPr>
             <a:r>
-              <a:rPr dirty="0" sz="1200">
+              <a:rPr sz="1200" dirty="0">
                 <a:latin typeface="Times New Roman"/>
                 <a:cs typeface="Times New Roman"/>
               </a:rPr>
               <a:t>Event</a:t>
             </a:r>
             <a:r>
-              <a:rPr dirty="0" sz="1200" spc="-30">
-                <a:latin typeface="Times New Roman"/>
-                <a:cs typeface="Times New Roman"/>
-              </a:rPr>
-              <a:t> </a:t>
-            </a:r>
-            <a:r>
-              <a:rPr dirty="0" sz="1200" spc="-10">
+              <a:rPr sz="1200" spc="-30" dirty="0">
+                <a:latin typeface="Times New Roman"/>
+                <a:cs typeface="Times New Roman"/>
+              </a:rPr>
+              <a:t> </a:t>
+            </a:r>
+            <a:r>
+              <a:rPr sz="1200" spc="-10" dirty="0">
                 <a:latin typeface="Times New Roman"/>
                 <a:cs typeface="Times New Roman"/>
               </a:rPr>
@@ -4539,7 +4040,7 @@
             </a:endParaRPr>
           </a:p>
           <a:p>
-            <a:pPr lvl="2" marL="288925" indent="-180975">
+            <a:pPr marL="288925" lvl="2" indent="-180975">
               <a:lnSpc>
                 <a:spcPct val="100000"/>
               </a:lnSpc>
@@ -4553,21 +4054,21 @@
               </a:tabLst>
             </a:pPr>
             <a:r>
-              <a:rPr dirty="0" sz="1200">
+              <a:rPr sz="1200" dirty="0">
                 <a:latin typeface="Times New Roman"/>
                 <a:cs typeface="Times New Roman"/>
               </a:rPr>
               <a:t>Additional</a:t>
             </a:r>
             <a:r>
-              <a:rPr dirty="0" sz="1200" spc="-55">
-                <a:latin typeface="Times New Roman"/>
-                <a:cs typeface="Times New Roman"/>
-              </a:rPr>
-              <a:t> </a:t>
-            </a:r>
-            <a:r>
-              <a:rPr dirty="0" sz="1200" spc="-10">
+              <a:rPr sz="1200" spc="-55" dirty="0">
+                <a:latin typeface="Times New Roman"/>
+                <a:cs typeface="Times New Roman"/>
+              </a:rPr>
+              <a:t> </a:t>
+            </a:r>
+            <a:r>
+              <a:rPr sz="1200" spc="-10" dirty="0">
                 <a:latin typeface="Times New Roman"/>
                 <a:cs typeface="Times New Roman"/>
               </a:rPr>
@@ -4579,7 +4080,7 @@
             </a:endParaRPr>
           </a:p>
           <a:p>
-            <a:pPr lvl="2" marL="288925" indent="-180975">
+            <a:pPr marL="288925" lvl="2" indent="-180975">
               <a:lnSpc>
                 <a:spcPct val="100000"/>
               </a:lnSpc>
@@ -4593,7 +4094,7 @@
               </a:tabLst>
             </a:pPr>
             <a:r>
-              <a:rPr dirty="0" sz="1200" spc="-10">
+              <a:rPr sz="1200" spc="-10" dirty="0">
                 <a:latin typeface="Times New Roman"/>
                 <a:cs typeface="Times New Roman"/>
               </a:rPr>
@@ -4605,7 +4106,7 @@
             </a:endParaRPr>
           </a:p>
           <a:p>
-            <a:pPr lvl="2" marL="288925" indent="-180975">
+            <a:pPr marL="288925" lvl="2" indent="-180975">
               <a:lnSpc>
                 <a:spcPct val="100000"/>
               </a:lnSpc>
@@ -4619,14 +4120,14 @@
               </a:tabLst>
             </a:pPr>
             <a:r>
-              <a:rPr dirty="0" sz="1200">
+              <a:rPr sz="1200" dirty="0">
                 <a:latin typeface="Times New Roman"/>
                 <a:cs typeface="Times New Roman"/>
               </a:rPr>
               <a:t>Form </a:t>
             </a:r>
             <a:r>
-              <a:rPr dirty="0" sz="1200" spc="-10">
+              <a:rPr sz="1200" spc="-10" dirty="0">
                 <a:latin typeface="Times New Roman"/>
                 <a:cs typeface="Times New Roman"/>
               </a:rPr>
@@ -4641,7 +4142,7 @@
       </p:sp>
       <p:pic>
         <p:nvPicPr>
-          <p:cNvPr id="10" name="object 10" descr=""/>
+          <p:cNvPr id="10" name="object 10"/>
           <p:cNvPicPr/>
           <p:nvPr/>
         </p:nvPicPr>
@@ -4663,7 +4164,7 @@
       </p:pic>
       <p:pic>
         <p:nvPicPr>
-          <p:cNvPr id="11" name="object 11" descr=""/>
+          <p:cNvPr id="11" name="object 11"/>
           <p:cNvPicPr/>
           <p:nvPr/>
         </p:nvPicPr>
@@ -4710,7 +4211,7 @@
       </p:grpSpPr>
       <p:pic>
         <p:nvPicPr>
-          <p:cNvPr id="2" name="object 2" descr=""/>
+          <p:cNvPr id="2" name="object 2"/>
           <p:cNvPicPr/>
           <p:nvPr/>
         </p:nvPicPr>
@@ -4732,7 +4233,7 @@
       </p:pic>
       <p:pic>
         <p:nvPicPr>
-          <p:cNvPr id="3" name="object 3" descr=""/>
+          <p:cNvPr id="3" name="object 3"/>
           <p:cNvPicPr/>
           <p:nvPr/>
         </p:nvPicPr>
@@ -4754,7 +4255,7 @@
       </p:pic>
       <p:sp>
         <p:nvSpPr>
-          <p:cNvPr id="4" name="object 4" descr=""/>
+          <p:cNvPr id="4" name="object 4"/>
           <p:cNvSpPr txBox="1"/>
           <p:nvPr/>
         </p:nvSpPr>
@@ -4768,7 +4269,7 @@
           </a:prstGeom>
         </p:spPr>
         <p:txBody>
-          <a:bodyPr wrap="square" lIns="0" tIns="12700" rIns="0" bIns="0" rtlCol="0" vert="horz">
+          <a:bodyPr vert="horz" wrap="square" lIns="0" tIns="12700" rIns="0" bIns="0" rtlCol="0">
             <a:spAutoFit/>
           </a:bodyPr>
           <a:lstStyle/>
@@ -4782,7 +4283,7 @@
               </a:spcBef>
             </a:pPr>
             <a:r>
-              <a:rPr dirty="0" sz="1300" spc="-10" b="1">
+              <a:rPr sz="1300" b="1" spc="-10" dirty="0">
                 <a:latin typeface="Times New Roman"/>
                 <a:cs typeface="Times New Roman"/>
               </a:rPr>
@@ -4803,98 +4304,98 @@
               </a:spcBef>
             </a:pPr>
             <a:r>
-              <a:rPr dirty="0" sz="1200" b="1">
+              <a:rPr sz="1200" b="1" dirty="0">
                 <a:latin typeface="Times New Roman"/>
                 <a:cs typeface="Times New Roman"/>
               </a:rPr>
               <a:t>Registration</a:t>
             </a:r>
             <a:r>
-              <a:rPr dirty="0" sz="1200" spc="-25" b="1">
-                <a:latin typeface="Times New Roman"/>
-                <a:cs typeface="Times New Roman"/>
-              </a:rPr>
-              <a:t> </a:t>
-            </a:r>
-            <a:r>
-              <a:rPr dirty="0" sz="1200" b="1">
+              <a:rPr sz="1200" b="1" spc="-25" dirty="0">
+                <a:latin typeface="Times New Roman"/>
+                <a:cs typeface="Times New Roman"/>
+              </a:rPr>
+              <a:t> </a:t>
+            </a:r>
+            <a:r>
+              <a:rPr sz="1200" b="1" dirty="0">
                 <a:latin typeface="Times New Roman"/>
                 <a:cs typeface="Times New Roman"/>
               </a:rPr>
               <a:t>Form</a:t>
             </a:r>
             <a:r>
-              <a:rPr dirty="0" sz="1200" spc="-25" b="1">
-                <a:latin typeface="Times New Roman"/>
-                <a:cs typeface="Times New Roman"/>
-              </a:rPr>
-              <a:t> </a:t>
-            </a:r>
-            <a:r>
-              <a:rPr dirty="0" sz="1200" b="1">
+              <a:rPr sz="1200" b="1" spc="-25" dirty="0">
+                <a:latin typeface="Times New Roman"/>
+                <a:cs typeface="Times New Roman"/>
+              </a:rPr>
+              <a:t> </a:t>
+            </a:r>
+            <a:r>
+              <a:rPr sz="1200" b="1" dirty="0">
                 <a:latin typeface="Times New Roman"/>
                 <a:cs typeface="Times New Roman"/>
               </a:rPr>
               <a:t>–</a:t>
             </a:r>
             <a:r>
-              <a:rPr dirty="0" sz="1200" spc="-25" b="1">
-                <a:latin typeface="Times New Roman"/>
-                <a:cs typeface="Times New Roman"/>
-              </a:rPr>
-              <a:t> </a:t>
-            </a:r>
-            <a:r>
-              <a:rPr dirty="0" sz="1200" b="1">
+              <a:rPr sz="1200" b="1" spc="-25" dirty="0">
+                <a:latin typeface="Times New Roman"/>
+                <a:cs typeface="Times New Roman"/>
+              </a:rPr>
+              <a:t> </a:t>
+            </a:r>
+            <a:r>
+              <a:rPr sz="1200" b="1" dirty="0">
                 <a:latin typeface="Times New Roman"/>
                 <a:cs typeface="Times New Roman"/>
               </a:rPr>
               <a:t>Sample</a:t>
             </a:r>
             <a:r>
-              <a:rPr dirty="0" sz="1200" spc="-25" b="1">
-                <a:latin typeface="Times New Roman"/>
-                <a:cs typeface="Times New Roman"/>
-              </a:rPr>
-              <a:t> </a:t>
-            </a:r>
-            <a:r>
-              <a:rPr dirty="0" sz="1200" b="1">
+              <a:rPr sz="1200" b="1" spc="-25" dirty="0">
+                <a:latin typeface="Times New Roman"/>
+                <a:cs typeface="Times New Roman"/>
+              </a:rPr>
+              <a:t> </a:t>
+            </a:r>
+            <a:r>
+              <a:rPr sz="1200" b="1" dirty="0">
                 <a:latin typeface="Times New Roman"/>
                 <a:cs typeface="Times New Roman"/>
               </a:rPr>
               <a:t>Filled</a:t>
             </a:r>
             <a:r>
-              <a:rPr dirty="0" sz="1200" spc="-25" b="1">
-                <a:latin typeface="Times New Roman"/>
-                <a:cs typeface="Times New Roman"/>
-              </a:rPr>
-              <a:t> </a:t>
-            </a:r>
-            <a:r>
-              <a:rPr dirty="0" sz="1200" spc="-20" b="1">
+              <a:rPr sz="1200" b="1" spc="-25" dirty="0">
+                <a:latin typeface="Times New Roman"/>
+                <a:cs typeface="Times New Roman"/>
+              </a:rPr>
+              <a:t> </a:t>
+            </a:r>
+            <a:r>
+              <a:rPr sz="1200" b="1" spc="-20" dirty="0">
                 <a:latin typeface="Times New Roman"/>
                 <a:cs typeface="Times New Roman"/>
               </a:rPr>
               <a:t>Data </a:t>
             </a:r>
             <a:r>
-              <a:rPr dirty="0" sz="1200" b="1">
+              <a:rPr sz="1200" b="1" dirty="0">
                 <a:latin typeface="Times New Roman"/>
                 <a:cs typeface="Times New Roman"/>
               </a:rPr>
               <a:t>Personal</a:t>
             </a:r>
             <a:r>
-              <a:rPr dirty="0" sz="1200" spc="-45" b="1">
-                <a:latin typeface="Times New Roman"/>
-                <a:cs typeface="Times New Roman"/>
-              </a:rPr>
-              <a:t> </a:t>
-            </a:r>
-            <a:r>
-              <a:rPr dirty="0" sz="1200" spc="-10" b="1">
+              <a:rPr sz="1200" b="1" spc="-45" dirty="0">
+                <a:latin typeface="Times New Roman"/>
+                <a:cs typeface="Times New Roman"/>
+              </a:rPr>
+              <a:t> </a:t>
+            </a:r>
+            <a:r>
+              <a:rPr sz="1200" b="1" spc="-10" dirty="0">
                 <a:latin typeface="Times New Roman"/>
                 <a:cs typeface="Times New Roman"/>
               </a:rPr>
@@ -4920,21 +4421,21 @@
               </a:tabLst>
             </a:pPr>
             <a:r>
-              <a:rPr dirty="0" sz="1200" b="1">
+              <a:rPr sz="1200" b="1" dirty="0">
                 <a:latin typeface="Times New Roman"/>
                 <a:cs typeface="Times New Roman"/>
               </a:rPr>
               <a:t>Name:</a:t>
             </a:r>
             <a:r>
-              <a:rPr dirty="0" sz="1200" spc="-35" b="1">
-                <a:latin typeface="Times New Roman"/>
-                <a:cs typeface="Times New Roman"/>
-              </a:rPr>
-              <a:t> </a:t>
-            </a:r>
-            <a:r>
-              <a:rPr dirty="0" sz="1200" spc="-25">
+              <a:rPr sz="1200" b="1" spc="-35" dirty="0">
+                <a:latin typeface="Times New Roman"/>
+                <a:cs typeface="Times New Roman"/>
+              </a:rPr>
+              <a:t> </a:t>
+            </a:r>
+            <a:r>
+              <a:rPr sz="1200" spc="-25" dirty="0">
                 <a:latin typeface="Times New Roman"/>
                 <a:cs typeface="Times New Roman"/>
               </a:rPr>
@@ -4957,21 +4458,21 @@
               </a:tabLst>
             </a:pPr>
             <a:r>
-              <a:rPr dirty="0" sz="1200" b="1">
+              <a:rPr sz="1200" b="1" dirty="0">
                 <a:latin typeface="Times New Roman"/>
                 <a:cs typeface="Times New Roman"/>
               </a:rPr>
               <a:t>Email:</a:t>
             </a:r>
             <a:r>
-              <a:rPr dirty="0" sz="1200" spc="-35" b="1">
-                <a:latin typeface="Times New Roman"/>
-                <a:cs typeface="Times New Roman"/>
-              </a:rPr>
-              <a:t> </a:t>
-            </a:r>
-            <a:r>
-              <a:rPr dirty="0" sz="1200" spc="-10">
+              <a:rPr sz="1200" b="1" spc="-35" dirty="0">
+                <a:latin typeface="Times New Roman"/>
+                <a:cs typeface="Times New Roman"/>
+              </a:rPr>
+              <a:t> </a:t>
+            </a:r>
+            <a:r>
+              <a:rPr sz="1200" spc="-10" dirty="0">
                 <a:latin typeface="Times New Roman"/>
                 <a:cs typeface="Times New Roman"/>
                 <a:hlinkClick r:id="rId4"/>
@@ -4995,14 +4496,14 @@
               </a:tabLst>
             </a:pPr>
             <a:r>
-              <a:rPr dirty="0" sz="1200" b="1">
+              <a:rPr sz="1200" b="1" dirty="0">
                 <a:latin typeface="Times New Roman"/>
                 <a:cs typeface="Times New Roman"/>
               </a:rPr>
               <a:t>Phone Number: </a:t>
             </a:r>
             <a:r>
-              <a:rPr dirty="0" sz="1200" spc="-10">
+              <a:rPr sz="1200" spc="-10" dirty="0">
                 <a:latin typeface="Times New Roman"/>
                 <a:cs typeface="Times New Roman"/>
               </a:rPr>
@@ -5025,49 +4526,49 @@
               </a:tabLst>
             </a:pPr>
             <a:r>
-              <a:rPr dirty="0" sz="1200" b="1">
+              <a:rPr sz="1200" b="1" dirty="0">
                 <a:latin typeface="Times New Roman"/>
                 <a:cs typeface="Times New Roman"/>
               </a:rPr>
               <a:t>Date</a:t>
             </a:r>
             <a:r>
-              <a:rPr dirty="0" sz="1200" spc="-25" b="1">
-                <a:latin typeface="Times New Roman"/>
-                <a:cs typeface="Times New Roman"/>
-              </a:rPr>
-              <a:t> </a:t>
-            </a:r>
-            <a:r>
-              <a:rPr dirty="0" sz="1200" b="1">
+              <a:rPr sz="1200" b="1" spc="-25" dirty="0">
+                <a:latin typeface="Times New Roman"/>
+                <a:cs typeface="Times New Roman"/>
+              </a:rPr>
+              <a:t> </a:t>
+            </a:r>
+            <a:r>
+              <a:rPr sz="1200" b="1" dirty="0">
                 <a:latin typeface="Times New Roman"/>
                 <a:cs typeface="Times New Roman"/>
               </a:rPr>
               <a:t>of</a:t>
             </a:r>
             <a:r>
-              <a:rPr dirty="0" sz="1200" spc="-20" b="1">
-                <a:latin typeface="Times New Roman"/>
-                <a:cs typeface="Times New Roman"/>
-              </a:rPr>
-              <a:t> </a:t>
-            </a:r>
-            <a:r>
-              <a:rPr dirty="0" sz="1200" b="1">
+              <a:rPr sz="1200" b="1" spc="-20" dirty="0">
+                <a:latin typeface="Times New Roman"/>
+                <a:cs typeface="Times New Roman"/>
+              </a:rPr>
+              <a:t> </a:t>
+            </a:r>
+            <a:r>
+              <a:rPr sz="1200" b="1" dirty="0">
                 <a:latin typeface="Times New Roman"/>
                 <a:cs typeface="Times New Roman"/>
               </a:rPr>
               <a:t>Birth:</a:t>
             </a:r>
             <a:r>
-              <a:rPr dirty="0" sz="1200" spc="-25" b="1">
-                <a:latin typeface="Times New Roman"/>
-                <a:cs typeface="Times New Roman"/>
-              </a:rPr>
-              <a:t> </a:t>
-            </a:r>
-            <a:r>
-              <a:rPr dirty="0" sz="1200" spc="-10">
+              <a:rPr sz="1200" b="1" spc="-25" dirty="0">
+                <a:latin typeface="Times New Roman"/>
+                <a:cs typeface="Times New Roman"/>
+              </a:rPr>
+              <a:t> </a:t>
+            </a:r>
+            <a:r>
+              <a:rPr sz="1200" spc="-10" dirty="0">
                 <a:latin typeface="Times New Roman"/>
                 <a:cs typeface="Times New Roman"/>
               </a:rPr>
@@ -5090,21 +4591,21 @@
               </a:tabLst>
             </a:pPr>
             <a:r>
-              <a:rPr dirty="0" sz="1200" b="1">
+              <a:rPr sz="1200" b="1" dirty="0">
                 <a:latin typeface="Times New Roman"/>
                 <a:cs typeface="Times New Roman"/>
               </a:rPr>
               <a:t>Gender:</a:t>
             </a:r>
             <a:r>
-              <a:rPr dirty="0" sz="1200" spc="-45" b="1">
-                <a:latin typeface="Times New Roman"/>
-                <a:cs typeface="Times New Roman"/>
-              </a:rPr>
-              <a:t> </a:t>
-            </a:r>
-            <a:r>
-              <a:rPr dirty="0" sz="1200" spc="-10">
+              <a:rPr sz="1200" b="1" spc="-45" dirty="0">
+                <a:latin typeface="Times New Roman"/>
+                <a:cs typeface="Times New Roman"/>
+              </a:rPr>
+              <a:t> </a:t>
+            </a:r>
+            <a:r>
+              <a:rPr sz="1200" spc="-10" dirty="0">
                 <a:latin typeface="Times New Roman"/>
                 <a:cs typeface="Times New Roman"/>
               </a:rPr>
@@ -5119,7 +4620,7 @@
       </p:sp>
       <p:sp>
         <p:nvSpPr>
-          <p:cNvPr id="5" name="object 5" descr=""/>
+          <p:cNvPr id="5" name="object 5"/>
           <p:cNvSpPr/>
           <p:nvPr/>
         </p:nvSpPr>
@@ -5135,7 +4636,7 @@
             <a:cxnLst/>
             <a:rect l="l" t="t" r="r" b="b"/>
             <a:pathLst>
-              <a:path w="6502400" h="0">
+              <a:path w="6502400">
                 <a:moveTo>
                   <a:pt x="0" y="0"/>
                 </a:moveTo>
@@ -5154,12 +4655,14 @@
         <p:txBody>
           <a:bodyPr wrap="square" lIns="0" tIns="0" rIns="0" bIns="0" rtlCol="0"/>
           <a:lstStyle/>
-          <a:p/>
+          <a:p>
+            <a:endParaRPr/>
+          </a:p>
         </p:txBody>
       </p:sp>
       <p:sp>
         <p:nvSpPr>
-          <p:cNvPr id="6" name="object 6" descr=""/>
+          <p:cNvPr id="6" name="object 6"/>
           <p:cNvSpPr txBox="1"/>
           <p:nvPr/>
         </p:nvSpPr>
@@ -5173,7 +4676,7 @@
           </a:prstGeom>
         </p:spPr>
         <p:txBody>
-          <a:bodyPr wrap="square" lIns="0" tIns="12700" rIns="0" bIns="0" rtlCol="0" vert="horz">
+          <a:bodyPr vert="horz" wrap="square" lIns="0" tIns="12700" rIns="0" bIns="0" rtlCol="0">
             <a:spAutoFit/>
           </a:bodyPr>
           <a:lstStyle/>
@@ -5187,49 +4690,49 @@
               </a:spcBef>
             </a:pPr>
             <a:r>
-              <a:rPr dirty="0" sz="1700" b="1">
+              <a:rPr sz="1700" b="1" dirty="0">
                 <a:latin typeface="Times New Roman"/>
                 <a:cs typeface="Times New Roman"/>
               </a:rPr>
               <a:t>3.3.</a:t>
             </a:r>
             <a:r>
-              <a:rPr dirty="0" sz="1700" spc="-75" b="1">
-                <a:latin typeface="Times New Roman"/>
-                <a:cs typeface="Times New Roman"/>
-              </a:rPr>
-              <a:t> </a:t>
-            </a:r>
-            <a:r>
-              <a:rPr dirty="0" sz="1700" b="1">
+              <a:rPr sz="1700" b="1" spc="-75" dirty="0">
+                <a:latin typeface="Times New Roman"/>
+                <a:cs typeface="Times New Roman"/>
+              </a:rPr>
+              <a:t> </a:t>
+            </a:r>
+            <a:r>
+              <a:rPr sz="1700" b="1" dirty="0">
                 <a:latin typeface="Times New Roman"/>
                 <a:cs typeface="Times New Roman"/>
               </a:rPr>
               <a:t>Registered</a:t>
             </a:r>
             <a:r>
-              <a:rPr dirty="0" sz="1700" spc="-70" b="1">
-                <a:latin typeface="Times New Roman"/>
-                <a:cs typeface="Times New Roman"/>
-              </a:rPr>
-              <a:t> </a:t>
-            </a:r>
-            <a:r>
-              <a:rPr dirty="0" sz="1700" b="1">
+              <a:rPr sz="1700" b="1" spc="-70" dirty="0">
+                <a:latin typeface="Times New Roman"/>
+                <a:cs typeface="Times New Roman"/>
+              </a:rPr>
+              <a:t> </a:t>
+            </a:r>
+            <a:r>
+              <a:rPr sz="1700" b="1" dirty="0">
                 <a:latin typeface="Times New Roman"/>
                 <a:cs typeface="Times New Roman"/>
               </a:rPr>
               <a:t>Participants</a:t>
             </a:r>
             <a:r>
-              <a:rPr dirty="0" sz="1700" spc="-75" b="1">
-                <a:latin typeface="Times New Roman"/>
-                <a:cs typeface="Times New Roman"/>
-              </a:rPr>
-              <a:t> </a:t>
-            </a:r>
-            <a:r>
-              <a:rPr dirty="0" sz="1700" spc="-10" b="1">
+              <a:rPr sz="1700" b="1" spc="-75" dirty="0">
+                <a:latin typeface="Times New Roman"/>
+                <a:cs typeface="Times New Roman"/>
+              </a:rPr>
+              <a:t> </a:t>
+            </a:r>
+            <a:r>
+              <a:rPr sz="1700" b="1" spc="-10" dirty="0">
                 <a:latin typeface="Times New Roman"/>
                 <a:cs typeface="Times New Roman"/>
               </a:rPr>
@@ -5250,147 +4753,147 @@
               </a:spcBef>
             </a:pPr>
             <a:r>
-              <a:rPr dirty="0" sz="1200">
+              <a:rPr sz="1200" dirty="0">
                 <a:latin typeface="Times New Roman"/>
                 <a:cs typeface="Times New Roman"/>
               </a:rPr>
               <a:t>(C</a:t>
             </a:r>
             <a:r>
-              <a:rPr dirty="0" sz="1200" i="1">
+              <a:rPr sz="1200" i="1" dirty="0">
                 <a:latin typeface="Times New Roman"/>
                 <a:cs typeface="Times New Roman"/>
               </a:rPr>
               <a:t>reate</a:t>
             </a:r>
             <a:r>
-              <a:rPr dirty="0" sz="1200" spc="-25" i="1">
-                <a:latin typeface="Times New Roman"/>
-                <a:cs typeface="Times New Roman"/>
-              </a:rPr>
-              <a:t> </a:t>
-            </a:r>
-            <a:r>
-              <a:rPr dirty="0" sz="1200" i="1">
+              <a:rPr sz="1200" i="1" spc="-25" dirty="0">
+                <a:latin typeface="Times New Roman"/>
+                <a:cs typeface="Times New Roman"/>
+              </a:rPr>
+              <a:t> </a:t>
+            </a:r>
+            <a:r>
+              <a:rPr sz="1200" i="1" dirty="0">
                 <a:latin typeface="Times New Roman"/>
                 <a:cs typeface="Times New Roman"/>
               </a:rPr>
               <a:t>a</a:t>
             </a:r>
             <a:r>
-              <a:rPr dirty="0" sz="1200" spc="-25" i="1">
-                <a:latin typeface="Times New Roman"/>
-                <a:cs typeface="Times New Roman"/>
-              </a:rPr>
-              <a:t> </a:t>
-            </a:r>
-            <a:r>
-              <a:rPr dirty="0" sz="1200" i="1">
+              <a:rPr sz="1200" i="1" spc="-25" dirty="0">
+                <a:latin typeface="Times New Roman"/>
+                <a:cs typeface="Times New Roman"/>
+              </a:rPr>
+              <a:t> </a:t>
+            </a:r>
+            <a:r>
+              <a:rPr sz="1200" i="1" dirty="0">
                 <a:latin typeface="Times New Roman"/>
                 <a:cs typeface="Times New Roman"/>
               </a:rPr>
               <a:t>table</a:t>
             </a:r>
             <a:r>
-              <a:rPr dirty="0" sz="1200" spc="-25" i="1">
-                <a:latin typeface="Times New Roman"/>
-                <a:cs typeface="Times New Roman"/>
-              </a:rPr>
-              <a:t> </a:t>
-            </a:r>
-            <a:r>
-              <a:rPr dirty="0" sz="1200" i="1">
+              <a:rPr sz="1200" i="1" spc="-25" dirty="0">
+                <a:latin typeface="Times New Roman"/>
+                <a:cs typeface="Times New Roman"/>
+              </a:rPr>
+              <a:t> </a:t>
+            </a:r>
+            <a:r>
+              <a:rPr sz="1200" i="1" dirty="0">
                 <a:latin typeface="Times New Roman"/>
                 <a:cs typeface="Times New Roman"/>
               </a:rPr>
               <a:t>to</a:t>
             </a:r>
             <a:r>
-              <a:rPr dirty="0" sz="1200" spc="-25" i="1">
-                <a:latin typeface="Times New Roman"/>
-                <a:cs typeface="Times New Roman"/>
-              </a:rPr>
-              <a:t> </a:t>
-            </a:r>
-            <a:r>
-              <a:rPr dirty="0" sz="1200" i="1">
+              <a:rPr sz="1200" i="1" spc="-25" dirty="0">
+                <a:latin typeface="Times New Roman"/>
+                <a:cs typeface="Times New Roman"/>
+              </a:rPr>
+              <a:t> </a:t>
+            </a:r>
+            <a:r>
+              <a:rPr sz="1200" i="1" dirty="0">
                 <a:latin typeface="Times New Roman"/>
                 <a:cs typeface="Times New Roman"/>
               </a:rPr>
               <a:t>display</a:t>
             </a:r>
             <a:r>
-              <a:rPr dirty="0" sz="1200" spc="-30" i="1">
-                <a:latin typeface="Times New Roman"/>
-                <a:cs typeface="Times New Roman"/>
-              </a:rPr>
-              <a:t> </a:t>
-            </a:r>
-            <a:r>
-              <a:rPr dirty="0" sz="1200" i="1">
+              <a:rPr sz="1200" i="1" spc="-30" dirty="0">
+                <a:latin typeface="Times New Roman"/>
+                <a:cs typeface="Times New Roman"/>
+              </a:rPr>
+              <a:t> </a:t>
+            </a:r>
+            <a:r>
+              <a:rPr sz="1200" i="1" dirty="0">
                 <a:latin typeface="Times New Roman"/>
                 <a:cs typeface="Times New Roman"/>
               </a:rPr>
               <a:t>the</a:t>
             </a:r>
             <a:r>
-              <a:rPr dirty="0" sz="1200" spc="-25" i="1">
-                <a:latin typeface="Times New Roman"/>
-                <a:cs typeface="Times New Roman"/>
-              </a:rPr>
-              <a:t> </a:t>
-            </a:r>
-            <a:r>
-              <a:rPr dirty="0" sz="1200" i="1">
+              <a:rPr sz="1200" i="1" spc="-25" dirty="0">
+                <a:latin typeface="Times New Roman"/>
+                <a:cs typeface="Times New Roman"/>
+              </a:rPr>
+              <a:t> </a:t>
+            </a:r>
+            <a:r>
+              <a:rPr sz="1200" i="1" dirty="0">
                 <a:latin typeface="Times New Roman"/>
                 <a:cs typeface="Times New Roman"/>
               </a:rPr>
               <a:t>details</a:t>
             </a:r>
             <a:r>
-              <a:rPr dirty="0" sz="1200" spc="-25" i="1">
-                <a:latin typeface="Times New Roman"/>
-                <a:cs typeface="Times New Roman"/>
-              </a:rPr>
-              <a:t> </a:t>
-            </a:r>
-            <a:r>
-              <a:rPr dirty="0" sz="1200" i="1">
+              <a:rPr sz="1200" i="1" spc="-25" dirty="0">
+                <a:latin typeface="Times New Roman"/>
+                <a:cs typeface="Times New Roman"/>
+              </a:rPr>
+              <a:t> </a:t>
+            </a:r>
+            <a:r>
+              <a:rPr sz="1200" i="1" dirty="0">
                 <a:latin typeface="Times New Roman"/>
                 <a:cs typeface="Times New Roman"/>
               </a:rPr>
               <a:t>of</a:t>
             </a:r>
             <a:r>
-              <a:rPr dirty="0" sz="1200" spc="-25" i="1">
-                <a:latin typeface="Times New Roman"/>
-                <a:cs typeface="Times New Roman"/>
-              </a:rPr>
-              <a:t> </a:t>
-            </a:r>
-            <a:r>
-              <a:rPr dirty="0" sz="1200" spc="-10" i="1">
+              <a:rPr sz="1200" i="1" spc="-25" dirty="0">
+                <a:latin typeface="Times New Roman"/>
+                <a:cs typeface="Times New Roman"/>
+              </a:rPr>
+              <a:t> </a:t>
+            </a:r>
+            <a:r>
+              <a:rPr sz="1200" i="1" spc="-10" dirty="0">
                 <a:latin typeface="Times New Roman"/>
                 <a:cs typeface="Times New Roman"/>
               </a:rPr>
               <a:t>registered</a:t>
             </a:r>
             <a:r>
-              <a:rPr dirty="0" sz="1200" spc="-25" i="1">
-                <a:latin typeface="Times New Roman"/>
-                <a:cs typeface="Times New Roman"/>
-              </a:rPr>
-              <a:t> </a:t>
-            </a:r>
-            <a:r>
-              <a:rPr dirty="0" sz="1200" spc="-10" i="1">
+              <a:rPr sz="1200" i="1" spc="-25" dirty="0">
+                <a:latin typeface="Times New Roman"/>
+                <a:cs typeface="Times New Roman"/>
+              </a:rPr>
+              <a:t> </a:t>
+            </a:r>
+            <a:r>
+              <a:rPr sz="1200" i="1" spc="-10" dirty="0">
                 <a:latin typeface="Times New Roman"/>
                 <a:cs typeface="Times New Roman"/>
               </a:rPr>
               <a:t>participants.</a:t>
             </a:r>
             <a:r>
-              <a:rPr dirty="0" sz="1200" spc="-10">
+              <a:rPr sz="1200" spc="-10" dirty="0">
                 <a:latin typeface="Times New Roman"/>
                 <a:cs typeface="Times New Roman"/>
               </a:rPr>
@@ -5408,189 +4911,189 @@
               </a:lnSpc>
             </a:pPr>
             <a:r>
-              <a:rPr dirty="0" sz="1200">
+              <a:rPr sz="1200" dirty="0">
                 <a:latin typeface="Times New Roman"/>
                 <a:cs typeface="Times New Roman"/>
               </a:rPr>
               <a:t>|</a:t>
             </a:r>
             <a:r>
-              <a:rPr dirty="0" sz="1200" spc="-15">
-                <a:latin typeface="Times New Roman"/>
-                <a:cs typeface="Times New Roman"/>
-              </a:rPr>
-              <a:t> </a:t>
-            </a:r>
-            <a:r>
-              <a:rPr dirty="0" sz="1200">
+              <a:rPr sz="1200" spc="-15" dirty="0">
+                <a:latin typeface="Times New Roman"/>
+                <a:cs typeface="Times New Roman"/>
+              </a:rPr>
+              <a:t> </a:t>
+            </a:r>
+            <a:r>
+              <a:rPr sz="1200" dirty="0">
                 <a:latin typeface="Times New Roman"/>
                 <a:cs typeface="Times New Roman"/>
               </a:rPr>
               <a:t>Name</a:t>
             </a:r>
             <a:r>
-              <a:rPr dirty="0" sz="1200" spc="-10">
-                <a:latin typeface="Times New Roman"/>
-                <a:cs typeface="Times New Roman"/>
-              </a:rPr>
-              <a:t> </a:t>
-            </a:r>
-            <a:r>
-              <a:rPr dirty="0" sz="1200">
+              <a:rPr sz="1200" spc="-10" dirty="0">
+                <a:latin typeface="Times New Roman"/>
+                <a:cs typeface="Times New Roman"/>
+              </a:rPr>
+              <a:t> </a:t>
+            </a:r>
+            <a:r>
+              <a:rPr sz="1200" dirty="0">
                 <a:latin typeface="Times New Roman"/>
                 <a:cs typeface="Times New Roman"/>
               </a:rPr>
               <a:t>|</a:t>
             </a:r>
             <a:r>
-              <a:rPr dirty="0" sz="1200" spc="-10">
-                <a:latin typeface="Times New Roman"/>
-                <a:cs typeface="Times New Roman"/>
-              </a:rPr>
-              <a:t> </a:t>
-            </a:r>
-            <a:r>
-              <a:rPr dirty="0" sz="1200">
+              <a:rPr sz="1200" spc="-10" dirty="0">
+                <a:latin typeface="Times New Roman"/>
+                <a:cs typeface="Times New Roman"/>
+              </a:rPr>
+              <a:t> </a:t>
+            </a:r>
+            <a:r>
+              <a:rPr sz="1200" dirty="0">
                 <a:latin typeface="Times New Roman"/>
                 <a:cs typeface="Times New Roman"/>
               </a:rPr>
               <a:t>Email</a:t>
             </a:r>
             <a:r>
-              <a:rPr dirty="0" sz="1200" spc="-10">
-                <a:latin typeface="Times New Roman"/>
-                <a:cs typeface="Times New Roman"/>
-              </a:rPr>
-              <a:t> </a:t>
-            </a:r>
-            <a:r>
-              <a:rPr dirty="0" sz="1200">
+              <a:rPr sz="1200" spc="-10" dirty="0">
+                <a:latin typeface="Times New Roman"/>
+                <a:cs typeface="Times New Roman"/>
+              </a:rPr>
+              <a:t> </a:t>
+            </a:r>
+            <a:r>
+              <a:rPr sz="1200" dirty="0">
                 <a:latin typeface="Times New Roman"/>
                 <a:cs typeface="Times New Roman"/>
               </a:rPr>
               <a:t>|</a:t>
             </a:r>
             <a:r>
-              <a:rPr dirty="0" sz="1200" spc="-10">
-                <a:latin typeface="Times New Roman"/>
-                <a:cs typeface="Times New Roman"/>
-              </a:rPr>
-              <a:t> </a:t>
-            </a:r>
-            <a:r>
-              <a:rPr dirty="0" sz="1200">
+              <a:rPr sz="1200" spc="-10" dirty="0">
+                <a:latin typeface="Times New Roman"/>
+                <a:cs typeface="Times New Roman"/>
+              </a:rPr>
+              <a:t> </a:t>
+            </a:r>
+            <a:r>
+              <a:rPr sz="1200" dirty="0">
                 <a:latin typeface="Times New Roman"/>
                 <a:cs typeface="Times New Roman"/>
               </a:rPr>
               <a:t>Phone</a:t>
             </a:r>
             <a:r>
-              <a:rPr dirty="0" sz="1200" spc="-10">
-                <a:latin typeface="Times New Roman"/>
-                <a:cs typeface="Times New Roman"/>
-              </a:rPr>
-              <a:t> </a:t>
-            </a:r>
-            <a:r>
-              <a:rPr dirty="0" sz="1200">
+              <a:rPr sz="1200" spc="-10" dirty="0">
+                <a:latin typeface="Times New Roman"/>
+                <a:cs typeface="Times New Roman"/>
+              </a:rPr>
+              <a:t> </a:t>
+            </a:r>
+            <a:r>
+              <a:rPr sz="1200" dirty="0">
                 <a:latin typeface="Times New Roman"/>
                 <a:cs typeface="Times New Roman"/>
               </a:rPr>
               <a:t>|</a:t>
             </a:r>
             <a:r>
-              <a:rPr dirty="0" sz="1200" spc="-10">
-                <a:latin typeface="Times New Roman"/>
-                <a:cs typeface="Times New Roman"/>
-              </a:rPr>
-              <a:t> </a:t>
-            </a:r>
-            <a:r>
-              <a:rPr dirty="0" sz="1200">
+              <a:rPr sz="1200" spc="-10" dirty="0">
+                <a:latin typeface="Times New Roman"/>
+                <a:cs typeface="Times New Roman"/>
+              </a:rPr>
+              <a:t> </a:t>
+            </a:r>
+            <a:r>
+              <a:rPr sz="1200" dirty="0">
                 <a:latin typeface="Times New Roman"/>
                 <a:cs typeface="Times New Roman"/>
               </a:rPr>
               <a:t>Event</a:t>
             </a:r>
             <a:r>
-              <a:rPr dirty="0" sz="1200" spc="-10">
-                <a:latin typeface="Times New Roman"/>
-                <a:cs typeface="Times New Roman"/>
-              </a:rPr>
-              <a:t> </a:t>
-            </a:r>
-            <a:r>
-              <a:rPr dirty="0" sz="1200">
+              <a:rPr sz="1200" spc="-10" dirty="0">
+                <a:latin typeface="Times New Roman"/>
+                <a:cs typeface="Times New Roman"/>
+              </a:rPr>
+              <a:t> </a:t>
+            </a:r>
+            <a:r>
+              <a:rPr sz="1200" dirty="0">
                 <a:latin typeface="Times New Roman"/>
                 <a:cs typeface="Times New Roman"/>
               </a:rPr>
               <a:t>|</a:t>
             </a:r>
             <a:r>
-              <a:rPr dirty="0" sz="1200" spc="-10">
-                <a:latin typeface="Times New Roman"/>
-                <a:cs typeface="Times New Roman"/>
-              </a:rPr>
-              <a:t> </a:t>
-            </a:r>
-            <a:r>
-              <a:rPr dirty="0" sz="1200">
+              <a:rPr sz="1200" spc="-10" dirty="0">
+                <a:latin typeface="Times New Roman"/>
+                <a:cs typeface="Times New Roman"/>
+              </a:rPr>
+              <a:t> </a:t>
+            </a:r>
+            <a:r>
+              <a:rPr sz="1200" dirty="0">
                 <a:latin typeface="Times New Roman"/>
                 <a:cs typeface="Times New Roman"/>
               </a:rPr>
               <a:t>Mode</a:t>
             </a:r>
             <a:r>
-              <a:rPr dirty="0" sz="1200" spc="-10">
-                <a:latin typeface="Times New Roman"/>
-                <a:cs typeface="Times New Roman"/>
-              </a:rPr>
-              <a:t> </a:t>
-            </a:r>
-            <a:r>
-              <a:rPr dirty="0" sz="1200" spc="-50">
+              <a:rPr sz="1200" spc="-10" dirty="0">
+                <a:latin typeface="Times New Roman"/>
+                <a:cs typeface="Times New Roman"/>
+              </a:rPr>
+              <a:t> </a:t>
+            </a:r>
+            <a:r>
+              <a:rPr sz="1200" spc="-50" dirty="0">
                 <a:latin typeface="Times New Roman"/>
                 <a:cs typeface="Times New Roman"/>
               </a:rPr>
               <a:t>| </a:t>
             </a:r>
             <a:r>
-              <a:rPr dirty="0" sz="1200">
+              <a:rPr sz="1200" dirty="0">
                 <a:latin typeface="Times New Roman"/>
                 <a:cs typeface="Times New Roman"/>
               </a:rPr>
               <a:t>(Add</a:t>
             </a:r>
             <a:r>
-              <a:rPr dirty="0" sz="1200" spc="-20">
-                <a:latin typeface="Times New Roman"/>
-                <a:cs typeface="Times New Roman"/>
-              </a:rPr>
-              <a:t> </a:t>
-            </a:r>
-            <a:r>
-              <a:rPr dirty="0" sz="1200">
+              <a:rPr sz="1200" spc="-20" dirty="0">
+                <a:latin typeface="Times New Roman"/>
+                <a:cs typeface="Times New Roman"/>
+              </a:rPr>
+              <a:t> </a:t>
+            </a:r>
+            <a:r>
+              <a:rPr sz="1200" dirty="0">
                 <a:latin typeface="Times New Roman"/>
                 <a:cs typeface="Times New Roman"/>
               </a:rPr>
               <a:t>one</a:t>
             </a:r>
             <a:r>
-              <a:rPr dirty="0" sz="1200" spc="-15">
-                <a:latin typeface="Times New Roman"/>
-                <a:cs typeface="Times New Roman"/>
-              </a:rPr>
-              <a:t> </a:t>
-            </a:r>
-            <a:r>
-              <a:rPr dirty="0" sz="1200">
+              <a:rPr sz="1200" spc="-15" dirty="0">
+                <a:latin typeface="Times New Roman"/>
+                <a:cs typeface="Times New Roman"/>
+              </a:rPr>
+              <a:t> </a:t>
+            </a:r>
+            <a:r>
+              <a:rPr sz="1200" dirty="0">
                 <a:latin typeface="Times New Roman"/>
                 <a:cs typeface="Times New Roman"/>
               </a:rPr>
               <a:t>sample</a:t>
             </a:r>
             <a:r>
-              <a:rPr dirty="0" sz="1200" spc="-20">
+              <a:rPr sz="1200" spc="-20" dirty="0">
                 <a:latin typeface="Times New Roman"/>
                 <a:cs typeface="Times New Roman"/>
               </a:rPr>
@@ -5611,7 +5114,7 @@
               </a:spcBef>
             </a:pPr>
             <a:r>
-              <a:rPr dirty="0" sz="1200" spc="-10" b="1">
+              <a:rPr sz="1200" b="1" spc="-10" dirty="0">
                 <a:latin typeface="Times New Roman"/>
                 <a:cs typeface="Times New Roman"/>
               </a:rPr>
@@ -5626,7 +5129,7 @@
       </p:sp>
       <p:graphicFrame>
         <p:nvGraphicFramePr>
-          <p:cNvPr id="7" name="object 7" descr=""/>
+          <p:cNvPr id="7" name="object 7"/>
           <p:cNvGraphicFramePr>
             <a:graphicFrameLocks noGrp="1"/>
           </p:cNvGraphicFramePr>
@@ -5634,7 +5137,7 @@
         </p:nvGraphicFramePr>
         <p:xfrm>
           <a:off x="749300" y="5511805"/>
-          <a:ext cx="6502400" cy="596265"/>
+          <a:ext cx="6413500" cy="596265"/>
         </p:xfrm>
         <a:graphic>
           <a:graphicData uri="http://schemas.openxmlformats.org/drawingml/2006/table">
@@ -5643,11 +5146,41 @@
                 <a:tableStyleId>{2D5ABB26-0587-4C30-8999-92F81FD0307C}</a:tableStyleId>
               </a:tblPr>
               <a:tblGrid>
-                <a:gridCol w="965200"/>
-                <a:gridCol w="1358900"/>
-                <a:gridCol w="1181100"/>
-                <a:gridCol w="1879600"/>
-                <a:gridCol w="1028700"/>
+                <a:gridCol w="965200">
+                  <a:extLst>
+                    <a:ext uri="{9D8B030D-6E8A-4147-A177-3AD203B41FA5}">
+                      <a16:colId xmlns:a16="http://schemas.microsoft.com/office/drawing/2014/main" val="20000"/>
+                    </a:ext>
+                  </a:extLst>
+                </a:gridCol>
+                <a:gridCol w="1358900">
+                  <a:extLst>
+                    <a:ext uri="{9D8B030D-6E8A-4147-A177-3AD203B41FA5}">
+                      <a16:colId xmlns:a16="http://schemas.microsoft.com/office/drawing/2014/main" val="20001"/>
+                    </a:ext>
+                  </a:extLst>
+                </a:gridCol>
+                <a:gridCol w="1181100">
+                  <a:extLst>
+                    <a:ext uri="{9D8B030D-6E8A-4147-A177-3AD203B41FA5}">
+                      <a16:colId xmlns:a16="http://schemas.microsoft.com/office/drawing/2014/main" val="20002"/>
+                    </a:ext>
+                  </a:extLst>
+                </a:gridCol>
+                <a:gridCol w="1879600">
+                  <a:extLst>
+                    <a:ext uri="{9D8B030D-6E8A-4147-A177-3AD203B41FA5}">
+                      <a16:colId xmlns:a16="http://schemas.microsoft.com/office/drawing/2014/main" val="20003"/>
+                    </a:ext>
+                  </a:extLst>
+                </a:gridCol>
+                <a:gridCol w="1028700">
+                  <a:extLst>
+                    <a:ext uri="{9D8B030D-6E8A-4147-A177-3AD203B41FA5}">
+                      <a16:colId xmlns:a16="http://schemas.microsoft.com/office/drawing/2014/main" val="20004"/>
+                    </a:ext>
+                  </a:extLst>
+                </a:gridCol>
               </a:tblGrid>
               <a:tr h="304165">
                 <a:tc>
@@ -5664,7 +5197,7 @@
                         </a:spcBef>
                       </a:pPr>
                       <a:r>
-                        <a:rPr dirty="0" sz="1100" spc="-20" b="1">
+                        <a:rPr sz="1100" b="1" spc="-20" dirty="0">
                           <a:latin typeface="Times New Roman"/>
                           <a:cs typeface="Times New Roman"/>
                         </a:rPr>
@@ -5676,7 +5209,7 @@
                       </a:endParaRPr>
                     </a:p>
                   </a:txBody>
-                  <a:tcPr marL="0" marR="0" marB="0" marT="62230">
+                  <a:tcPr marL="0" marR="0" marT="62230" marB="0">
                     <a:lnL w="12700">
                       <a:solidFill>
                         <a:srgbClr val="000000"/>
@@ -5708,7 +5241,7 @@
                     <a:bodyPr/>
                     <a:lstStyle/>
                     <a:p>
-                      <a:pPr algn="ctr" marL="4445">
+                      <a:pPr marL="4445" algn="ctr">
                         <a:lnSpc>
                           <a:spcPct val="100000"/>
                         </a:lnSpc>
@@ -5717,7 +5250,7 @@
                         </a:spcBef>
                       </a:pPr>
                       <a:r>
-                        <a:rPr dirty="0" sz="1100" spc="-10" b="1">
+                        <a:rPr sz="1100" b="1" spc="-10" dirty="0">
                           <a:latin typeface="Times New Roman"/>
                           <a:cs typeface="Times New Roman"/>
                         </a:rPr>
@@ -5729,7 +5262,7 @@
                       </a:endParaRPr>
                     </a:p>
                   </a:txBody>
-                  <a:tcPr marL="0" marR="0" marB="0" marT="62230">
+                  <a:tcPr marL="0" marR="0" marT="62230" marB="0">
                     <a:lnL w="12700">
                       <a:solidFill>
                         <a:srgbClr val="000000"/>
@@ -5761,7 +5294,7 @@
                     <a:bodyPr/>
                     <a:lstStyle/>
                     <a:p>
-                      <a:pPr algn="ctr" marL="7620">
+                      <a:pPr marL="7620" algn="ctr">
                         <a:lnSpc>
                           <a:spcPct val="100000"/>
                         </a:lnSpc>
@@ -5770,7 +5303,7 @@
                         </a:spcBef>
                       </a:pPr>
                       <a:r>
-                        <a:rPr dirty="0" sz="1100" spc="-10" b="1">
+                        <a:rPr sz="1100" b="1" spc="-10" dirty="0">
                           <a:latin typeface="Times New Roman"/>
                           <a:cs typeface="Times New Roman"/>
                         </a:rPr>
@@ -5782,7 +5315,7 @@
                       </a:endParaRPr>
                     </a:p>
                   </a:txBody>
-                  <a:tcPr marL="0" marR="0" marB="0" marT="62230">
+                  <a:tcPr marL="0" marR="0" marT="62230" marB="0">
                     <a:lnL w="12700">
                       <a:solidFill>
                         <a:srgbClr val="000000"/>
@@ -5814,7 +5347,7 @@
                     <a:bodyPr/>
                     <a:lstStyle/>
                     <a:p>
-                      <a:pPr algn="ctr" marL="4445">
+                      <a:pPr marL="4445" algn="ctr">
                         <a:lnSpc>
                           <a:spcPct val="100000"/>
                         </a:lnSpc>
@@ -5823,7 +5356,7 @@
                         </a:spcBef>
                       </a:pPr>
                       <a:r>
-                        <a:rPr dirty="0" sz="1100" spc="-10" b="1">
+                        <a:rPr sz="1100" b="1" spc="-10" dirty="0">
                           <a:latin typeface="Times New Roman"/>
                           <a:cs typeface="Times New Roman"/>
                         </a:rPr>
@@ -5835,7 +5368,7 @@
                       </a:endParaRPr>
                     </a:p>
                   </a:txBody>
-                  <a:tcPr marL="0" marR="0" marB="0" marT="62230">
+                  <a:tcPr marL="0" marR="0" marT="62230" marB="0">
                     <a:lnL w="12700">
                       <a:solidFill>
                         <a:srgbClr val="000000"/>
@@ -5867,7 +5400,7 @@
                     <a:bodyPr/>
                     <a:lstStyle/>
                     <a:p>
-                      <a:pPr algn="ctr" marL="1270">
+                      <a:pPr marL="1270" algn="ctr">
                         <a:lnSpc>
                           <a:spcPct val="100000"/>
                         </a:lnSpc>
@@ -5876,7 +5409,7 @@
                         </a:spcBef>
                       </a:pPr>
                       <a:r>
-                        <a:rPr dirty="0" sz="1100" spc="-20" b="1">
+                        <a:rPr sz="1100" b="1" spc="-20" dirty="0">
                           <a:latin typeface="Times New Roman"/>
                           <a:cs typeface="Times New Roman"/>
                         </a:rPr>
@@ -5888,7 +5421,7 @@
                       </a:endParaRPr>
                     </a:p>
                   </a:txBody>
-                  <a:tcPr marL="0" marR="0" marB="0" marT="62230">
+                  <a:tcPr marL="0" marR="0" marT="62230" marB="0">
                     <a:lnL w="12700">
                       <a:solidFill>
                         <a:srgbClr val="000000"/>
@@ -5915,6 +5448,11 @@
                     </a:lnB>
                   </a:tcPr>
                 </a:tc>
+                <a:extLst>
+                  <a:ext uri="{0D108BD9-81ED-4DB2-BD59-A6C34878D82A}">
+                    <a16:rowId xmlns:a16="http://schemas.microsoft.com/office/drawing/2014/main" val="10000"/>
+                  </a:ext>
+                </a:extLst>
               </a:tr>
               <a:tr h="292100">
                 <a:tc>
@@ -5931,7 +5469,7 @@
                         </a:spcBef>
                       </a:pPr>
                       <a:r>
-                        <a:rPr dirty="0" sz="1100" spc="-25">
+                        <a:rPr sz="1100" spc="-25" dirty="0">
                           <a:latin typeface="Times New Roman"/>
                           <a:cs typeface="Times New Roman"/>
                         </a:rPr>
@@ -5943,7 +5481,7 @@
                       </a:endParaRPr>
                     </a:p>
                   </a:txBody>
-                  <a:tcPr marL="0" marR="0" marB="0" marT="60960">
+                  <a:tcPr marL="0" marR="0" marT="60960" marB="0">
                     <a:lnL w="12700">
                       <a:solidFill>
                         <a:srgbClr val="000000"/>
@@ -5975,7 +5513,7 @@
                     <a:bodyPr/>
                     <a:lstStyle/>
                     <a:p>
-                      <a:pPr algn="ctr" marL="4445">
+                      <a:pPr marL="4445" algn="ctr">
                         <a:lnSpc>
                           <a:spcPct val="100000"/>
                         </a:lnSpc>
@@ -5984,7 +5522,7 @@
                         </a:spcBef>
                       </a:pPr>
                       <a:r>
-                        <a:rPr dirty="0" sz="1100" spc="-10">
+                        <a:rPr sz="1100" spc="-10" dirty="0">
                           <a:latin typeface="Times New Roman"/>
                           <a:cs typeface="Times New Roman"/>
                           <a:hlinkClick r:id="rId4"/>
@@ -5997,7 +5535,7 @@
                       </a:endParaRPr>
                     </a:p>
                   </a:txBody>
-                  <a:tcPr marL="0" marR="0" marB="0" marT="60960">
+                  <a:tcPr marL="0" marR="0" marT="60960" marB="0">
                     <a:lnL w="12700">
                       <a:solidFill>
                         <a:srgbClr val="000000"/>
@@ -6029,7 +5567,7 @@
                     <a:bodyPr/>
                     <a:lstStyle/>
                     <a:p>
-                      <a:pPr algn="ctr" marL="7620">
+                      <a:pPr marL="7620" algn="ctr">
                         <a:lnSpc>
                           <a:spcPct val="100000"/>
                         </a:lnSpc>
@@ -6038,7 +5576,7 @@
                         </a:spcBef>
                       </a:pPr>
                       <a:r>
-                        <a:rPr dirty="0" sz="1100" spc="-10">
+                        <a:rPr sz="1100" spc="-10" dirty="0">
                           <a:latin typeface="Times New Roman"/>
                           <a:cs typeface="Times New Roman"/>
                         </a:rPr>
@@ -6050,7 +5588,7 @@
                       </a:endParaRPr>
                     </a:p>
                   </a:txBody>
-                  <a:tcPr marL="0" marR="0" marB="0" marT="60960">
+                  <a:tcPr marL="0" marR="0" marT="60960" marB="0">
                     <a:lnL w="12700">
                       <a:solidFill>
                         <a:srgbClr val="000000"/>
@@ -6091,35 +5629,35 @@
                         </a:spcBef>
                       </a:pPr>
                       <a:r>
-                        <a:rPr dirty="0" sz="1100" spc="-20">
+                        <a:rPr sz="1100" spc="-20" dirty="0">
                           <a:latin typeface="Times New Roman"/>
                           <a:cs typeface="Times New Roman"/>
                         </a:rPr>
                         <a:t>Web</a:t>
                       </a:r>
                       <a:r>
-                        <a:rPr dirty="0" sz="1100" spc="-50">
+                        <a:rPr sz="1100" spc="-50" dirty="0">
                           <a:latin typeface="Times New Roman"/>
                           <a:cs typeface="Times New Roman"/>
                         </a:rPr>
                         <a:t> </a:t>
                       </a:r>
                       <a:r>
-                        <a:rPr dirty="0" sz="1100">
+                        <a:rPr sz="1100" dirty="0">
                           <a:latin typeface="Times New Roman"/>
                           <a:cs typeface="Times New Roman"/>
                         </a:rPr>
                         <a:t>Development</a:t>
                       </a:r>
                       <a:r>
-                        <a:rPr dirty="0" sz="1100" spc="-50">
+                        <a:rPr sz="1100" spc="-50" dirty="0">
                           <a:latin typeface="Times New Roman"/>
                           <a:cs typeface="Times New Roman"/>
                         </a:rPr>
                         <a:t> </a:t>
                       </a:r>
                       <a:r>
-                        <a:rPr dirty="0" sz="1100" spc="-10">
+                        <a:rPr sz="1100" spc="-10" dirty="0">
                           <a:latin typeface="Times New Roman"/>
                           <a:cs typeface="Times New Roman"/>
                         </a:rPr>
@@ -6131,7 +5669,7 @@
                       </a:endParaRPr>
                     </a:p>
                   </a:txBody>
-                  <a:tcPr marL="0" marR="0" marB="0" marT="60960">
+                  <a:tcPr marL="0" marR="0" marT="60960" marB="0">
                     <a:lnL w="12700">
                       <a:solidFill>
                         <a:srgbClr val="000000"/>
@@ -6163,7 +5701,7 @@
                     <a:bodyPr/>
                     <a:lstStyle/>
                     <a:p>
-                      <a:pPr algn="ctr" marL="1270">
+                      <a:pPr marL="1270" algn="ctr">
                         <a:lnSpc>
                           <a:spcPct val="100000"/>
                         </a:lnSpc>
@@ -6172,7 +5710,7 @@
                         </a:spcBef>
                       </a:pPr>
                       <a:r>
-                        <a:rPr dirty="0" sz="1100" spc="-10">
+                        <a:rPr sz="1100" spc="-10" dirty="0">
                           <a:latin typeface="Times New Roman"/>
                           <a:cs typeface="Times New Roman"/>
                         </a:rPr>
@@ -6184,7 +5722,7 @@
                       </a:endParaRPr>
                     </a:p>
                   </a:txBody>
-                  <a:tcPr marL="0" marR="0" marB="0" marT="60960">
+                  <a:tcPr marL="0" marR="0" marT="60960" marB="0">
                     <a:lnL w="12700">
                       <a:solidFill>
                         <a:srgbClr val="000000"/>
@@ -6211,6 +5749,11 @@
                     </a:lnB>
                   </a:tcPr>
                 </a:tc>
+                <a:extLst>
+                  <a:ext uri="{0D108BD9-81ED-4DB2-BD59-A6C34878D82A}">
+                    <a16:rowId xmlns:a16="http://schemas.microsoft.com/office/drawing/2014/main" val="10001"/>
+                  </a:ext>
+                </a:extLst>
               </a:tr>
             </a:tbl>
           </a:graphicData>
@@ -6218,7 +5761,7 @@
       </p:graphicFrame>
       <p:sp>
         <p:nvSpPr>
-          <p:cNvPr id="8" name="object 8" descr=""/>
+          <p:cNvPr id="8" name="object 8"/>
           <p:cNvSpPr/>
           <p:nvPr/>
         </p:nvSpPr>
@@ -6234,7 +5777,7 @@
             <a:cxnLst/>
             <a:rect l="l" t="t" r="r" b="b"/>
             <a:pathLst>
-              <a:path w="6502400" h="0">
+              <a:path w="6502400">
                 <a:moveTo>
                   <a:pt x="0" y="0"/>
                 </a:moveTo>
@@ -6253,12 +5796,14 @@
         <p:txBody>
           <a:bodyPr wrap="square" lIns="0" tIns="0" rIns="0" bIns="0" rtlCol="0"/>
           <a:lstStyle/>
-          <a:p/>
+          <a:p>
+            <a:endParaRPr/>
+          </a:p>
         </p:txBody>
       </p:sp>
       <p:sp>
         <p:nvSpPr>
-          <p:cNvPr id="9" name="object 9" descr=""/>
+          <p:cNvPr id="9" name="object 9"/>
           <p:cNvSpPr txBox="1"/>
           <p:nvPr/>
         </p:nvSpPr>
@@ -6272,7 +5817,7 @@
           </a:prstGeom>
         </p:spPr>
         <p:txBody>
-          <a:bodyPr wrap="square" lIns="0" tIns="74930" rIns="0" bIns="0" rtlCol="0" vert="horz">
+          <a:bodyPr vert="horz" wrap="square" lIns="0" tIns="74930" rIns="0" bIns="0" rtlCol="0">
             <a:spAutoFit/>
           </a:bodyPr>
           <a:lstStyle/>
@@ -6286,35 +5831,35 @@
               </a:spcBef>
             </a:pPr>
             <a:r>
-              <a:rPr dirty="0" sz="1700" b="1">
+              <a:rPr sz="1700" b="1" dirty="0">
                 <a:latin typeface="Times New Roman"/>
                 <a:cs typeface="Times New Roman"/>
               </a:rPr>
               <a:t>3.4.</a:t>
             </a:r>
             <a:r>
-              <a:rPr dirty="0" sz="1700" spc="-25" b="1">
-                <a:latin typeface="Times New Roman"/>
-                <a:cs typeface="Times New Roman"/>
-              </a:rPr>
-              <a:t> </a:t>
-            </a:r>
-            <a:r>
-              <a:rPr dirty="0" sz="1700" b="1">
+              <a:rPr sz="1700" b="1" spc="-25" dirty="0">
+                <a:latin typeface="Times New Roman"/>
+                <a:cs typeface="Times New Roman"/>
+              </a:rPr>
+              <a:t> </a:t>
+            </a:r>
+            <a:r>
+              <a:rPr sz="1700" b="1" dirty="0">
                 <a:latin typeface="Times New Roman"/>
                 <a:cs typeface="Times New Roman"/>
               </a:rPr>
               <a:t>Footer</a:t>
             </a:r>
             <a:r>
-              <a:rPr dirty="0" sz="1700" spc="-25" b="1">
-                <a:latin typeface="Times New Roman"/>
-                <a:cs typeface="Times New Roman"/>
-              </a:rPr>
-              <a:t> </a:t>
-            </a:r>
-            <a:r>
-              <a:rPr dirty="0" sz="1700" spc="-10" b="1">
+              <a:rPr sz="1700" b="1" spc="-25" dirty="0">
+                <a:latin typeface="Times New Roman"/>
+                <a:cs typeface="Times New Roman"/>
+              </a:rPr>
+              <a:t> </a:t>
+            </a:r>
+            <a:r>
+              <a:rPr sz="1700" b="1" spc="-10" dirty="0">
                 <a:latin typeface="Times New Roman"/>
                 <a:cs typeface="Times New Roman"/>
               </a:rPr>
@@ -6335,189 +5880,189 @@
               </a:spcBef>
             </a:pPr>
             <a:r>
-              <a:rPr dirty="0" sz="1200" i="1">
+              <a:rPr sz="1200" i="1" dirty="0">
                 <a:latin typeface="Times New Roman"/>
                 <a:cs typeface="Times New Roman"/>
               </a:rPr>
               <a:t>(Add</a:t>
             </a:r>
             <a:r>
-              <a:rPr dirty="0" sz="1200" spc="-25" i="1">
-                <a:latin typeface="Times New Roman"/>
-                <a:cs typeface="Times New Roman"/>
-              </a:rPr>
-              <a:t> </a:t>
-            </a:r>
-            <a:r>
-              <a:rPr dirty="0" sz="1200" i="1">
+              <a:rPr sz="1200" i="1" spc="-25" dirty="0">
+                <a:latin typeface="Times New Roman"/>
+                <a:cs typeface="Times New Roman"/>
+              </a:rPr>
+              <a:t> </a:t>
+            </a:r>
+            <a:r>
+              <a:rPr sz="1200" i="1" dirty="0">
                 <a:latin typeface="Times New Roman"/>
                 <a:cs typeface="Times New Roman"/>
               </a:rPr>
               <a:t>contact</a:t>
             </a:r>
             <a:r>
-              <a:rPr dirty="0" sz="1200" spc="-25" i="1">
-                <a:latin typeface="Times New Roman"/>
-                <a:cs typeface="Times New Roman"/>
-              </a:rPr>
-              <a:t> </a:t>
-            </a:r>
-            <a:r>
-              <a:rPr dirty="0" sz="1200" i="1">
+              <a:rPr sz="1200" i="1" spc="-25" dirty="0">
+                <a:latin typeface="Times New Roman"/>
+                <a:cs typeface="Times New Roman"/>
+              </a:rPr>
+              <a:t> </a:t>
+            </a:r>
+            <a:r>
+              <a:rPr sz="1200" i="1" dirty="0">
                 <a:latin typeface="Times New Roman"/>
                 <a:cs typeface="Times New Roman"/>
               </a:rPr>
               <a:t>details,</a:t>
             </a:r>
             <a:r>
-              <a:rPr dirty="0" sz="1200" spc="-25" i="1">
-                <a:latin typeface="Times New Roman"/>
-                <a:cs typeface="Times New Roman"/>
-              </a:rPr>
-              <a:t> </a:t>
-            </a:r>
-            <a:r>
-              <a:rPr dirty="0" sz="1200" i="1">
+              <a:rPr sz="1200" i="1" spc="-25" dirty="0">
+                <a:latin typeface="Times New Roman"/>
+                <a:cs typeface="Times New Roman"/>
+              </a:rPr>
+              <a:t> </a:t>
+            </a:r>
+            <a:r>
+              <a:rPr sz="1200" i="1" dirty="0">
                 <a:latin typeface="Times New Roman"/>
                 <a:cs typeface="Times New Roman"/>
               </a:rPr>
               <a:t>support</a:t>
             </a:r>
             <a:r>
-              <a:rPr dirty="0" sz="1200" spc="-25" i="1">
-                <a:latin typeface="Times New Roman"/>
-                <a:cs typeface="Times New Roman"/>
-              </a:rPr>
-              <a:t> </a:t>
-            </a:r>
-            <a:r>
-              <a:rPr dirty="0" sz="1200" i="1">
+              <a:rPr sz="1200" i="1" spc="-25" dirty="0">
+                <a:latin typeface="Times New Roman"/>
+                <a:cs typeface="Times New Roman"/>
+              </a:rPr>
+              <a:t> </a:t>
+            </a:r>
+            <a:r>
+              <a:rPr sz="1200" i="1" dirty="0">
                 <a:latin typeface="Times New Roman"/>
                 <a:cs typeface="Times New Roman"/>
               </a:rPr>
               <a:t>information,</a:t>
             </a:r>
             <a:r>
-              <a:rPr dirty="0" sz="1200" spc="-25" i="1">
-                <a:latin typeface="Times New Roman"/>
-                <a:cs typeface="Times New Roman"/>
-              </a:rPr>
-              <a:t> </a:t>
-            </a:r>
-            <a:r>
-              <a:rPr dirty="0" sz="1200" i="1">
+              <a:rPr sz="1200" i="1" spc="-25" dirty="0">
+                <a:latin typeface="Times New Roman"/>
+                <a:cs typeface="Times New Roman"/>
+              </a:rPr>
+              <a:t> </a:t>
+            </a:r>
+            <a:r>
+              <a:rPr sz="1200" i="1" dirty="0">
                 <a:latin typeface="Times New Roman"/>
                 <a:cs typeface="Times New Roman"/>
               </a:rPr>
               <a:t>and</a:t>
             </a:r>
             <a:r>
-              <a:rPr dirty="0" sz="1200" spc="-20" i="1">
-                <a:latin typeface="Times New Roman"/>
-                <a:cs typeface="Times New Roman"/>
-              </a:rPr>
-              <a:t> </a:t>
-            </a:r>
-            <a:r>
-              <a:rPr dirty="0" sz="1200" i="1">
+              <a:rPr sz="1200" i="1" spc="-20" dirty="0">
+                <a:latin typeface="Times New Roman"/>
+                <a:cs typeface="Times New Roman"/>
+              </a:rPr>
+              <a:t> </a:t>
+            </a:r>
+            <a:r>
+              <a:rPr sz="1200" i="1" dirty="0">
                 <a:latin typeface="Times New Roman"/>
                 <a:cs typeface="Times New Roman"/>
               </a:rPr>
               <a:t>copyright</a:t>
             </a:r>
             <a:r>
-              <a:rPr dirty="0" sz="1200" spc="-25" i="1">
-                <a:latin typeface="Times New Roman"/>
-                <a:cs typeface="Times New Roman"/>
-              </a:rPr>
-              <a:t> </a:t>
-            </a:r>
-            <a:r>
-              <a:rPr dirty="0" sz="1200" i="1">
+              <a:rPr sz="1200" i="1" spc="-25" dirty="0">
+                <a:latin typeface="Times New Roman"/>
+                <a:cs typeface="Times New Roman"/>
+              </a:rPr>
+              <a:t> </a:t>
+            </a:r>
+            <a:r>
+              <a:rPr sz="1200" i="1" dirty="0">
                 <a:latin typeface="Times New Roman"/>
                 <a:cs typeface="Times New Roman"/>
               </a:rPr>
               <a:t>details</a:t>
             </a:r>
             <a:r>
-              <a:rPr dirty="0" sz="1200" spc="-25" i="1">
-                <a:latin typeface="Times New Roman"/>
-                <a:cs typeface="Times New Roman"/>
-              </a:rPr>
-              <a:t> </a:t>
-            </a:r>
-            <a:r>
-              <a:rPr dirty="0" sz="1200" i="1">
+              <a:rPr sz="1200" i="1" spc="-25" dirty="0">
+                <a:latin typeface="Times New Roman"/>
+                <a:cs typeface="Times New Roman"/>
+              </a:rPr>
+              <a:t> </a:t>
+            </a:r>
+            <a:r>
+              <a:rPr sz="1200" i="1" dirty="0">
                 <a:latin typeface="Times New Roman"/>
                 <a:cs typeface="Times New Roman"/>
               </a:rPr>
               <a:t>at</a:t>
             </a:r>
             <a:r>
-              <a:rPr dirty="0" sz="1200" spc="-25" i="1">
-                <a:latin typeface="Times New Roman"/>
-                <a:cs typeface="Times New Roman"/>
-              </a:rPr>
-              <a:t> </a:t>
-            </a:r>
-            <a:r>
-              <a:rPr dirty="0" sz="1200" i="1">
+              <a:rPr sz="1200" i="1" spc="-25" dirty="0">
+                <a:latin typeface="Times New Roman"/>
+                <a:cs typeface="Times New Roman"/>
+              </a:rPr>
+              <a:t> </a:t>
+            </a:r>
+            <a:r>
+              <a:rPr sz="1200" i="1" dirty="0">
                 <a:latin typeface="Times New Roman"/>
                 <a:cs typeface="Times New Roman"/>
               </a:rPr>
               <a:t>the</a:t>
             </a:r>
             <a:r>
-              <a:rPr dirty="0" sz="1200" spc="-25" i="1">
-                <a:latin typeface="Times New Roman"/>
-                <a:cs typeface="Times New Roman"/>
-              </a:rPr>
-              <a:t> </a:t>
-            </a:r>
-            <a:r>
-              <a:rPr dirty="0" sz="1200" i="1">
+              <a:rPr sz="1200" i="1" spc="-25" dirty="0">
+                <a:latin typeface="Times New Roman"/>
+                <a:cs typeface="Times New Roman"/>
+              </a:rPr>
+              <a:t> </a:t>
+            </a:r>
+            <a:r>
+              <a:rPr sz="1200" i="1" dirty="0">
                 <a:latin typeface="Times New Roman"/>
                 <a:cs typeface="Times New Roman"/>
               </a:rPr>
               <a:t>bottom</a:t>
             </a:r>
             <a:r>
-              <a:rPr dirty="0" sz="1200" spc="-25" i="1">
-                <a:latin typeface="Times New Roman"/>
-                <a:cs typeface="Times New Roman"/>
-              </a:rPr>
-              <a:t> </a:t>
-            </a:r>
-            <a:r>
-              <a:rPr dirty="0" sz="1200" i="1">
+              <a:rPr sz="1200" i="1" spc="-25" dirty="0">
+                <a:latin typeface="Times New Roman"/>
+                <a:cs typeface="Times New Roman"/>
+              </a:rPr>
+              <a:t> </a:t>
+            </a:r>
+            <a:r>
+              <a:rPr sz="1200" i="1" dirty="0">
                 <a:latin typeface="Times New Roman"/>
                 <a:cs typeface="Times New Roman"/>
               </a:rPr>
               <a:t>of</a:t>
             </a:r>
             <a:r>
-              <a:rPr dirty="0" sz="1200" spc="-20" i="1">
-                <a:latin typeface="Times New Roman"/>
-                <a:cs typeface="Times New Roman"/>
-              </a:rPr>
-              <a:t> </a:t>
-            </a:r>
-            <a:r>
-              <a:rPr dirty="0" sz="1200" i="1">
+              <a:rPr sz="1200" i="1" spc="-20" dirty="0">
+                <a:latin typeface="Times New Roman"/>
+                <a:cs typeface="Times New Roman"/>
+              </a:rPr>
+              <a:t> </a:t>
+            </a:r>
+            <a:r>
+              <a:rPr sz="1200" i="1" dirty="0">
                 <a:latin typeface="Times New Roman"/>
                 <a:cs typeface="Times New Roman"/>
               </a:rPr>
               <a:t>the</a:t>
             </a:r>
             <a:r>
-              <a:rPr dirty="0" sz="1200" spc="-25" i="1">
-                <a:latin typeface="Times New Roman"/>
-                <a:cs typeface="Times New Roman"/>
-              </a:rPr>
-              <a:t> </a:t>
-            </a:r>
-            <a:r>
-              <a:rPr dirty="0" sz="1200" spc="-10" i="1">
+              <a:rPr sz="1200" i="1" spc="-25" dirty="0">
+                <a:latin typeface="Times New Roman"/>
+                <a:cs typeface="Times New Roman"/>
+              </a:rPr>
+              <a:t> </a:t>
+            </a:r>
+            <a:r>
+              <a:rPr sz="1200" i="1" spc="-10" dirty="0">
                 <a:latin typeface="Times New Roman"/>
                 <a:cs typeface="Times New Roman"/>
               </a:rPr>
@@ -6552,7 +6097,7 @@
               </a:spcBef>
             </a:pPr>
             <a:r>
-              <a:rPr dirty="0" sz="1300" spc="-10" b="1">
+              <a:rPr sz="1300" b="1" spc="-10" dirty="0">
                 <a:latin typeface="Times New Roman"/>
                 <a:cs typeface="Times New Roman"/>
               </a:rPr>
@@ -6573,35 +6118,35 @@
               </a:spcBef>
             </a:pPr>
             <a:r>
-              <a:rPr dirty="0" sz="1300" b="1">
+              <a:rPr sz="1300" b="1" dirty="0">
                 <a:latin typeface="Times New Roman"/>
                 <a:cs typeface="Times New Roman"/>
               </a:rPr>
               <a:t>Contact</a:t>
             </a:r>
             <a:r>
-              <a:rPr dirty="0" sz="1300" spc="-60" b="1">
-                <a:latin typeface="Times New Roman"/>
-                <a:cs typeface="Times New Roman"/>
-              </a:rPr>
-              <a:t> </a:t>
-            </a:r>
-            <a:r>
-              <a:rPr dirty="0" sz="1300" b="1">
+              <a:rPr sz="1300" b="1" spc="-60" dirty="0">
+                <a:latin typeface="Times New Roman"/>
+                <a:cs typeface="Times New Roman"/>
+              </a:rPr>
+              <a:t> </a:t>
+            </a:r>
+            <a:r>
+              <a:rPr sz="1300" b="1" dirty="0">
                 <a:latin typeface="Times New Roman"/>
                 <a:cs typeface="Times New Roman"/>
               </a:rPr>
               <a:t>Email:</a:t>
             </a:r>
             <a:r>
-              <a:rPr dirty="0" sz="1300" spc="-60" b="1">
-                <a:latin typeface="Times New Roman"/>
-                <a:cs typeface="Times New Roman"/>
-              </a:rPr>
-              <a:t> </a:t>
-            </a:r>
-            <a:r>
-              <a:rPr dirty="0" sz="1300" spc="-10">
+              <a:rPr sz="1300" b="1" spc="-60" dirty="0">
+                <a:latin typeface="Times New Roman"/>
+                <a:cs typeface="Times New Roman"/>
+              </a:rPr>
+              <a:t> </a:t>
+            </a:r>
+            <a:r>
+              <a:rPr sz="1300" spc="-10" dirty="0">
                 <a:latin typeface="Times New Roman"/>
                 <a:cs typeface="Times New Roman"/>
                 <a:hlinkClick r:id="rId5"/>
@@ -6623,77 +6168,77 @@
               </a:spcBef>
             </a:pPr>
             <a:r>
-              <a:rPr dirty="0" sz="1300" b="1">
+              <a:rPr sz="1300" b="1" dirty="0">
                 <a:latin typeface="Times New Roman"/>
                 <a:cs typeface="Times New Roman"/>
               </a:rPr>
               <a:t>Help</a:t>
             </a:r>
             <a:r>
-              <a:rPr dirty="0" sz="1300" spc="-40" b="1">
-                <a:latin typeface="Times New Roman"/>
-                <a:cs typeface="Times New Roman"/>
-              </a:rPr>
-              <a:t> </a:t>
-            </a:r>
-            <a:r>
-              <a:rPr dirty="0" sz="1300" b="1">
+              <a:rPr sz="1300" b="1" spc="-40" dirty="0">
+                <a:latin typeface="Times New Roman"/>
+                <a:cs typeface="Times New Roman"/>
+              </a:rPr>
+              <a:t> </a:t>
+            </a:r>
+            <a:r>
+              <a:rPr sz="1300" b="1" dirty="0">
                 <a:latin typeface="Times New Roman"/>
                 <a:cs typeface="Times New Roman"/>
               </a:rPr>
               <a:t>Desk</a:t>
             </a:r>
             <a:r>
-              <a:rPr dirty="0" sz="1300" spc="-35" b="1">
-                <a:latin typeface="Times New Roman"/>
-                <a:cs typeface="Times New Roman"/>
-              </a:rPr>
-              <a:t> </a:t>
-            </a:r>
-            <a:r>
-              <a:rPr dirty="0" sz="1300" b="1">
+              <a:rPr sz="1300" b="1" spc="-35" dirty="0">
+                <a:latin typeface="Times New Roman"/>
+                <a:cs typeface="Times New Roman"/>
+              </a:rPr>
+              <a:t> </a:t>
+            </a:r>
+            <a:r>
+              <a:rPr sz="1300" b="1" dirty="0">
                 <a:latin typeface="Times New Roman"/>
                 <a:cs typeface="Times New Roman"/>
               </a:rPr>
               <a:t>Number:</a:t>
             </a:r>
             <a:r>
-              <a:rPr dirty="0" sz="1300" spc="-35" b="1">
-                <a:latin typeface="Times New Roman"/>
-                <a:cs typeface="Times New Roman"/>
-              </a:rPr>
-              <a:t> </a:t>
-            </a:r>
-            <a:r>
-              <a:rPr dirty="0" sz="1300">
+              <a:rPr sz="1300" b="1" spc="-35" dirty="0">
+                <a:latin typeface="Times New Roman"/>
+                <a:cs typeface="Times New Roman"/>
+              </a:rPr>
+              <a:t> </a:t>
+            </a:r>
+            <a:r>
+              <a:rPr sz="1300" dirty="0">
                 <a:latin typeface="Times New Roman"/>
                 <a:cs typeface="Times New Roman"/>
               </a:rPr>
               <a:t>+91</a:t>
             </a:r>
             <a:r>
-              <a:rPr dirty="0" sz="1300" spc="-35">
-                <a:latin typeface="Times New Roman"/>
-                <a:cs typeface="Times New Roman"/>
-              </a:rPr>
-              <a:t> </a:t>
-            </a:r>
-            <a:r>
-              <a:rPr dirty="0" sz="1300">
+              <a:rPr sz="1300" spc="-35" dirty="0">
+                <a:latin typeface="Times New Roman"/>
+                <a:cs typeface="Times New Roman"/>
+              </a:rPr>
+              <a:t> </a:t>
+            </a:r>
+            <a:r>
+              <a:rPr sz="1300" dirty="0">
                 <a:latin typeface="Times New Roman"/>
                 <a:cs typeface="Times New Roman"/>
               </a:rPr>
               <a:t>94444</a:t>
             </a:r>
             <a:r>
-              <a:rPr dirty="0" sz="1300" spc="-35">
-                <a:latin typeface="Times New Roman"/>
-                <a:cs typeface="Times New Roman"/>
-              </a:rPr>
-              <a:t> </a:t>
-            </a:r>
-            <a:r>
-              <a:rPr dirty="0" sz="1300" spc="-10">
+              <a:rPr sz="1300" spc="-35" dirty="0">
+                <a:latin typeface="Times New Roman"/>
+                <a:cs typeface="Times New Roman"/>
+              </a:rPr>
+              <a:t> </a:t>
+            </a:r>
+            <a:r>
+              <a:rPr sz="1300" spc="-10" dirty="0">
                 <a:latin typeface="Times New Roman"/>
                 <a:cs typeface="Times New Roman"/>
               </a:rPr>
@@ -6714,119 +6259,119 @@
               </a:spcBef>
             </a:pPr>
             <a:r>
-              <a:rPr dirty="0" sz="1300" b="1">
+              <a:rPr sz="1300" b="1" dirty="0">
                 <a:latin typeface="Times New Roman"/>
                 <a:cs typeface="Times New Roman"/>
               </a:rPr>
               <a:t>Support</a:t>
             </a:r>
             <a:r>
-              <a:rPr dirty="0" sz="1300" spc="-20" b="1">
-                <a:latin typeface="Times New Roman"/>
-                <a:cs typeface="Times New Roman"/>
-              </a:rPr>
-              <a:t> </a:t>
-            </a:r>
-            <a:r>
-              <a:rPr dirty="0" sz="1300" spc="-10" b="1">
+              <a:rPr sz="1300" b="1" spc="-20" dirty="0">
+                <a:latin typeface="Times New Roman"/>
+                <a:cs typeface="Times New Roman"/>
+              </a:rPr>
+              <a:t> </a:t>
+            </a:r>
+            <a:r>
+              <a:rPr sz="1300" b="1" spc="-10" dirty="0">
                 <a:latin typeface="Times New Roman"/>
                 <a:cs typeface="Times New Roman"/>
               </a:rPr>
               <a:t>Timings:</a:t>
             </a:r>
             <a:r>
-              <a:rPr dirty="0" sz="1300" spc="-20" b="1">
-                <a:latin typeface="Times New Roman"/>
-                <a:cs typeface="Times New Roman"/>
-              </a:rPr>
-              <a:t> </a:t>
-            </a:r>
-            <a:r>
-              <a:rPr dirty="0" sz="1300">
+              <a:rPr sz="1300" b="1" spc="-20" dirty="0">
+                <a:latin typeface="Times New Roman"/>
+                <a:cs typeface="Times New Roman"/>
+              </a:rPr>
+              <a:t> </a:t>
+            </a:r>
+            <a:r>
+              <a:rPr sz="1300" dirty="0">
                 <a:latin typeface="Times New Roman"/>
                 <a:cs typeface="Times New Roman"/>
               </a:rPr>
               <a:t>9:00</a:t>
             </a:r>
             <a:r>
-              <a:rPr dirty="0" sz="1300" spc="-20">
-                <a:latin typeface="Times New Roman"/>
-                <a:cs typeface="Times New Roman"/>
-              </a:rPr>
-              <a:t> </a:t>
-            </a:r>
-            <a:r>
-              <a:rPr dirty="0" sz="1300">
+              <a:rPr sz="1300" spc="-20" dirty="0">
+                <a:latin typeface="Times New Roman"/>
+                <a:cs typeface="Times New Roman"/>
+              </a:rPr>
+              <a:t> </a:t>
+            </a:r>
+            <a:r>
+              <a:rPr sz="1300" dirty="0">
                 <a:latin typeface="Times New Roman"/>
                 <a:cs typeface="Times New Roman"/>
               </a:rPr>
               <a:t>AM</a:t>
             </a:r>
             <a:r>
-              <a:rPr dirty="0" sz="1300" spc="-20">
-                <a:latin typeface="Times New Roman"/>
-                <a:cs typeface="Times New Roman"/>
-              </a:rPr>
-              <a:t> </a:t>
-            </a:r>
-            <a:r>
-              <a:rPr dirty="0" sz="1300">
+              <a:rPr sz="1300" spc="-20" dirty="0">
+                <a:latin typeface="Times New Roman"/>
+                <a:cs typeface="Times New Roman"/>
+              </a:rPr>
+              <a:t> </a:t>
+            </a:r>
+            <a:r>
+              <a:rPr sz="1300" dirty="0">
                 <a:latin typeface="Times New Roman"/>
                 <a:cs typeface="Times New Roman"/>
               </a:rPr>
               <a:t>–</a:t>
             </a:r>
             <a:r>
-              <a:rPr dirty="0" sz="1300" spc="-20">
-                <a:latin typeface="Times New Roman"/>
-                <a:cs typeface="Times New Roman"/>
-              </a:rPr>
-              <a:t> </a:t>
-            </a:r>
-            <a:r>
-              <a:rPr dirty="0" sz="1300">
+              <a:rPr sz="1300" spc="-20" dirty="0">
+                <a:latin typeface="Times New Roman"/>
+                <a:cs typeface="Times New Roman"/>
+              </a:rPr>
+              <a:t> </a:t>
+            </a:r>
+            <a:r>
+              <a:rPr sz="1300" dirty="0">
                 <a:latin typeface="Times New Roman"/>
                 <a:cs typeface="Times New Roman"/>
               </a:rPr>
               <a:t>4:30</a:t>
             </a:r>
             <a:r>
-              <a:rPr dirty="0" sz="1300" spc="-20">
-                <a:latin typeface="Times New Roman"/>
-                <a:cs typeface="Times New Roman"/>
-              </a:rPr>
-              <a:t> </a:t>
-            </a:r>
-            <a:r>
-              <a:rPr dirty="0" sz="1300">
+              <a:rPr sz="1300" spc="-20" dirty="0">
+                <a:latin typeface="Times New Roman"/>
+                <a:cs typeface="Times New Roman"/>
+              </a:rPr>
+              <a:t> </a:t>
+            </a:r>
+            <a:r>
+              <a:rPr sz="1300" dirty="0">
                 <a:latin typeface="Times New Roman"/>
                 <a:cs typeface="Times New Roman"/>
               </a:rPr>
               <a:t>PM</a:t>
             </a:r>
             <a:r>
-              <a:rPr dirty="0" sz="1300" spc="-20">
+              <a:rPr sz="1300" spc="-20" dirty="0">
                 <a:latin typeface="Times New Roman"/>
                 <a:cs typeface="Times New Roman"/>
               </a:rPr>
               <a:t> (Working </a:t>
             </a:r>
             <a:r>
-              <a:rPr dirty="0" sz="1300">
+              <a:rPr sz="1300" dirty="0">
                 <a:latin typeface="Times New Roman"/>
                 <a:cs typeface="Times New Roman"/>
               </a:rPr>
               <a:t>Days</a:t>
             </a:r>
             <a:r>
-              <a:rPr dirty="0" sz="1300" spc="-20">
-                <a:latin typeface="Times New Roman"/>
-                <a:cs typeface="Times New Roman"/>
-              </a:rPr>
-              <a:t> </a:t>
-            </a:r>
-            <a:r>
-              <a:rPr dirty="0" sz="1300" spc="-10">
+              <a:rPr sz="1300" spc="-20" dirty="0">
+                <a:latin typeface="Times New Roman"/>
+                <a:cs typeface="Times New Roman"/>
+              </a:rPr>
+              <a:t> </a:t>
+            </a:r>
+            <a:r>
+              <a:rPr sz="1300" spc="-10" dirty="0">
                 <a:latin typeface="Times New Roman"/>
                 <a:cs typeface="Times New Roman"/>
               </a:rPr>
@@ -6847,161 +6392,161 @@
               </a:spcBef>
             </a:pPr>
             <a:r>
-              <a:rPr dirty="0" sz="1300" spc="-10" b="1">
+              <a:rPr sz="1300" b="1" spc="-10" dirty="0">
                 <a:latin typeface="Times New Roman"/>
                 <a:cs typeface="Times New Roman"/>
               </a:rPr>
               <a:t>Copyright:</a:t>
             </a:r>
             <a:r>
-              <a:rPr dirty="0" sz="1300" spc="-10">
+              <a:rPr sz="1300" spc="-10" dirty="0">
                 <a:latin typeface="Times New Roman"/>
                 <a:cs typeface="Times New Roman"/>
               </a:rPr>
               <a:t>©</a:t>
             </a:r>
             <a:r>
-              <a:rPr dirty="0" sz="1300" spc="-40">
-                <a:latin typeface="Times New Roman"/>
-                <a:cs typeface="Times New Roman"/>
-              </a:rPr>
-              <a:t> </a:t>
-            </a:r>
-            <a:r>
-              <a:rPr dirty="0" sz="1300">
+              <a:rPr sz="1300" spc="-40" dirty="0">
+                <a:latin typeface="Times New Roman"/>
+                <a:cs typeface="Times New Roman"/>
+              </a:rPr>
+              <a:t> </a:t>
+            </a:r>
+            <a:r>
+              <a:rPr sz="1300" dirty="0">
                 <a:latin typeface="Times New Roman"/>
                 <a:cs typeface="Times New Roman"/>
               </a:rPr>
               <a:t>2026</a:t>
             </a:r>
             <a:r>
-              <a:rPr dirty="0" sz="1300" spc="-40">
-                <a:latin typeface="Times New Roman"/>
-                <a:cs typeface="Times New Roman"/>
-              </a:rPr>
-              <a:t> </a:t>
-            </a:r>
-            <a:r>
-              <a:rPr dirty="0" sz="1300">
+              <a:rPr sz="1300" spc="-40" dirty="0">
+                <a:latin typeface="Times New Roman"/>
+                <a:cs typeface="Times New Roman"/>
+              </a:rPr>
+              <a:t> </a:t>
+            </a:r>
+            <a:r>
+              <a:rPr sz="1300" dirty="0">
                 <a:latin typeface="Times New Roman"/>
                 <a:cs typeface="Times New Roman"/>
               </a:rPr>
               <a:t>Department</a:t>
             </a:r>
             <a:r>
-              <a:rPr dirty="0" sz="1300" spc="-40">
-                <a:latin typeface="Times New Roman"/>
-                <a:cs typeface="Times New Roman"/>
-              </a:rPr>
-              <a:t> </a:t>
-            </a:r>
-            <a:r>
-              <a:rPr dirty="0" sz="1300">
+              <a:rPr sz="1300" spc="-40" dirty="0">
+                <a:latin typeface="Times New Roman"/>
+                <a:cs typeface="Times New Roman"/>
+              </a:rPr>
+              <a:t> </a:t>
+            </a:r>
+            <a:r>
+              <a:rPr sz="1300" dirty="0">
                 <a:latin typeface="Times New Roman"/>
                 <a:cs typeface="Times New Roman"/>
               </a:rPr>
               <a:t>of</a:t>
             </a:r>
             <a:r>
-              <a:rPr dirty="0" sz="1300" spc="-40">
-                <a:latin typeface="Times New Roman"/>
-                <a:cs typeface="Times New Roman"/>
-              </a:rPr>
-              <a:t> </a:t>
-            </a:r>
-            <a:r>
-              <a:rPr dirty="0" sz="1300">
+              <a:rPr sz="1300" spc="-40" dirty="0">
+                <a:latin typeface="Times New Roman"/>
+                <a:cs typeface="Times New Roman"/>
+              </a:rPr>
+              <a:t> </a:t>
+            </a:r>
+            <a:r>
+              <a:rPr sz="1300" dirty="0">
                 <a:latin typeface="Times New Roman"/>
                 <a:cs typeface="Times New Roman"/>
               </a:rPr>
               <a:t>Computer</a:t>
             </a:r>
             <a:r>
-              <a:rPr dirty="0" sz="1300" spc="-35">
-                <a:latin typeface="Times New Roman"/>
-                <a:cs typeface="Times New Roman"/>
-              </a:rPr>
-              <a:t> </a:t>
-            </a:r>
-            <a:r>
-              <a:rPr dirty="0" sz="1300">
+              <a:rPr sz="1300" spc="-35" dirty="0">
+                <a:latin typeface="Times New Roman"/>
+                <a:cs typeface="Times New Roman"/>
+              </a:rPr>
+              <a:t> </a:t>
+            </a:r>
+            <a:r>
+              <a:rPr sz="1300" dirty="0">
                 <a:latin typeface="Times New Roman"/>
                 <a:cs typeface="Times New Roman"/>
               </a:rPr>
               <a:t>Science,</a:t>
             </a:r>
             <a:r>
-              <a:rPr dirty="0" sz="1300" spc="-40">
-                <a:latin typeface="Times New Roman"/>
-                <a:cs typeface="Times New Roman"/>
-              </a:rPr>
-              <a:t> </a:t>
-            </a:r>
-            <a:r>
-              <a:rPr dirty="0" sz="1300">
+              <a:rPr sz="1300" spc="-40" dirty="0">
+                <a:latin typeface="Times New Roman"/>
+                <a:cs typeface="Times New Roman"/>
+              </a:rPr>
+              <a:t> </a:t>
+            </a:r>
+            <a:r>
+              <a:rPr sz="1300" dirty="0">
                 <a:latin typeface="Times New Roman"/>
                 <a:cs typeface="Times New Roman"/>
               </a:rPr>
               <a:t>ABC</a:t>
             </a:r>
             <a:r>
-              <a:rPr dirty="0" sz="1300" spc="-40">
-                <a:latin typeface="Times New Roman"/>
-                <a:cs typeface="Times New Roman"/>
-              </a:rPr>
-              <a:t> </a:t>
-            </a:r>
-            <a:r>
-              <a:rPr dirty="0" sz="1300">
+              <a:rPr sz="1300" spc="-40" dirty="0">
+                <a:latin typeface="Times New Roman"/>
+                <a:cs typeface="Times New Roman"/>
+              </a:rPr>
+              <a:t> </a:t>
+            </a:r>
+            <a:r>
+              <a:rPr sz="1300" dirty="0">
                 <a:latin typeface="Times New Roman"/>
                 <a:cs typeface="Times New Roman"/>
               </a:rPr>
               <a:t>Engineering</a:t>
             </a:r>
             <a:r>
-              <a:rPr dirty="0" sz="1300" spc="-40">
-                <a:latin typeface="Times New Roman"/>
-                <a:cs typeface="Times New Roman"/>
-              </a:rPr>
-              <a:t> </a:t>
-            </a:r>
-            <a:r>
-              <a:rPr dirty="0" sz="1300">
+              <a:rPr sz="1300" spc="-40" dirty="0">
+                <a:latin typeface="Times New Roman"/>
+                <a:cs typeface="Times New Roman"/>
+              </a:rPr>
+              <a:t> </a:t>
+            </a:r>
+            <a:r>
+              <a:rPr sz="1300" dirty="0">
                 <a:latin typeface="Times New Roman"/>
                 <a:cs typeface="Times New Roman"/>
               </a:rPr>
               <a:t>College.</a:t>
             </a:r>
             <a:r>
-              <a:rPr dirty="0" sz="1300" spc="-40">
-                <a:latin typeface="Times New Roman"/>
-                <a:cs typeface="Times New Roman"/>
-              </a:rPr>
-              <a:t> </a:t>
-            </a:r>
-            <a:r>
-              <a:rPr dirty="0" sz="1300" spc="-25">
+              <a:rPr sz="1300" spc="-40" dirty="0">
+                <a:latin typeface="Times New Roman"/>
+                <a:cs typeface="Times New Roman"/>
+              </a:rPr>
+              <a:t> </a:t>
+            </a:r>
+            <a:r>
+              <a:rPr sz="1300" spc="-25" dirty="0">
                 <a:latin typeface="Times New Roman"/>
                 <a:cs typeface="Times New Roman"/>
               </a:rPr>
               <a:t>All </a:t>
             </a:r>
             <a:r>
-              <a:rPr dirty="0" sz="1300">
+              <a:rPr sz="1300" dirty="0">
                 <a:latin typeface="Times New Roman"/>
                 <a:cs typeface="Times New Roman"/>
               </a:rPr>
               <a:t>Rights</a:t>
             </a:r>
             <a:r>
-              <a:rPr dirty="0" sz="1300" spc="-35">
-                <a:latin typeface="Times New Roman"/>
-                <a:cs typeface="Times New Roman"/>
-              </a:rPr>
-              <a:t> </a:t>
-            </a:r>
-            <a:r>
-              <a:rPr dirty="0" sz="1300" spc="-10">
+              <a:rPr sz="1300" spc="-35" dirty="0">
+                <a:latin typeface="Times New Roman"/>
+                <a:cs typeface="Times New Roman"/>
+              </a:rPr>
+              <a:t> </a:t>
+            </a:r>
+            <a:r>
+              <a:rPr sz="1300" spc="-10" dirty="0">
                 <a:latin typeface="Times New Roman"/>
                 <a:cs typeface="Times New Roman"/>
               </a:rPr>
@@ -7016,7 +6561,7 @@
       </p:sp>
       <p:pic>
         <p:nvPicPr>
-          <p:cNvPr id="10" name="object 10" descr=""/>
+          <p:cNvPr id="10" name="object 10"/>
           <p:cNvPicPr/>
           <p:nvPr/>
         </p:nvPicPr>
@@ -7038,7 +6583,7 @@
       </p:pic>
       <p:pic>
         <p:nvPicPr>
-          <p:cNvPr id="11" name="object 11" descr=""/>
+          <p:cNvPr id="11" name="object 11"/>
           <p:cNvPicPr/>
           <p:nvPr/>
         </p:nvPicPr>
@@ -7085,7 +6630,7 @@
       </p:grpSpPr>
       <p:pic>
         <p:nvPicPr>
-          <p:cNvPr id="2" name="object 2" descr=""/>
+          <p:cNvPr id="2" name="object 2"/>
           <p:cNvPicPr/>
           <p:nvPr/>
         </p:nvPicPr>
@@ -7107,7 +6652,7 @@
       </p:pic>
       <p:pic>
         <p:nvPicPr>
-          <p:cNvPr id="3" name="object 3" descr=""/>
+          <p:cNvPr id="3" name="object 3"/>
           <p:cNvPicPr/>
           <p:nvPr/>
         </p:nvPicPr>
@@ -7129,7 +6674,7 @@
       </p:pic>
       <p:sp>
         <p:nvSpPr>
-          <p:cNvPr id="4" name="object 4" descr=""/>
+          <p:cNvPr id="4" name="object 4"/>
           <p:cNvSpPr/>
           <p:nvPr/>
         </p:nvSpPr>
@@ -7145,7 +6690,7 @@
             <a:cxnLst/>
             <a:rect l="l" t="t" r="r" b="b"/>
             <a:pathLst>
-              <a:path w="6502400" h="0">
+              <a:path w="6502400">
                 <a:moveTo>
                   <a:pt x="0" y="0"/>
                 </a:moveTo>
@@ -7164,12 +6709,14 @@
         <p:txBody>
           <a:bodyPr wrap="square" lIns="0" tIns="0" rIns="0" bIns="0" rtlCol="0"/>
           <a:lstStyle/>
-          <a:p/>
+          <a:p>
+            <a:endParaRPr/>
+          </a:p>
         </p:txBody>
       </p:sp>
       <p:sp>
         <p:nvSpPr>
-          <p:cNvPr id="5" name="object 5" descr=""/>
+          <p:cNvPr id="5" name="object 5"/>
           <p:cNvSpPr/>
           <p:nvPr/>
         </p:nvSpPr>
@@ -7185,7 +6732,7 @@
             <a:cxnLst/>
             <a:rect l="l" t="t" r="r" b="b"/>
             <a:pathLst>
-              <a:path w="6502400" h="0">
+              <a:path w="6502400">
                 <a:moveTo>
                   <a:pt x="0" y="0"/>
                 </a:moveTo>
@@ -7204,12 +6751,14 @@
         <p:txBody>
           <a:bodyPr wrap="square" lIns="0" tIns="0" rIns="0" bIns="0" rtlCol="0"/>
           <a:lstStyle/>
-          <a:p/>
+          <a:p>
+            <a:endParaRPr/>
+          </a:p>
         </p:txBody>
       </p:sp>
       <p:sp>
         <p:nvSpPr>
-          <p:cNvPr id="6" name="object 6" descr=""/>
+          <p:cNvPr id="6" name="object 6"/>
           <p:cNvSpPr/>
           <p:nvPr/>
         </p:nvSpPr>
@@ -7225,7 +6774,7 @@
             <a:cxnLst/>
             <a:rect l="l" t="t" r="r" b="b"/>
             <a:pathLst>
-              <a:path w="6502400" h="0">
+              <a:path w="6502400">
                 <a:moveTo>
                   <a:pt x="0" y="0"/>
                 </a:moveTo>
@@ -7244,12 +6793,14 @@
         <p:txBody>
           <a:bodyPr wrap="square" lIns="0" tIns="0" rIns="0" bIns="0" rtlCol="0"/>
           <a:lstStyle/>
-          <a:p/>
+          <a:p>
+            <a:endParaRPr/>
+          </a:p>
         </p:txBody>
       </p:sp>
       <p:sp>
         <p:nvSpPr>
-          <p:cNvPr id="7" name="object 7" descr=""/>
+          <p:cNvPr id="7" name="object 7"/>
           <p:cNvSpPr/>
           <p:nvPr/>
         </p:nvSpPr>
@@ -7265,7 +6816,7 @@
             <a:cxnLst/>
             <a:rect l="l" t="t" r="r" b="b"/>
             <a:pathLst>
-              <a:path w="6502400" h="0">
+              <a:path w="6502400">
                 <a:moveTo>
                   <a:pt x="0" y="0"/>
                 </a:moveTo>
@@ -7284,12 +6835,14 @@
         <p:txBody>
           <a:bodyPr wrap="square" lIns="0" tIns="0" rIns="0" bIns="0" rtlCol="0"/>
           <a:lstStyle/>
-          <a:p/>
+          <a:p>
+            <a:endParaRPr/>
+          </a:p>
         </p:txBody>
       </p:sp>
       <p:sp>
         <p:nvSpPr>
-          <p:cNvPr id="8" name="object 8" descr=""/>
+          <p:cNvPr id="8" name="object 8"/>
           <p:cNvSpPr txBox="1"/>
           <p:nvPr/>
         </p:nvSpPr>
@@ -7303,7 +6856,7 @@
           </a:prstGeom>
         </p:spPr>
         <p:txBody>
-          <a:bodyPr wrap="square" lIns="0" tIns="148590" rIns="0" bIns="0" rtlCol="0" vert="horz">
+          <a:bodyPr vert="horz" wrap="square" lIns="0" tIns="148590" rIns="0" bIns="0" rtlCol="0">
             <a:spAutoFit/>
           </a:bodyPr>
           <a:lstStyle/>
@@ -7326,7 +6879,7 @@
               </a:tabLst>
             </a:pPr>
             <a:r>
-              <a:rPr dirty="0" sz="2300" b="1">
+              <a:rPr sz="2300" b="1" dirty="0">
                 <a:solidFill>
                   <a:srgbClr val="3C78D8"/>
                 </a:solidFill>
@@ -7336,7 +6889,7 @@
               <a:t>Implementation</a:t>
             </a:r>
             <a:r>
-              <a:rPr dirty="0" sz="2300" spc="-100" b="1">
+              <a:rPr sz="2300" b="1" spc="-100" dirty="0">
                 <a:solidFill>
                   <a:srgbClr val="3C78D8"/>
                 </a:solidFill>
@@ -7346,7 +6899,7 @@
               <a:t> </a:t>
             </a:r>
             <a:r>
-              <a:rPr dirty="0" sz="2300" spc="-10" b="1">
+              <a:rPr sz="2300" b="1" spc="-10" dirty="0">
                 <a:solidFill>
                   <a:srgbClr val="3C78D8"/>
                 </a:solidFill>
@@ -7370,140 +6923,140 @@
               </a:spcBef>
             </a:pPr>
             <a:r>
-              <a:rPr dirty="0" sz="1200" i="1">
+              <a:rPr sz="1200" i="1" dirty="0">
                 <a:latin typeface="Times New Roman"/>
                 <a:cs typeface="Times New Roman"/>
               </a:rPr>
               <a:t>(Explain</a:t>
             </a:r>
             <a:r>
-              <a:rPr dirty="0" sz="1200" spc="-35" i="1">
-                <a:latin typeface="Times New Roman"/>
-                <a:cs typeface="Times New Roman"/>
-              </a:rPr>
-              <a:t> </a:t>
-            </a:r>
-            <a:r>
-              <a:rPr dirty="0" sz="1200" i="1">
+              <a:rPr sz="1200" i="1" spc="-35" dirty="0">
+                <a:latin typeface="Times New Roman"/>
+                <a:cs typeface="Times New Roman"/>
+              </a:rPr>
+              <a:t> </a:t>
+            </a:r>
+            <a:r>
+              <a:rPr sz="1200" i="1" dirty="0">
                 <a:latin typeface="Times New Roman"/>
                 <a:cs typeface="Times New Roman"/>
               </a:rPr>
               <a:t>the</a:t>
             </a:r>
             <a:r>
-              <a:rPr dirty="0" sz="1200" spc="-30" i="1">
-                <a:latin typeface="Times New Roman"/>
-                <a:cs typeface="Times New Roman"/>
-              </a:rPr>
-              <a:t> </a:t>
-            </a:r>
-            <a:r>
-              <a:rPr dirty="0" sz="1200" spc="-10" i="1">
+              <a:rPr sz="1200" i="1" spc="-30" dirty="0">
+                <a:latin typeface="Times New Roman"/>
+                <a:cs typeface="Times New Roman"/>
+              </a:rPr>
+              <a:t> </a:t>
+            </a:r>
+            <a:r>
+              <a:rPr sz="1200" i="1" spc="-10" dirty="0">
                 <a:latin typeface="Times New Roman"/>
                 <a:cs typeface="Times New Roman"/>
               </a:rPr>
               <a:t>step-by-</a:t>
             </a:r>
             <a:r>
-              <a:rPr dirty="0" sz="1200" i="1">
+              <a:rPr sz="1200" i="1" dirty="0">
                 <a:latin typeface="Times New Roman"/>
                 <a:cs typeface="Times New Roman"/>
               </a:rPr>
               <a:t>step</a:t>
             </a:r>
             <a:r>
-              <a:rPr dirty="0" sz="1200" spc="-35" i="1">
-                <a:latin typeface="Times New Roman"/>
-                <a:cs typeface="Times New Roman"/>
-              </a:rPr>
-              <a:t> </a:t>
-            </a:r>
-            <a:r>
-              <a:rPr dirty="0" sz="1200" i="1">
+              <a:rPr sz="1200" i="1" spc="-35" dirty="0">
+                <a:latin typeface="Times New Roman"/>
+                <a:cs typeface="Times New Roman"/>
+              </a:rPr>
+              <a:t> </a:t>
+            </a:r>
+            <a:r>
+              <a:rPr sz="1200" i="1" dirty="0">
                 <a:latin typeface="Times New Roman"/>
                 <a:cs typeface="Times New Roman"/>
               </a:rPr>
               <a:t>process</a:t>
             </a:r>
             <a:r>
-              <a:rPr dirty="0" sz="1200" spc="-30" i="1">
-                <a:latin typeface="Times New Roman"/>
-                <a:cs typeface="Times New Roman"/>
-              </a:rPr>
-              <a:t> </a:t>
-            </a:r>
-            <a:r>
-              <a:rPr dirty="0" sz="1200" i="1">
+              <a:rPr sz="1200" i="1" spc="-30" dirty="0">
+                <a:latin typeface="Times New Roman"/>
+                <a:cs typeface="Times New Roman"/>
+              </a:rPr>
+              <a:t> </a:t>
+            </a:r>
+            <a:r>
+              <a:rPr sz="1200" i="1" dirty="0">
                 <a:latin typeface="Times New Roman"/>
                 <a:cs typeface="Times New Roman"/>
               </a:rPr>
               <a:t>followed</a:t>
             </a:r>
             <a:r>
-              <a:rPr dirty="0" sz="1200" spc="-30" i="1">
-                <a:latin typeface="Times New Roman"/>
-                <a:cs typeface="Times New Roman"/>
-              </a:rPr>
-              <a:t> </a:t>
-            </a:r>
-            <a:r>
-              <a:rPr dirty="0" sz="1200" i="1">
+              <a:rPr sz="1200" i="1" spc="-30" dirty="0">
+                <a:latin typeface="Times New Roman"/>
+                <a:cs typeface="Times New Roman"/>
+              </a:rPr>
+              <a:t> </a:t>
+            </a:r>
+            <a:r>
+              <a:rPr sz="1200" i="1" dirty="0">
                 <a:latin typeface="Times New Roman"/>
                 <a:cs typeface="Times New Roman"/>
               </a:rPr>
               <a:t>to</a:t>
             </a:r>
             <a:r>
-              <a:rPr dirty="0" sz="1200" spc="-30" i="1">
-                <a:latin typeface="Times New Roman"/>
-                <a:cs typeface="Times New Roman"/>
-              </a:rPr>
-              <a:t> </a:t>
-            </a:r>
-            <a:r>
-              <a:rPr dirty="0" sz="1200" i="1">
+              <a:rPr sz="1200" i="1" spc="-30" dirty="0">
+                <a:latin typeface="Times New Roman"/>
+                <a:cs typeface="Times New Roman"/>
+              </a:rPr>
+              <a:t> </a:t>
+            </a:r>
+            <a:r>
+              <a:rPr sz="1200" i="1" dirty="0">
                 <a:latin typeface="Times New Roman"/>
                 <a:cs typeface="Times New Roman"/>
               </a:rPr>
               <a:t>develop</a:t>
             </a:r>
             <a:r>
-              <a:rPr dirty="0" sz="1200" spc="-35" i="1">
-                <a:latin typeface="Times New Roman"/>
-                <a:cs typeface="Times New Roman"/>
-              </a:rPr>
-              <a:t> </a:t>
-            </a:r>
-            <a:r>
-              <a:rPr dirty="0" sz="1200" i="1">
+              <a:rPr sz="1200" i="1" spc="-35" dirty="0">
+                <a:latin typeface="Times New Roman"/>
+                <a:cs typeface="Times New Roman"/>
+              </a:rPr>
+              <a:t> </a:t>
+            </a:r>
+            <a:r>
+              <a:rPr sz="1200" i="1" dirty="0">
                 <a:latin typeface="Times New Roman"/>
                 <a:cs typeface="Times New Roman"/>
               </a:rPr>
               <a:t>the</a:t>
             </a:r>
             <a:r>
-              <a:rPr dirty="0" sz="1200" spc="-30" i="1">
-                <a:latin typeface="Times New Roman"/>
-                <a:cs typeface="Times New Roman"/>
-              </a:rPr>
-              <a:t> </a:t>
-            </a:r>
-            <a:r>
-              <a:rPr dirty="0" sz="1200" i="1">
+              <a:rPr sz="1200" i="1" spc="-30" dirty="0">
+                <a:latin typeface="Times New Roman"/>
+                <a:cs typeface="Times New Roman"/>
+              </a:rPr>
+              <a:t> </a:t>
+            </a:r>
+            <a:r>
+              <a:rPr sz="1200" i="1" dirty="0">
                 <a:latin typeface="Times New Roman"/>
                 <a:cs typeface="Times New Roman"/>
               </a:rPr>
               <a:t>project</a:t>
             </a:r>
             <a:r>
-              <a:rPr dirty="0" sz="1200" spc="-30" i="1">
-                <a:latin typeface="Times New Roman"/>
-                <a:cs typeface="Times New Roman"/>
-              </a:rPr>
-              <a:t> </a:t>
-            </a:r>
-            <a:r>
-              <a:rPr dirty="0" sz="1200" spc="-25" i="1">
+              <a:rPr sz="1200" i="1" spc="-30" dirty="0">
+                <a:latin typeface="Times New Roman"/>
+                <a:cs typeface="Times New Roman"/>
+              </a:rPr>
+              <a:t> </a:t>
+            </a:r>
+            <a:r>
+              <a:rPr sz="1200" i="1" spc="-25" dirty="0">
                 <a:latin typeface="Times New Roman"/>
                 <a:cs typeface="Times New Roman"/>
               </a:rPr>
@@ -7555,7 +7108,7 @@
               </a:tabLst>
             </a:pPr>
             <a:r>
-              <a:rPr dirty="0" sz="2300" spc="-25" b="1">
+              <a:rPr sz="2300" b="1" spc="-25" dirty="0">
                 <a:solidFill>
                   <a:srgbClr val="3C78D8"/>
                 </a:solidFill>
@@ -7565,7 +7118,7 @@
               <a:t>Technologies</a:t>
             </a:r>
             <a:r>
-              <a:rPr dirty="0" sz="2300" spc="-30" b="1">
+              <a:rPr sz="2300" b="1" spc="-30" dirty="0">
                 <a:solidFill>
                   <a:srgbClr val="3C78D8"/>
                 </a:solidFill>
@@ -7575,7 +7128,7 @@
               <a:t> </a:t>
             </a:r>
             <a:r>
-              <a:rPr dirty="0" sz="2300" spc="-20" b="1">
+              <a:rPr sz="2300" b="1" spc="-20" dirty="0">
                 <a:solidFill>
                   <a:srgbClr val="3C78D8"/>
                 </a:solidFill>
@@ -7599,175 +7152,175 @@
               </a:spcBef>
             </a:pPr>
             <a:r>
-              <a:rPr dirty="0" sz="1200" i="1">
+              <a:rPr sz="1200" i="1" dirty="0">
                 <a:latin typeface="Times New Roman"/>
                 <a:cs typeface="Times New Roman"/>
               </a:rPr>
               <a:t>(Mention</a:t>
             </a:r>
             <a:r>
-              <a:rPr dirty="0" sz="1200" spc="-25" i="1">
-                <a:latin typeface="Times New Roman"/>
-                <a:cs typeface="Times New Roman"/>
-              </a:rPr>
-              <a:t> </a:t>
-            </a:r>
-            <a:r>
-              <a:rPr dirty="0" sz="1200" i="1">
+              <a:rPr sz="1200" i="1" spc="-25" dirty="0">
+                <a:latin typeface="Times New Roman"/>
+                <a:cs typeface="Times New Roman"/>
+              </a:rPr>
+              <a:t> </a:t>
+            </a:r>
+            <a:r>
+              <a:rPr sz="1200" i="1" dirty="0">
                 <a:latin typeface="Times New Roman"/>
                 <a:cs typeface="Times New Roman"/>
               </a:rPr>
               <a:t>the</a:t>
             </a:r>
             <a:r>
-              <a:rPr dirty="0" sz="1200" spc="-25" i="1">
-                <a:latin typeface="Times New Roman"/>
-                <a:cs typeface="Times New Roman"/>
-              </a:rPr>
-              <a:t> </a:t>
-            </a:r>
-            <a:r>
-              <a:rPr dirty="0" sz="1200" i="1">
+              <a:rPr sz="1200" i="1" spc="-25" dirty="0">
+                <a:latin typeface="Times New Roman"/>
+                <a:cs typeface="Times New Roman"/>
+              </a:rPr>
+              <a:t> </a:t>
+            </a:r>
+            <a:r>
+              <a:rPr sz="1200" i="1" dirty="0">
                 <a:latin typeface="Times New Roman"/>
                 <a:cs typeface="Times New Roman"/>
               </a:rPr>
               <a:t>technologies</a:t>
             </a:r>
             <a:r>
-              <a:rPr dirty="0" sz="1200" spc="-20" i="1">
-                <a:latin typeface="Times New Roman"/>
-                <a:cs typeface="Times New Roman"/>
-              </a:rPr>
-              <a:t> </a:t>
-            </a:r>
-            <a:r>
-              <a:rPr dirty="0" sz="1200" i="1">
+              <a:rPr sz="1200" i="1" spc="-20" dirty="0">
+                <a:latin typeface="Times New Roman"/>
+                <a:cs typeface="Times New Roman"/>
+              </a:rPr>
+              <a:t> </a:t>
+            </a:r>
+            <a:r>
+              <a:rPr sz="1200" i="1" dirty="0">
                 <a:latin typeface="Times New Roman"/>
                 <a:cs typeface="Times New Roman"/>
               </a:rPr>
               <a:t>used</a:t>
             </a:r>
             <a:r>
-              <a:rPr dirty="0" sz="1200" spc="-25" i="1">
-                <a:latin typeface="Times New Roman"/>
-                <a:cs typeface="Times New Roman"/>
-              </a:rPr>
-              <a:t> </a:t>
-            </a:r>
-            <a:r>
-              <a:rPr dirty="0" sz="1200" i="1">
+              <a:rPr sz="1200" i="1" spc="-25" dirty="0">
+                <a:latin typeface="Times New Roman"/>
+                <a:cs typeface="Times New Roman"/>
+              </a:rPr>
+              <a:t> </a:t>
+            </a:r>
+            <a:r>
+              <a:rPr sz="1200" i="1" dirty="0">
                 <a:latin typeface="Times New Roman"/>
                 <a:cs typeface="Times New Roman"/>
               </a:rPr>
               <a:t>to</a:t>
             </a:r>
             <a:r>
-              <a:rPr dirty="0" sz="1200" spc="-25" i="1">
-                <a:latin typeface="Times New Roman"/>
-                <a:cs typeface="Times New Roman"/>
-              </a:rPr>
-              <a:t> </a:t>
-            </a:r>
-            <a:r>
-              <a:rPr dirty="0" sz="1200" i="1">
+              <a:rPr sz="1200" i="1" spc="-25" dirty="0">
+                <a:latin typeface="Times New Roman"/>
+                <a:cs typeface="Times New Roman"/>
+              </a:rPr>
+              <a:t> </a:t>
+            </a:r>
+            <a:r>
+              <a:rPr sz="1200" i="1" dirty="0">
                 <a:latin typeface="Times New Roman"/>
                 <a:cs typeface="Times New Roman"/>
               </a:rPr>
               <a:t>build</a:t>
             </a:r>
             <a:r>
-              <a:rPr dirty="0" sz="1200" spc="-20" i="1">
-                <a:latin typeface="Times New Roman"/>
-                <a:cs typeface="Times New Roman"/>
-              </a:rPr>
-              <a:t> </a:t>
-            </a:r>
-            <a:r>
-              <a:rPr dirty="0" sz="1200" i="1">
+              <a:rPr sz="1200" i="1" spc="-20" dirty="0">
+                <a:latin typeface="Times New Roman"/>
+                <a:cs typeface="Times New Roman"/>
+              </a:rPr>
+              <a:t> </a:t>
+            </a:r>
+            <a:r>
+              <a:rPr sz="1200" i="1" dirty="0">
                 <a:latin typeface="Times New Roman"/>
                 <a:cs typeface="Times New Roman"/>
               </a:rPr>
               <a:t>the</a:t>
             </a:r>
             <a:r>
-              <a:rPr dirty="0" sz="1200" spc="-30" i="1">
-                <a:latin typeface="Times New Roman"/>
-                <a:cs typeface="Times New Roman"/>
-              </a:rPr>
-              <a:t> </a:t>
-            </a:r>
-            <a:r>
-              <a:rPr dirty="0" sz="1200" i="1">
+              <a:rPr sz="1200" i="1" spc="-30" dirty="0">
+                <a:latin typeface="Times New Roman"/>
+                <a:cs typeface="Times New Roman"/>
+              </a:rPr>
+              <a:t> </a:t>
+            </a:r>
+            <a:r>
+              <a:rPr sz="1200" i="1" dirty="0">
                 <a:latin typeface="Times New Roman"/>
                 <a:cs typeface="Times New Roman"/>
               </a:rPr>
               <a:t>project</a:t>
             </a:r>
             <a:r>
-              <a:rPr dirty="0" sz="1200" spc="254" i="1">
-                <a:latin typeface="Times New Roman"/>
-                <a:cs typeface="Times New Roman"/>
-              </a:rPr>
-              <a:t> </a:t>
-            </a:r>
-            <a:r>
-              <a:rPr dirty="0" sz="1200" i="1">
+              <a:rPr sz="1200" i="1" spc="254" dirty="0">
+                <a:latin typeface="Times New Roman"/>
+                <a:cs typeface="Times New Roman"/>
+              </a:rPr>
+              <a:t> </a:t>
+            </a:r>
+            <a:r>
+              <a:rPr sz="1200" i="1" dirty="0">
                 <a:latin typeface="Times New Roman"/>
                 <a:cs typeface="Times New Roman"/>
               </a:rPr>
               <a:t>with</a:t>
             </a:r>
             <a:r>
-              <a:rPr dirty="0" sz="1200" spc="-25" i="1">
-                <a:latin typeface="Times New Roman"/>
-                <a:cs typeface="Times New Roman"/>
-              </a:rPr>
-              <a:t> </a:t>
-            </a:r>
-            <a:r>
-              <a:rPr dirty="0" sz="1200" i="1">
+              <a:rPr sz="1200" i="1" spc="-25" dirty="0">
+                <a:latin typeface="Times New Roman"/>
+                <a:cs typeface="Times New Roman"/>
+              </a:rPr>
+              <a:t> </a:t>
+            </a:r>
+            <a:r>
+              <a:rPr sz="1200" i="1" dirty="0">
                 <a:latin typeface="Times New Roman"/>
                 <a:cs typeface="Times New Roman"/>
               </a:rPr>
               <a:t>code</a:t>
             </a:r>
             <a:r>
-              <a:rPr dirty="0" sz="1200" spc="-25" i="1">
-                <a:latin typeface="Times New Roman"/>
-                <a:cs typeface="Times New Roman"/>
-              </a:rPr>
-              <a:t> </a:t>
-            </a:r>
-            <a:r>
-              <a:rPr dirty="0" sz="1200" i="1">
+              <a:rPr sz="1200" i="1" spc="-25" dirty="0">
+                <a:latin typeface="Times New Roman"/>
+                <a:cs typeface="Times New Roman"/>
+              </a:rPr>
+              <a:t> </a:t>
+            </a:r>
+            <a:r>
+              <a:rPr sz="1200" i="1" dirty="0">
                 <a:latin typeface="Times New Roman"/>
                 <a:cs typeface="Times New Roman"/>
               </a:rPr>
               <a:t>(HTML,</a:t>
             </a:r>
             <a:r>
-              <a:rPr dirty="0" sz="1200" spc="-25" i="1">
-                <a:latin typeface="Times New Roman"/>
-                <a:cs typeface="Times New Roman"/>
-              </a:rPr>
-              <a:t> </a:t>
-            </a:r>
-            <a:r>
-              <a:rPr dirty="0" sz="1200" i="1">
+              <a:rPr sz="1200" i="1" spc="-25" dirty="0">
+                <a:latin typeface="Times New Roman"/>
+                <a:cs typeface="Times New Roman"/>
+              </a:rPr>
+              <a:t> </a:t>
+            </a:r>
+            <a:r>
+              <a:rPr sz="1200" i="1" dirty="0">
                 <a:latin typeface="Times New Roman"/>
                 <a:cs typeface="Times New Roman"/>
               </a:rPr>
               <a:t>CSS,</a:t>
             </a:r>
             <a:r>
-              <a:rPr dirty="0" sz="1200" spc="-25" i="1">
-                <a:latin typeface="Times New Roman"/>
-                <a:cs typeface="Times New Roman"/>
-              </a:rPr>
-              <a:t> </a:t>
-            </a:r>
-            <a:r>
-              <a:rPr dirty="0" sz="1200" spc="-10" i="1">
+              <a:rPr sz="1200" i="1" spc="-25" dirty="0">
+                <a:latin typeface="Times New Roman"/>
+                <a:cs typeface="Times New Roman"/>
+              </a:rPr>
+              <a:t> </a:t>
+            </a:r>
+            <a:r>
+              <a:rPr sz="1200" i="1" spc="-10" dirty="0">
                 <a:latin typeface="Times New Roman"/>
                 <a:cs typeface="Times New Roman"/>
               </a:rPr>
@@ -7815,7 +7368,7 @@
               </a:tabLst>
             </a:pPr>
             <a:r>
-              <a:rPr dirty="0" sz="2300" spc="-10" b="1">
+              <a:rPr sz="2300" b="1" spc="-10" dirty="0">
                 <a:solidFill>
                   <a:srgbClr val="3C78D8"/>
                 </a:solidFill>
@@ -7839,210 +7392,210 @@
               </a:spcBef>
             </a:pPr>
             <a:r>
-              <a:rPr dirty="0" sz="1200" i="1">
+              <a:rPr sz="1200" i="1" dirty="0">
                 <a:latin typeface="Times New Roman"/>
                 <a:cs typeface="Times New Roman"/>
               </a:rPr>
               <a:t>(Attach</a:t>
             </a:r>
             <a:r>
-              <a:rPr dirty="0" sz="1200" spc="-25" i="1">
-                <a:latin typeface="Times New Roman"/>
-                <a:cs typeface="Times New Roman"/>
-              </a:rPr>
-              <a:t> </a:t>
-            </a:r>
-            <a:r>
-              <a:rPr dirty="0" sz="1200" spc="-10" i="1">
+              <a:rPr sz="1200" i="1" spc="-25" dirty="0">
+                <a:latin typeface="Times New Roman"/>
+                <a:cs typeface="Times New Roman"/>
+              </a:rPr>
+              <a:t> </a:t>
+            </a:r>
+            <a:r>
+              <a:rPr sz="1200" i="1" spc="-10" dirty="0">
                 <a:latin typeface="Times New Roman"/>
                 <a:cs typeface="Times New Roman"/>
               </a:rPr>
               <a:t>screenshots</a:t>
             </a:r>
             <a:r>
-              <a:rPr dirty="0" sz="1200" spc="-20" i="1">
-                <a:latin typeface="Times New Roman"/>
-                <a:cs typeface="Times New Roman"/>
-              </a:rPr>
-              <a:t> </a:t>
-            </a:r>
-            <a:r>
-              <a:rPr dirty="0" sz="1200" i="1">
+              <a:rPr sz="1200" i="1" spc="-20" dirty="0">
+                <a:latin typeface="Times New Roman"/>
+                <a:cs typeface="Times New Roman"/>
+              </a:rPr>
+              <a:t> </a:t>
+            </a:r>
+            <a:r>
+              <a:rPr sz="1200" i="1" dirty="0">
                 <a:latin typeface="Times New Roman"/>
                 <a:cs typeface="Times New Roman"/>
               </a:rPr>
               <a:t>showing</a:t>
             </a:r>
             <a:r>
-              <a:rPr dirty="0" sz="1200" spc="-20" i="1">
-                <a:latin typeface="Times New Roman"/>
-                <a:cs typeface="Times New Roman"/>
-              </a:rPr>
-              <a:t> </a:t>
-            </a:r>
-            <a:r>
-              <a:rPr dirty="0" sz="1200" i="1">
+              <a:rPr sz="1200" i="1" spc="-20" dirty="0">
+                <a:latin typeface="Times New Roman"/>
+                <a:cs typeface="Times New Roman"/>
+              </a:rPr>
+              <a:t> </a:t>
+            </a:r>
+            <a:r>
+              <a:rPr sz="1200" i="1" dirty="0">
                 <a:latin typeface="Times New Roman"/>
                 <a:cs typeface="Times New Roman"/>
               </a:rPr>
               <a:t>the</a:t>
             </a:r>
             <a:r>
-              <a:rPr dirty="0" sz="1200" spc="-20" i="1">
-                <a:latin typeface="Times New Roman"/>
-                <a:cs typeface="Times New Roman"/>
-              </a:rPr>
-              <a:t> </a:t>
-            </a:r>
-            <a:r>
-              <a:rPr dirty="0" sz="1200" i="1">
+              <a:rPr sz="1200" i="1" spc="-20" dirty="0">
+                <a:latin typeface="Times New Roman"/>
+                <a:cs typeface="Times New Roman"/>
+              </a:rPr>
+              <a:t> </a:t>
+            </a:r>
+            <a:r>
+              <a:rPr sz="1200" i="1" dirty="0">
                 <a:latin typeface="Times New Roman"/>
                 <a:cs typeface="Times New Roman"/>
               </a:rPr>
               <a:t>final</a:t>
             </a:r>
             <a:r>
-              <a:rPr dirty="0" sz="1200" spc="-20" i="1">
-                <a:latin typeface="Times New Roman"/>
-                <a:cs typeface="Times New Roman"/>
-              </a:rPr>
-              <a:t> </a:t>
-            </a:r>
-            <a:r>
-              <a:rPr dirty="0" sz="1200" i="1">
+              <a:rPr sz="1200" i="1" spc="-20" dirty="0">
+                <a:latin typeface="Times New Roman"/>
+                <a:cs typeface="Times New Roman"/>
+              </a:rPr>
+              <a:t> </a:t>
+            </a:r>
+            <a:r>
+              <a:rPr sz="1200" i="1" dirty="0">
                 <a:latin typeface="Times New Roman"/>
                 <a:cs typeface="Times New Roman"/>
               </a:rPr>
               <a:t>working</a:t>
             </a:r>
             <a:r>
-              <a:rPr dirty="0" sz="1200" spc="-20" i="1">
-                <a:latin typeface="Times New Roman"/>
-                <a:cs typeface="Times New Roman"/>
-              </a:rPr>
-              <a:t> </a:t>
-            </a:r>
-            <a:r>
-              <a:rPr dirty="0" sz="1200" i="1">
+              <a:rPr sz="1200" i="1" spc="-20" dirty="0">
+                <a:latin typeface="Times New Roman"/>
+                <a:cs typeface="Times New Roman"/>
+              </a:rPr>
+              <a:t> </a:t>
+            </a:r>
+            <a:r>
+              <a:rPr sz="1200" i="1" dirty="0">
                 <a:latin typeface="Times New Roman"/>
                 <a:cs typeface="Times New Roman"/>
               </a:rPr>
               <a:t>output</a:t>
             </a:r>
             <a:r>
-              <a:rPr dirty="0" sz="1200" spc="-20" i="1">
-                <a:latin typeface="Times New Roman"/>
-                <a:cs typeface="Times New Roman"/>
-              </a:rPr>
-              <a:t> </a:t>
-            </a:r>
-            <a:r>
-              <a:rPr dirty="0" sz="1200" i="1">
+              <a:rPr sz="1200" i="1" spc="-20" dirty="0">
+                <a:latin typeface="Times New Roman"/>
+                <a:cs typeface="Times New Roman"/>
+              </a:rPr>
+              <a:t> </a:t>
+            </a:r>
+            <a:r>
+              <a:rPr sz="1200" i="1" dirty="0">
                 <a:latin typeface="Times New Roman"/>
                 <a:cs typeface="Times New Roman"/>
               </a:rPr>
               <a:t>of</a:t>
             </a:r>
             <a:r>
-              <a:rPr dirty="0" sz="1200" spc="-20" i="1">
-                <a:latin typeface="Times New Roman"/>
-                <a:cs typeface="Times New Roman"/>
-              </a:rPr>
-              <a:t> </a:t>
-            </a:r>
-            <a:r>
-              <a:rPr dirty="0" sz="1200" i="1">
+              <a:rPr sz="1200" i="1" spc="-20" dirty="0">
+                <a:latin typeface="Times New Roman"/>
+                <a:cs typeface="Times New Roman"/>
+              </a:rPr>
+              <a:t> </a:t>
+            </a:r>
+            <a:r>
+              <a:rPr sz="1200" i="1" dirty="0">
                 <a:latin typeface="Times New Roman"/>
                 <a:cs typeface="Times New Roman"/>
               </a:rPr>
               <a:t>the</a:t>
             </a:r>
             <a:r>
-              <a:rPr dirty="0" sz="1200" spc="-20" i="1">
-                <a:latin typeface="Times New Roman"/>
-                <a:cs typeface="Times New Roman"/>
-              </a:rPr>
-              <a:t> </a:t>
-            </a:r>
-            <a:r>
-              <a:rPr dirty="0" sz="1200" i="1">
+              <a:rPr sz="1200" i="1" spc="-20" dirty="0">
+                <a:latin typeface="Times New Roman"/>
+                <a:cs typeface="Times New Roman"/>
+              </a:rPr>
+              <a:t> </a:t>
+            </a:r>
+            <a:r>
+              <a:rPr sz="1200" i="1" dirty="0">
                 <a:latin typeface="Times New Roman"/>
                 <a:cs typeface="Times New Roman"/>
               </a:rPr>
               <a:t>application,</a:t>
             </a:r>
             <a:r>
-              <a:rPr dirty="0" sz="1200" spc="-20" i="1">
-                <a:latin typeface="Times New Roman"/>
-                <a:cs typeface="Times New Roman"/>
-              </a:rPr>
-              <a:t> </a:t>
-            </a:r>
-            <a:r>
-              <a:rPr dirty="0" sz="1200" i="1">
+              <a:rPr sz="1200" i="1" spc="-20" dirty="0">
+                <a:latin typeface="Times New Roman"/>
+                <a:cs typeface="Times New Roman"/>
+              </a:rPr>
+              <a:t> </a:t>
+            </a:r>
+            <a:r>
+              <a:rPr sz="1200" i="1" dirty="0">
                 <a:latin typeface="Times New Roman"/>
                 <a:cs typeface="Times New Roman"/>
               </a:rPr>
               <a:t>including</a:t>
             </a:r>
             <a:r>
-              <a:rPr dirty="0" sz="1200" spc="-20" i="1">
-                <a:latin typeface="Times New Roman"/>
-                <a:cs typeface="Times New Roman"/>
-              </a:rPr>
-              <a:t> </a:t>
-            </a:r>
-            <a:r>
-              <a:rPr dirty="0" sz="1200" i="1">
+              <a:rPr sz="1200" i="1" spc="-20" dirty="0">
+                <a:latin typeface="Times New Roman"/>
+                <a:cs typeface="Times New Roman"/>
+              </a:rPr>
+              <a:t> </a:t>
+            </a:r>
+            <a:r>
+              <a:rPr sz="1200" i="1" dirty="0">
                 <a:latin typeface="Times New Roman"/>
                 <a:cs typeface="Times New Roman"/>
               </a:rPr>
               <a:t>the</a:t>
             </a:r>
             <a:r>
-              <a:rPr dirty="0" sz="1200" spc="-20" i="1">
-                <a:latin typeface="Times New Roman"/>
-                <a:cs typeface="Times New Roman"/>
-              </a:rPr>
-              <a:t> </a:t>
-            </a:r>
-            <a:r>
-              <a:rPr dirty="0" sz="1200" i="1">
+              <a:rPr sz="1200" i="1" spc="-20" dirty="0">
+                <a:latin typeface="Times New Roman"/>
+                <a:cs typeface="Times New Roman"/>
+              </a:rPr>
+              <a:t> </a:t>
+            </a:r>
+            <a:r>
+              <a:rPr sz="1200" i="1" dirty="0">
                 <a:latin typeface="Times New Roman"/>
                 <a:cs typeface="Times New Roman"/>
               </a:rPr>
               <a:t>form</a:t>
             </a:r>
             <a:r>
-              <a:rPr dirty="0" sz="1200" spc="-20" i="1">
-                <a:latin typeface="Times New Roman"/>
-                <a:cs typeface="Times New Roman"/>
-              </a:rPr>
-              <a:t> </a:t>
-            </a:r>
-            <a:r>
-              <a:rPr dirty="0" sz="1200" spc="-25" i="1">
+              <a:rPr sz="1200" i="1" spc="-20" dirty="0">
+                <a:latin typeface="Times New Roman"/>
+                <a:cs typeface="Times New Roman"/>
+              </a:rPr>
+              <a:t> </a:t>
+            </a:r>
+            <a:r>
+              <a:rPr sz="1200" i="1" spc="-25" dirty="0">
                 <a:latin typeface="Times New Roman"/>
                 <a:cs typeface="Times New Roman"/>
               </a:rPr>
               <a:t>and </a:t>
             </a:r>
             <a:r>
-              <a:rPr dirty="0" sz="1200" i="1">
+              <a:rPr sz="1200" i="1" dirty="0">
                 <a:latin typeface="Times New Roman"/>
                 <a:cs typeface="Times New Roman"/>
               </a:rPr>
               <a:t>participants</a:t>
             </a:r>
             <a:r>
-              <a:rPr dirty="0" sz="1200" spc="-60" i="1">
-                <a:latin typeface="Times New Roman"/>
-                <a:cs typeface="Times New Roman"/>
-              </a:rPr>
-              <a:t> </a:t>
-            </a:r>
-            <a:r>
-              <a:rPr dirty="0" sz="1200" spc="-10" i="1">
+              <a:rPr sz="1200" i="1" spc="-60" dirty="0">
+                <a:latin typeface="Times New Roman"/>
+                <a:cs typeface="Times New Roman"/>
+              </a:rPr>
+              <a:t> </a:t>
+            </a:r>
+            <a:r>
+              <a:rPr sz="1200" i="1" spc="-10" dirty="0">
                 <a:latin typeface="Times New Roman"/>
                 <a:cs typeface="Times New Roman"/>
               </a:rPr>
@@ -8094,7 +7647,7 @@
               </a:tabLst>
             </a:pPr>
             <a:r>
-              <a:rPr dirty="0" sz="2300" b="1">
+              <a:rPr sz="2300" b="1" dirty="0">
                 <a:solidFill>
                   <a:srgbClr val="3C78D8"/>
                 </a:solidFill>
@@ -8104,7 +7657,7 @@
               <a:t>Learning</a:t>
             </a:r>
             <a:r>
-              <a:rPr dirty="0" sz="2300" spc="-80" b="1">
+              <a:rPr sz="2300" b="1" spc="-80" dirty="0">
                 <a:solidFill>
                   <a:srgbClr val="3C78D8"/>
                 </a:solidFill>
@@ -8114,7 +7667,7 @@
               <a:t> </a:t>
             </a:r>
             <a:r>
-              <a:rPr dirty="0" sz="2300" spc="-10" b="1">
+              <a:rPr sz="2300" b="1" spc="-10" dirty="0">
                 <a:solidFill>
                   <a:srgbClr val="3C78D8"/>
                 </a:solidFill>
@@ -8138,133 +7691,133 @@
               </a:spcBef>
             </a:pPr>
             <a:r>
-              <a:rPr dirty="0" sz="1200" i="1">
+              <a:rPr sz="1200" i="1" dirty="0">
                 <a:latin typeface="Times New Roman"/>
                 <a:cs typeface="Times New Roman"/>
               </a:rPr>
               <a:t>(Explain</a:t>
             </a:r>
             <a:r>
-              <a:rPr dirty="0" sz="1200" spc="-35" i="1">
-                <a:latin typeface="Times New Roman"/>
-                <a:cs typeface="Times New Roman"/>
-              </a:rPr>
-              <a:t> </a:t>
-            </a:r>
-            <a:r>
-              <a:rPr dirty="0" sz="1200" i="1">
+              <a:rPr sz="1200" i="1" spc="-35" dirty="0">
+                <a:latin typeface="Times New Roman"/>
+                <a:cs typeface="Times New Roman"/>
+              </a:rPr>
+              <a:t> </a:t>
+            </a:r>
+            <a:r>
+              <a:rPr sz="1200" i="1" dirty="0">
                 <a:latin typeface="Times New Roman"/>
                 <a:cs typeface="Times New Roman"/>
               </a:rPr>
               <a:t>the</a:t>
             </a:r>
             <a:r>
-              <a:rPr dirty="0" sz="1200" spc="-30" i="1">
-                <a:latin typeface="Times New Roman"/>
-                <a:cs typeface="Times New Roman"/>
-              </a:rPr>
-              <a:t> </a:t>
-            </a:r>
-            <a:r>
-              <a:rPr dirty="0" sz="1200" i="1">
+              <a:rPr sz="1200" i="1" spc="-30" dirty="0">
+                <a:latin typeface="Times New Roman"/>
+                <a:cs typeface="Times New Roman"/>
+              </a:rPr>
+              <a:t> </a:t>
+            </a:r>
+            <a:r>
+              <a:rPr sz="1200" i="1" dirty="0">
                 <a:latin typeface="Times New Roman"/>
                 <a:cs typeface="Times New Roman"/>
               </a:rPr>
               <a:t>skills</a:t>
             </a:r>
             <a:r>
-              <a:rPr dirty="0" sz="1200" spc="-30" i="1">
-                <a:latin typeface="Times New Roman"/>
-                <a:cs typeface="Times New Roman"/>
-              </a:rPr>
-              <a:t> </a:t>
-            </a:r>
-            <a:r>
-              <a:rPr dirty="0" sz="1200" i="1">
+              <a:rPr sz="1200" i="1" spc="-30" dirty="0">
+                <a:latin typeface="Times New Roman"/>
+                <a:cs typeface="Times New Roman"/>
+              </a:rPr>
+              <a:t> </a:t>
+            </a:r>
+            <a:r>
+              <a:rPr sz="1200" i="1" dirty="0">
                 <a:latin typeface="Times New Roman"/>
                 <a:cs typeface="Times New Roman"/>
               </a:rPr>
               <a:t>and</a:t>
             </a:r>
             <a:r>
-              <a:rPr dirty="0" sz="1200" spc="-30" i="1">
-                <a:latin typeface="Times New Roman"/>
-                <a:cs typeface="Times New Roman"/>
-              </a:rPr>
-              <a:t> </a:t>
-            </a:r>
-            <a:r>
-              <a:rPr dirty="0" sz="1200" i="1">
+              <a:rPr sz="1200" i="1" spc="-30" dirty="0">
+                <a:latin typeface="Times New Roman"/>
+                <a:cs typeface="Times New Roman"/>
+              </a:rPr>
+              <a:t> </a:t>
+            </a:r>
+            <a:r>
+              <a:rPr sz="1200" i="1" dirty="0">
                 <a:latin typeface="Times New Roman"/>
                 <a:cs typeface="Times New Roman"/>
               </a:rPr>
               <a:t>knowledge</a:t>
             </a:r>
             <a:r>
-              <a:rPr dirty="0" sz="1200" spc="-35" i="1">
-                <a:latin typeface="Times New Roman"/>
-                <a:cs typeface="Times New Roman"/>
-              </a:rPr>
-              <a:t> </a:t>
-            </a:r>
-            <a:r>
-              <a:rPr dirty="0" sz="1200" i="1">
+              <a:rPr sz="1200" i="1" spc="-35" dirty="0">
+                <a:latin typeface="Times New Roman"/>
+                <a:cs typeface="Times New Roman"/>
+              </a:rPr>
+              <a:t> </a:t>
+            </a:r>
+            <a:r>
+              <a:rPr sz="1200" i="1" dirty="0">
                 <a:latin typeface="Times New Roman"/>
                 <a:cs typeface="Times New Roman"/>
               </a:rPr>
               <a:t>gained</a:t>
             </a:r>
             <a:r>
-              <a:rPr dirty="0" sz="1200" spc="-30" i="1">
-                <a:latin typeface="Times New Roman"/>
-                <a:cs typeface="Times New Roman"/>
-              </a:rPr>
-              <a:t> </a:t>
-            </a:r>
-            <a:r>
-              <a:rPr dirty="0" sz="1200" i="1">
+              <a:rPr sz="1200" i="1" spc="-30" dirty="0">
+                <a:latin typeface="Times New Roman"/>
+                <a:cs typeface="Times New Roman"/>
+              </a:rPr>
+              <a:t> </a:t>
+            </a:r>
+            <a:r>
+              <a:rPr sz="1200" i="1" dirty="0">
                 <a:latin typeface="Times New Roman"/>
                 <a:cs typeface="Times New Roman"/>
               </a:rPr>
               <a:t>from</a:t>
             </a:r>
             <a:r>
-              <a:rPr dirty="0" sz="1200" spc="-30" i="1">
-                <a:latin typeface="Times New Roman"/>
-                <a:cs typeface="Times New Roman"/>
-              </a:rPr>
-              <a:t> </a:t>
-            </a:r>
-            <a:r>
-              <a:rPr dirty="0" sz="1200" i="1">
+              <a:rPr sz="1200" i="1" spc="-30" dirty="0">
+                <a:latin typeface="Times New Roman"/>
+                <a:cs typeface="Times New Roman"/>
+              </a:rPr>
+              <a:t> </a:t>
+            </a:r>
+            <a:r>
+              <a:rPr sz="1200" i="1" dirty="0">
                 <a:latin typeface="Times New Roman"/>
                 <a:cs typeface="Times New Roman"/>
               </a:rPr>
               <a:t>completing</a:t>
             </a:r>
             <a:r>
-              <a:rPr dirty="0" sz="1200" spc="-30" i="1">
-                <a:latin typeface="Times New Roman"/>
-                <a:cs typeface="Times New Roman"/>
-              </a:rPr>
-              <a:t> </a:t>
-            </a:r>
-            <a:r>
-              <a:rPr dirty="0" sz="1200" i="1">
+              <a:rPr sz="1200" i="1" spc="-30" dirty="0">
+                <a:latin typeface="Times New Roman"/>
+                <a:cs typeface="Times New Roman"/>
+              </a:rPr>
+              <a:t> </a:t>
+            </a:r>
+            <a:r>
+              <a:rPr sz="1200" i="1" dirty="0">
                 <a:latin typeface="Times New Roman"/>
                 <a:cs typeface="Times New Roman"/>
               </a:rPr>
               <a:t>this</a:t>
             </a:r>
             <a:r>
-              <a:rPr dirty="0" sz="1200" spc="-35" i="1">
-                <a:latin typeface="Times New Roman"/>
-                <a:cs typeface="Times New Roman"/>
-              </a:rPr>
-              <a:t> </a:t>
-            </a:r>
-            <a:r>
-              <a:rPr dirty="0" sz="1200" spc="-10" i="1">
+              <a:rPr sz="1200" i="1" spc="-35" dirty="0">
+                <a:latin typeface="Times New Roman"/>
+                <a:cs typeface="Times New Roman"/>
+              </a:rPr>
+              <a:t> </a:t>
+            </a:r>
+            <a:r>
+              <a:rPr sz="1200" i="1" spc="-10" dirty="0">
                 <a:latin typeface="Times New Roman"/>
                 <a:cs typeface="Times New Roman"/>
               </a:rPr>
@@ -8319,7 +7872,7 @@
               </a:tabLst>
             </a:pPr>
             <a:r>
-              <a:rPr dirty="0" sz="2300" spc="-10" b="1">
+              <a:rPr sz="2300" b="1" spc="-10" dirty="0">
                 <a:solidFill>
                   <a:srgbClr val="3C78D8"/>
                 </a:solidFill>
@@ -8343,119 +7896,119 @@
               </a:spcBef>
             </a:pPr>
             <a:r>
-              <a:rPr dirty="0" sz="1200" i="1">
+              <a:rPr sz="1200" i="1" dirty="0">
                 <a:latin typeface="Times New Roman"/>
                 <a:cs typeface="Times New Roman"/>
               </a:rPr>
               <a:t>(Summarize</a:t>
             </a:r>
             <a:r>
-              <a:rPr dirty="0" sz="1200" spc="-25" i="1">
-                <a:latin typeface="Times New Roman"/>
-                <a:cs typeface="Times New Roman"/>
-              </a:rPr>
-              <a:t> </a:t>
-            </a:r>
-            <a:r>
-              <a:rPr dirty="0" sz="1200" i="1">
+              <a:rPr sz="1200" i="1" spc="-25" dirty="0">
+                <a:latin typeface="Times New Roman"/>
+                <a:cs typeface="Times New Roman"/>
+              </a:rPr>
+              <a:t> </a:t>
+            </a:r>
+            <a:r>
+              <a:rPr sz="1200" i="1" dirty="0">
                 <a:latin typeface="Times New Roman"/>
                 <a:cs typeface="Times New Roman"/>
               </a:rPr>
               <a:t>the</a:t>
             </a:r>
             <a:r>
-              <a:rPr dirty="0" sz="1200" spc="-30" i="1">
-                <a:latin typeface="Times New Roman"/>
-                <a:cs typeface="Times New Roman"/>
-              </a:rPr>
-              <a:t> </a:t>
-            </a:r>
-            <a:r>
-              <a:rPr dirty="0" sz="1200" i="1">
+              <a:rPr sz="1200" i="1" spc="-30" dirty="0">
+                <a:latin typeface="Times New Roman"/>
+                <a:cs typeface="Times New Roman"/>
+              </a:rPr>
+              <a:t> </a:t>
+            </a:r>
+            <a:r>
+              <a:rPr sz="1200" i="1" dirty="0">
                 <a:latin typeface="Times New Roman"/>
                 <a:cs typeface="Times New Roman"/>
               </a:rPr>
               <a:t>project</a:t>
             </a:r>
             <a:r>
-              <a:rPr dirty="0" sz="1200" spc="-25" i="1">
-                <a:latin typeface="Times New Roman"/>
-                <a:cs typeface="Times New Roman"/>
-              </a:rPr>
-              <a:t> </a:t>
-            </a:r>
-            <a:r>
-              <a:rPr dirty="0" sz="1200" i="1">
+              <a:rPr sz="1200" i="1" spc="-25" dirty="0">
+                <a:latin typeface="Times New Roman"/>
+                <a:cs typeface="Times New Roman"/>
+              </a:rPr>
+              <a:t> </a:t>
+            </a:r>
+            <a:r>
+              <a:rPr sz="1200" i="1" dirty="0">
                 <a:latin typeface="Times New Roman"/>
                 <a:cs typeface="Times New Roman"/>
               </a:rPr>
               <a:t>and</a:t>
             </a:r>
             <a:r>
-              <a:rPr dirty="0" sz="1200" spc="-25" i="1">
-                <a:latin typeface="Times New Roman"/>
-                <a:cs typeface="Times New Roman"/>
-              </a:rPr>
-              <a:t> </a:t>
-            </a:r>
-            <a:r>
-              <a:rPr dirty="0" sz="1200" i="1">
+              <a:rPr sz="1200" i="1" spc="-25" dirty="0">
+                <a:latin typeface="Times New Roman"/>
+                <a:cs typeface="Times New Roman"/>
+              </a:rPr>
+              <a:t> </a:t>
+            </a:r>
+            <a:r>
+              <a:rPr sz="1200" i="1" dirty="0">
                 <a:latin typeface="Times New Roman"/>
                 <a:cs typeface="Times New Roman"/>
               </a:rPr>
               <a:t>briefly</a:t>
             </a:r>
             <a:r>
-              <a:rPr dirty="0" sz="1200" spc="-25" i="1">
-                <a:latin typeface="Times New Roman"/>
-                <a:cs typeface="Times New Roman"/>
-              </a:rPr>
-              <a:t> </a:t>
-            </a:r>
-            <a:r>
-              <a:rPr dirty="0" sz="1200" i="1">
+              <a:rPr sz="1200" i="1" spc="-25" dirty="0">
+                <a:latin typeface="Times New Roman"/>
+                <a:cs typeface="Times New Roman"/>
+              </a:rPr>
+              <a:t> </a:t>
+            </a:r>
+            <a:r>
+              <a:rPr sz="1200" i="1" dirty="0">
                 <a:latin typeface="Times New Roman"/>
                 <a:cs typeface="Times New Roman"/>
               </a:rPr>
               <a:t>describe</a:t>
             </a:r>
             <a:r>
-              <a:rPr dirty="0" sz="1200" spc="-20" i="1">
-                <a:latin typeface="Times New Roman"/>
-                <a:cs typeface="Times New Roman"/>
-              </a:rPr>
-              <a:t> </a:t>
-            </a:r>
-            <a:r>
-              <a:rPr dirty="0" sz="1200" i="1">
+              <a:rPr sz="1200" i="1" spc="-20" dirty="0">
+                <a:latin typeface="Times New Roman"/>
+                <a:cs typeface="Times New Roman"/>
+              </a:rPr>
+              <a:t> </a:t>
+            </a:r>
+            <a:r>
+              <a:rPr sz="1200" i="1" dirty="0">
                 <a:latin typeface="Times New Roman"/>
                 <a:cs typeface="Times New Roman"/>
               </a:rPr>
               <a:t>the</a:t>
             </a:r>
             <a:r>
-              <a:rPr dirty="0" sz="1200" spc="-25" i="1">
-                <a:latin typeface="Times New Roman"/>
-                <a:cs typeface="Times New Roman"/>
-              </a:rPr>
-              <a:t> </a:t>
-            </a:r>
-            <a:r>
-              <a:rPr dirty="0" sz="1200" i="1">
+              <a:rPr sz="1200" i="1" spc="-25" dirty="0">
+                <a:latin typeface="Times New Roman"/>
+                <a:cs typeface="Times New Roman"/>
+              </a:rPr>
+              <a:t> </a:t>
+            </a:r>
+            <a:r>
+              <a:rPr sz="1200" i="1" dirty="0">
                 <a:latin typeface="Times New Roman"/>
                 <a:cs typeface="Times New Roman"/>
               </a:rPr>
               <a:t>final</a:t>
             </a:r>
             <a:r>
-              <a:rPr dirty="0" sz="1200" spc="-30" i="1">
-                <a:latin typeface="Times New Roman"/>
-                <a:cs typeface="Times New Roman"/>
-              </a:rPr>
-              <a:t> </a:t>
-            </a:r>
-            <a:r>
-              <a:rPr dirty="0" sz="1200" spc="-10" i="1">
+              <a:rPr sz="1200" i="1" spc="-30" dirty="0">
+                <a:latin typeface="Times New Roman"/>
+                <a:cs typeface="Times New Roman"/>
+              </a:rPr>
+              <a:t> </a:t>
+            </a:r>
+            <a:r>
+              <a:rPr sz="1200" i="1" spc="-10" dirty="0">
                 <a:latin typeface="Times New Roman"/>
                 <a:cs typeface="Times New Roman"/>
               </a:rPr>
@@ -8470,7 +8023,7 @@
       </p:sp>
       <p:pic>
         <p:nvPicPr>
-          <p:cNvPr id="9" name="object 9" descr=""/>
+          <p:cNvPr id="9" name="object 9"/>
           <p:cNvPicPr/>
           <p:nvPr/>
         </p:nvPicPr>
@@ -8492,7 +8045,7 @@
       </p:pic>
       <p:pic>
         <p:nvPicPr>
-          <p:cNvPr id="10" name="object 10" descr=""/>
+          <p:cNvPr id="10" name="object 10"/>
           <p:cNvPicPr/>
           <p:nvPr/>
         </p:nvPicPr>

--- a/ppt/FE Assignment-1 Template.pptx
+++ b/ppt/FE Assignment-1 Template.pptx
@@ -187,7 +187,7 @@
           <a:p>
             <a:fld id="{1D8BD707-D9CF-40AE-B4C6-C98DA3205C09}" type="datetimeFigureOut">
               <a:rPr lang="en-US"/>
-              <a:t>3/4/2026</a:t>
+              <a:t>3/5/2026</a:t>
             </a:fld>
             <a:endParaRPr lang="en-US"/>
           </a:p>
@@ -364,7 +364,7 @@
           <a:p>
             <a:fld id="{1D8BD707-D9CF-40AE-B4C6-C98DA3205C09}" type="datetimeFigureOut">
               <a:rPr lang="en-US"/>
-              <a:t>3/4/2026</a:t>
+              <a:t>3/5/2026</a:t>
             </a:fld>
             <a:endParaRPr lang="en-US"/>
           </a:p>
@@ -578,7 +578,7 @@
           <a:p>
             <a:fld id="{1D8BD707-D9CF-40AE-B4C6-C98DA3205C09}" type="datetimeFigureOut">
               <a:rPr lang="en-US"/>
-              <a:t>3/4/2026</a:t>
+              <a:t>3/5/2026</a:t>
             </a:fld>
             <a:endParaRPr lang="en-US"/>
           </a:p>
@@ -726,7 +726,7 @@
           <a:p>
             <a:fld id="{1D8BD707-D9CF-40AE-B4C6-C98DA3205C09}" type="datetimeFigureOut">
               <a:rPr lang="en-US"/>
-              <a:t>3/4/2026</a:t>
+              <a:t>3/5/2026</a:t>
             </a:fld>
             <a:endParaRPr lang="en-US"/>
           </a:p>
@@ -845,7 +845,7 @@
           <a:p>
             <a:fld id="{1D8BD707-D9CF-40AE-B4C6-C98DA3205C09}" type="datetimeFigureOut">
               <a:rPr lang="en-US"/>
-              <a:t>3/4/2026</a:t>
+              <a:t>3/5/2026</a:t>
             </a:fld>
             <a:endParaRPr lang="en-US"/>
           </a:p>
@@ -1070,7 +1070,7 @@
           <a:p>
             <a:fld id="{1D8BD707-D9CF-40AE-B4C6-C98DA3205C09}" type="datetimeFigureOut">
               <a:rPr lang="en-US"/>
-              <a:t>3/4/2026</a:t>
+              <a:t>3/5/2026</a:t>
             </a:fld>
             <a:endParaRPr lang="en-US"/>
           </a:p>
@@ -1390,6 +1390,10 @@
           </p:nvPr>
         </p:nvSpPr>
         <p:spPr>
+          <a:xfrm>
+            <a:off x="551278" y="2159508"/>
+            <a:ext cx="6466642" cy="7236918"/>
+          </a:xfrm>
           <a:prstGeom prst="rect">
             <a:avLst/>
           </a:prstGeom>
@@ -1446,7 +1450,11 @@
               <a:rPr sz="1200" spc="-10" dirty="0"/>
               <a:t>NAME:</a:t>
             </a:r>
-            <a:endParaRPr sz="1200"/>
+            <a:r>
+              <a:rPr lang="en-US" sz="1200" spc="-10" dirty="0"/>
+              <a:t> Hariharan S</a:t>
+            </a:r>
+            <a:endParaRPr sz="1200" dirty="0"/>
           </a:p>
           <a:p>
             <a:pPr marL="360045">
@@ -1461,7 +1469,11 @@
               <a:rPr sz="1200" spc="-10" dirty="0"/>
               <a:t>YEAR:</a:t>
             </a:r>
-            <a:endParaRPr sz="1200"/>
+            <a:r>
+              <a:rPr lang="en-US" sz="1200" spc="-10" dirty="0"/>
+              <a:t> II</a:t>
+            </a:r>
+            <a:endParaRPr sz="1200" dirty="0"/>
           </a:p>
           <a:p>
             <a:pPr marL="360045">
@@ -1484,7 +1496,11 @@
               <a:rPr sz="1200" spc="-10" dirty="0"/>
               <a:t>CODE:</a:t>
             </a:r>
-            <a:endParaRPr sz="1200"/>
+            <a:r>
+              <a:rPr lang="en-US" sz="1200" spc="-10" dirty="0"/>
+              <a:t> 1455</a:t>
+            </a:r>
+            <a:endParaRPr sz="1200" dirty="0"/>
           </a:p>
           <a:p>
             <a:pPr marL="360045">
@@ -1507,7 +1523,15 @@
               <a:rPr sz="1200" spc="-10" dirty="0"/>
               <a:t>NAME:</a:t>
             </a:r>
-            <a:endParaRPr sz="1200"/>
+            <a:r>
+              <a:rPr lang="en-US" sz="1200" spc="-10" dirty="0"/>
+              <a:t> Tagore College of Arts And Science ,</a:t>
+            </a:r>
+            <a:r>
+              <a:rPr lang="en-US" sz="1200" spc="-10" dirty="0" err="1"/>
+              <a:t>Chrompet</a:t>
+            </a:r>
+            <a:endParaRPr sz="1200" dirty="0"/>
           </a:p>
           <a:p>
             <a:pPr marL="360045">
@@ -1522,7 +1546,11 @@
               <a:rPr sz="1200" spc="-10" dirty="0"/>
               <a:t>DEPARTMENT:</a:t>
             </a:r>
-            <a:endParaRPr sz="1200"/>
+            <a:r>
+              <a:rPr lang="en-US" sz="1200" spc="-10" dirty="0"/>
+              <a:t> Computer Science </a:t>
+            </a:r>
+            <a:endParaRPr sz="1200" dirty="0"/>
           </a:p>
           <a:p>
             <a:pPr marL="360045">
@@ -1537,7 +1565,19 @@
               <a:rPr sz="1200" spc="-10" dirty="0"/>
               <a:t>SEMESTER:</a:t>
             </a:r>
-            <a:endParaRPr sz="1200"/>
+            <a:r>
+              <a:rPr lang="en-US" sz="1200" spc="-10" dirty="0"/>
+              <a:t> 4</a:t>
+            </a:r>
+            <a:r>
+              <a:rPr lang="en-US" sz="1200" spc="-10" baseline="30000" dirty="0"/>
+              <a:t>th</a:t>
+            </a:r>
+            <a:r>
+              <a:rPr lang="en-US" sz="1200" spc="-10" dirty="0"/>
+              <a:t> Semester</a:t>
+            </a:r>
+            <a:endParaRPr sz="1200" dirty="0"/>
           </a:p>
           <a:p>
             <a:pPr marL="360045">
@@ -1556,7 +1596,11 @@
               <a:rPr sz="1200" spc="-25" dirty="0"/>
               <a:t>NO:</a:t>
             </a:r>
-            <a:endParaRPr sz="1200"/>
+            <a:r>
+              <a:rPr lang="en-US" sz="1200" spc="-25" dirty="0"/>
+              <a:t>  222407723</a:t>
+            </a:r>
+            <a:endParaRPr sz="1200" dirty="0"/>
           </a:p>
           <a:p>
             <a:pPr marL="360045">
@@ -1571,7 +1615,11 @@
               <a:rPr sz="1200" spc="-10" dirty="0"/>
               <a:t>NMID:</a:t>
             </a:r>
-            <a:endParaRPr sz="1200"/>
+            <a:r>
+              <a:rPr lang="en-US" sz="1200" spc="-10" dirty="0"/>
+              <a:t> </a:t>
+            </a:r>
+            <a:endParaRPr sz="1200" dirty="0"/>
           </a:p>
           <a:p>
             <a:pPr marL="360045">
@@ -1586,7 +1634,11 @@
               <a:rPr sz="1200" spc="-10" dirty="0"/>
               <a:t>DATE:</a:t>
             </a:r>
-            <a:endParaRPr sz="1200"/>
+            <a:r>
+              <a:rPr lang="en-US" sz="1200" spc="-10" dirty="0"/>
+              <a:t> 06/03/2026</a:t>
+            </a:r>
+            <a:endParaRPr sz="1200" dirty="0"/>
           </a:p>
           <a:p>
             <a:pPr marL="360045">
@@ -1605,7 +1657,11 @@
               <a:rPr sz="1200" spc="-10" dirty="0"/>
               <a:t>TITLE:</a:t>
             </a:r>
-            <a:endParaRPr sz="1200"/>
+            <a:r>
+              <a:rPr lang="en-US" sz="1200" spc="-10" dirty="0"/>
+              <a:t> </a:t>
+            </a:r>
+            <a:endParaRPr sz="1200" dirty="0"/>
           </a:p>
           <a:p>
             <a:pPr marL="10795">
@@ -1613,7 +1669,7 @@
                 <a:spcPct val="100000"/>
               </a:lnSpc>
             </a:pPr>
-            <a:endParaRPr sz="1200"/>
+            <a:endParaRPr sz="1200" dirty="0"/>
           </a:p>
           <a:p>
             <a:pPr marL="10795">
@@ -1624,7 +1680,7 @@
                 <a:spcPts val="440"/>
               </a:spcBef>
             </a:pPr>
-            <a:endParaRPr sz="1200"/>
+            <a:endParaRPr sz="1200" dirty="0"/>
           </a:p>
           <a:p>
             <a:pPr marL="244475" indent="-222250">
@@ -1677,7 +1733,7 @@
               </a:rPr>
               <a:t>Assumptions:</a:t>
             </a:r>
-            <a:endParaRPr sz="2300"/>
+            <a:endParaRPr sz="2300" dirty="0"/>
           </a:p>
           <a:p>
             <a:pPr marL="115570">
@@ -1891,7 +1947,7 @@
               </a:rPr>
               <a:t>about.).</a:t>
             </a:r>
-            <a:endParaRPr sz="1300">
+            <a:endParaRPr sz="1300" dirty="0">
               <a:latin typeface="Times New Roman"/>
               <a:cs typeface="Times New Roman"/>
             </a:endParaRPr>
@@ -1917,7 +1973,7 @@
               </a:rPr>
               <a:t>Assignment:</a:t>
             </a:r>
-            <a:endParaRPr sz="1700">
+            <a:endParaRPr sz="1700" dirty="0">
               <a:latin typeface="Times New Roman"/>
               <a:cs typeface="Times New Roman"/>
             </a:endParaRPr>
@@ -2414,7 +2470,7 @@
               </a:rPr>
               <a:t>JavaScript.</a:t>
             </a:r>
-            <a:endParaRPr sz="1200">
+            <a:endParaRPr sz="1200" dirty="0">
               <a:latin typeface="Times New Roman"/>
               <a:cs typeface="Times New Roman"/>
             </a:endParaRPr>
@@ -2519,7 +2575,7 @@
               </a:rPr>
               <a:t>to:</a:t>
             </a:r>
-            <a:endParaRPr sz="1200">
+            <a:endParaRPr sz="1200" dirty="0">
               <a:latin typeface="Times New Roman"/>
               <a:cs typeface="Times New Roman"/>
             </a:endParaRPr>
@@ -2573,7 +2629,7 @@
               </a:rPr>
               <a:t>details</a:t>
             </a:r>
-            <a:endParaRPr sz="1200">
+            <a:endParaRPr sz="1200" dirty="0">
               <a:latin typeface="Times New Roman"/>
               <a:cs typeface="Times New Roman"/>
             </a:endParaRPr>
@@ -2623,7 +2679,7 @@
               </a:rPr>
               <a:t>information</a:t>
             </a:r>
-            <a:endParaRPr sz="1200">
+            <a:endParaRPr sz="1200" dirty="0">
               <a:latin typeface="Times New Roman"/>
               <a:cs typeface="Times New Roman"/>
             </a:endParaRPr>
@@ -2673,7 +2729,7 @@
               </a:rPr>
               <a:t>preferences</a:t>
             </a:r>
-            <a:endParaRPr sz="1200">
+            <a:endParaRPr sz="1200" dirty="0">
               <a:latin typeface="Times New Roman"/>
               <a:cs typeface="Times New Roman"/>
             </a:endParaRPr>
@@ -2723,7 +2779,7 @@
               </a:rPr>
               <a:t>details</a:t>
             </a:r>
-            <a:endParaRPr sz="1200">
+            <a:endParaRPr sz="1200" dirty="0">
               <a:latin typeface="Times New Roman"/>
               <a:cs typeface="Times New Roman"/>
             </a:endParaRPr>
@@ -2801,7 +2857,7 @@
               </a:rPr>
               <a:t>table)</a:t>
             </a:r>
-            <a:endParaRPr sz="1200">
+            <a:endParaRPr sz="1200" dirty="0">
               <a:latin typeface="Times New Roman"/>
               <a:cs typeface="Times New Roman"/>
             </a:endParaRPr>

--- a/ppt/FE Assignment-1 Template.pptx
+++ b/ppt/FE Assignment-1 Template.pptx
@@ -9,6 +9,7 @@
     <p:sldId id="257" r:id="rId3"/>
     <p:sldId id="258" r:id="rId4"/>
     <p:sldId id="259" r:id="rId5"/>
+    <p:sldId id="260" r:id="rId6"/>
   </p:sldIdLst>
   <p:sldSz cx="7569200" cy="10693400"/>
   <p:notesSz cx="7569200" cy="10693400"/>
@@ -1300,6 +1301,10 @@
           </p:nvPr>
         </p:nvSpPr>
         <p:spPr>
+          <a:xfrm>
+            <a:off x="1732569" y="1229789"/>
+            <a:ext cx="4104062" cy="375919"/>
+          </a:xfrm>
           <a:prstGeom prst="rect">
             <a:avLst/>
           </a:prstGeom>
@@ -1345,7 +1350,7 @@
         </p:nvSpPr>
         <p:spPr>
           <a:xfrm>
-            <a:off x="660400" y="5594349"/>
+            <a:off x="680083" y="5346700"/>
             <a:ext cx="6502400" cy="0"/>
           </a:xfrm>
           <a:custGeom>
@@ -1391,8 +1396,8 @@
         </p:nvSpPr>
         <p:spPr>
           <a:xfrm>
-            <a:off x="551278" y="2159508"/>
-            <a:ext cx="6466642" cy="7236918"/>
+            <a:off x="442158" y="1742023"/>
+            <a:ext cx="6466642" cy="8799845"/>
           </a:xfrm>
           <a:prstGeom prst="rect">
             <a:avLst/>
@@ -1452,9 +1457,13 @@
             </a:r>
             <a:r>
               <a:rPr lang="en-US" sz="1200" spc="-10" dirty="0"/>
-              <a:t> Hariharan S</a:t>
-            </a:r>
-            <a:endParaRPr sz="1200" dirty="0"/>
+              <a:t> </a:t>
+            </a:r>
+            <a:r>
+              <a:rPr lang="en-US" sz="1300" spc="-10" dirty="0"/>
+              <a:t>Hariharan S</a:t>
+            </a:r>
+            <a:endParaRPr sz="1300" dirty="0"/>
           </a:p>
           <a:p>
             <a:pPr marL="360045">
@@ -1470,10 +1479,10 @@
               <a:t>YEAR:</a:t>
             </a:r>
             <a:r>
-              <a:rPr lang="en-US" sz="1200" spc="-10" dirty="0"/>
+              <a:rPr lang="en-US" sz="1300" spc="-10" dirty="0"/>
               <a:t> II</a:t>
             </a:r>
-            <a:endParaRPr sz="1200" dirty="0"/>
+            <a:endParaRPr sz="1300" dirty="0"/>
           </a:p>
           <a:p>
             <a:pPr marL="360045">
@@ -1498,9 +1507,13 @@
             </a:r>
             <a:r>
               <a:rPr lang="en-US" sz="1200" spc="-10" dirty="0"/>
-              <a:t> 1455</a:t>
-            </a:r>
-            <a:endParaRPr sz="1200" dirty="0"/>
+              <a:t> </a:t>
+            </a:r>
+            <a:r>
+              <a:rPr lang="en-US" sz="1300" spc="-10" dirty="0"/>
+              <a:t>1455</a:t>
+            </a:r>
+            <a:endParaRPr sz="1300" dirty="0"/>
           </a:p>
           <a:p>
             <a:pPr marL="360045">
@@ -1525,13 +1538,17 @@
             </a:r>
             <a:r>
               <a:rPr lang="en-US" sz="1200" spc="-10" dirty="0"/>
-              <a:t> Tagore College of Arts And Science ,</a:t>
-            </a:r>
-            <a:r>
-              <a:rPr lang="en-US" sz="1200" spc="-10" dirty="0" err="1"/>
+              <a:t> </a:t>
+            </a:r>
+            <a:r>
+              <a:rPr lang="en-US" sz="1300" spc="-10" dirty="0"/>
+              <a:t>Tagore College of Arts And Science ,</a:t>
+            </a:r>
+            <a:r>
+              <a:rPr lang="en-US" sz="1300" spc="-10" dirty="0" err="1"/>
               <a:t>Chrompet</a:t>
             </a:r>
-            <a:endParaRPr sz="1200" dirty="0"/>
+            <a:endParaRPr sz="1300" dirty="0"/>
           </a:p>
           <a:p>
             <a:pPr marL="360045">
@@ -1544,13 +1561,17 @@
             </a:pPr>
             <a:r>
               <a:rPr sz="1200" spc="-10" dirty="0"/>
-              <a:t>DEPARTMENT:</a:t>
-            </a:r>
-            <a:r>
-              <a:rPr lang="en-US" sz="1200" spc="-10" dirty="0"/>
+              <a:t>DEPARTMENT</a:t>
+            </a:r>
+            <a:r>
+              <a:rPr sz="1300" spc="-10" dirty="0"/>
+              <a:t>:</a:t>
+            </a:r>
+            <a:r>
+              <a:rPr lang="en-US" sz="1300" spc="-10" dirty="0"/>
               <a:t> Computer Science </a:t>
             </a:r>
-            <a:endParaRPr sz="1200" dirty="0"/>
+            <a:endParaRPr sz="1300" dirty="0"/>
           </a:p>
           <a:p>
             <a:pPr marL="360045">
@@ -1563,21 +1584,25 @@
             </a:pPr>
             <a:r>
               <a:rPr sz="1200" spc="-10" dirty="0"/>
-              <a:t>SEMESTER:</a:t>
-            </a:r>
-            <a:r>
-              <a:rPr lang="en-US" sz="1200" spc="-10" dirty="0"/>
-              <a:t> 4</a:t>
-            </a:r>
-            <a:r>
-              <a:rPr lang="en-US" sz="1200" spc="-10" baseline="30000" dirty="0"/>
+              <a:t>SEMESTER</a:t>
+            </a:r>
+            <a:r>
+              <a:rPr lang="en-IN" sz="1200" spc="-10" dirty="0"/>
+              <a:t>: </a:t>
+            </a:r>
+            <a:r>
+              <a:rPr lang="en-IN" sz="1300" spc="-10" dirty="0"/>
+              <a:t>4</a:t>
+            </a:r>
+            <a:r>
+              <a:rPr lang="en-IN" sz="1300" spc="-10" baseline="30000" dirty="0"/>
               <a:t>th</a:t>
             </a:r>
             <a:r>
-              <a:rPr lang="en-US" sz="1200" spc="-10" dirty="0"/>
+              <a:rPr lang="en-IN" sz="1300" spc="-10" dirty="0"/>
               <a:t> Semester</a:t>
             </a:r>
-            <a:endParaRPr sz="1200" dirty="0"/>
+            <a:endParaRPr sz="1300" dirty="0"/>
           </a:p>
           <a:p>
             <a:pPr marL="360045">
@@ -1598,9 +1623,13 @@
             </a:r>
             <a:r>
               <a:rPr lang="en-US" sz="1200" spc="-25" dirty="0"/>
-              <a:t>  222407723</a:t>
-            </a:r>
-            <a:endParaRPr sz="1200" dirty="0"/>
+              <a:t>  </a:t>
+            </a:r>
+            <a:r>
+              <a:rPr lang="en-US" sz="1300" spc="-25" dirty="0"/>
+              <a:t>222407723</a:t>
+            </a:r>
+            <a:endParaRPr sz="1300" dirty="0"/>
           </a:p>
           <a:p>
             <a:pPr marL="360045">
@@ -1636,9 +1665,13 @@
             </a:r>
             <a:r>
               <a:rPr lang="en-US" sz="1200" spc="-10" dirty="0"/>
-              <a:t> 06/03/2026</a:t>
-            </a:r>
-            <a:endParaRPr sz="1200" dirty="0"/>
+              <a:t> </a:t>
+            </a:r>
+            <a:r>
+              <a:rPr lang="en-US" sz="1300" spc="-10" dirty="0"/>
+              <a:t>06/03/2026</a:t>
+            </a:r>
+            <a:endParaRPr sz="1300" dirty="0"/>
           </a:p>
           <a:p>
             <a:pPr marL="360045">
@@ -1694,7 +1727,7 @@
               </a:tabLst>
             </a:pPr>
             <a:r>
-              <a:rPr sz="2300" dirty="0">
+              <a:rPr lang="en-US" sz="2300" dirty="0">
                 <a:solidFill>
                   <a:srgbClr val="6D9DEB"/>
                 </a:solidFill>
@@ -1702,7 +1735,7 @@
               <a:t>Assignment</a:t>
             </a:r>
             <a:r>
-              <a:rPr sz="2300" spc="-55" dirty="0">
+              <a:rPr lang="en-US" sz="2300" spc="-55" dirty="0">
                 <a:solidFill>
                   <a:srgbClr val="6D9DEB"/>
                 </a:solidFill>
@@ -1710,7 +1743,7 @@
               <a:t> </a:t>
             </a:r>
             <a:r>
-              <a:rPr sz="2300" dirty="0">
+              <a:rPr lang="en-US" sz="2300" dirty="0">
                 <a:solidFill>
                   <a:srgbClr val="6D9DEB"/>
                 </a:solidFill>
@@ -1718,7 +1751,7 @@
               <a:t>and</a:t>
             </a:r>
             <a:r>
-              <a:rPr sz="2300" spc="-55" dirty="0">
+              <a:rPr lang="en-US" sz="2300" spc="-55" dirty="0">
                 <a:solidFill>
                   <a:srgbClr val="6D9DEB"/>
                 </a:solidFill>
@@ -1726,231 +1759,53 @@
               <a:t> </a:t>
             </a:r>
             <a:r>
-              <a:rPr sz="2300" spc="-10" dirty="0">
+              <a:rPr lang="en-US" sz="2300" spc="-10" dirty="0">
                 <a:solidFill>
                   <a:srgbClr val="6D9DEB"/>
                 </a:solidFill>
               </a:rPr>
               <a:t>Assumptions:</a:t>
             </a:r>
-            <a:endParaRPr sz="2300" dirty="0"/>
-          </a:p>
-          <a:p>
-            <a:pPr marL="115570">
+            <a:endParaRPr lang="en-US" sz="2300" dirty="0"/>
+          </a:p>
+          <a:p>
+            <a:pPr marL="23495" lvl="1">
               <a:lnSpc>
                 <a:spcPct val="100000"/>
               </a:lnSpc>
               <a:spcBef>
-                <a:spcPts val="1275"/>
+                <a:spcPts val="655"/>
               </a:spcBef>
-            </a:pPr>
-            <a:r>
-              <a:rPr sz="1300" b="0" i="1" dirty="0">
-                <a:latin typeface="Times New Roman"/>
-                <a:cs typeface="Times New Roman"/>
-              </a:rPr>
-              <a:t>(This</a:t>
-            </a:r>
-            <a:r>
-              <a:rPr sz="1300" b="0" i="1" spc="-25" dirty="0">
-                <a:latin typeface="Times New Roman"/>
-                <a:cs typeface="Times New Roman"/>
-              </a:rPr>
-              <a:t> </a:t>
-            </a:r>
-            <a:r>
-              <a:rPr sz="1300" b="0" i="1" dirty="0">
-                <a:latin typeface="Times New Roman"/>
-                <a:cs typeface="Times New Roman"/>
-              </a:rPr>
-              <a:t>section</a:t>
-            </a:r>
-            <a:r>
-              <a:rPr sz="1300" b="0" i="1" spc="-25" dirty="0">
-                <a:latin typeface="Times New Roman"/>
-                <a:cs typeface="Times New Roman"/>
-              </a:rPr>
-              <a:t> </a:t>
-            </a:r>
-            <a:r>
-              <a:rPr sz="1300" b="0" i="1" dirty="0">
-                <a:latin typeface="Times New Roman"/>
-                <a:cs typeface="Times New Roman"/>
-              </a:rPr>
-              <a:t>gives</a:t>
-            </a:r>
-            <a:r>
-              <a:rPr sz="1300" b="0" i="1" spc="-25" dirty="0">
-                <a:latin typeface="Times New Roman"/>
-                <a:cs typeface="Times New Roman"/>
-              </a:rPr>
-              <a:t> </a:t>
-            </a:r>
-            <a:r>
-              <a:rPr sz="1300" b="0" i="1" dirty="0">
-                <a:latin typeface="Times New Roman"/>
-                <a:cs typeface="Times New Roman"/>
-              </a:rPr>
-              <a:t>an</a:t>
-            </a:r>
-            <a:r>
-              <a:rPr sz="1300" b="0" i="1" spc="-25" dirty="0">
-                <a:latin typeface="Times New Roman"/>
-                <a:cs typeface="Times New Roman"/>
-              </a:rPr>
-              <a:t> </a:t>
-            </a:r>
-            <a:r>
-              <a:rPr sz="1300" b="0" i="1" dirty="0">
-                <a:latin typeface="Times New Roman"/>
-                <a:cs typeface="Times New Roman"/>
-              </a:rPr>
-              <a:t>overview</a:t>
-            </a:r>
-            <a:r>
-              <a:rPr sz="1300" b="0" i="1" spc="-25" dirty="0">
-                <a:latin typeface="Times New Roman"/>
-                <a:cs typeface="Times New Roman"/>
-              </a:rPr>
-              <a:t> </a:t>
-            </a:r>
-            <a:r>
-              <a:rPr sz="1300" b="0" i="1" dirty="0">
-                <a:latin typeface="Times New Roman"/>
-                <a:cs typeface="Times New Roman"/>
-              </a:rPr>
-              <a:t>of</a:t>
-            </a:r>
-            <a:r>
-              <a:rPr sz="1300" b="0" i="1" spc="-25" dirty="0">
-                <a:latin typeface="Times New Roman"/>
-                <a:cs typeface="Times New Roman"/>
-              </a:rPr>
-              <a:t> </a:t>
-            </a:r>
-            <a:r>
-              <a:rPr sz="1300" b="0" i="1" dirty="0">
-                <a:latin typeface="Times New Roman"/>
-                <a:cs typeface="Times New Roman"/>
-              </a:rPr>
-              <a:t>the</a:t>
-            </a:r>
-            <a:r>
-              <a:rPr sz="1300" b="0" i="1" spc="-25" dirty="0">
-                <a:latin typeface="Times New Roman"/>
-                <a:cs typeface="Times New Roman"/>
-              </a:rPr>
-              <a:t> </a:t>
-            </a:r>
-            <a:r>
-              <a:rPr sz="1300" b="0" i="1" dirty="0">
-                <a:latin typeface="Times New Roman"/>
-                <a:cs typeface="Times New Roman"/>
-              </a:rPr>
-              <a:t>assignment</a:t>
-            </a:r>
-            <a:r>
-              <a:rPr sz="1300" b="0" i="1" spc="-25" dirty="0">
-                <a:latin typeface="Times New Roman"/>
-                <a:cs typeface="Times New Roman"/>
-              </a:rPr>
-              <a:t> </a:t>
-            </a:r>
-            <a:r>
-              <a:rPr sz="1300" b="0" i="1" dirty="0">
-                <a:latin typeface="Times New Roman"/>
-                <a:cs typeface="Times New Roman"/>
-              </a:rPr>
-              <a:t>and</a:t>
-            </a:r>
-            <a:r>
-              <a:rPr sz="1300" b="0" i="1" spc="-25" dirty="0">
-                <a:latin typeface="Times New Roman"/>
-                <a:cs typeface="Times New Roman"/>
-              </a:rPr>
-              <a:t> </a:t>
-            </a:r>
-            <a:r>
-              <a:rPr sz="1300" b="0" i="1" dirty="0">
-                <a:latin typeface="Times New Roman"/>
-                <a:cs typeface="Times New Roman"/>
-              </a:rPr>
-              <a:t>explains</a:t>
-            </a:r>
-            <a:r>
-              <a:rPr sz="1300" b="0" i="1" spc="-25" dirty="0">
-                <a:latin typeface="Times New Roman"/>
-                <a:cs typeface="Times New Roman"/>
-              </a:rPr>
-              <a:t> </a:t>
-            </a:r>
-            <a:r>
-              <a:rPr sz="1300" b="0" i="1" dirty="0">
-                <a:latin typeface="Times New Roman"/>
-                <a:cs typeface="Times New Roman"/>
-              </a:rPr>
-              <a:t>what</a:t>
-            </a:r>
-            <a:r>
-              <a:rPr sz="1300" b="0" i="1" spc="-25" dirty="0">
-                <a:latin typeface="Times New Roman"/>
-                <a:cs typeface="Times New Roman"/>
-              </a:rPr>
-              <a:t> </a:t>
-            </a:r>
-            <a:r>
-              <a:rPr sz="1300" b="0" i="1" dirty="0">
-                <a:latin typeface="Times New Roman"/>
-                <a:cs typeface="Times New Roman"/>
-              </a:rPr>
-              <a:t>the</a:t>
-            </a:r>
-            <a:r>
-              <a:rPr sz="1300" b="0" i="1" spc="-25" dirty="0">
-                <a:latin typeface="Times New Roman"/>
-                <a:cs typeface="Times New Roman"/>
-              </a:rPr>
-              <a:t> </a:t>
-            </a:r>
-            <a:r>
-              <a:rPr sz="1300" b="0" i="1" spc="-10" dirty="0">
-                <a:latin typeface="Times New Roman"/>
-                <a:cs typeface="Times New Roman"/>
-              </a:rPr>
-              <a:t>project</a:t>
-            </a:r>
-            <a:r>
-              <a:rPr sz="1300" b="0" i="1" spc="-25" dirty="0">
-                <a:latin typeface="Times New Roman"/>
-                <a:cs typeface="Times New Roman"/>
-              </a:rPr>
-              <a:t> </a:t>
-            </a:r>
-            <a:r>
-              <a:rPr sz="1300" b="0" i="1" dirty="0">
-                <a:latin typeface="Times New Roman"/>
-                <a:cs typeface="Times New Roman"/>
-              </a:rPr>
-              <a:t>is</a:t>
-            </a:r>
-            <a:r>
-              <a:rPr sz="1300" b="0" i="1" spc="-25" dirty="0">
-                <a:latin typeface="Times New Roman"/>
-                <a:cs typeface="Times New Roman"/>
-              </a:rPr>
-              <a:t> </a:t>
-            </a:r>
-            <a:r>
-              <a:rPr sz="1300" b="0" i="1" spc="-10" dirty="0">
-                <a:latin typeface="Times New Roman"/>
-                <a:cs typeface="Times New Roman"/>
-              </a:rPr>
-              <a:t>about.).</a:t>
-            </a:r>
-            <a:endParaRPr sz="1300" dirty="0">
+              <a:buSzPct val="94117"/>
+              <a:tabLst>
+                <a:tab pos="345440" algn="l"/>
+              </a:tabLst>
+            </a:pPr>
+            <a:endParaRPr lang="en-US" sz="600" spc="-10" dirty="0">
               <a:latin typeface="Times New Roman"/>
               <a:cs typeface="Times New Roman"/>
             </a:endParaRPr>
+          </a:p>
+          <a:p>
+            <a:pPr marL="23495" lvl="1">
+              <a:lnSpc>
+                <a:spcPct val="100000"/>
+              </a:lnSpc>
+              <a:spcBef>
+                <a:spcPts val="655"/>
+              </a:spcBef>
+              <a:buSzPct val="94117"/>
+              <a:tabLst>
+                <a:tab pos="345440" algn="l"/>
+              </a:tabLst>
+            </a:pPr>
+            <a:r>
+              <a:rPr lang="en-US" sz="1500" spc="-10" dirty="0">
+                <a:latin typeface="Times New Roman"/>
+                <a:cs typeface="Times New Roman"/>
+              </a:rPr>
+              <a:t>This project is a College Workshop Registration page designed to digitize student sign-ups for technical seminars. It provides a structured interface for users to view event logistics, submit personal data through a grouped form, and view a summary of participants in a table.</a:t>
+            </a:r>
           </a:p>
           <a:p>
             <a:pPr marL="344805" lvl="1" indent="-321310">
@@ -1967,900 +1822,132 @@
               </a:tabLst>
             </a:pPr>
             <a:r>
-              <a:rPr sz="1700" b="1" spc="-10" dirty="0">
+              <a:rPr lang="en-US" sz="1700" b="1" spc="-10" dirty="0">
                 <a:latin typeface="Times New Roman"/>
                 <a:cs typeface="Times New Roman"/>
               </a:rPr>
               <a:t>Assignment:</a:t>
             </a:r>
-            <a:endParaRPr sz="1700" dirty="0">
-              <a:latin typeface="Times New Roman"/>
-              <a:cs typeface="Times New Roman"/>
-            </a:endParaRPr>
-          </a:p>
-          <a:p>
-            <a:pPr marL="74295" marR="5080" indent="-38100">
-              <a:lnSpc>
-                <a:spcPct val="179200"/>
+          </a:p>
+          <a:p>
+            <a:pPr marL="23495" lvl="1">
+              <a:lnSpc>
+                <a:spcPct val="100000"/>
               </a:lnSpc>
               <a:spcBef>
-                <a:spcPts val="985"/>
+                <a:spcPts val="655"/>
               </a:spcBef>
-            </a:pPr>
-            <a:r>
-              <a:rPr sz="1200" b="0" dirty="0">
-                <a:latin typeface="Times New Roman"/>
-                <a:cs typeface="Times New Roman"/>
-              </a:rPr>
-              <a:t>(</a:t>
-            </a:r>
-            <a:r>
-              <a:rPr sz="1200" b="0" i="1" dirty="0">
-                <a:latin typeface="Times New Roman"/>
-                <a:cs typeface="Times New Roman"/>
-              </a:rPr>
-              <a:t>In</a:t>
-            </a:r>
-            <a:r>
-              <a:rPr sz="1200" b="0" i="1" spc="-25" dirty="0">
-                <a:latin typeface="Times New Roman"/>
-                <a:cs typeface="Times New Roman"/>
-              </a:rPr>
-              <a:t> </a:t>
-            </a:r>
-            <a:r>
-              <a:rPr sz="1200" b="0" i="1" dirty="0">
-                <a:latin typeface="Times New Roman"/>
-                <a:cs typeface="Times New Roman"/>
-              </a:rPr>
-              <a:t>this</a:t>
-            </a:r>
-            <a:r>
-              <a:rPr sz="1200" b="0" i="1" spc="-25" dirty="0">
-                <a:latin typeface="Times New Roman"/>
-                <a:cs typeface="Times New Roman"/>
-              </a:rPr>
-              <a:t> </a:t>
-            </a:r>
-            <a:r>
-              <a:rPr sz="1200" b="0" i="1" dirty="0">
-                <a:latin typeface="Times New Roman"/>
-                <a:cs typeface="Times New Roman"/>
-              </a:rPr>
-              <a:t>section,</a:t>
-            </a:r>
-            <a:r>
-              <a:rPr sz="1200" b="0" i="1" spc="-20" dirty="0">
-                <a:latin typeface="Times New Roman"/>
-                <a:cs typeface="Times New Roman"/>
-              </a:rPr>
-              <a:t> </a:t>
-            </a:r>
-            <a:r>
-              <a:rPr sz="1200" b="0" i="1" dirty="0">
-                <a:latin typeface="Times New Roman"/>
-                <a:cs typeface="Times New Roman"/>
-              </a:rPr>
-              <a:t>briefly</a:t>
-            </a:r>
-            <a:r>
-              <a:rPr sz="1200" b="0" i="1" spc="-25" dirty="0">
-                <a:latin typeface="Times New Roman"/>
-                <a:cs typeface="Times New Roman"/>
-              </a:rPr>
-              <a:t> </a:t>
-            </a:r>
-            <a:r>
-              <a:rPr sz="1200" b="0" i="1" dirty="0">
-                <a:latin typeface="Times New Roman"/>
-                <a:cs typeface="Times New Roman"/>
-              </a:rPr>
-              <a:t>describe</a:t>
-            </a:r>
-            <a:r>
-              <a:rPr sz="1200" b="0" i="1" spc="-20" dirty="0">
-                <a:latin typeface="Times New Roman"/>
-                <a:cs typeface="Times New Roman"/>
-              </a:rPr>
-              <a:t> </a:t>
-            </a:r>
-            <a:r>
-              <a:rPr sz="1200" b="0" i="1" dirty="0">
-                <a:latin typeface="Times New Roman"/>
-                <a:cs typeface="Times New Roman"/>
-              </a:rPr>
-              <a:t>the</a:t>
-            </a:r>
-            <a:r>
-              <a:rPr sz="1200" b="0" i="1" spc="-25" dirty="0">
-                <a:latin typeface="Times New Roman"/>
-                <a:cs typeface="Times New Roman"/>
-              </a:rPr>
-              <a:t> </a:t>
-            </a:r>
-            <a:r>
-              <a:rPr sz="1200" b="0" i="1" dirty="0">
-                <a:latin typeface="Times New Roman"/>
-                <a:cs typeface="Times New Roman"/>
-              </a:rPr>
-              <a:t>application</a:t>
-            </a:r>
-            <a:r>
-              <a:rPr sz="1200" b="0" i="1" spc="-25" dirty="0">
-                <a:latin typeface="Times New Roman"/>
-                <a:cs typeface="Times New Roman"/>
-              </a:rPr>
-              <a:t> </a:t>
-            </a:r>
-            <a:r>
-              <a:rPr sz="1200" b="0" i="1" dirty="0">
-                <a:latin typeface="Times New Roman"/>
-                <a:cs typeface="Times New Roman"/>
-              </a:rPr>
-              <a:t>you</a:t>
-            </a:r>
-            <a:r>
-              <a:rPr sz="1200" b="0" i="1" spc="-20" dirty="0">
-                <a:latin typeface="Times New Roman"/>
-                <a:cs typeface="Times New Roman"/>
-              </a:rPr>
-              <a:t> </a:t>
-            </a:r>
-            <a:r>
-              <a:rPr sz="1200" b="0" i="1" dirty="0">
-                <a:latin typeface="Times New Roman"/>
-                <a:cs typeface="Times New Roman"/>
-              </a:rPr>
-              <a:t>are</a:t>
-            </a:r>
-            <a:r>
-              <a:rPr sz="1200" b="0" i="1" spc="-25" dirty="0">
-                <a:latin typeface="Times New Roman"/>
-                <a:cs typeface="Times New Roman"/>
-              </a:rPr>
-              <a:t> </a:t>
-            </a:r>
-            <a:r>
-              <a:rPr sz="1200" b="0" i="1" dirty="0">
-                <a:latin typeface="Times New Roman"/>
-                <a:cs typeface="Times New Roman"/>
-              </a:rPr>
-              <a:t>developing</a:t>
-            </a:r>
-            <a:r>
-              <a:rPr sz="1200" b="0" i="1" spc="-20" dirty="0">
-                <a:latin typeface="Times New Roman"/>
-                <a:cs typeface="Times New Roman"/>
-              </a:rPr>
-              <a:t> </a:t>
-            </a:r>
-            <a:r>
-              <a:rPr sz="1200" b="0" i="1" dirty="0">
-                <a:latin typeface="Times New Roman"/>
-                <a:cs typeface="Times New Roman"/>
-              </a:rPr>
-              <a:t>and</a:t>
-            </a:r>
-            <a:r>
-              <a:rPr sz="1200" b="0" i="1" spc="-25" dirty="0">
-                <a:latin typeface="Times New Roman"/>
-                <a:cs typeface="Times New Roman"/>
-              </a:rPr>
-              <a:t> </a:t>
-            </a:r>
-            <a:r>
-              <a:rPr sz="1200" b="0" i="1" dirty="0">
-                <a:latin typeface="Times New Roman"/>
-                <a:cs typeface="Times New Roman"/>
-              </a:rPr>
-              <a:t>the</a:t>
-            </a:r>
-            <a:r>
-              <a:rPr sz="1200" b="0" i="1" spc="-20" dirty="0">
-                <a:latin typeface="Times New Roman"/>
-                <a:cs typeface="Times New Roman"/>
-              </a:rPr>
-              <a:t> </a:t>
-            </a:r>
-            <a:r>
-              <a:rPr sz="1200" b="0" i="1" dirty="0">
-                <a:latin typeface="Times New Roman"/>
-                <a:cs typeface="Times New Roman"/>
-              </a:rPr>
-              <a:t>main</a:t>
-            </a:r>
-            <a:r>
-              <a:rPr sz="1200" b="0" i="1" spc="-25" dirty="0">
-                <a:latin typeface="Times New Roman"/>
-                <a:cs typeface="Times New Roman"/>
-              </a:rPr>
-              <a:t> </a:t>
-            </a:r>
-            <a:r>
-              <a:rPr sz="1200" b="0" i="1" dirty="0">
-                <a:latin typeface="Times New Roman"/>
-                <a:cs typeface="Times New Roman"/>
-              </a:rPr>
-              <a:t>tasks</a:t>
-            </a:r>
-            <a:r>
-              <a:rPr sz="1200" b="0" i="1" spc="-25" dirty="0">
-                <a:latin typeface="Times New Roman"/>
-                <a:cs typeface="Times New Roman"/>
-              </a:rPr>
-              <a:t> </a:t>
-            </a:r>
-            <a:r>
-              <a:rPr sz="1200" b="0" i="1" dirty="0">
-                <a:latin typeface="Times New Roman"/>
-                <a:cs typeface="Times New Roman"/>
-              </a:rPr>
-              <a:t>to</a:t>
-            </a:r>
-            <a:r>
-              <a:rPr sz="1200" b="0" i="1" spc="-20" dirty="0">
-                <a:latin typeface="Times New Roman"/>
-                <a:cs typeface="Times New Roman"/>
-              </a:rPr>
-              <a:t> </a:t>
-            </a:r>
-            <a:r>
-              <a:rPr sz="1200" b="0" i="1" dirty="0">
-                <a:latin typeface="Times New Roman"/>
-                <a:cs typeface="Times New Roman"/>
-              </a:rPr>
-              <a:t>be</a:t>
-            </a:r>
-            <a:r>
-              <a:rPr sz="1200" b="0" i="1" spc="-25" dirty="0">
-                <a:latin typeface="Times New Roman"/>
-                <a:cs typeface="Times New Roman"/>
-              </a:rPr>
-              <a:t> </a:t>
-            </a:r>
-            <a:r>
-              <a:rPr sz="1200" b="0" i="1" spc="-10" dirty="0">
-                <a:latin typeface="Times New Roman"/>
-                <a:cs typeface="Times New Roman"/>
-              </a:rPr>
-              <a:t>completed.</a:t>
-            </a:r>
-            <a:r>
-              <a:rPr sz="1200" b="0" spc="-10" dirty="0">
-                <a:latin typeface="Times New Roman"/>
-                <a:cs typeface="Times New Roman"/>
-              </a:rPr>
-              <a:t>) </a:t>
-            </a:r>
-            <a:r>
-              <a:rPr sz="1200" b="0" dirty="0">
-                <a:latin typeface="Times New Roman"/>
-                <a:cs typeface="Times New Roman"/>
-              </a:rPr>
-              <a:t>The</a:t>
-            </a:r>
-            <a:r>
-              <a:rPr sz="1200" b="0" spc="-30" dirty="0">
-                <a:latin typeface="Times New Roman"/>
-                <a:cs typeface="Times New Roman"/>
-              </a:rPr>
-              <a:t> </a:t>
-            </a:r>
-            <a:r>
-              <a:rPr sz="1200" b="0" dirty="0">
-                <a:latin typeface="Times New Roman"/>
-                <a:cs typeface="Times New Roman"/>
-              </a:rPr>
-              <a:t>proposed</a:t>
-            </a:r>
-            <a:r>
-              <a:rPr sz="1200" b="0" spc="-25" dirty="0">
-                <a:latin typeface="Times New Roman"/>
-                <a:cs typeface="Times New Roman"/>
-              </a:rPr>
-              <a:t> </a:t>
-            </a:r>
-            <a:r>
-              <a:rPr sz="1200" b="0" dirty="0">
-                <a:latin typeface="Times New Roman"/>
-                <a:cs typeface="Times New Roman"/>
-              </a:rPr>
-              <a:t>assignment</a:t>
-            </a:r>
-            <a:r>
-              <a:rPr sz="1200" b="0" spc="-25" dirty="0">
-                <a:latin typeface="Times New Roman"/>
-                <a:cs typeface="Times New Roman"/>
-              </a:rPr>
-              <a:t> </a:t>
-            </a:r>
-            <a:r>
-              <a:rPr sz="1200" b="0" dirty="0">
-                <a:latin typeface="Times New Roman"/>
-                <a:cs typeface="Times New Roman"/>
-              </a:rPr>
-              <a:t>is</a:t>
-            </a:r>
-            <a:r>
-              <a:rPr sz="1200" b="0" spc="-30" dirty="0">
-                <a:latin typeface="Times New Roman"/>
-                <a:cs typeface="Times New Roman"/>
-              </a:rPr>
-              <a:t> </a:t>
-            </a:r>
-            <a:r>
-              <a:rPr sz="1200" b="0" dirty="0">
-                <a:latin typeface="Times New Roman"/>
-                <a:cs typeface="Times New Roman"/>
-              </a:rPr>
-              <a:t>to</a:t>
-            </a:r>
-            <a:r>
-              <a:rPr sz="1200" b="0" spc="-25" dirty="0">
-                <a:latin typeface="Times New Roman"/>
-                <a:cs typeface="Times New Roman"/>
-              </a:rPr>
-              <a:t> </a:t>
-            </a:r>
-            <a:r>
-              <a:rPr sz="1200" b="0" dirty="0">
-                <a:latin typeface="Times New Roman"/>
-                <a:cs typeface="Times New Roman"/>
-              </a:rPr>
-              <a:t>design</a:t>
-            </a:r>
-            <a:r>
-              <a:rPr sz="1200" b="0" spc="-25" dirty="0">
-                <a:latin typeface="Times New Roman"/>
-                <a:cs typeface="Times New Roman"/>
-              </a:rPr>
-              <a:t> </a:t>
-            </a:r>
-            <a:r>
-              <a:rPr sz="1200" b="0" dirty="0">
-                <a:latin typeface="Times New Roman"/>
-                <a:cs typeface="Times New Roman"/>
-              </a:rPr>
-              <a:t>and</a:t>
-            </a:r>
-            <a:r>
-              <a:rPr sz="1200" b="0" spc="-30" dirty="0">
-                <a:latin typeface="Times New Roman"/>
-                <a:cs typeface="Times New Roman"/>
-              </a:rPr>
-              <a:t> </a:t>
-            </a:r>
-            <a:r>
-              <a:rPr sz="1200" b="0" dirty="0">
-                <a:latin typeface="Times New Roman"/>
-                <a:cs typeface="Times New Roman"/>
-              </a:rPr>
-              <a:t>develop</a:t>
-            </a:r>
-            <a:r>
-              <a:rPr sz="1200" b="0" spc="-25" dirty="0">
-                <a:latin typeface="Times New Roman"/>
-                <a:cs typeface="Times New Roman"/>
-              </a:rPr>
-              <a:t> </a:t>
-            </a:r>
-            <a:r>
-              <a:rPr sz="1200" b="0" dirty="0">
-                <a:latin typeface="Times New Roman"/>
-                <a:cs typeface="Times New Roman"/>
-              </a:rPr>
-              <a:t>a</a:t>
-            </a:r>
-            <a:r>
-              <a:rPr sz="1200" b="0" spc="-25" dirty="0">
-                <a:latin typeface="Times New Roman"/>
-                <a:cs typeface="Times New Roman"/>
-              </a:rPr>
-              <a:t> </a:t>
-            </a:r>
-            <a:r>
-              <a:rPr sz="1200" b="0" dirty="0">
-                <a:latin typeface="Times New Roman"/>
-                <a:cs typeface="Times New Roman"/>
-              </a:rPr>
-              <a:t>Simple</a:t>
-            </a:r>
-            <a:r>
-              <a:rPr sz="1200" b="0" spc="-30" dirty="0">
-                <a:latin typeface="Times New Roman"/>
-                <a:cs typeface="Times New Roman"/>
-              </a:rPr>
-              <a:t> </a:t>
-            </a:r>
-            <a:r>
-              <a:rPr sz="1200" b="0" dirty="0">
-                <a:latin typeface="Times New Roman"/>
-                <a:cs typeface="Times New Roman"/>
-              </a:rPr>
-              <a:t>Event</a:t>
-            </a:r>
-            <a:r>
-              <a:rPr sz="1200" b="0" spc="-25" dirty="0">
-                <a:latin typeface="Times New Roman"/>
-                <a:cs typeface="Times New Roman"/>
-              </a:rPr>
-              <a:t> </a:t>
-            </a:r>
-            <a:r>
-              <a:rPr sz="1200" b="0" dirty="0">
-                <a:latin typeface="Times New Roman"/>
-                <a:cs typeface="Times New Roman"/>
-              </a:rPr>
-              <a:t>Registration</a:t>
-            </a:r>
-            <a:r>
-              <a:rPr sz="1200" b="0" spc="-25" dirty="0">
-                <a:latin typeface="Times New Roman"/>
-                <a:cs typeface="Times New Roman"/>
-              </a:rPr>
-              <a:t> </a:t>
-            </a:r>
-            <a:r>
-              <a:rPr sz="1200" b="0" dirty="0">
-                <a:latin typeface="Times New Roman"/>
-                <a:cs typeface="Times New Roman"/>
-              </a:rPr>
-              <a:t>Page</a:t>
-            </a:r>
-            <a:r>
-              <a:rPr sz="1200" b="0" spc="-30" dirty="0">
-                <a:latin typeface="Times New Roman"/>
-                <a:cs typeface="Times New Roman"/>
-              </a:rPr>
-              <a:t> </a:t>
-            </a:r>
-            <a:r>
-              <a:rPr sz="1200" b="0" dirty="0">
-                <a:latin typeface="Times New Roman"/>
-                <a:cs typeface="Times New Roman"/>
-              </a:rPr>
-              <a:t>using</a:t>
-            </a:r>
-            <a:r>
-              <a:rPr sz="1200" b="0" spc="-25" dirty="0">
-                <a:latin typeface="Times New Roman"/>
-                <a:cs typeface="Times New Roman"/>
-              </a:rPr>
-              <a:t> </a:t>
-            </a:r>
-            <a:r>
-              <a:rPr sz="1200" b="0" dirty="0">
-                <a:latin typeface="Times New Roman"/>
-                <a:cs typeface="Times New Roman"/>
-              </a:rPr>
-              <a:t>HTML,</a:t>
-            </a:r>
-            <a:r>
-              <a:rPr sz="1200" b="0" spc="-25" dirty="0">
-                <a:latin typeface="Times New Roman"/>
-                <a:cs typeface="Times New Roman"/>
-              </a:rPr>
-              <a:t> </a:t>
-            </a:r>
-            <a:r>
-              <a:rPr sz="1200" b="0" spc="-20" dirty="0">
-                <a:latin typeface="Times New Roman"/>
-                <a:cs typeface="Times New Roman"/>
-              </a:rPr>
-              <a:t>CSS, </a:t>
-            </a:r>
-            <a:r>
-              <a:rPr sz="1200" b="0" dirty="0">
-                <a:latin typeface="Times New Roman"/>
-                <a:cs typeface="Times New Roman"/>
-              </a:rPr>
-              <a:t>and</a:t>
-            </a:r>
-            <a:r>
-              <a:rPr sz="1200" b="0" spc="-20" dirty="0">
-                <a:latin typeface="Times New Roman"/>
-                <a:cs typeface="Times New Roman"/>
-              </a:rPr>
-              <a:t> </a:t>
-            </a:r>
-            <a:r>
-              <a:rPr sz="1200" b="0" spc="-10" dirty="0">
-                <a:latin typeface="Times New Roman"/>
-                <a:cs typeface="Times New Roman"/>
-              </a:rPr>
-              <a:t>JavaScript.</a:t>
-            </a:r>
-            <a:endParaRPr sz="1200" dirty="0">
-              <a:latin typeface="Times New Roman"/>
-              <a:cs typeface="Times New Roman"/>
-            </a:endParaRPr>
-          </a:p>
-          <a:p>
-            <a:pPr marL="74295">
+              <a:buSzPct val="94117"/>
+              <a:tabLst>
+                <a:tab pos="345440" algn="l"/>
+              </a:tabLst>
+            </a:pPr>
+            <a:r>
+              <a:rPr lang="en-US" sz="1500" dirty="0">
+                <a:latin typeface="Times New Roman"/>
+                <a:cs typeface="Times New Roman"/>
+              </a:rPr>
+              <a:t>The objective of this assignment is to design and develop a Simple Event Registration Page utilizing a structured approach to front-end development. The application is built to manage the registration process for college-level technical seminars. The main tasks completed include:</a:t>
+            </a:r>
+          </a:p>
+          <a:p>
+            <a:pPr marL="309245" lvl="1" indent="-285750">
               <a:lnSpc>
                 <a:spcPct val="100000"/>
               </a:lnSpc>
               <a:spcBef>
-                <a:spcPts val="1140"/>
+                <a:spcPts val="655"/>
               </a:spcBef>
-            </a:pPr>
-            <a:r>
-              <a:rPr sz="1200" b="0" dirty="0">
-                <a:latin typeface="Times New Roman"/>
-                <a:cs typeface="Times New Roman"/>
-              </a:rPr>
-              <a:t>The</a:t>
-            </a:r>
-            <a:r>
-              <a:rPr sz="1200" b="0" spc="-15" dirty="0">
-                <a:latin typeface="Times New Roman"/>
-                <a:cs typeface="Times New Roman"/>
-              </a:rPr>
-              <a:t> </a:t>
-            </a:r>
-            <a:r>
-              <a:rPr sz="1200" b="0" dirty="0">
-                <a:latin typeface="Times New Roman"/>
-                <a:cs typeface="Times New Roman"/>
-              </a:rPr>
-              <a:t>web</a:t>
-            </a:r>
-            <a:r>
-              <a:rPr sz="1200" b="0" spc="-15" dirty="0">
-                <a:latin typeface="Times New Roman"/>
-                <a:cs typeface="Times New Roman"/>
-              </a:rPr>
-              <a:t> </a:t>
-            </a:r>
-            <a:r>
-              <a:rPr sz="1200" b="0" dirty="0">
-                <a:latin typeface="Times New Roman"/>
-                <a:cs typeface="Times New Roman"/>
-              </a:rPr>
-              <a:t>page</a:t>
-            </a:r>
-            <a:r>
-              <a:rPr sz="1200" b="0" spc="-15" dirty="0">
-                <a:latin typeface="Times New Roman"/>
-                <a:cs typeface="Times New Roman"/>
-              </a:rPr>
-              <a:t> </a:t>
-            </a:r>
-            <a:r>
-              <a:rPr sz="1200" b="0" dirty="0">
-                <a:latin typeface="Times New Roman"/>
-                <a:cs typeface="Times New Roman"/>
-              </a:rPr>
-              <a:t>should</a:t>
-            </a:r>
-            <a:r>
-              <a:rPr sz="1200" b="0" spc="-15" dirty="0">
-                <a:latin typeface="Times New Roman"/>
-                <a:cs typeface="Times New Roman"/>
-              </a:rPr>
-              <a:t> </a:t>
-            </a:r>
-            <a:r>
-              <a:rPr sz="1200" b="0" dirty="0">
-                <a:latin typeface="Times New Roman"/>
-                <a:cs typeface="Times New Roman"/>
-              </a:rPr>
-              <a:t>allow</a:t>
-            </a:r>
-            <a:r>
-              <a:rPr sz="1200" b="0" spc="-15" dirty="0">
-                <a:latin typeface="Times New Roman"/>
-                <a:cs typeface="Times New Roman"/>
-              </a:rPr>
-              <a:t> </a:t>
-            </a:r>
-            <a:r>
-              <a:rPr sz="1200" b="0" dirty="0">
-                <a:latin typeface="Times New Roman"/>
-                <a:cs typeface="Times New Roman"/>
-              </a:rPr>
-              <a:t>users</a:t>
-            </a:r>
-            <a:r>
-              <a:rPr sz="1200" b="0" spc="-15" dirty="0">
-                <a:latin typeface="Times New Roman"/>
-                <a:cs typeface="Times New Roman"/>
-              </a:rPr>
-              <a:t> </a:t>
-            </a:r>
-            <a:r>
-              <a:rPr sz="1200" b="0" spc="-25" dirty="0">
-                <a:latin typeface="Times New Roman"/>
-                <a:cs typeface="Times New Roman"/>
-              </a:rPr>
-              <a:t>to:</a:t>
-            </a:r>
-            <a:endParaRPr sz="1200" dirty="0">
-              <a:latin typeface="Times New Roman"/>
-              <a:cs typeface="Times New Roman"/>
-            </a:endParaRPr>
-          </a:p>
-          <a:p>
-            <a:pPr marL="241935" lvl="2" indent="-91440">
-              <a:lnSpc>
-                <a:spcPts val="1410"/>
-              </a:lnSpc>
-              <a:spcBef>
-                <a:spcPts val="1140"/>
-              </a:spcBef>
-              <a:buFont typeface="Times New Roman"/>
+              <a:buSzPct val="94117"/>
+              <a:buFont typeface="Arial" panose="020B0604020202020204" pitchFamily="34" charset="0"/>
               <a:buChar char="•"/>
               <a:tabLst>
-                <a:tab pos="242570" algn="l"/>
+                <a:tab pos="345440" algn="l"/>
               </a:tabLst>
             </a:pPr>
             <a:r>
-              <a:rPr sz="1200" spc="-10" dirty="0">
-                <a:latin typeface="Times New Roman"/>
-                <a:cs typeface="Times New Roman"/>
-              </a:rPr>
-              <a:t>View</a:t>
-            </a:r>
-            <a:r>
-              <a:rPr sz="1200" spc="-40" dirty="0">
-                <a:latin typeface="Times New Roman"/>
-                <a:cs typeface="Times New Roman"/>
-              </a:rPr>
-              <a:t> </a:t>
-            </a:r>
-            <a:r>
-              <a:rPr sz="1200" dirty="0">
-                <a:latin typeface="Times New Roman"/>
-                <a:cs typeface="Times New Roman"/>
-              </a:rPr>
-              <a:t>event</a:t>
-            </a:r>
-            <a:r>
-              <a:rPr sz="1200" spc="-40" dirty="0">
-                <a:latin typeface="Times New Roman"/>
-                <a:cs typeface="Times New Roman"/>
-              </a:rPr>
-              <a:t> </a:t>
-            </a:r>
-            <a:r>
-              <a:rPr sz="1200" spc="-10" dirty="0">
-                <a:latin typeface="Times New Roman"/>
-                <a:cs typeface="Times New Roman"/>
-              </a:rPr>
-              <a:t>details</a:t>
-            </a:r>
-            <a:endParaRPr sz="1200" dirty="0">
-              <a:latin typeface="Times New Roman"/>
-              <a:cs typeface="Times New Roman"/>
-            </a:endParaRPr>
-          </a:p>
-          <a:p>
-            <a:pPr marL="241935" lvl="2" indent="-91440">
-              <a:lnSpc>
-                <a:spcPts val="1380"/>
-              </a:lnSpc>
+              <a:rPr lang="en-US" sz="1500" dirty="0">
+                <a:latin typeface="Times New Roman"/>
+                <a:cs typeface="Times New Roman"/>
+              </a:rPr>
+              <a:t>Structural Architecture: Defining a clear hierarchy of information using </a:t>
+            </a:r>
+            <a:r>
+              <a:rPr lang="en-US" sz="1500" u="sng" dirty="0">
+                <a:latin typeface="Times New Roman"/>
+                <a:cs typeface="Times New Roman"/>
+              </a:rPr>
+              <a:t>HTML5</a:t>
+            </a:r>
+          </a:p>
+          <a:p>
+            <a:pPr marL="309245" lvl="1" indent="-285750">
+              <a:lnSpc>
+                <a:spcPct val="100000"/>
+              </a:lnSpc>
+              <a:spcBef>
+                <a:spcPts val="655"/>
+              </a:spcBef>
+              <a:buSzPct val="94117"/>
+              <a:buFont typeface="Arial" panose="020B0604020202020204" pitchFamily="34" charset="0"/>
               <a:buChar char="•"/>
               <a:tabLst>
-                <a:tab pos="242570" algn="l"/>
+                <a:tab pos="345440" algn="l"/>
               </a:tabLst>
             </a:pPr>
             <a:r>
-              <a:rPr sz="1200" dirty="0">
-                <a:latin typeface="Times New Roman"/>
-                <a:cs typeface="Times New Roman"/>
-              </a:rPr>
-              <a:t>Enter</a:t>
-            </a:r>
-            <a:r>
-              <a:rPr sz="1200" spc="-35" dirty="0">
-                <a:latin typeface="Times New Roman"/>
-                <a:cs typeface="Times New Roman"/>
-              </a:rPr>
-              <a:t> </a:t>
-            </a:r>
-            <a:r>
-              <a:rPr sz="1200" dirty="0">
-                <a:latin typeface="Times New Roman"/>
-                <a:cs typeface="Times New Roman"/>
-              </a:rPr>
-              <a:t>personal</a:t>
-            </a:r>
-            <a:r>
-              <a:rPr sz="1200" spc="-35" dirty="0">
-                <a:latin typeface="Times New Roman"/>
-                <a:cs typeface="Times New Roman"/>
-              </a:rPr>
-              <a:t> </a:t>
-            </a:r>
-            <a:r>
-              <a:rPr sz="1200" spc="-10" dirty="0">
-                <a:latin typeface="Times New Roman"/>
-                <a:cs typeface="Times New Roman"/>
-              </a:rPr>
-              <a:t>information</a:t>
-            </a:r>
-            <a:endParaRPr sz="1200" dirty="0">
-              <a:latin typeface="Times New Roman"/>
-              <a:cs typeface="Times New Roman"/>
-            </a:endParaRPr>
-          </a:p>
-          <a:p>
-            <a:pPr marL="241935" lvl="2" indent="-91440">
-              <a:lnSpc>
-                <a:spcPts val="1380"/>
-              </a:lnSpc>
+              <a:rPr lang="en-US" sz="1500" dirty="0">
+                <a:latin typeface="Times New Roman"/>
+                <a:cs typeface="Times New Roman"/>
+              </a:rPr>
+              <a:t>User Information Capture: Designing a multi-section form to collect personal, event, and college-specific data.</a:t>
+            </a:r>
+          </a:p>
+          <a:p>
+            <a:pPr marL="309245" lvl="1" indent="-285750">
+              <a:lnSpc>
+                <a:spcPct val="100000"/>
+              </a:lnSpc>
+              <a:spcBef>
+                <a:spcPts val="655"/>
+              </a:spcBef>
+              <a:buSzPct val="94117"/>
+              <a:buFont typeface="Arial" panose="020B0604020202020204" pitchFamily="34" charset="0"/>
               <a:buChar char="•"/>
               <a:tabLst>
-                <a:tab pos="242570" algn="l"/>
+                <a:tab pos="345440" algn="l"/>
               </a:tabLst>
             </a:pPr>
             <a:r>
-              <a:rPr sz="1200" dirty="0">
-                <a:latin typeface="Times New Roman"/>
-                <a:cs typeface="Times New Roman"/>
-              </a:rPr>
-              <a:t>Select</a:t>
-            </a:r>
-            <a:r>
-              <a:rPr sz="1200" spc="-30" dirty="0">
-                <a:latin typeface="Times New Roman"/>
-                <a:cs typeface="Times New Roman"/>
-              </a:rPr>
-              <a:t> </a:t>
-            </a:r>
-            <a:r>
-              <a:rPr sz="1200" dirty="0">
-                <a:latin typeface="Times New Roman"/>
-                <a:cs typeface="Times New Roman"/>
-              </a:rPr>
-              <a:t>event</a:t>
-            </a:r>
-            <a:r>
-              <a:rPr sz="1200" spc="-30" dirty="0">
-                <a:latin typeface="Times New Roman"/>
-                <a:cs typeface="Times New Roman"/>
-              </a:rPr>
-              <a:t> </a:t>
-            </a:r>
-            <a:r>
-              <a:rPr sz="1200" spc="-10" dirty="0">
-                <a:latin typeface="Times New Roman"/>
-                <a:cs typeface="Times New Roman"/>
-              </a:rPr>
-              <a:t>preferences</a:t>
-            </a:r>
-            <a:endParaRPr sz="1200" dirty="0">
-              <a:latin typeface="Times New Roman"/>
-              <a:cs typeface="Times New Roman"/>
-            </a:endParaRPr>
-          </a:p>
-          <a:p>
-            <a:pPr marL="241935" lvl="2" indent="-91440">
-              <a:lnSpc>
-                <a:spcPts val="1380"/>
-              </a:lnSpc>
+              <a:rPr lang="en-US" sz="1500" dirty="0">
+                <a:latin typeface="Times New Roman"/>
+                <a:cs typeface="Times New Roman"/>
+              </a:rPr>
+              <a:t>Data Organization: Implementing selection menus and radio buttons to standardize user responses.</a:t>
+            </a:r>
+          </a:p>
+          <a:p>
+            <a:pPr marL="309245" lvl="1" indent="-285750">
+              <a:lnSpc>
+                <a:spcPct val="100000"/>
+              </a:lnSpc>
+              <a:spcBef>
+                <a:spcPts val="655"/>
+              </a:spcBef>
+              <a:buSzPct val="94117"/>
+              <a:buFont typeface="Arial" panose="020B0604020202020204" pitchFamily="34" charset="0"/>
               <a:buChar char="•"/>
               <a:tabLst>
-                <a:tab pos="242570" algn="l"/>
+                <a:tab pos="345440" algn="l"/>
               </a:tabLst>
             </a:pPr>
             <a:r>
-              <a:rPr sz="1200" dirty="0">
-                <a:latin typeface="Times New Roman"/>
-                <a:cs typeface="Times New Roman"/>
-              </a:rPr>
-              <a:t>Submit</a:t>
-            </a:r>
-            <a:r>
-              <a:rPr sz="1200" spc="-45" dirty="0">
-                <a:latin typeface="Times New Roman"/>
-                <a:cs typeface="Times New Roman"/>
-              </a:rPr>
-              <a:t> </a:t>
-            </a:r>
-            <a:r>
-              <a:rPr sz="1200" dirty="0">
-                <a:latin typeface="Times New Roman"/>
-                <a:cs typeface="Times New Roman"/>
-              </a:rPr>
-              <a:t>registration</a:t>
-            </a:r>
-            <a:r>
-              <a:rPr sz="1200" spc="-45" dirty="0">
-                <a:latin typeface="Times New Roman"/>
-                <a:cs typeface="Times New Roman"/>
-              </a:rPr>
-              <a:t> </a:t>
-            </a:r>
-            <a:r>
-              <a:rPr sz="1200" spc="-10" dirty="0">
-                <a:latin typeface="Times New Roman"/>
-                <a:cs typeface="Times New Roman"/>
-              </a:rPr>
-              <a:t>details</a:t>
-            </a:r>
-            <a:endParaRPr sz="1200" dirty="0">
-              <a:latin typeface="Times New Roman"/>
-              <a:cs typeface="Times New Roman"/>
-            </a:endParaRPr>
-          </a:p>
-          <a:p>
-            <a:pPr marL="241935" lvl="2" indent="-91440">
-              <a:lnSpc>
-                <a:spcPts val="1410"/>
-              </a:lnSpc>
-              <a:buChar char="•"/>
-              <a:tabLst>
-                <a:tab pos="242570" algn="l"/>
-              </a:tabLst>
-            </a:pPr>
-            <a:r>
-              <a:rPr sz="1200" spc="-10" dirty="0">
-                <a:latin typeface="Times New Roman"/>
-                <a:cs typeface="Times New Roman"/>
-              </a:rPr>
-              <a:t>View</a:t>
-            </a:r>
-            <a:r>
-              <a:rPr sz="1200" spc="-50" dirty="0">
-                <a:latin typeface="Times New Roman"/>
-                <a:cs typeface="Times New Roman"/>
-              </a:rPr>
-              <a:t> </a:t>
-            </a:r>
-            <a:r>
-              <a:rPr sz="1200" dirty="0">
-                <a:latin typeface="Times New Roman"/>
-                <a:cs typeface="Times New Roman"/>
-              </a:rPr>
-              <a:t>registered</a:t>
-            </a:r>
-            <a:r>
-              <a:rPr sz="1200" spc="-45" dirty="0">
-                <a:latin typeface="Times New Roman"/>
-                <a:cs typeface="Times New Roman"/>
-              </a:rPr>
-              <a:t> </a:t>
-            </a:r>
-            <a:r>
-              <a:rPr sz="1200" dirty="0">
-                <a:latin typeface="Times New Roman"/>
-                <a:cs typeface="Times New Roman"/>
-              </a:rPr>
-              <a:t>participants</a:t>
-            </a:r>
-            <a:r>
-              <a:rPr sz="1200" spc="-45" dirty="0">
-                <a:latin typeface="Times New Roman"/>
-                <a:cs typeface="Times New Roman"/>
-              </a:rPr>
-              <a:t> </a:t>
-            </a:r>
-            <a:r>
-              <a:rPr sz="1200" dirty="0">
-                <a:latin typeface="Times New Roman"/>
-                <a:cs typeface="Times New Roman"/>
-              </a:rPr>
-              <a:t>(static</a:t>
-            </a:r>
-            <a:r>
-              <a:rPr sz="1200" spc="-55" dirty="0">
-                <a:latin typeface="Times New Roman"/>
-                <a:cs typeface="Times New Roman"/>
-              </a:rPr>
-              <a:t> </a:t>
-            </a:r>
-            <a:r>
-              <a:rPr sz="1200" spc="-10" dirty="0">
-                <a:latin typeface="Times New Roman"/>
-                <a:cs typeface="Times New Roman"/>
-              </a:rPr>
-              <a:t>table)</a:t>
-            </a:r>
-            <a:endParaRPr sz="1200" dirty="0">
-              <a:latin typeface="Times New Roman"/>
-              <a:cs typeface="Times New Roman"/>
-            </a:endParaRPr>
+              <a:rPr lang="en-US" sz="1500" dirty="0">
+                <a:latin typeface="Times New Roman"/>
+                <a:cs typeface="Times New Roman"/>
+              </a:rPr>
+              <a:t>Reporting Interface: Creating a static table to represent how registered participant data is displayed to administrators.</a:t>
+            </a:r>
           </a:p>
         </p:txBody>
       </p:sp>
@@ -2872,7 +1959,7 @@
         </p:nvSpPr>
         <p:spPr>
           <a:xfrm>
-            <a:off x="660400" y="9582143"/>
+            <a:off x="327660" y="10452100"/>
             <a:ext cx="6502400" cy="0"/>
           </a:xfrm>
           <a:custGeom>
@@ -3071,8 +2158,8 @@
         </p:nvSpPr>
         <p:spPr>
           <a:xfrm>
-            <a:off x="613409" y="1756702"/>
-            <a:ext cx="5252720" cy="784830"/>
+            <a:off x="613408" y="1336652"/>
+            <a:ext cx="6066791" cy="748923"/>
           </a:xfrm>
           <a:prstGeom prst="rect">
             <a:avLst/>
@@ -3099,7 +2186,7 @@
               </a:rPr>
               <a:t>1.2.Purpose:</a:t>
             </a:r>
-            <a:endParaRPr sz="1700" dirty="0">
+            <a:endParaRPr lang="en-US" sz="1700" b="1" spc="-10" dirty="0">
               <a:latin typeface="Times New Roman"/>
               <a:cs typeface="Times New Roman"/>
             </a:endParaRPr>
@@ -3110,14 +2197,31 @@
                 <a:spcPct val="100000"/>
               </a:lnSpc>
               <a:spcBef>
-                <a:spcPts val="1145"/>
+                <a:spcPts val="100"/>
               </a:spcBef>
             </a:pPr>
             <a:r>
-              <a:rPr lang="en-US" sz="1200" dirty="0"/>
-              <a:t>To understand the fundamental structure of a webpage using HTML5 and to create a functional data collection form for event management</a:t>
-            </a:r>
-            <a:endParaRPr sz="1200" dirty="0">
+              <a:rPr lang="en-US" sz="1500" dirty="0">
+                <a:latin typeface="Times New Roman"/>
+                <a:cs typeface="Times New Roman"/>
+              </a:rPr>
+              <a:t>The objective is to master Semantic HTML and form structures. I aim to learn how to organize user inputs and display data clearly using tables and </a:t>
+            </a:r>
+            <a:r>
+              <a:rPr lang="en-US" sz="1500" dirty="0" err="1">
+                <a:latin typeface="Times New Roman"/>
+                <a:cs typeface="Times New Roman"/>
+              </a:rPr>
+              <a:t>fieldsets</a:t>
+            </a:r>
+            <a:r>
+              <a:rPr lang="en-US" sz="1500" dirty="0">
+                <a:latin typeface="Times New Roman"/>
+                <a:cs typeface="Times New Roman"/>
+              </a:rPr>
+              <a:t>.</a:t>
+            </a:r>
+            <a:endParaRPr sz="1500" dirty="0">
               <a:latin typeface="Times New Roman"/>
               <a:cs typeface="Times New Roman"/>
             </a:endParaRPr>
@@ -3132,7 +2236,7 @@
         </p:nvSpPr>
         <p:spPr>
           <a:xfrm>
-            <a:off x="660400" y="2635248"/>
+            <a:off x="613408" y="2222500"/>
             <a:ext cx="6502400" cy="0"/>
           </a:xfrm>
           <a:custGeom>
@@ -3174,7 +2278,445 @@
         </p:nvSpPr>
         <p:spPr>
           <a:xfrm>
-            <a:off x="660400" y="4127500"/>
+            <a:off x="588803" y="4127501"/>
+            <a:ext cx="6502400" cy="76199"/>
+          </a:xfrm>
+          <a:custGeom>
+            <a:avLst/>
+            <a:gdLst/>
+            <a:ahLst/>
+            <a:cxnLst/>
+            <a:rect l="l" t="t" r="r" b="b"/>
+            <a:pathLst>
+              <a:path w="6502400">
+                <a:moveTo>
+                  <a:pt x="0" y="0"/>
+                </a:moveTo>
+                <a:lnTo>
+                  <a:pt x="6502403" y="0"/>
+                </a:lnTo>
+              </a:path>
+            </a:pathLst>
+          </a:custGeom>
+          <a:ln w="12699">
+            <a:solidFill>
+              <a:srgbClr val="878787"/>
+            </a:solidFill>
+          </a:ln>
+        </p:spPr>
+        <p:txBody>
+          <a:bodyPr wrap="square" lIns="0" tIns="0" rIns="0" bIns="0" rtlCol="0"/>
+          <a:lstStyle/>
+          <a:p>
+            <a:endParaRPr/>
+          </a:p>
+        </p:txBody>
+      </p:sp>
+      <p:sp>
+        <p:nvSpPr>
+          <p:cNvPr id="7" name="object 7"/>
+          <p:cNvSpPr txBox="1"/>
+          <p:nvPr/>
+        </p:nvSpPr>
+        <p:spPr>
+          <a:xfrm>
+            <a:off x="588008" y="2319889"/>
+            <a:ext cx="6641466" cy="3375283"/>
+          </a:xfrm>
+          <a:prstGeom prst="rect">
+            <a:avLst/>
+          </a:prstGeom>
+        </p:spPr>
+        <p:txBody>
+          <a:bodyPr vert="horz" wrap="square" lIns="0" tIns="12700" rIns="0" bIns="0" rtlCol="0">
+            <a:spAutoFit/>
+          </a:bodyPr>
+          <a:lstStyle/>
+          <a:p>
+            <a:pPr marL="278130" indent="-222250">
+              <a:lnSpc>
+                <a:spcPct val="100000"/>
+              </a:lnSpc>
+              <a:spcBef>
+                <a:spcPts val="100"/>
+              </a:spcBef>
+              <a:buClr>
+                <a:srgbClr val="3C78D8"/>
+              </a:buClr>
+              <a:buSzPct val="95652"/>
+              <a:buFont typeface="Times New Roman"/>
+              <a:buAutoNum type="arabicPeriod" startAt="2"/>
+              <a:tabLst>
+                <a:tab pos="278130" algn="l"/>
+              </a:tabLst>
+            </a:pPr>
+            <a:r>
+              <a:rPr sz="2300" b="1" dirty="0">
+                <a:solidFill>
+                  <a:srgbClr val="3C78D8"/>
+                </a:solidFill>
+                <a:latin typeface="Times New Roman"/>
+                <a:cs typeface="Times New Roman"/>
+              </a:rPr>
+              <a:t>Problem</a:t>
+            </a:r>
+            <a:r>
+              <a:rPr sz="2300" b="1" spc="-100" dirty="0">
+                <a:solidFill>
+                  <a:srgbClr val="3C78D8"/>
+                </a:solidFill>
+                <a:latin typeface="Times New Roman"/>
+                <a:cs typeface="Times New Roman"/>
+              </a:rPr>
+              <a:t> </a:t>
+            </a:r>
+            <a:r>
+              <a:rPr sz="2300" b="1" spc="-10" dirty="0">
+                <a:solidFill>
+                  <a:srgbClr val="3C78D8"/>
+                </a:solidFill>
+                <a:latin typeface="Times New Roman"/>
+                <a:cs typeface="Times New Roman"/>
+              </a:rPr>
+              <a:t>Statement:</a:t>
+            </a:r>
+            <a:endParaRPr lang="en-US" sz="2300" b="1" spc="-10" dirty="0">
+              <a:solidFill>
+                <a:srgbClr val="3C78D8"/>
+              </a:solidFill>
+              <a:latin typeface="Times New Roman"/>
+              <a:cs typeface="Times New Roman"/>
+            </a:endParaRPr>
+          </a:p>
+          <a:p>
+            <a:pPr marL="55880">
+              <a:lnSpc>
+                <a:spcPct val="100000"/>
+              </a:lnSpc>
+              <a:spcBef>
+                <a:spcPts val="100"/>
+              </a:spcBef>
+              <a:buClr>
+                <a:srgbClr val="3C78D8"/>
+              </a:buClr>
+              <a:buSzPct val="95652"/>
+              <a:tabLst>
+                <a:tab pos="278130" algn="l"/>
+              </a:tabLst>
+            </a:pPr>
+            <a:endParaRPr lang="en-US" sz="500" b="1" spc="-10" dirty="0">
+              <a:solidFill>
+                <a:srgbClr val="3C78D8"/>
+              </a:solidFill>
+              <a:latin typeface="Times New Roman"/>
+              <a:cs typeface="Times New Roman"/>
+            </a:endParaRPr>
+          </a:p>
+          <a:p>
+            <a:pPr marL="55880">
+              <a:lnSpc>
+                <a:spcPct val="100000"/>
+              </a:lnSpc>
+              <a:spcBef>
+                <a:spcPts val="100"/>
+              </a:spcBef>
+              <a:buClr>
+                <a:srgbClr val="3C78D8"/>
+              </a:buClr>
+              <a:buSzPct val="95652"/>
+              <a:tabLst>
+                <a:tab pos="278130" algn="l"/>
+              </a:tabLst>
+            </a:pPr>
+            <a:r>
+              <a:rPr lang="en-US" sz="1500" dirty="0">
+                <a:latin typeface="Times New Roman"/>
+                <a:cs typeface="Times New Roman"/>
+              </a:rPr>
+              <a:t>Current event registration methods in academic environments often rely on physical paperwork or fragmented digital tools, which are prone to data entry errors and loss of information. This application addresses the need for a centralized, digital registration portal that streamlines the sign-up process, ensures all mandatory fields are captured, and provides an immediate visual summary of registered students</a:t>
+            </a:r>
+            <a:endParaRPr sz="1500" dirty="0">
+              <a:latin typeface="Times New Roman"/>
+              <a:cs typeface="Times New Roman"/>
+            </a:endParaRPr>
+          </a:p>
+          <a:p>
+            <a:pPr>
+              <a:lnSpc>
+                <a:spcPct val="100000"/>
+              </a:lnSpc>
+              <a:spcBef>
+                <a:spcPts val="705"/>
+              </a:spcBef>
+            </a:pPr>
+            <a:endParaRPr sz="1200" dirty="0">
+              <a:latin typeface="Times New Roman"/>
+              <a:cs typeface="Times New Roman"/>
+            </a:endParaRPr>
+          </a:p>
+          <a:p>
+            <a:pPr marL="230504" indent="-222250">
+              <a:lnSpc>
+                <a:spcPct val="100000"/>
+              </a:lnSpc>
+              <a:spcBef>
+                <a:spcPts val="5"/>
+              </a:spcBef>
+              <a:buClr>
+                <a:srgbClr val="3C78D8"/>
+              </a:buClr>
+              <a:buSzPct val="95652"/>
+              <a:buFont typeface="Times New Roman"/>
+              <a:buAutoNum type="arabicPeriod" startAt="3"/>
+              <a:tabLst>
+                <a:tab pos="230504" algn="l"/>
+              </a:tabLst>
+            </a:pPr>
+            <a:r>
+              <a:rPr sz="2300" b="1" dirty="0">
+                <a:solidFill>
+                  <a:srgbClr val="3C78D8"/>
+                </a:solidFill>
+                <a:latin typeface="Times New Roman"/>
+                <a:cs typeface="Times New Roman"/>
+              </a:rPr>
+              <a:t>Expected</a:t>
+            </a:r>
+            <a:r>
+              <a:rPr sz="2300" b="1" spc="-90" dirty="0">
+                <a:solidFill>
+                  <a:srgbClr val="3C78D8"/>
+                </a:solidFill>
+                <a:latin typeface="Times New Roman"/>
+                <a:cs typeface="Times New Roman"/>
+              </a:rPr>
+              <a:t> </a:t>
+            </a:r>
+            <a:r>
+              <a:rPr sz="2300" b="1" spc="-10" dirty="0">
+                <a:solidFill>
+                  <a:srgbClr val="3C78D8"/>
+                </a:solidFill>
+                <a:latin typeface="Times New Roman"/>
+                <a:cs typeface="Times New Roman"/>
+              </a:rPr>
+              <a:t>Features:</a:t>
+            </a:r>
+            <a:endParaRPr lang="en-US" sz="1700" b="1" dirty="0">
+              <a:latin typeface="Times New Roman"/>
+              <a:cs typeface="Times New Roman"/>
+            </a:endParaRPr>
+          </a:p>
+          <a:p>
+            <a:pPr marL="8254">
+              <a:lnSpc>
+                <a:spcPct val="100000"/>
+              </a:lnSpc>
+              <a:spcBef>
+                <a:spcPts val="5"/>
+              </a:spcBef>
+              <a:buClr>
+                <a:srgbClr val="3C78D8"/>
+              </a:buClr>
+              <a:buSzPct val="95652"/>
+              <a:tabLst>
+                <a:tab pos="230504" algn="l"/>
+              </a:tabLst>
+            </a:pPr>
+            <a:endParaRPr lang="en-US" sz="500" b="1" dirty="0">
+              <a:latin typeface="Times New Roman"/>
+              <a:cs typeface="Times New Roman"/>
+            </a:endParaRPr>
+          </a:p>
+          <a:p>
+            <a:pPr marL="8254">
+              <a:lnSpc>
+                <a:spcPct val="100000"/>
+              </a:lnSpc>
+              <a:spcBef>
+                <a:spcPts val="5"/>
+              </a:spcBef>
+              <a:buClr>
+                <a:srgbClr val="3C78D8"/>
+              </a:buClr>
+              <a:buSzPct val="95652"/>
+              <a:tabLst>
+                <a:tab pos="230504" algn="l"/>
+              </a:tabLst>
+            </a:pPr>
+            <a:r>
+              <a:rPr lang="en-US" sz="1700" b="1" dirty="0">
+                <a:latin typeface="Times New Roman"/>
+                <a:cs typeface="Times New Roman"/>
+              </a:rPr>
+              <a:t>1.  </a:t>
+            </a:r>
+            <a:r>
+              <a:rPr sz="1700" b="1" dirty="0">
+                <a:latin typeface="Times New Roman"/>
+                <a:cs typeface="Times New Roman"/>
+              </a:rPr>
+              <a:t>Event</a:t>
+            </a:r>
+            <a:r>
+              <a:rPr sz="1700" b="1" spc="-55" dirty="0">
+                <a:latin typeface="Times New Roman"/>
+                <a:cs typeface="Times New Roman"/>
+              </a:rPr>
+              <a:t> </a:t>
+            </a:r>
+            <a:r>
+              <a:rPr sz="1700" b="1" dirty="0">
+                <a:latin typeface="Times New Roman"/>
+                <a:cs typeface="Times New Roman"/>
+              </a:rPr>
+              <a:t>Title</a:t>
+            </a:r>
+            <a:r>
+              <a:rPr sz="1700" b="1" spc="-50" dirty="0">
+                <a:latin typeface="Times New Roman"/>
+                <a:cs typeface="Times New Roman"/>
+              </a:rPr>
+              <a:t> </a:t>
+            </a:r>
+            <a:r>
+              <a:rPr sz="1700" b="1" dirty="0">
+                <a:latin typeface="Times New Roman"/>
+                <a:cs typeface="Times New Roman"/>
+              </a:rPr>
+              <a:t>and</a:t>
+            </a:r>
+            <a:r>
+              <a:rPr sz="1700" b="1" spc="-55" dirty="0">
+                <a:latin typeface="Times New Roman"/>
+                <a:cs typeface="Times New Roman"/>
+              </a:rPr>
+              <a:t> </a:t>
+            </a:r>
+            <a:r>
+              <a:rPr sz="1700" b="1" spc="-10" dirty="0">
+                <a:latin typeface="Times New Roman"/>
+                <a:cs typeface="Times New Roman"/>
+              </a:rPr>
+              <a:t>Description:</a:t>
+            </a:r>
+            <a:endParaRPr lang="en-US" sz="1700" b="1" spc="-10" dirty="0">
+              <a:latin typeface="Times New Roman"/>
+              <a:cs typeface="Times New Roman"/>
+            </a:endParaRPr>
+          </a:p>
+          <a:p>
+            <a:pPr marL="8254">
+              <a:lnSpc>
+                <a:spcPct val="100000"/>
+              </a:lnSpc>
+              <a:spcBef>
+                <a:spcPts val="5"/>
+              </a:spcBef>
+              <a:buClr>
+                <a:srgbClr val="3C78D8"/>
+              </a:buClr>
+              <a:buSzPct val="95652"/>
+              <a:tabLst>
+                <a:tab pos="230504" algn="l"/>
+              </a:tabLst>
+            </a:pPr>
+            <a:r>
+              <a:rPr lang="en-US" sz="1700" dirty="0">
+                <a:latin typeface="Times New Roman"/>
+                <a:cs typeface="Times New Roman"/>
+              </a:rPr>
+              <a:t>	</a:t>
+            </a:r>
+            <a:r>
+              <a:rPr lang="en-US" sz="1700" b="1" dirty="0">
+                <a:latin typeface="Times New Roman"/>
+                <a:cs typeface="Times New Roman"/>
+              </a:rPr>
+              <a:t>Title:</a:t>
+            </a:r>
+            <a:r>
+              <a:rPr lang="en-US" sz="1700" dirty="0">
+                <a:latin typeface="Times New Roman"/>
+                <a:cs typeface="Times New Roman"/>
+              </a:rPr>
+              <a:t> </a:t>
+            </a:r>
+            <a:r>
+              <a:rPr lang="en-US" sz="1500" dirty="0">
+                <a:latin typeface="Times New Roman"/>
+                <a:cs typeface="Times New Roman"/>
+              </a:rPr>
+              <a:t>College Workshop Registration</a:t>
+            </a:r>
+          </a:p>
+          <a:p>
+            <a:pPr marL="8254">
+              <a:lnSpc>
+                <a:spcPct val="100000"/>
+              </a:lnSpc>
+              <a:spcBef>
+                <a:spcPts val="5"/>
+              </a:spcBef>
+              <a:buClr>
+                <a:srgbClr val="3C78D8"/>
+              </a:buClr>
+              <a:buSzPct val="95652"/>
+              <a:tabLst>
+                <a:tab pos="230504" algn="l"/>
+              </a:tabLst>
+            </a:pPr>
+            <a:r>
+              <a:rPr lang="en-US" sz="1700" dirty="0">
+                <a:latin typeface="Times New Roman"/>
+                <a:cs typeface="Times New Roman"/>
+              </a:rPr>
+              <a:t>     </a:t>
+            </a:r>
+            <a:r>
+              <a:rPr lang="en-US" sz="1700" b="1" dirty="0">
+                <a:latin typeface="Times New Roman"/>
+                <a:cs typeface="Times New Roman"/>
+              </a:rPr>
+              <a:t>Description: </a:t>
+            </a:r>
+            <a:r>
+              <a:rPr lang="en-US" sz="1500" dirty="0">
+                <a:latin typeface="Times New Roman"/>
+                <a:cs typeface="Times New Roman"/>
+              </a:rPr>
+              <a:t>To provide an intuitive platform for students to sign up for upcoming technical seminars, such as Java , python and </a:t>
+            </a:r>
+            <a:r>
+              <a:rPr lang="en-US" sz="1500" dirty="0" err="1">
+                <a:latin typeface="Times New Roman"/>
+                <a:cs typeface="Times New Roman"/>
+              </a:rPr>
+              <a:t>c++</a:t>
+            </a:r>
+            <a:r>
+              <a:rPr lang="en-US" sz="1500" dirty="0">
+                <a:latin typeface="Times New Roman"/>
+                <a:cs typeface="Times New Roman"/>
+              </a:rPr>
+              <a:t> workshops.</a:t>
+            </a:r>
+            <a:endParaRPr sz="1500" dirty="0">
+              <a:latin typeface="Times New Roman"/>
+              <a:cs typeface="Times New Roman"/>
+            </a:endParaRPr>
+          </a:p>
+        </p:txBody>
+      </p:sp>
+      <p:sp>
+        <p:nvSpPr>
+          <p:cNvPr id="8" name="object 8"/>
+          <p:cNvSpPr/>
+          <p:nvPr/>
+        </p:nvSpPr>
+        <p:spPr>
+          <a:xfrm>
+            <a:off x="588008" y="5819977"/>
             <a:ext cx="6502400" cy="0"/>
           </a:xfrm>
           <a:custGeom>
@@ -3210,376 +2752,14 @@
       </p:sp>
       <p:sp>
         <p:nvSpPr>
-          <p:cNvPr id="7" name="object 7"/>
-          <p:cNvSpPr txBox="1"/>
-          <p:nvPr/>
-        </p:nvSpPr>
-        <p:spPr>
-          <a:xfrm>
-            <a:off x="565710" y="2959997"/>
-            <a:ext cx="5879465" cy="3011081"/>
-          </a:xfrm>
-          <a:prstGeom prst="rect">
-            <a:avLst/>
-          </a:prstGeom>
-        </p:spPr>
-        <p:txBody>
-          <a:bodyPr vert="horz" wrap="square" lIns="0" tIns="12700" rIns="0" bIns="0" rtlCol="0">
-            <a:spAutoFit/>
-          </a:bodyPr>
-          <a:lstStyle/>
-          <a:p>
-            <a:pPr marL="278130" indent="-222250">
-              <a:lnSpc>
-                <a:spcPct val="100000"/>
-              </a:lnSpc>
-              <a:spcBef>
-                <a:spcPts val="100"/>
-              </a:spcBef>
-              <a:buClr>
-                <a:srgbClr val="3C78D8"/>
-              </a:buClr>
-              <a:buSzPct val="95652"/>
-              <a:buFont typeface="Times New Roman"/>
-              <a:buAutoNum type="arabicPeriod" startAt="2"/>
-              <a:tabLst>
-                <a:tab pos="278130" algn="l"/>
-              </a:tabLst>
-            </a:pPr>
-            <a:r>
-              <a:rPr sz="2300" b="1" dirty="0">
-                <a:solidFill>
-                  <a:srgbClr val="3C78D8"/>
-                </a:solidFill>
-                <a:latin typeface="Times New Roman"/>
-                <a:cs typeface="Times New Roman"/>
-              </a:rPr>
-              <a:t>Problem</a:t>
-            </a:r>
-            <a:r>
-              <a:rPr sz="2300" b="1" spc="-100" dirty="0">
-                <a:solidFill>
-                  <a:srgbClr val="3C78D8"/>
-                </a:solidFill>
-                <a:latin typeface="Times New Roman"/>
-                <a:cs typeface="Times New Roman"/>
-              </a:rPr>
-              <a:t> </a:t>
-            </a:r>
-            <a:r>
-              <a:rPr sz="2300" b="1" spc="-10" dirty="0">
-                <a:solidFill>
-                  <a:srgbClr val="3C78D8"/>
-                </a:solidFill>
-                <a:latin typeface="Times New Roman"/>
-                <a:cs typeface="Times New Roman"/>
-              </a:rPr>
-              <a:t>Statement:</a:t>
-            </a:r>
-            <a:endParaRPr sz="2300" dirty="0">
-              <a:latin typeface="Times New Roman"/>
-              <a:cs typeface="Times New Roman"/>
-            </a:endParaRPr>
-          </a:p>
-          <a:p>
-            <a:pPr marL="60325">
-              <a:lnSpc>
-                <a:spcPct val="100000"/>
-              </a:lnSpc>
-              <a:spcBef>
-                <a:spcPts val="1155"/>
-              </a:spcBef>
-            </a:pPr>
-            <a:r>
-              <a:rPr lang="en-US" sz="1200" dirty="0"/>
-              <a:t>Manual event registration is prone to errors and difficult to manage. This application provides a digital interface to collect participant details systematically and display them in a structured table.</a:t>
-            </a:r>
-            <a:endParaRPr sz="1200" dirty="0">
-              <a:latin typeface="Times New Roman"/>
-              <a:cs typeface="Times New Roman"/>
-            </a:endParaRPr>
-          </a:p>
-          <a:p>
-            <a:pPr>
-              <a:lnSpc>
-                <a:spcPct val="100000"/>
-              </a:lnSpc>
-              <a:spcBef>
-                <a:spcPts val="705"/>
-              </a:spcBef>
-            </a:pPr>
-            <a:endParaRPr sz="1200" dirty="0">
-              <a:latin typeface="Times New Roman"/>
-              <a:cs typeface="Times New Roman"/>
-            </a:endParaRPr>
-          </a:p>
-          <a:p>
-            <a:pPr marL="230504" indent="-222250">
-              <a:lnSpc>
-                <a:spcPct val="100000"/>
-              </a:lnSpc>
-              <a:spcBef>
-                <a:spcPts val="5"/>
-              </a:spcBef>
-              <a:buClr>
-                <a:srgbClr val="3C78D8"/>
-              </a:buClr>
-              <a:buSzPct val="95652"/>
-              <a:buFont typeface="Times New Roman"/>
-              <a:buAutoNum type="arabicPeriod" startAt="3"/>
-              <a:tabLst>
-                <a:tab pos="230504" algn="l"/>
-              </a:tabLst>
-            </a:pPr>
-            <a:r>
-              <a:rPr sz="2300" b="1" dirty="0">
-                <a:solidFill>
-                  <a:srgbClr val="3C78D8"/>
-                </a:solidFill>
-                <a:latin typeface="Times New Roman"/>
-                <a:cs typeface="Times New Roman"/>
-              </a:rPr>
-              <a:t>Expected</a:t>
-            </a:r>
-            <a:r>
-              <a:rPr sz="2300" b="1" spc="-90" dirty="0">
-                <a:solidFill>
-                  <a:srgbClr val="3C78D8"/>
-                </a:solidFill>
-                <a:latin typeface="Times New Roman"/>
-                <a:cs typeface="Times New Roman"/>
-              </a:rPr>
-              <a:t> </a:t>
-            </a:r>
-            <a:r>
-              <a:rPr sz="2300" b="1" spc="-10" dirty="0">
-                <a:solidFill>
-                  <a:srgbClr val="3C78D8"/>
-                </a:solidFill>
-                <a:latin typeface="Times New Roman"/>
-                <a:cs typeface="Times New Roman"/>
-              </a:rPr>
-              <a:t>Features:</a:t>
-            </a:r>
-            <a:endParaRPr lang="en-US" sz="2300" spc="-10" dirty="0">
-              <a:solidFill>
-                <a:srgbClr val="3C78D8"/>
-              </a:solidFill>
-              <a:latin typeface="Times New Roman"/>
-              <a:cs typeface="Times New Roman"/>
-            </a:endParaRPr>
-          </a:p>
-          <a:p>
-            <a:pPr marL="8254">
-              <a:lnSpc>
-                <a:spcPct val="100000"/>
-              </a:lnSpc>
-              <a:spcBef>
-                <a:spcPts val="5"/>
-              </a:spcBef>
-              <a:buClr>
-                <a:srgbClr val="3C78D8"/>
-              </a:buClr>
-              <a:buSzPct val="95652"/>
-              <a:tabLst>
-                <a:tab pos="230504" algn="l"/>
-              </a:tabLst>
-            </a:pPr>
-            <a:r>
-              <a:rPr lang="en-US" sz="1700" b="1" dirty="0">
-                <a:latin typeface="Times New Roman"/>
-                <a:cs typeface="Times New Roman"/>
-              </a:rPr>
-              <a:t>1.  </a:t>
-            </a:r>
-            <a:r>
-              <a:rPr sz="1700" b="1" dirty="0">
-                <a:latin typeface="Times New Roman"/>
-                <a:cs typeface="Times New Roman"/>
-              </a:rPr>
-              <a:t>Event</a:t>
-            </a:r>
-            <a:r>
-              <a:rPr sz="1700" b="1" spc="-55" dirty="0">
-                <a:latin typeface="Times New Roman"/>
-                <a:cs typeface="Times New Roman"/>
-              </a:rPr>
-              <a:t> </a:t>
-            </a:r>
-            <a:r>
-              <a:rPr sz="1700" b="1" dirty="0">
-                <a:latin typeface="Times New Roman"/>
-                <a:cs typeface="Times New Roman"/>
-              </a:rPr>
-              <a:t>Title</a:t>
-            </a:r>
-            <a:r>
-              <a:rPr sz="1700" b="1" spc="-50" dirty="0">
-                <a:latin typeface="Times New Roman"/>
-                <a:cs typeface="Times New Roman"/>
-              </a:rPr>
-              <a:t> </a:t>
-            </a:r>
-            <a:r>
-              <a:rPr sz="1700" b="1" dirty="0">
-                <a:latin typeface="Times New Roman"/>
-                <a:cs typeface="Times New Roman"/>
-              </a:rPr>
-              <a:t>and</a:t>
-            </a:r>
-            <a:r>
-              <a:rPr sz="1700" b="1" spc="-55" dirty="0">
-                <a:latin typeface="Times New Roman"/>
-                <a:cs typeface="Times New Roman"/>
-              </a:rPr>
-              <a:t> </a:t>
-            </a:r>
-            <a:r>
-              <a:rPr sz="1700" b="1" spc="-10" dirty="0">
-                <a:latin typeface="Times New Roman"/>
-                <a:cs typeface="Times New Roman"/>
-              </a:rPr>
-              <a:t>Description:</a:t>
-            </a:r>
-            <a:endParaRPr lang="en-US" sz="1700" b="1" spc="-10" dirty="0">
-              <a:latin typeface="Times New Roman"/>
-              <a:cs typeface="Times New Roman"/>
-            </a:endParaRPr>
-          </a:p>
-          <a:p>
-            <a:pPr marL="8254">
-              <a:lnSpc>
-                <a:spcPct val="100000"/>
-              </a:lnSpc>
-              <a:spcBef>
-                <a:spcPts val="5"/>
-              </a:spcBef>
-              <a:buClr>
-                <a:srgbClr val="3C78D8"/>
-              </a:buClr>
-              <a:buSzPct val="95652"/>
-              <a:tabLst>
-                <a:tab pos="230504" algn="l"/>
-              </a:tabLst>
-            </a:pPr>
-            <a:r>
-              <a:rPr lang="en-US" sz="1700" dirty="0">
-                <a:latin typeface="Times New Roman"/>
-                <a:cs typeface="Times New Roman"/>
-              </a:rPr>
-              <a:t>	</a:t>
-            </a:r>
-            <a:r>
-              <a:rPr lang="en-US" sz="1700" b="1" dirty="0">
-                <a:latin typeface="Times New Roman"/>
-                <a:cs typeface="Times New Roman"/>
-              </a:rPr>
-              <a:t>Title:</a:t>
-            </a:r>
-            <a:r>
-              <a:rPr lang="en-US" sz="1700" dirty="0">
-                <a:latin typeface="Times New Roman"/>
-                <a:cs typeface="Times New Roman"/>
-              </a:rPr>
-              <a:t> College Workshop Registration</a:t>
-            </a:r>
-          </a:p>
-          <a:p>
-            <a:pPr marL="8254">
-              <a:lnSpc>
-                <a:spcPct val="100000"/>
-              </a:lnSpc>
-              <a:spcBef>
-                <a:spcPts val="5"/>
-              </a:spcBef>
-              <a:buClr>
-                <a:srgbClr val="3C78D8"/>
-              </a:buClr>
-              <a:buSzPct val="95652"/>
-              <a:tabLst>
-                <a:tab pos="230504" algn="l"/>
-              </a:tabLst>
-            </a:pPr>
-            <a:r>
-              <a:rPr lang="en-US" sz="1700" dirty="0">
-                <a:latin typeface="Times New Roman"/>
-                <a:cs typeface="Times New Roman"/>
-              </a:rPr>
-              <a:t>     </a:t>
-            </a:r>
-            <a:r>
-              <a:rPr lang="en-US" sz="1700" b="1" dirty="0">
-                <a:latin typeface="Times New Roman"/>
-                <a:cs typeface="Times New Roman"/>
-              </a:rPr>
-              <a:t>Description:</a:t>
-            </a:r>
-            <a:r>
-              <a:rPr lang="en-US" sz="1700" dirty="0">
-                <a:latin typeface="Times New Roman"/>
-                <a:cs typeface="Times New Roman"/>
-              </a:rPr>
-              <a:t> A technical seminar designed to provide students 	with hands-on experience in modern programming languages     	like Java and Python.</a:t>
-            </a:r>
-            <a:endParaRPr sz="1700" dirty="0">
-              <a:latin typeface="Times New Roman"/>
-              <a:cs typeface="Times New Roman"/>
-            </a:endParaRPr>
-          </a:p>
-        </p:txBody>
-      </p:sp>
-      <p:sp>
-        <p:nvSpPr>
-          <p:cNvPr id="8" name="object 8"/>
-          <p:cNvSpPr/>
-          <p:nvPr/>
-        </p:nvSpPr>
-        <p:spPr>
-          <a:xfrm>
-            <a:off x="660400" y="6000457"/>
-            <a:ext cx="6502400" cy="0"/>
-          </a:xfrm>
-          <a:custGeom>
-            <a:avLst/>
-            <a:gdLst/>
-            <a:ahLst/>
-            <a:cxnLst/>
-            <a:rect l="l" t="t" r="r" b="b"/>
-            <a:pathLst>
-              <a:path w="6502400">
-                <a:moveTo>
-                  <a:pt x="0" y="0"/>
-                </a:moveTo>
-                <a:lnTo>
-                  <a:pt x="6502403" y="0"/>
-                </a:lnTo>
-              </a:path>
-            </a:pathLst>
-          </a:custGeom>
-          <a:ln w="12699">
-            <a:solidFill>
-              <a:srgbClr val="878787"/>
-            </a:solidFill>
-          </a:ln>
-        </p:spPr>
-        <p:txBody>
-          <a:bodyPr wrap="square" lIns="0" tIns="0" rIns="0" bIns="0" rtlCol="0"/>
-          <a:lstStyle/>
-          <a:p>
-            <a:endParaRPr/>
-          </a:p>
-        </p:txBody>
-      </p:sp>
-      <p:sp>
-        <p:nvSpPr>
           <p:cNvPr id="9" name="object 9"/>
           <p:cNvSpPr txBox="1"/>
           <p:nvPr/>
         </p:nvSpPr>
         <p:spPr>
           <a:xfrm>
-            <a:off x="613409" y="5968709"/>
-            <a:ext cx="5546090" cy="3413760"/>
+            <a:off x="613408" y="5819977"/>
+            <a:ext cx="6289994" cy="4646144"/>
           </a:xfrm>
           <a:prstGeom prst="rect">
             <a:avLst/>
@@ -3591,20 +2771,25 @@
           </a:bodyPr>
           <a:lstStyle/>
           <a:p>
-            <a:pPr marL="387985" lvl="1" indent="-375285">
+            <a:pPr marL="12700" lvl="1">
               <a:lnSpc>
                 <a:spcPct val="100000"/>
               </a:lnSpc>
               <a:spcBef>
                 <a:spcPts val="590"/>
               </a:spcBef>
-              <a:buFont typeface="Times New Roman"/>
-              <a:buAutoNum type="arabicPeriod" startAt="2"/>
               <a:tabLst>
                 <a:tab pos="387985" algn="l"/>
               </a:tabLst>
             </a:pPr>
             <a:r>
+              <a:rPr lang="en-US" sz="1700" b="1" dirty="0">
+                <a:latin typeface="Times New Roman"/>
+                <a:cs typeface="Times New Roman"/>
+              </a:rPr>
+              <a:t>2.  </a:t>
+            </a:r>
+            <a:r>
               <a:rPr sz="1700" b="1" dirty="0">
                 <a:latin typeface="Times New Roman"/>
                 <a:cs typeface="Times New Roman"/>
@@ -3681,518 +2866,247 @@
               </a:rPr>
               <a:t>Section:</a:t>
             </a:r>
-            <a:endParaRPr sz="1700">
+            <a:endParaRPr lang="en-US" sz="1700" b="1" spc="-10" dirty="0">
               <a:latin typeface="Times New Roman"/>
               <a:cs typeface="Times New Roman"/>
             </a:endParaRPr>
           </a:p>
           <a:p>
-            <a:pPr marL="12700">
+            <a:pPr marL="12700" lvl="1">
               <a:lnSpc>
                 <a:spcPct val="100000"/>
               </a:lnSpc>
               <a:spcBef>
-                <a:spcPts val="350"/>
+                <a:spcPts val="590"/>
               </a:spcBef>
-            </a:pPr>
-            <a:r>
-              <a:rPr sz="1200" i="1" dirty="0">
-                <a:latin typeface="Times New Roman"/>
-                <a:cs typeface="Times New Roman"/>
-              </a:rPr>
-              <a:t>(Include</a:t>
-            </a:r>
-            <a:r>
-              <a:rPr sz="1200" i="1" spc="-15" dirty="0">
-                <a:latin typeface="Times New Roman"/>
-                <a:cs typeface="Times New Roman"/>
-              </a:rPr>
-              <a:t> </a:t>
-            </a:r>
-            <a:r>
-              <a:rPr sz="1200" i="1" dirty="0">
-                <a:latin typeface="Times New Roman"/>
-                <a:cs typeface="Times New Roman"/>
-              </a:rPr>
-              <a:t>complete</a:t>
-            </a:r>
-            <a:r>
-              <a:rPr sz="1200" i="1" spc="-15" dirty="0">
-                <a:latin typeface="Times New Roman"/>
-                <a:cs typeface="Times New Roman"/>
-              </a:rPr>
-              <a:t> </a:t>
-            </a:r>
-            <a:r>
-              <a:rPr sz="1200" i="1" dirty="0">
-                <a:latin typeface="Times New Roman"/>
-                <a:cs typeface="Times New Roman"/>
-              </a:rPr>
-              <a:t>event</a:t>
-            </a:r>
-            <a:r>
-              <a:rPr sz="1200" i="1" spc="-15" dirty="0">
-                <a:latin typeface="Times New Roman"/>
-                <a:cs typeface="Times New Roman"/>
-              </a:rPr>
-              <a:t> </a:t>
-            </a:r>
-            <a:r>
-              <a:rPr sz="1200" i="1" dirty="0">
-                <a:latin typeface="Times New Roman"/>
-                <a:cs typeface="Times New Roman"/>
-              </a:rPr>
-              <a:t>details</a:t>
-            </a:r>
-            <a:r>
-              <a:rPr sz="1200" i="1" spc="-15" dirty="0">
-                <a:latin typeface="Times New Roman"/>
-                <a:cs typeface="Times New Roman"/>
-              </a:rPr>
-              <a:t> </a:t>
-            </a:r>
-            <a:r>
-              <a:rPr sz="1200" i="1" dirty="0">
-                <a:latin typeface="Times New Roman"/>
-                <a:cs typeface="Times New Roman"/>
-              </a:rPr>
-              <a:t>and</a:t>
-            </a:r>
-            <a:r>
-              <a:rPr sz="1200" i="1" spc="-15" dirty="0">
-                <a:latin typeface="Times New Roman"/>
-                <a:cs typeface="Times New Roman"/>
-              </a:rPr>
-              <a:t> </a:t>
-            </a:r>
-            <a:r>
-              <a:rPr sz="1200" i="1" spc="-10" dirty="0">
-                <a:latin typeface="Times New Roman"/>
-                <a:cs typeface="Times New Roman"/>
-              </a:rPr>
-              <a:t>create</a:t>
-            </a:r>
-            <a:r>
-              <a:rPr sz="1200" i="1" spc="-15" dirty="0">
-                <a:latin typeface="Times New Roman"/>
-                <a:cs typeface="Times New Roman"/>
-              </a:rPr>
-              <a:t> </a:t>
-            </a:r>
-            <a:r>
-              <a:rPr sz="1200" i="1" dirty="0">
-                <a:latin typeface="Times New Roman"/>
-                <a:cs typeface="Times New Roman"/>
-              </a:rPr>
-              <a:t>a</a:t>
-            </a:r>
-            <a:r>
-              <a:rPr sz="1200" i="1" spc="-15" dirty="0">
-                <a:latin typeface="Times New Roman"/>
-                <a:cs typeface="Times New Roman"/>
-              </a:rPr>
-              <a:t> </a:t>
-            </a:r>
-            <a:r>
-              <a:rPr sz="1200" i="1" spc="-10" dirty="0">
-                <a:latin typeface="Times New Roman"/>
-                <a:cs typeface="Times New Roman"/>
-              </a:rPr>
-              <a:t>registration</a:t>
-            </a:r>
-            <a:r>
-              <a:rPr sz="1200" i="1" spc="-20" dirty="0">
-                <a:latin typeface="Times New Roman"/>
-                <a:cs typeface="Times New Roman"/>
-              </a:rPr>
-              <a:t> </a:t>
-            </a:r>
-            <a:r>
-              <a:rPr sz="1200" i="1" dirty="0">
-                <a:latin typeface="Times New Roman"/>
-                <a:cs typeface="Times New Roman"/>
-              </a:rPr>
-              <a:t>form</a:t>
-            </a:r>
-            <a:r>
-              <a:rPr sz="1200" i="1" spc="-15" dirty="0">
-                <a:latin typeface="Times New Roman"/>
-                <a:cs typeface="Times New Roman"/>
-              </a:rPr>
-              <a:t> </a:t>
-            </a:r>
-            <a:r>
-              <a:rPr sz="1200" i="1" dirty="0">
-                <a:latin typeface="Times New Roman"/>
-                <a:cs typeface="Times New Roman"/>
-              </a:rPr>
-              <a:t>to</a:t>
-            </a:r>
-            <a:r>
-              <a:rPr sz="1200" i="1" spc="-15" dirty="0">
-                <a:latin typeface="Times New Roman"/>
-                <a:cs typeface="Times New Roman"/>
-              </a:rPr>
-              <a:t> </a:t>
-            </a:r>
-            <a:r>
-              <a:rPr sz="1200" i="1" dirty="0">
-                <a:latin typeface="Times New Roman"/>
-                <a:cs typeface="Times New Roman"/>
-              </a:rPr>
-              <a:t>collect</a:t>
-            </a:r>
-            <a:r>
-              <a:rPr sz="1200" i="1" spc="-15" dirty="0">
-                <a:latin typeface="Times New Roman"/>
-                <a:cs typeface="Times New Roman"/>
-              </a:rPr>
-              <a:t> </a:t>
-            </a:r>
-            <a:r>
-              <a:rPr sz="1200" i="1" dirty="0">
-                <a:latin typeface="Times New Roman"/>
-                <a:cs typeface="Times New Roman"/>
-              </a:rPr>
-              <a:t>user</a:t>
-            </a:r>
-            <a:r>
-              <a:rPr sz="1200" i="1" spc="-20" dirty="0">
-                <a:latin typeface="Times New Roman"/>
-                <a:cs typeface="Times New Roman"/>
-              </a:rPr>
-              <a:t> </a:t>
-            </a:r>
-            <a:r>
-              <a:rPr sz="1200" i="1" spc="-10" dirty="0">
-                <a:latin typeface="Times New Roman"/>
-                <a:cs typeface="Times New Roman"/>
-              </a:rPr>
-              <a:t>information.)</a:t>
-            </a:r>
-            <a:endParaRPr sz="1200">
-              <a:latin typeface="Times New Roman"/>
-              <a:cs typeface="Times New Roman"/>
-            </a:endParaRPr>
-          </a:p>
-          <a:p>
-            <a:pPr>
+              <a:tabLst>
+                <a:tab pos="387985" algn="l"/>
+              </a:tabLst>
+            </a:pPr>
+            <a:r>
+              <a:rPr lang="en-US" sz="1500" spc="-10" dirty="0">
+                <a:latin typeface="Times New Roman"/>
+                <a:cs typeface="Times New Roman"/>
+              </a:rPr>
+              <a:t>This section serves as the core interaction point for the user, providing essential logistics and data entry fields.</a:t>
+            </a:r>
+          </a:p>
+          <a:p>
+            <a:pPr marL="298450" lvl="1" indent="-285750">
               <a:lnSpc>
                 <a:spcPct val="100000"/>
               </a:lnSpc>
               <a:spcBef>
-                <a:spcPts val="360"/>
+                <a:spcPts val="590"/>
               </a:spcBef>
-            </a:pPr>
-            <a:endParaRPr sz="1200">
-              <a:latin typeface="Times New Roman"/>
-              <a:cs typeface="Times New Roman"/>
-            </a:endParaRPr>
-          </a:p>
-          <a:p>
-            <a:pPr marL="12700">
-              <a:lnSpc>
-                <a:spcPct val="100000"/>
-              </a:lnSpc>
-            </a:pPr>
-            <a:r>
-              <a:rPr sz="1200" dirty="0">
-                <a:latin typeface="Times New Roman"/>
-                <a:cs typeface="Times New Roman"/>
-              </a:rPr>
-              <a:t>This</a:t>
-            </a:r>
-            <a:r>
-              <a:rPr sz="1200" spc="-30" dirty="0">
-                <a:latin typeface="Times New Roman"/>
-                <a:cs typeface="Times New Roman"/>
-              </a:rPr>
-              <a:t> </a:t>
-            </a:r>
-            <a:r>
-              <a:rPr sz="1200" dirty="0">
-                <a:latin typeface="Times New Roman"/>
-                <a:cs typeface="Times New Roman"/>
-              </a:rPr>
-              <a:t>section</a:t>
-            </a:r>
-            <a:r>
-              <a:rPr sz="1200" spc="-30" dirty="0">
-                <a:latin typeface="Times New Roman"/>
-                <a:cs typeface="Times New Roman"/>
-              </a:rPr>
-              <a:t> </a:t>
-            </a:r>
-            <a:r>
-              <a:rPr sz="1200" spc="-10" dirty="0">
-                <a:latin typeface="Times New Roman"/>
-                <a:cs typeface="Times New Roman"/>
-              </a:rPr>
-              <a:t>includes:</a:t>
-            </a:r>
-            <a:endParaRPr sz="1200">
-              <a:latin typeface="Times New Roman"/>
-              <a:cs typeface="Times New Roman"/>
-            </a:endParaRPr>
-          </a:p>
-          <a:p>
-            <a:pPr marL="288925" lvl="2" indent="-180975">
+              <a:buFont typeface="Arial" panose="020B0604020202020204" pitchFamily="34" charset="0"/>
+              <a:buChar char="•"/>
+              <a:tabLst>
+                <a:tab pos="387985" algn="l"/>
+              </a:tabLst>
+            </a:pPr>
+            <a:r>
+              <a:rPr lang="en-US" sz="1500" b="1" spc="-10" dirty="0">
+                <a:latin typeface="Times New Roman"/>
+                <a:cs typeface="Times New Roman"/>
+              </a:rPr>
+              <a:t>Event Information: </a:t>
+            </a:r>
+            <a:r>
+              <a:rPr lang="en-US" sz="1500" spc="-10" dirty="0">
+                <a:latin typeface="Times New Roman"/>
+                <a:cs typeface="Times New Roman"/>
+              </a:rPr>
+              <a:t>Displays the specific date (15-03-2026) and the physical location (Seminar Hall A) to the user.</a:t>
+            </a:r>
+          </a:p>
+          <a:p>
+            <a:pPr marL="298450" lvl="1" indent="-285750">
               <a:lnSpc>
                 <a:spcPct val="100000"/>
               </a:lnSpc>
               <a:spcBef>
-                <a:spcPts val="1145"/>
+                <a:spcPts val="590"/>
               </a:spcBef>
-              <a:buFont typeface="Arial"/>
-              <a:buChar char="●"/>
+              <a:buFont typeface="Arial" panose="020B0604020202020204" pitchFamily="34" charset="0"/>
+              <a:buChar char="•"/>
               <a:tabLst>
-                <a:tab pos="288925" algn="l"/>
+                <a:tab pos="387985" algn="l"/>
               </a:tabLst>
             </a:pPr>
             <a:r>
-              <a:rPr sz="1200" dirty="0">
-                <a:latin typeface="Times New Roman"/>
-                <a:cs typeface="Times New Roman"/>
-              </a:rPr>
-              <a:t>Event</a:t>
-            </a:r>
-            <a:r>
-              <a:rPr sz="1200" spc="-30" dirty="0">
-                <a:latin typeface="Times New Roman"/>
-                <a:cs typeface="Times New Roman"/>
-              </a:rPr>
-              <a:t> </a:t>
-            </a:r>
-            <a:r>
-              <a:rPr sz="1200" spc="-10" dirty="0">
-                <a:latin typeface="Times New Roman"/>
-                <a:cs typeface="Times New Roman"/>
-              </a:rPr>
-              <a:t>Information</a:t>
-            </a:r>
-            <a:endParaRPr sz="1200">
-              <a:latin typeface="Times New Roman"/>
-              <a:cs typeface="Times New Roman"/>
-            </a:endParaRPr>
-          </a:p>
-          <a:p>
-            <a:pPr marL="288925" lvl="2" indent="-180975">
+              <a:rPr lang="en-US" sz="1500" b="1" spc="-10" dirty="0">
+                <a:latin typeface="Times New Roman"/>
+                <a:cs typeface="Times New Roman"/>
+              </a:rPr>
+              <a:t>Registration Form: </a:t>
+            </a:r>
+            <a:r>
+              <a:rPr lang="en-US" sz="1500" spc="-10" dirty="0">
+                <a:latin typeface="Times New Roman"/>
+                <a:cs typeface="Times New Roman"/>
+              </a:rPr>
+              <a:t>A highly organized form using &lt;</a:t>
+            </a:r>
+            <a:r>
+              <a:rPr lang="en-US" sz="1500" spc="-10" dirty="0" err="1">
+                <a:latin typeface="Times New Roman"/>
+                <a:cs typeface="Times New Roman"/>
+              </a:rPr>
+              <a:t>fieldset</a:t>
+            </a:r>
+            <a:r>
+              <a:rPr lang="en-US" sz="1500" spc="-10" dirty="0">
+                <a:latin typeface="Times New Roman"/>
+                <a:cs typeface="Times New Roman"/>
+              </a:rPr>
+              <a:t>&gt; containers to group related information logically.</a:t>
+            </a:r>
+          </a:p>
+          <a:p>
+            <a:pPr marL="298450" lvl="1" indent="-285750">
               <a:lnSpc>
                 <a:spcPct val="100000"/>
               </a:lnSpc>
               <a:spcBef>
-                <a:spcPts val="1325"/>
+                <a:spcPts val="590"/>
               </a:spcBef>
-              <a:buFont typeface="Arial"/>
-              <a:buChar char="●"/>
+              <a:buFont typeface="Arial" panose="020B0604020202020204" pitchFamily="34" charset="0"/>
+              <a:buChar char="•"/>
               <a:tabLst>
-                <a:tab pos="288925" algn="l"/>
+                <a:tab pos="387985" algn="l"/>
               </a:tabLst>
             </a:pPr>
             <a:r>
-              <a:rPr sz="1200" dirty="0">
-                <a:latin typeface="Times New Roman"/>
-                <a:cs typeface="Times New Roman"/>
-              </a:rPr>
-              <a:t>Registration</a:t>
-            </a:r>
-            <a:r>
-              <a:rPr sz="1200" spc="-60" dirty="0">
-                <a:latin typeface="Times New Roman"/>
-                <a:cs typeface="Times New Roman"/>
-              </a:rPr>
-              <a:t> </a:t>
-            </a:r>
-            <a:r>
-              <a:rPr sz="1200" spc="-20" dirty="0">
-                <a:latin typeface="Times New Roman"/>
-                <a:cs typeface="Times New Roman"/>
-              </a:rPr>
-              <a:t>Form</a:t>
-            </a:r>
-            <a:endParaRPr sz="1200">
-              <a:latin typeface="Times New Roman"/>
-              <a:cs typeface="Times New Roman"/>
-            </a:endParaRPr>
-          </a:p>
-          <a:p>
-            <a:pPr marL="288925" lvl="2" indent="-180975">
+              <a:rPr lang="en-US" sz="1500" b="1" spc="-10" dirty="0">
+                <a:latin typeface="Times New Roman"/>
+                <a:cs typeface="Times New Roman"/>
+              </a:rPr>
+              <a:t>Personal Information: </a:t>
+            </a:r>
+            <a:r>
+              <a:rPr lang="en-US" sz="1500" spc="-10" dirty="0">
+                <a:latin typeface="Times New Roman"/>
+                <a:cs typeface="Times New Roman"/>
+              </a:rPr>
+              <a:t>Captures the student's Name, Email, Phone number, and Date of Birth.</a:t>
+            </a:r>
+          </a:p>
+          <a:p>
+            <a:pPr marL="298450" lvl="1" indent="-285750">
               <a:lnSpc>
                 <a:spcPct val="100000"/>
               </a:lnSpc>
               <a:spcBef>
-                <a:spcPts val="1325"/>
+                <a:spcPts val="590"/>
               </a:spcBef>
-              <a:buFont typeface="Arial"/>
-              <a:buChar char="●"/>
+              <a:buFont typeface="Arial" panose="020B0604020202020204" pitchFamily="34" charset="0"/>
+              <a:buChar char="•"/>
               <a:tabLst>
-                <a:tab pos="288925" algn="l"/>
+                <a:tab pos="387985" algn="l"/>
               </a:tabLst>
             </a:pPr>
             <a:r>
-              <a:rPr sz="1200" dirty="0">
-                <a:latin typeface="Times New Roman"/>
-                <a:cs typeface="Times New Roman"/>
-              </a:rPr>
-              <a:t>Personal</a:t>
-            </a:r>
-            <a:r>
-              <a:rPr sz="1200" spc="-45" dirty="0">
-                <a:latin typeface="Times New Roman"/>
-                <a:cs typeface="Times New Roman"/>
-              </a:rPr>
-              <a:t> </a:t>
-            </a:r>
-            <a:r>
-              <a:rPr sz="1200" spc="-10" dirty="0">
-                <a:latin typeface="Times New Roman"/>
-                <a:cs typeface="Times New Roman"/>
-              </a:rPr>
-              <a:t>Information</a:t>
-            </a:r>
-            <a:endParaRPr sz="1200">
-              <a:latin typeface="Times New Roman"/>
-              <a:cs typeface="Times New Roman"/>
-            </a:endParaRPr>
-          </a:p>
-          <a:p>
-            <a:pPr marL="288925" lvl="2" indent="-180975">
+              <a:rPr lang="en-US" sz="1500" b="1" spc="-10" dirty="0">
+                <a:latin typeface="Times New Roman"/>
+                <a:cs typeface="Times New Roman"/>
+              </a:rPr>
+              <a:t>Event Selection: </a:t>
+            </a:r>
+            <a:r>
+              <a:rPr lang="en-US" sz="1500" spc="-10" dirty="0">
+                <a:latin typeface="Times New Roman"/>
+                <a:cs typeface="Times New Roman"/>
+              </a:rPr>
+              <a:t>Offers a curated list of workshops (Java or Python) via a dropdown menu.</a:t>
+            </a:r>
+          </a:p>
+          <a:p>
+            <a:pPr marL="298450" lvl="1" indent="-285750">
               <a:lnSpc>
                 <a:spcPct val="100000"/>
               </a:lnSpc>
               <a:spcBef>
-                <a:spcPts val="1325"/>
+                <a:spcPts val="590"/>
               </a:spcBef>
-              <a:buFont typeface="Arial"/>
-              <a:buChar char="●"/>
+              <a:buFont typeface="Arial" panose="020B0604020202020204" pitchFamily="34" charset="0"/>
+              <a:buChar char="•"/>
               <a:tabLst>
-                <a:tab pos="288925" algn="l"/>
+                <a:tab pos="387985" algn="l"/>
               </a:tabLst>
             </a:pPr>
             <a:r>
-              <a:rPr sz="1200" dirty="0">
-                <a:latin typeface="Times New Roman"/>
-                <a:cs typeface="Times New Roman"/>
-              </a:rPr>
-              <a:t>Event</a:t>
-            </a:r>
-            <a:r>
-              <a:rPr sz="1200" spc="-30" dirty="0">
-                <a:latin typeface="Times New Roman"/>
-                <a:cs typeface="Times New Roman"/>
-              </a:rPr>
-              <a:t> </a:t>
-            </a:r>
-            <a:r>
-              <a:rPr sz="1200" spc="-10" dirty="0">
-                <a:latin typeface="Times New Roman"/>
-                <a:cs typeface="Times New Roman"/>
-              </a:rPr>
-              <a:t>Selection</a:t>
-            </a:r>
-            <a:endParaRPr sz="1200">
-              <a:latin typeface="Times New Roman"/>
-              <a:cs typeface="Times New Roman"/>
-            </a:endParaRPr>
-          </a:p>
-          <a:p>
-            <a:pPr marL="288925" lvl="2" indent="-180975">
+              <a:rPr lang="en-US" sz="1500" b="1" spc="-10" dirty="0">
+                <a:latin typeface="Times New Roman"/>
+                <a:cs typeface="Times New Roman"/>
+              </a:rPr>
+              <a:t>Additional Details: </a:t>
+            </a:r>
+            <a:r>
+              <a:rPr lang="en-US" sz="1500" spc="-10" dirty="0">
+                <a:latin typeface="Times New Roman"/>
+                <a:cs typeface="Times New Roman"/>
+              </a:rPr>
+              <a:t>Allows students to specify their participation mode—either "Online" for remote access or "Offline" for in-person attendance.</a:t>
+            </a:r>
+          </a:p>
+          <a:p>
+            <a:pPr marL="298450" lvl="1" indent="-285750">
               <a:lnSpc>
                 <a:spcPct val="100000"/>
               </a:lnSpc>
               <a:spcBef>
-                <a:spcPts val="1325"/>
+                <a:spcPts val="590"/>
               </a:spcBef>
-              <a:buFont typeface="Arial"/>
-              <a:buChar char="●"/>
+              <a:buFont typeface="Arial" panose="020B0604020202020204" pitchFamily="34" charset="0"/>
+              <a:buChar char="•"/>
               <a:tabLst>
-                <a:tab pos="288925" algn="l"/>
+                <a:tab pos="387985" algn="l"/>
               </a:tabLst>
             </a:pPr>
             <a:r>
-              <a:rPr sz="1200" dirty="0">
-                <a:latin typeface="Times New Roman"/>
-                <a:cs typeface="Times New Roman"/>
-              </a:rPr>
-              <a:t>Additional</a:t>
-            </a:r>
-            <a:r>
-              <a:rPr sz="1200" spc="-55" dirty="0">
-                <a:latin typeface="Times New Roman"/>
-                <a:cs typeface="Times New Roman"/>
-              </a:rPr>
-              <a:t> </a:t>
-            </a:r>
-            <a:r>
-              <a:rPr sz="1200" spc="-10" dirty="0">
-                <a:latin typeface="Times New Roman"/>
-                <a:cs typeface="Times New Roman"/>
-              </a:rPr>
-              <a:t>Details</a:t>
-            </a:r>
-            <a:endParaRPr sz="1200">
-              <a:latin typeface="Times New Roman"/>
-              <a:cs typeface="Times New Roman"/>
-            </a:endParaRPr>
-          </a:p>
-          <a:p>
-            <a:pPr marL="288925" lvl="2" indent="-180975">
+              <a:rPr lang="en-US" sz="1500" b="1" spc="-10" dirty="0">
+                <a:latin typeface="Times New Roman"/>
+                <a:cs typeface="Times New Roman"/>
+              </a:rPr>
+              <a:t>Declaration: </a:t>
+            </a:r>
+            <a:r>
+              <a:rPr lang="en-US" sz="1500" spc="-10" dirty="0">
+                <a:latin typeface="Times New Roman"/>
+                <a:cs typeface="Times New Roman"/>
+              </a:rPr>
+              <a:t>Includes a mandatory confirmation checkbox to ensure the user verifies the accuracy of their provided details.</a:t>
+            </a:r>
+          </a:p>
+          <a:p>
+            <a:pPr marL="298450" lvl="1" indent="-285750">
               <a:lnSpc>
                 <a:spcPct val="100000"/>
               </a:lnSpc>
               <a:spcBef>
-                <a:spcPts val="1325"/>
+                <a:spcPts val="590"/>
               </a:spcBef>
-              <a:buFont typeface="Arial"/>
-              <a:buChar char="●"/>
+              <a:buFont typeface="Arial" panose="020B0604020202020204" pitchFamily="34" charset="0"/>
+              <a:buChar char="•"/>
               <a:tabLst>
-                <a:tab pos="288925" algn="l"/>
+                <a:tab pos="387985" algn="l"/>
               </a:tabLst>
             </a:pPr>
             <a:r>
-              <a:rPr sz="1200" spc="-10" dirty="0">
-                <a:latin typeface="Times New Roman"/>
-                <a:cs typeface="Times New Roman"/>
-              </a:rPr>
-              <a:t>Declaration</a:t>
-            </a:r>
-            <a:endParaRPr sz="1200">
-              <a:latin typeface="Times New Roman"/>
-              <a:cs typeface="Times New Roman"/>
-            </a:endParaRPr>
-          </a:p>
-          <a:p>
-            <a:pPr marL="288925" lvl="2" indent="-180975">
-              <a:lnSpc>
-                <a:spcPct val="100000"/>
-              </a:lnSpc>
-              <a:spcBef>
-                <a:spcPts val="1325"/>
-              </a:spcBef>
-              <a:buFont typeface="Arial"/>
-              <a:buChar char="●"/>
-              <a:tabLst>
-                <a:tab pos="288925" algn="l"/>
-              </a:tabLst>
-            </a:pPr>
-            <a:r>
-              <a:rPr sz="1200" dirty="0">
-                <a:latin typeface="Times New Roman"/>
-                <a:cs typeface="Times New Roman"/>
-              </a:rPr>
-              <a:t>Form </a:t>
-            </a:r>
-            <a:r>
-              <a:rPr sz="1200" spc="-10" dirty="0">
-                <a:latin typeface="Times New Roman"/>
-                <a:cs typeface="Times New Roman"/>
-              </a:rPr>
-              <a:t>Controls</a:t>
-            </a:r>
-            <a:endParaRPr sz="1200">
-              <a:latin typeface="Times New Roman"/>
-              <a:cs typeface="Times New Roman"/>
-            </a:endParaRPr>
+              <a:rPr lang="en-US" sz="1500" b="1" spc="-10" dirty="0">
+                <a:latin typeface="Times New Roman"/>
+                <a:cs typeface="Times New Roman"/>
+              </a:rPr>
+              <a:t>Form Controls: </a:t>
+            </a:r>
+            <a:r>
+              <a:rPr lang="en-US" sz="1500" spc="-10" dirty="0">
+                <a:latin typeface="Times New Roman"/>
+                <a:cs typeface="Times New Roman"/>
+              </a:rPr>
+              <a:t>Features a "Submit" button to process the registration and a "Reset" button to clear all inputs for fresh entry.</a:t>
+            </a:r>
           </a:p>
         </p:txBody>
       </p:sp>
@@ -4234,6 +3148,36 @@
           <a:xfrm>
             <a:off x="2569210" y="641963"/>
             <a:ext cx="1009650" cy="571500"/>
+          </a:xfrm>
+          <a:prstGeom prst="rect">
+            <a:avLst/>
+          </a:prstGeom>
+        </p:spPr>
+      </p:pic>
+      <p:pic>
+        <p:nvPicPr>
+          <p:cNvPr id="12" name="Picture 11">
+            <a:extLst>
+              <a:ext uri="{FF2B5EF4-FFF2-40B4-BE49-F238E27FC236}">
+                <a16:creationId xmlns:a16="http://schemas.microsoft.com/office/drawing/2014/main" id="{6328C188-F6FF-9C72-DDD5-4313850C24E9}"/>
+              </a:ext>
+            </a:extLst>
+          </p:cNvPr>
+          <p:cNvPicPr>
+            <a:picLocks noChangeAspect="1"/>
+          </p:cNvPicPr>
+          <p:nvPr/>
+        </p:nvPicPr>
+        <p:blipFill>
+          <a:blip r:embed="rId6"/>
+          <a:stretch>
+            <a:fillRect/>
+          </a:stretch>
+        </p:blipFill>
+        <p:spPr>
+          <a:xfrm>
+            <a:off x="588008" y="10460025"/>
+            <a:ext cx="6511092" cy="12193"/>
           </a:xfrm>
           <a:prstGeom prst="rect">
             <a:avLst/>
@@ -4317,8 +3261,8 @@
         </p:nvSpPr>
         <p:spPr>
           <a:xfrm>
-            <a:off x="765809" y="1235593"/>
-            <a:ext cx="2695575" cy="2012950"/>
+            <a:off x="685800" y="961559"/>
+            <a:ext cx="5448300" cy="1659300"/>
           </a:xfrm>
           <a:prstGeom prst="rect">
             <a:avLst/>
@@ -4339,13 +3283,20 @@
               </a:spcBef>
             </a:pPr>
             <a:r>
+              <a:rPr lang="en-US" sz="1300" b="1" spc="-10" dirty="0">
+                <a:latin typeface="Times New Roman"/>
+                <a:cs typeface="Times New Roman"/>
+              </a:rPr>
+              <a:t>Example</a:t>
+            </a:r>
+            <a:r>
               <a:rPr sz="1300" b="1" spc="-10" dirty="0">
                 <a:latin typeface="Times New Roman"/>
                 <a:cs typeface="Times New Roman"/>
               </a:rPr>
-              <a:t>Sample:</a:t>
-            </a:r>
-            <a:endParaRPr sz="1300">
+              <a:t>:</a:t>
+            </a:r>
+            <a:endParaRPr sz="1300" dirty="0">
               <a:latin typeface="Times New Roman"/>
               <a:cs typeface="Times New Roman"/>
             </a:endParaRPr>
@@ -4402,11 +3353,25 @@
               <a:t> </a:t>
             </a:r>
             <a:r>
+              <a:rPr lang="en-US" sz="1200" b="1" spc="-25" dirty="0">
+                <a:latin typeface="Times New Roman"/>
+                <a:cs typeface="Times New Roman"/>
+              </a:rPr>
+              <a:t>Example</a:t>
+            </a:r>
+            <a:r>
+              <a:rPr sz="1200" b="1" spc="-25" dirty="0">
+                <a:latin typeface="Times New Roman"/>
+                <a:cs typeface="Times New Roman"/>
+              </a:rPr>
+              <a:t> </a:t>
+            </a:r>
+            <a:r>
               <a:rPr sz="1200" b="1" dirty="0">
                 <a:latin typeface="Times New Roman"/>
                 <a:cs typeface="Times New Roman"/>
               </a:rPr>
-              <a:t>Sample</a:t>
+              <a:t>Filled</a:t>
             </a:r>
             <a:r>
               <a:rPr sz="1200" b="1" spc="-25" dirty="0">
@@ -4416,48 +3381,34 @@
               <a:t> </a:t>
             </a:r>
             <a:r>
+              <a:rPr sz="1200" b="1" spc="-20" dirty="0">
+                <a:latin typeface="Times New Roman"/>
+                <a:cs typeface="Times New Roman"/>
+              </a:rPr>
+              <a:t>Data </a:t>
+            </a:r>
+            <a:r>
               <a:rPr sz="1200" b="1" dirty="0">
                 <a:latin typeface="Times New Roman"/>
                 <a:cs typeface="Times New Roman"/>
               </a:rPr>
-              <a:t>Filled</a:t>
-            </a:r>
-            <a:r>
-              <a:rPr sz="1200" b="1" spc="-25" dirty="0">
+              <a:t>Personal</a:t>
+            </a:r>
+            <a:r>
+              <a:rPr sz="1200" b="1" spc="-45" dirty="0">
                 <a:latin typeface="Times New Roman"/>
                 <a:cs typeface="Times New Roman"/>
               </a:rPr>
               <a:t> </a:t>
             </a:r>
             <a:r>
-              <a:rPr sz="1200" b="1" spc="-20" dirty="0">
-                <a:latin typeface="Times New Roman"/>
-                <a:cs typeface="Times New Roman"/>
-              </a:rPr>
-              <a:t>Data </a:t>
-            </a:r>
-            <a:r>
-              <a:rPr sz="1200" b="1" dirty="0">
-                <a:latin typeface="Times New Roman"/>
-                <a:cs typeface="Times New Roman"/>
-              </a:rPr>
-              <a:t>Personal</a:t>
-            </a:r>
-            <a:r>
-              <a:rPr sz="1200" b="1" spc="-45" dirty="0">
-                <a:latin typeface="Times New Roman"/>
-                <a:cs typeface="Times New Roman"/>
-              </a:rPr>
-              <a:t> </a:t>
-            </a:r>
-            <a:r>
               <a:rPr sz="1200" b="1" spc="-10" dirty="0">
                 <a:latin typeface="Times New Roman"/>
                 <a:cs typeface="Times New Roman"/>
               </a:rPr>
               <a:t>Information</a:t>
             </a:r>
-            <a:endParaRPr sz="1200">
+            <a:endParaRPr sz="1200" dirty="0">
               <a:latin typeface="Times New Roman"/>
               <a:cs typeface="Times New Roman"/>
             </a:endParaRPr>
@@ -4491,13 +3442,20 @@
               <a:t> </a:t>
             </a:r>
             <a:r>
-              <a:rPr sz="1200" spc="-25" dirty="0">
-                <a:latin typeface="Times New Roman"/>
-                <a:cs typeface="Times New Roman"/>
-              </a:rPr>
-              <a:t>XYZ</a:t>
-            </a:r>
-            <a:endParaRPr sz="1200">
+              <a:rPr lang="en-US" sz="1200" b="1" spc="-35" dirty="0">
+                <a:latin typeface="Times New Roman"/>
+                <a:cs typeface="Times New Roman"/>
+              </a:rPr>
+              <a:t> </a:t>
+            </a:r>
+            <a:r>
+              <a:rPr lang="en-US" sz="1200" spc="-35" dirty="0">
+                <a:latin typeface="Times New Roman"/>
+                <a:cs typeface="Times New Roman"/>
+              </a:rPr>
+              <a:t>Hariharan S</a:t>
+            </a:r>
+            <a:endParaRPr sz="1200" dirty="0">
               <a:latin typeface="Times New Roman"/>
               <a:cs typeface="Times New Roman"/>
             </a:endParaRPr>
@@ -4528,14 +3486,13 @@
               <a:t> </a:t>
             </a:r>
             <a:r>
-              <a:rPr sz="1200" spc="-10" dirty="0">
-                <a:latin typeface="Times New Roman"/>
-                <a:cs typeface="Times New Roman"/>
-                <a:hlinkClick r:id="rId4"/>
-              </a:rPr>
-              <a:t>xyz@gmail.com</a:t>
-            </a:r>
-            <a:endParaRPr sz="1200">
+              <a:rPr lang="en-US" sz="1200" spc="-10" dirty="0">
+                <a:latin typeface="Times New Roman"/>
+                <a:cs typeface="Times New Roman"/>
+              </a:rPr>
+              <a:t>kumaravelat2005@gmail.com</a:t>
+            </a:r>
+            <a:endParaRPr sz="1200" dirty="0">
               <a:latin typeface="Times New Roman"/>
               <a:cs typeface="Times New Roman"/>
             </a:endParaRPr>
@@ -4559,13 +3516,13 @@
               <a:t>Phone Number: </a:t>
             </a:r>
             <a:r>
-              <a:rPr sz="1200" spc="-10" dirty="0">
-                <a:latin typeface="Times New Roman"/>
-                <a:cs typeface="Times New Roman"/>
-              </a:rPr>
-              <a:t>9876543210</a:t>
-            </a:r>
-            <a:endParaRPr sz="1200">
+              <a:rPr lang="en-US" sz="1200" spc="-10" dirty="0">
+                <a:latin typeface="Times New Roman"/>
+                <a:cs typeface="Times New Roman"/>
+              </a:rPr>
+              <a:t>8056194886</a:t>
+            </a:r>
+            <a:endParaRPr sz="1200" dirty="0">
               <a:latin typeface="Times New Roman"/>
               <a:cs typeface="Times New Roman"/>
             </a:endParaRPr>
@@ -4624,13 +3581,13 @@
               <a:t> </a:t>
             </a:r>
             <a:r>
-              <a:rPr sz="1200" spc="-10" dirty="0">
-                <a:latin typeface="Times New Roman"/>
-                <a:cs typeface="Times New Roman"/>
-              </a:rPr>
-              <a:t>12/02/2006</a:t>
-            </a:r>
-            <a:endParaRPr sz="1200">
+              <a:rPr lang="en-US" sz="1200" spc="-10" dirty="0">
+                <a:latin typeface="Times New Roman"/>
+                <a:cs typeface="Times New Roman"/>
+              </a:rPr>
+              <a:t>26/10/2005</a:t>
+            </a:r>
+            <a:endParaRPr sz="1200" dirty="0">
               <a:latin typeface="Times New Roman"/>
               <a:cs typeface="Times New Roman"/>
             </a:endParaRPr>
@@ -4661,13 +3618,13 @@
               <a:t> </a:t>
             </a:r>
             <a:r>
-              <a:rPr sz="1200" spc="-10" dirty="0">
-                <a:latin typeface="Times New Roman"/>
-                <a:cs typeface="Times New Roman"/>
-              </a:rPr>
-              <a:t>Female</a:t>
-            </a:r>
-            <a:endParaRPr sz="1200">
+              <a:rPr lang="en-US" sz="1200" spc="-45" dirty="0">
+                <a:latin typeface="Times New Roman"/>
+                <a:cs typeface="Times New Roman"/>
+              </a:rPr>
+              <a:t>Male</a:t>
+            </a:r>
+            <a:endParaRPr sz="1200" dirty="0">
               <a:latin typeface="Times New Roman"/>
               <a:cs typeface="Times New Roman"/>
             </a:endParaRPr>
@@ -4682,7 +3639,7 @@
         </p:nvSpPr>
         <p:spPr>
           <a:xfrm>
-            <a:off x="660400" y="3511546"/>
+            <a:off x="660400" y="2832100"/>
             <a:ext cx="6502400" cy="0"/>
           </a:xfrm>
           <a:custGeom>
@@ -4724,8 +3681,8 @@
         </p:nvSpPr>
         <p:spPr>
           <a:xfrm>
-            <a:off x="613409" y="3767176"/>
-            <a:ext cx="3949700" cy="1596390"/>
+            <a:off x="461484" y="3373761"/>
+            <a:ext cx="6828315" cy="2100896"/>
           </a:xfrm>
           <a:prstGeom prst="rect">
             <a:avLst/>
@@ -4794,168 +3751,214 @@
               </a:rPr>
               <a:t>Section</a:t>
             </a:r>
-            <a:endParaRPr sz="1700">
+            <a:endParaRPr sz="1700" dirty="0">
               <a:latin typeface="Times New Roman"/>
               <a:cs typeface="Times New Roman"/>
             </a:endParaRPr>
           </a:p>
           <a:p>
-            <a:pPr marL="50800">
-              <a:lnSpc>
-                <a:spcPct val="100000"/>
-              </a:lnSpc>
-              <a:spcBef>
-                <a:spcPts val="1145"/>
-              </a:spcBef>
-            </a:pPr>
-            <a:r>
-              <a:rPr sz="1200" dirty="0">
-                <a:latin typeface="Times New Roman"/>
-                <a:cs typeface="Times New Roman"/>
-              </a:rPr>
-              <a:t>(C</a:t>
-            </a:r>
-            <a:r>
-              <a:rPr sz="1200" i="1" dirty="0">
-                <a:latin typeface="Times New Roman"/>
-                <a:cs typeface="Times New Roman"/>
-              </a:rPr>
-              <a:t>reate</a:t>
-            </a:r>
-            <a:r>
-              <a:rPr sz="1200" i="1" spc="-25" dirty="0">
+            <a:pPr marL="88900" marR="1468120">
+              <a:lnSpc>
+                <a:spcPct val="179200"/>
+              </a:lnSpc>
+            </a:pPr>
+            <a:r>
+              <a:rPr lang="en-US" sz="1400" dirty="0">
+                <a:latin typeface="Times New Roman"/>
+                <a:cs typeface="Times New Roman"/>
+              </a:rPr>
+              <a:t>This section presents a clear, tabular view of student data, which is essential  event coordinators to track attendance</a:t>
+            </a:r>
+          </a:p>
+          <a:p>
+            <a:pPr marL="88900" marR="1468120">
+              <a:lnSpc>
+                <a:spcPct val="179200"/>
+              </a:lnSpc>
+            </a:pPr>
+            <a:r>
+              <a:rPr sz="1400" dirty="0">
+                <a:latin typeface="Times New Roman"/>
+                <a:cs typeface="Times New Roman"/>
+              </a:rPr>
+              <a:t>|</a:t>
+            </a:r>
+            <a:r>
+              <a:rPr sz="1400" spc="-15" dirty="0">
                 <a:latin typeface="Times New Roman"/>
                 <a:cs typeface="Times New Roman"/>
               </a:rPr>
               <a:t> </a:t>
             </a:r>
             <a:r>
-              <a:rPr sz="1200" i="1" dirty="0">
-                <a:latin typeface="Times New Roman"/>
-                <a:cs typeface="Times New Roman"/>
-              </a:rPr>
-              <a:t>a</a:t>
-            </a:r>
-            <a:r>
-              <a:rPr sz="1200" i="1" spc="-25" dirty="0">
+              <a:rPr sz="1400" dirty="0">
+                <a:latin typeface="Times New Roman"/>
+                <a:cs typeface="Times New Roman"/>
+              </a:rPr>
+              <a:t>Name</a:t>
+            </a:r>
+            <a:r>
+              <a:rPr lang="en-US" sz="1400" dirty="0">
+                <a:latin typeface="Times New Roman"/>
+                <a:cs typeface="Times New Roman"/>
+              </a:rPr>
+              <a:t>        </a:t>
+            </a:r>
+            <a:r>
+              <a:rPr sz="1400" spc="-10" dirty="0">
                 <a:latin typeface="Times New Roman"/>
                 <a:cs typeface="Times New Roman"/>
               </a:rPr>
               <a:t> </a:t>
             </a:r>
             <a:r>
-              <a:rPr sz="1200" i="1" dirty="0">
-                <a:latin typeface="Times New Roman"/>
-                <a:cs typeface="Times New Roman"/>
-              </a:rPr>
-              <a:t>table</a:t>
-            </a:r>
-            <a:r>
-              <a:rPr sz="1200" i="1" spc="-25" dirty="0">
+              <a:rPr sz="1400" dirty="0">
+                <a:latin typeface="Times New Roman"/>
+                <a:cs typeface="Times New Roman"/>
+              </a:rPr>
+              <a:t>|</a:t>
+            </a:r>
+            <a:r>
+              <a:rPr sz="1400" spc="-10" dirty="0">
                 <a:latin typeface="Times New Roman"/>
                 <a:cs typeface="Times New Roman"/>
               </a:rPr>
               <a:t> </a:t>
             </a:r>
             <a:r>
-              <a:rPr sz="1200" i="1" dirty="0">
-                <a:latin typeface="Times New Roman"/>
-                <a:cs typeface="Times New Roman"/>
-              </a:rPr>
-              <a:t>to</a:t>
-            </a:r>
-            <a:r>
-              <a:rPr sz="1200" i="1" spc="-25" dirty="0">
+              <a:rPr sz="1400" dirty="0">
+                <a:latin typeface="Times New Roman"/>
+                <a:cs typeface="Times New Roman"/>
+              </a:rPr>
+              <a:t>Email</a:t>
+            </a:r>
+            <a:r>
+              <a:rPr sz="1400" spc="-10" dirty="0">
                 <a:latin typeface="Times New Roman"/>
                 <a:cs typeface="Times New Roman"/>
               </a:rPr>
               <a:t> </a:t>
             </a:r>
             <a:r>
-              <a:rPr sz="1200" i="1" dirty="0">
-                <a:latin typeface="Times New Roman"/>
-                <a:cs typeface="Times New Roman"/>
-              </a:rPr>
-              <a:t>display</a:t>
-            </a:r>
-            <a:r>
-              <a:rPr sz="1200" i="1" spc="-30" dirty="0">
+              <a:rPr lang="en-US" sz="1400" spc="-10" dirty="0">
+                <a:latin typeface="Times New Roman"/>
+                <a:cs typeface="Times New Roman"/>
+              </a:rPr>
+              <a:t>                                    </a:t>
+            </a:r>
+            <a:r>
+              <a:rPr sz="1400" dirty="0">
+                <a:latin typeface="Times New Roman"/>
+                <a:cs typeface="Times New Roman"/>
+              </a:rPr>
+              <a:t>|</a:t>
+            </a:r>
+            <a:r>
+              <a:rPr sz="1400" spc="-10" dirty="0">
                 <a:latin typeface="Times New Roman"/>
                 <a:cs typeface="Times New Roman"/>
               </a:rPr>
               <a:t> </a:t>
             </a:r>
             <a:r>
-              <a:rPr sz="1200" i="1" dirty="0">
-                <a:latin typeface="Times New Roman"/>
-                <a:cs typeface="Times New Roman"/>
-              </a:rPr>
-              <a:t>the</a:t>
-            </a:r>
-            <a:r>
-              <a:rPr sz="1200" i="1" spc="-25" dirty="0">
+              <a:rPr sz="1400" dirty="0">
+                <a:latin typeface="Times New Roman"/>
+                <a:cs typeface="Times New Roman"/>
+              </a:rPr>
+              <a:t>Phone</a:t>
+            </a:r>
+            <a:r>
+              <a:rPr sz="1400" spc="-10" dirty="0">
                 <a:latin typeface="Times New Roman"/>
                 <a:cs typeface="Times New Roman"/>
               </a:rPr>
               <a:t> </a:t>
             </a:r>
             <a:r>
-              <a:rPr sz="1200" i="1" dirty="0">
-                <a:latin typeface="Times New Roman"/>
-                <a:cs typeface="Times New Roman"/>
-              </a:rPr>
-              <a:t>details</a:t>
-            </a:r>
-            <a:r>
-              <a:rPr sz="1200" i="1" spc="-25" dirty="0">
+              <a:rPr lang="en-US" sz="1400" spc="-10" dirty="0">
+                <a:latin typeface="Times New Roman"/>
+                <a:cs typeface="Times New Roman"/>
+              </a:rPr>
+              <a:t>         </a:t>
+            </a:r>
+            <a:r>
+              <a:rPr sz="1400" dirty="0">
+                <a:latin typeface="Times New Roman"/>
+                <a:cs typeface="Times New Roman"/>
+              </a:rPr>
+              <a:t>|Event</a:t>
+            </a:r>
+            <a:r>
+              <a:rPr sz="1400" spc="-10" dirty="0">
                 <a:latin typeface="Times New Roman"/>
                 <a:cs typeface="Times New Roman"/>
               </a:rPr>
               <a:t> </a:t>
             </a:r>
             <a:r>
-              <a:rPr sz="1200" i="1" dirty="0">
-                <a:latin typeface="Times New Roman"/>
-                <a:cs typeface="Times New Roman"/>
-              </a:rPr>
-              <a:t>of</a:t>
-            </a:r>
-            <a:r>
-              <a:rPr sz="1200" i="1" spc="-25" dirty="0">
+              <a:rPr lang="en-US" sz="1400" spc="-10" dirty="0">
+                <a:latin typeface="Times New Roman"/>
+                <a:cs typeface="Times New Roman"/>
+              </a:rPr>
+              <a:t>  </a:t>
+            </a:r>
+            <a:r>
+              <a:rPr sz="1400" dirty="0">
+                <a:latin typeface="Times New Roman"/>
+                <a:cs typeface="Times New Roman"/>
+              </a:rPr>
+              <a:t>|</a:t>
+            </a:r>
+            <a:r>
+              <a:rPr sz="1400" spc="-10" dirty="0">
                 <a:latin typeface="Times New Roman"/>
                 <a:cs typeface="Times New Roman"/>
               </a:rPr>
               <a:t> </a:t>
             </a:r>
             <a:r>
-              <a:rPr sz="1200" i="1" spc="-10" dirty="0">
-                <a:latin typeface="Times New Roman"/>
-                <a:cs typeface="Times New Roman"/>
-              </a:rPr>
-              <a:t>registered</a:t>
-            </a:r>
-            <a:r>
-              <a:rPr sz="1200" i="1" spc="-25" dirty="0">
+              <a:rPr sz="1400" dirty="0">
+                <a:latin typeface="Times New Roman"/>
+                <a:cs typeface="Times New Roman"/>
+              </a:rPr>
+              <a:t>Mode</a:t>
+            </a:r>
+            <a:r>
+              <a:rPr lang="en-US" sz="1400" dirty="0">
                 <a:latin typeface="Times New Roman"/>
                 <a:cs typeface="Times New Roman"/>
               </a:rPr>
               <a:t> </a:t>
             </a:r>
             <a:r>
-              <a:rPr sz="1200" i="1" spc="-10" dirty="0">
-                <a:latin typeface="Times New Roman"/>
-                <a:cs typeface="Times New Roman"/>
-              </a:rPr>
-              <a:t>participants.</a:t>
-            </a:r>
-            <a:r>
-              <a:rPr sz="1200" spc="-10" dirty="0">
-                <a:latin typeface="Times New Roman"/>
-                <a:cs typeface="Times New Roman"/>
-              </a:rPr>
-              <a:t>)</a:t>
-            </a:r>
-            <a:endParaRPr sz="1200">
+              <a:rPr sz="1400" spc="-10" dirty="0">
+                <a:latin typeface="Times New Roman"/>
+                <a:cs typeface="Times New Roman"/>
+              </a:rPr>
+              <a:t> </a:t>
+            </a:r>
+            <a:r>
+              <a:rPr sz="1400" spc="-50" dirty="0">
+                <a:latin typeface="Times New Roman"/>
+                <a:cs typeface="Times New Roman"/>
+              </a:rPr>
+              <a:t>|</a:t>
+            </a:r>
+            <a:r>
+              <a:rPr lang="en-US" sz="1400" spc="-50" dirty="0">
+                <a:latin typeface="Times New Roman"/>
+                <a:cs typeface="Times New Roman"/>
+              </a:rPr>
+              <a:t> </a:t>
+            </a:r>
+            <a:r>
+              <a:rPr sz="1400" spc="-50" dirty="0">
+                <a:latin typeface="Times New Roman"/>
+                <a:cs typeface="Times New Roman"/>
+              </a:rPr>
+              <a:t> </a:t>
+            </a:r>
+            <a:endParaRPr lang="en-US" sz="1400" spc="-50" dirty="0">
               <a:latin typeface="Times New Roman"/>
               <a:cs typeface="Times New Roman"/>
             </a:endParaRPr>
@@ -4967,207 +3970,33 @@
               </a:lnSpc>
             </a:pPr>
             <a:r>
-              <a:rPr sz="1200" dirty="0">
-                <a:latin typeface="Times New Roman"/>
-                <a:cs typeface="Times New Roman"/>
-              </a:rPr>
-              <a:t>|</a:t>
-            </a:r>
-            <a:r>
-              <a:rPr sz="1200" spc="-15" dirty="0">
-                <a:latin typeface="Times New Roman"/>
-                <a:cs typeface="Times New Roman"/>
-              </a:rPr>
-              <a:t> </a:t>
-            </a:r>
-            <a:r>
-              <a:rPr sz="1200" dirty="0">
-                <a:latin typeface="Times New Roman"/>
-                <a:cs typeface="Times New Roman"/>
-              </a:rPr>
-              <a:t>Name</a:t>
-            </a:r>
-            <a:r>
-              <a:rPr sz="1200" spc="-10" dirty="0">
-                <a:latin typeface="Times New Roman"/>
-                <a:cs typeface="Times New Roman"/>
-              </a:rPr>
-              <a:t> </a:t>
-            </a:r>
-            <a:r>
-              <a:rPr sz="1200" dirty="0">
-                <a:latin typeface="Times New Roman"/>
-                <a:cs typeface="Times New Roman"/>
-              </a:rPr>
-              <a:t>|</a:t>
-            </a:r>
-            <a:r>
-              <a:rPr sz="1200" spc="-10" dirty="0">
-                <a:latin typeface="Times New Roman"/>
-                <a:cs typeface="Times New Roman"/>
-              </a:rPr>
-              <a:t> </a:t>
-            </a:r>
-            <a:r>
-              <a:rPr sz="1200" dirty="0">
-                <a:latin typeface="Times New Roman"/>
-                <a:cs typeface="Times New Roman"/>
-              </a:rPr>
-              <a:t>Email</a:t>
-            </a:r>
-            <a:r>
-              <a:rPr sz="1200" spc="-10" dirty="0">
-                <a:latin typeface="Times New Roman"/>
-                <a:cs typeface="Times New Roman"/>
-              </a:rPr>
-              <a:t> </a:t>
-            </a:r>
-            <a:r>
-              <a:rPr sz="1200" dirty="0">
-                <a:latin typeface="Times New Roman"/>
-                <a:cs typeface="Times New Roman"/>
-              </a:rPr>
-              <a:t>|</a:t>
-            </a:r>
-            <a:r>
-              <a:rPr sz="1200" spc="-10" dirty="0">
-                <a:latin typeface="Times New Roman"/>
-                <a:cs typeface="Times New Roman"/>
-              </a:rPr>
-              <a:t> </a:t>
-            </a:r>
-            <a:r>
-              <a:rPr sz="1200" dirty="0">
-                <a:latin typeface="Times New Roman"/>
-                <a:cs typeface="Times New Roman"/>
-              </a:rPr>
-              <a:t>Phone</a:t>
-            </a:r>
-            <a:r>
-              <a:rPr sz="1200" spc="-10" dirty="0">
-                <a:latin typeface="Times New Roman"/>
-                <a:cs typeface="Times New Roman"/>
-              </a:rPr>
-              <a:t> </a:t>
-            </a:r>
-            <a:r>
-              <a:rPr sz="1200" dirty="0">
-                <a:latin typeface="Times New Roman"/>
-                <a:cs typeface="Times New Roman"/>
-              </a:rPr>
-              <a:t>|</a:t>
-            </a:r>
-            <a:r>
-              <a:rPr sz="1200" spc="-10" dirty="0">
-                <a:latin typeface="Times New Roman"/>
-                <a:cs typeface="Times New Roman"/>
-              </a:rPr>
-              <a:t> </a:t>
-            </a:r>
-            <a:r>
-              <a:rPr sz="1200" dirty="0">
-                <a:latin typeface="Times New Roman"/>
-                <a:cs typeface="Times New Roman"/>
-              </a:rPr>
-              <a:t>Event</a:t>
-            </a:r>
-            <a:r>
-              <a:rPr sz="1200" spc="-10" dirty="0">
-                <a:latin typeface="Times New Roman"/>
-                <a:cs typeface="Times New Roman"/>
-              </a:rPr>
-              <a:t> </a:t>
-            </a:r>
-            <a:r>
-              <a:rPr sz="1200" dirty="0">
-                <a:latin typeface="Times New Roman"/>
-                <a:cs typeface="Times New Roman"/>
-              </a:rPr>
-              <a:t>|</a:t>
-            </a:r>
-            <a:r>
-              <a:rPr sz="1200" spc="-10" dirty="0">
-                <a:latin typeface="Times New Roman"/>
-                <a:cs typeface="Times New Roman"/>
-              </a:rPr>
-              <a:t> </a:t>
-            </a:r>
-            <a:r>
-              <a:rPr sz="1200" dirty="0">
-                <a:latin typeface="Times New Roman"/>
-                <a:cs typeface="Times New Roman"/>
-              </a:rPr>
-              <a:t>Mode</a:t>
-            </a:r>
-            <a:r>
-              <a:rPr sz="1200" spc="-10" dirty="0">
-                <a:latin typeface="Times New Roman"/>
-                <a:cs typeface="Times New Roman"/>
-              </a:rPr>
-              <a:t> </a:t>
-            </a:r>
-            <a:r>
-              <a:rPr sz="1200" spc="-50" dirty="0">
-                <a:latin typeface="Times New Roman"/>
-                <a:cs typeface="Times New Roman"/>
-              </a:rPr>
-              <a:t>| </a:t>
-            </a:r>
-            <a:r>
-              <a:rPr sz="1200" dirty="0">
-                <a:latin typeface="Times New Roman"/>
-                <a:cs typeface="Times New Roman"/>
-              </a:rPr>
-              <a:t>(Add</a:t>
-            </a:r>
-            <a:r>
-              <a:rPr sz="1200" spc="-20" dirty="0">
-                <a:latin typeface="Times New Roman"/>
-                <a:cs typeface="Times New Roman"/>
-              </a:rPr>
-              <a:t> </a:t>
-            </a:r>
-            <a:r>
-              <a:rPr sz="1200" dirty="0">
-                <a:latin typeface="Times New Roman"/>
-                <a:cs typeface="Times New Roman"/>
-              </a:rPr>
-              <a:t>one</a:t>
-            </a:r>
-            <a:r>
-              <a:rPr sz="1200" spc="-15" dirty="0">
-                <a:latin typeface="Times New Roman"/>
-                <a:cs typeface="Times New Roman"/>
-              </a:rPr>
-              <a:t> </a:t>
-            </a:r>
-            <a:r>
-              <a:rPr sz="1200" dirty="0">
-                <a:latin typeface="Times New Roman"/>
-                <a:cs typeface="Times New Roman"/>
-              </a:rPr>
-              <a:t>sample</a:t>
-            </a:r>
-            <a:r>
-              <a:rPr sz="1200" spc="-20" dirty="0">
-                <a:latin typeface="Times New Roman"/>
-                <a:cs typeface="Times New Roman"/>
-              </a:rPr>
-              <a:t> row)</a:t>
-            </a:r>
-            <a:endParaRPr sz="1200">
-              <a:latin typeface="Times New Roman"/>
-              <a:cs typeface="Times New Roman"/>
-            </a:endParaRPr>
-          </a:p>
-          <a:p>
-            <a:pPr marL="88900">
-              <a:lnSpc>
-                <a:spcPct val="100000"/>
-              </a:lnSpc>
-              <a:spcBef>
-                <a:spcPts val="1140"/>
-              </a:spcBef>
+              <a:rPr lang="en-US" sz="1400" spc="-50" dirty="0">
+                <a:latin typeface="Times New Roman"/>
+                <a:cs typeface="Times New Roman"/>
+              </a:rPr>
+              <a:t>| Hariharan S | </a:t>
+            </a:r>
+            <a:r>
+              <a:rPr lang="en-US" sz="1400" spc="-50" dirty="0">
+                <a:latin typeface="Times New Roman"/>
+                <a:cs typeface="Times New Roman"/>
+                <a:hlinkClick r:id="rId4"/>
+              </a:rPr>
+              <a:t>kumaravelat2005@gmaul.com</a:t>
+            </a:r>
+            <a:r>
+              <a:rPr lang="en-US" sz="1400" spc="-50" dirty="0">
+                <a:latin typeface="Times New Roman"/>
+                <a:cs typeface="Times New Roman"/>
+              </a:rPr>
+              <a:t> |8056194885 | Java      | Offline|</a:t>
+            </a:r>
+          </a:p>
+          <a:p>
+            <a:pPr marL="88900" marR="1468120">
+              <a:lnSpc>
+                <a:spcPct val="179200"/>
+              </a:lnSpc>
             </a:pPr>
             <a:r>
               <a:rPr sz="1200" b="1" spc="-10" dirty="0">
@@ -5176,7 +4005,7 @@
               </a:rPr>
               <a:t>Sample:</a:t>
             </a:r>
-            <a:endParaRPr sz="1200">
+            <a:endParaRPr sz="1200" dirty="0">
               <a:latin typeface="Times New Roman"/>
               <a:cs typeface="Times New Roman"/>
             </a:endParaRPr>
@@ -5189,11 +4018,17 @@
           <p:cNvGraphicFramePr>
             <a:graphicFrameLocks noGrp="1"/>
           </p:cNvGraphicFramePr>
-          <p:nvPr/>
+          <p:nvPr>
+            <p:extLst>
+              <p:ext uri="{D42A27DB-BD31-4B8C-83A1-F6EECF244321}">
+                <p14:modId xmlns:p14="http://schemas.microsoft.com/office/powerpoint/2010/main" val="1945122980"/>
+              </p:ext>
+            </p:extLst>
+          </p:nvPr>
         </p:nvGraphicFramePr>
         <p:xfrm>
-          <a:off x="749300" y="5511805"/>
-          <a:ext cx="6413500" cy="596265"/>
+          <a:off x="479425" y="5683431"/>
+          <a:ext cx="6610350" cy="784506"/>
         </p:xfrm>
         <a:graphic>
           <a:graphicData uri="http://schemas.openxmlformats.org/drawingml/2006/table">
@@ -5209,28 +4044,28 @@
                     </a:ext>
                   </a:extLst>
                 </a:gridCol>
-                <a:gridCol w="1358900">
+                <a:gridCol w="2063750">
                   <a:extLst>
                     <a:ext uri="{9D8B030D-6E8A-4147-A177-3AD203B41FA5}">
                       <a16:colId xmlns:a16="http://schemas.microsoft.com/office/drawing/2014/main" val="20001"/>
                     </a:ext>
                   </a:extLst>
                 </a:gridCol>
-                <a:gridCol w="1181100">
+                <a:gridCol w="1447800">
                   <a:extLst>
                     <a:ext uri="{9D8B030D-6E8A-4147-A177-3AD203B41FA5}">
                       <a16:colId xmlns:a16="http://schemas.microsoft.com/office/drawing/2014/main" val="20002"/>
                     </a:ext>
                   </a:extLst>
                 </a:gridCol>
-                <a:gridCol w="1879600">
+                <a:gridCol w="908050">
                   <a:extLst>
                     <a:ext uri="{9D8B030D-6E8A-4147-A177-3AD203B41FA5}">
                       <a16:colId xmlns:a16="http://schemas.microsoft.com/office/drawing/2014/main" val="20003"/>
                     </a:ext>
                   </a:extLst>
                 </a:gridCol>
-                <a:gridCol w="1028700">
+                <a:gridCol w="1225550">
                   <a:extLst>
                     <a:ext uri="{9D8B030D-6E8A-4147-A177-3AD203B41FA5}">
                       <a16:colId xmlns:a16="http://schemas.microsoft.com/office/drawing/2014/main" val="20004"/>
@@ -5238,7 +4073,7 @@
                   </a:extLst>
                 </a:gridCol>
               </a:tblGrid>
-              <a:tr h="304165">
+              <a:tr h="471892">
                 <a:tc>
                   <a:txBody>
                     <a:bodyPr/>
@@ -5253,13 +4088,13 @@
                         </a:spcBef>
                       </a:pPr>
                       <a:r>
-                        <a:rPr sz="1100" b="1" spc="-20" dirty="0">
+                        <a:rPr sz="1300" b="1" spc="-20" dirty="0">
                           <a:latin typeface="Times New Roman"/>
                           <a:cs typeface="Times New Roman"/>
                         </a:rPr>
                         <a:t>Name</a:t>
                       </a:r>
-                      <a:endParaRPr sz="1100">
+                      <a:endParaRPr sz="1300">
                         <a:latin typeface="Times New Roman"/>
                         <a:cs typeface="Times New Roman"/>
                       </a:endParaRPr>
@@ -5306,13 +4141,13 @@
                         </a:spcBef>
                       </a:pPr>
                       <a:r>
-                        <a:rPr sz="1100" b="1" spc="-10" dirty="0">
+                        <a:rPr sz="1300" b="1" spc="-10" dirty="0">
                           <a:latin typeface="Times New Roman"/>
                           <a:cs typeface="Times New Roman"/>
                         </a:rPr>
                         <a:t>Email</a:t>
                       </a:r>
-                      <a:endParaRPr sz="1100">
+                      <a:endParaRPr sz="1300" dirty="0">
                         <a:latin typeface="Times New Roman"/>
                         <a:cs typeface="Times New Roman"/>
                       </a:endParaRPr>
@@ -5359,13 +4194,13 @@
                         </a:spcBef>
                       </a:pPr>
                       <a:r>
-                        <a:rPr sz="1100" b="1" spc="-10" dirty="0">
+                        <a:rPr sz="1300" b="1" spc="-10" dirty="0">
                           <a:latin typeface="Times New Roman"/>
                           <a:cs typeface="Times New Roman"/>
                         </a:rPr>
                         <a:t>Phone</a:t>
                       </a:r>
-                      <a:endParaRPr sz="1100">
+                      <a:endParaRPr sz="1300">
                         <a:latin typeface="Times New Roman"/>
                         <a:cs typeface="Times New Roman"/>
                       </a:endParaRPr>
@@ -5412,13 +4247,13 @@
                         </a:spcBef>
                       </a:pPr>
                       <a:r>
-                        <a:rPr sz="1100" b="1" spc="-10" dirty="0">
+                        <a:rPr sz="1300" b="1" spc="-10" dirty="0">
                           <a:latin typeface="Times New Roman"/>
                           <a:cs typeface="Times New Roman"/>
                         </a:rPr>
                         <a:t>Event</a:t>
                       </a:r>
-                      <a:endParaRPr sz="1100">
+                      <a:endParaRPr sz="1300">
                         <a:latin typeface="Times New Roman"/>
                         <a:cs typeface="Times New Roman"/>
                       </a:endParaRPr>
@@ -5465,13 +4300,13 @@
                         </a:spcBef>
                       </a:pPr>
                       <a:r>
-                        <a:rPr sz="1100" b="1" spc="-20" dirty="0">
+                        <a:rPr sz="1300" b="1" spc="-20" dirty="0">
                           <a:latin typeface="Times New Roman"/>
                           <a:cs typeface="Times New Roman"/>
                         </a:rPr>
                         <a:t>Mode</a:t>
                       </a:r>
-                      <a:endParaRPr sz="1100">
+                      <a:endParaRPr sz="1300">
                         <a:latin typeface="Times New Roman"/>
                         <a:cs typeface="Times New Roman"/>
                       </a:endParaRPr>
@@ -5510,7 +4345,7 @@
                   </a:ext>
                 </a:extLst>
               </a:tr>
-              <a:tr h="292100">
+              <a:tr h="312614">
                 <a:tc>
                   <a:txBody>
                     <a:bodyPr/>
@@ -5525,13 +4360,20 @@
                         </a:spcBef>
                       </a:pPr>
                       <a:r>
-                        <a:rPr sz="1100" spc="-25" dirty="0">
+                        <a:rPr lang="en-US" sz="1300" spc="-25" dirty="0" err="1">
                           <a:latin typeface="Times New Roman"/>
                           <a:cs typeface="Times New Roman"/>
                         </a:rPr>
-                        <a:t>XYZ</a:t>
+                        <a:t>Hraiharan</a:t>
                       </a:r>
-                      <a:endParaRPr sz="1100">
+                      <a:r>
+                        <a:rPr lang="en-US" sz="1300" spc="-25" dirty="0">
+                          <a:latin typeface="Times New Roman"/>
+                          <a:cs typeface="Times New Roman"/>
+                        </a:rPr>
+                        <a:t> S</a:t>
+                      </a:r>
+                      <a:endParaRPr sz="1300" dirty="0">
                         <a:latin typeface="Times New Roman"/>
                         <a:cs typeface="Times New Roman"/>
                       </a:endParaRPr>
@@ -5578,14 +4420,13 @@
                         </a:spcBef>
                       </a:pPr>
                       <a:r>
-                        <a:rPr sz="1100" spc="-10" dirty="0">
+                        <a:rPr lang="en-US" sz="1300" dirty="0">
                           <a:latin typeface="Times New Roman"/>
                           <a:cs typeface="Times New Roman"/>
-                          <a:hlinkClick r:id="rId4"/>
                         </a:rPr>
-                        <a:t>xyz@gmail.com</a:t>
+                        <a:t>kumaravelat2005@gmail.com</a:t>
                       </a:r>
-                      <a:endParaRPr sz="1100">
+                      <a:endParaRPr sz="1300" dirty="0">
                         <a:latin typeface="Times New Roman"/>
                         <a:cs typeface="Times New Roman"/>
                       </a:endParaRPr>
@@ -5632,13 +4473,13 @@
                         </a:spcBef>
                       </a:pPr>
                       <a:r>
-                        <a:rPr sz="1100" spc="-10" dirty="0">
+                        <a:rPr lang="en-US" sz="1300" spc="-10" dirty="0">
                           <a:latin typeface="Times New Roman"/>
                           <a:cs typeface="Times New Roman"/>
                         </a:rPr>
-                        <a:t>9876543210</a:t>
+                        <a:t>8056194886</a:t>
                       </a:r>
-                      <a:endParaRPr sz="1100">
+                      <a:endParaRPr sz="1300" dirty="0">
                         <a:latin typeface="Times New Roman"/>
                         <a:cs typeface="Times New Roman"/>
                       </a:endParaRPr>
@@ -5685,41 +4526,13 @@
                         </a:spcBef>
                       </a:pPr>
                       <a:r>
-                        <a:rPr sz="1100" spc="-20" dirty="0">
+                        <a:rPr lang="en-US" sz="1300" dirty="0">
                           <a:latin typeface="Times New Roman"/>
                           <a:cs typeface="Times New Roman"/>
                         </a:rPr>
-                        <a:t>Web</a:t>
+                        <a:t>      Java</a:t>
                       </a:r>
-                      <a:r>
-                        <a:rPr sz="1100" spc="-50" dirty="0">
-                          <a:latin typeface="Times New Roman"/>
-                          <a:cs typeface="Times New Roman"/>
-                        </a:rPr>
-                        <a:t> </a:t>
-                      </a:r>
-                      <a:r>
-                        <a:rPr sz="1100" dirty="0">
-                          <a:latin typeface="Times New Roman"/>
-                          <a:cs typeface="Times New Roman"/>
-                        </a:rPr>
-                        <a:t>Development</a:t>
-                      </a:r>
-                      <a:r>
-                        <a:rPr sz="1100" spc="-50" dirty="0">
-                          <a:latin typeface="Times New Roman"/>
-                          <a:cs typeface="Times New Roman"/>
-                        </a:rPr>
-                        <a:t> </a:t>
-                      </a:r>
-                      <a:r>
-                        <a:rPr sz="1100" spc="-10" dirty="0">
-                          <a:latin typeface="Times New Roman"/>
-                          <a:cs typeface="Times New Roman"/>
-                        </a:rPr>
-                        <a:t>Workshop</a:t>
-                      </a:r>
-                      <a:endParaRPr sz="1100">
+                      <a:endParaRPr sz="1300" dirty="0">
                         <a:latin typeface="Times New Roman"/>
                         <a:cs typeface="Times New Roman"/>
                       </a:endParaRPr>
@@ -5766,13 +4579,13 @@
                         </a:spcBef>
                       </a:pPr>
                       <a:r>
-                        <a:rPr sz="1100" spc="-10" dirty="0">
+                        <a:rPr sz="1300" spc="-10" dirty="0">
                           <a:latin typeface="Times New Roman"/>
                           <a:cs typeface="Times New Roman"/>
                         </a:rPr>
                         <a:t>Offline</a:t>
                       </a:r>
-                      <a:endParaRPr sz="1100">
+                      <a:endParaRPr sz="1300" dirty="0">
                         <a:latin typeface="Times New Roman"/>
                         <a:cs typeface="Times New Roman"/>
                       </a:endParaRPr>
@@ -5823,7 +4636,7 @@
         </p:nvSpPr>
         <p:spPr>
           <a:xfrm>
-            <a:off x="660400" y="6572244"/>
+            <a:off x="514985" y="6794500"/>
             <a:ext cx="6502400" cy="0"/>
           </a:xfrm>
           <a:custGeom>
@@ -5865,8 +4678,8 @@
         </p:nvSpPr>
         <p:spPr>
           <a:xfrm>
-            <a:off x="575309" y="6765718"/>
-            <a:ext cx="6341110" cy="2550160"/>
+            <a:off x="461484" y="6841660"/>
+            <a:ext cx="6341110" cy="2776401"/>
           </a:xfrm>
           <a:prstGeom prst="rect">
             <a:avLst/>
@@ -5921,224 +4734,42 @@
               </a:rPr>
               <a:t>Section:</a:t>
             </a:r>
-            <a:endParaRPr sz="1700">
+            <a:endParaRPr sz="1700" dirty="0">
               <a:latin typeface="Times New Roman"/>
               <a:cs typeface="Times New Roman"/>
             </a:endParaRPr>
           </a:p>
           <a:p>
-            <a:pPr marL="12700">
+            <a:pPr>
               <a:lnSpc>
                 <a:spcPct val="100000"/>
               </a:lnSpc>
               <a:spcBef>
-                <a:spcPts val="350"/>
+                <a:spcPts val="45"/>
               </a:spcBef>
             </a:pPr>
             <a:r>
-              <a:rPr sz="1200" i="1" dirty="0">
-                <a:latin typeface="Times New Roman"/>
-                <a:cs typeface="Times New Roman"/>
-              </a:rPr>
-              <a:t>(Add</a:t>
-            </a:r>
-            <a:r>
-              <a:rPr sz="1200" i="1" spc="-25" dirty="0">
-                <a:latin typeface="Times New Roman"/>
-                <a:cs typeface="Times New Roman"/>
-              </a:rPr>
-              <a:t> </a:t>
-            </a:r>
-            <a:r>
-              <a:rPr sz="1200" i="1" dirty="0">
-                <a:latin typeface="Times New Roman"/>
-                <a:cs typeface="Times New Roman"/>
-              </a:rPr>
-              <a:t>contact</a:t>
-            </a:r>
-            <a:r>
-              <a:rPr sz="1200" i="1" spc="-25" dirty="0">
-                <a:latin typeface="Times New Roman"/>
-                <a:cs typeface="Times New Roman"/>
-              </a:rPr>
-              <a:t> </a:t>
-            </a:r>
-            <a:r>
-              <a:rPr sz="1200" i="1" dirty="0">
-                <a:latin typeface="Times New Roman"/>
-                <a:cs typeface="Times New Roman"/>
-              </a:rPr>
-              <a:t>details,</a:t>
-            </a:r>
-            <a:r>
-              <a:rPr sz="1200" i="1" spc="-25" dirty="0">
-                <a:latin typeface="Times New Roman"/>
-                <a:cs typeface="Times New Roman"/>
-              </a:rPr>
-              <a:t> </a:t>
-            </a:r>
-            <a:r>
-              <a:rPr sz="1200" i="1" dirty="0">
-                <a:latin typeface="Times New Roman"/>
-                <a:cs typeface="Times New Roman"/>
-              </a:rPr>
-              <a:t>support</a:t>
-            </a:r>
-            <a:r>
-              <a:rPr sz="1200" i="1" spc="-25" dirty="0">
-                <a:latin typeface="Times New Roman"/>
-                <a:cs typeface="Times New Roman"/>
-              </a:rPr>
-              <a:t> </a:t>
-            </a:r>
-            <a:r>
-              <a:rPr sz="1200" i="1" dirty="0">
-                <a:latin typeface="Times New Roman"/>
-                <a:cs typeface="Times New Roman"/>
-              </a:rPr>
-              <a:t>information,</a:t>
-            </a:r>
-            <a:r>
-              <a:rPr sz="1200" i="1" spc="-25" dirty="0">
-                <a:latin typeface="Times New Roman"/>
-                <a:cs typeface="Times New Roman"/>
-              </a:rPr>
-              <a:t> </a:t>
-            </a:r>
-            <a:r>
-              <a:rPr sz="1200" i="1" dirty="0">
-                <a:latin typeface="Times New Roman"/>
-                <a:cs typeface="Times New Roman"/>
-              </a:rPr>
-              <a:t>and</a:t>
-            </a:r>
-            <a:r>
-              <a:rPr sz="1200" i="1" spc="-20" dirty="0">
-                <a:latin typeface="Times New Roman"/>
-                <a:cs typeface="Times New Roman"/>
-              </a:rPr>
-              <a:t> </a:t>
-            </a:r>
-            <a:r>
-              <a:rPr sz="1200" i="1" dirty="0">
-                <a:latin typeface="Times New Roman"/>
-                <a:cs typeface="Times New Roman"/>
-              </a:rPr>
-              <a:t>copyright</a:t>
-            </a:r>
-            <a:r>
-              <a:rPr sz="1200" i="1" spc="-25" dirty="0">
-                <a:latin typeface="Times New Roman"/>
-                <a:cs typeface="Times New Roman"/>
-              </a:rPr>
-              <a:t> </a:t>
-            </a:r>
-            <a:r>
-              <a:rPr sz="1200" i="1" dirty="0">
-                <a:latin typeface="Times New Roman"/>
-                <a:cs typeface="Times New Roman"/>
-              </a:rPr>
-              <a:t>details</a:t>
-            </a:r>
-            <a:r>
-              <a:rPr sz="1200" i="1" spc="-25" dirty="0">
-                <a:latin typeface="Times New Roman"/>
-                <a:cs typeface="Times New Roman"/>
-              </a:rPr>
-              <a:t> </a:t>
-            </a:r>
-            <a:r>
-              <a:rPr sz="1200" i="1" dirty="0">
-                <a:latin typeface="Times New Roman"/>
-                <a:cs typeface="Times New Roman"/>
-              </a:rPr>
-              <a:t>at</a:t>
-            </a:r>
-            <a:r>
-              <a:rPr sz="1200" i="1" spc="-25" dirty="0">
-                <a:latin typeface="Times New Roman"/>
-                <a:cs typeface="Times New Roman"/>
-              </a:rPr>
-              <a:t> </a:t>
-            </a:r>
-            <a:r>
-              <a:rPr sz="1200" i="1" dirty="0">
-                <a:latin typeface="Times New Roman"/>
-                <a:cs typeface="Times New Roman"/>
-              </a:rPr>
-              <a:t>the</a:t>
-            </a:r>
-            <a:r>
-              <a:rPr sz="1200" i="1" spc="-25" dirty="0">
-                <a:latin typeface="Times New Roman"/>
-                <a:cs typeface="Times New Roman"/>
-              </a:rPr>
-              <a:t> </a:t>
-            </a:r>
-            <a:r>
-              <a:rPr sz="1200" i="1" dirty="0">
-                <a:latin typeface="Times New Roman"/>
-                <a:cs typeface="Times New Roman"/>
-              </a:rPr>
-              <a:t>bottom</a:t>
-            </a:r>
-            <a:r>
-              <a:rPr sz="1200" i="1" spc="-25" dirty="0">
-                <a:latin typeface="Times New Roman"/>
-                <a:cs typeface="Times New Roman"/>
-              </a:rPr>
-              <a:t> </a:t>
-            </a:r>
-            <a:r>
-              <a:rPr sz="1200" i="1" dirty="0">
-                <a:latin typeface="Times New Roman"/>
-                <a:cs typeface="Times New Roman"/>
-              </a:rPr>
-              <a:t>of</a:t>
-            </a:r>
-            <a:r>
-              <a:rPr sz="1200" i="1" spc="-20" dirty="0">
-                <a:latin typeface="Times New Roman"/>
-                <a:cs typeface="Times New Roman"/>
-              </a:rPr>
-              <a:t> </a:t>
-            </a:r>
-            <a:r>
-              <a:rPr sz="1200" i="1" dirty="0">
-                <a:latin typeface="Times New Roman"/>
-                <a:cs typeface="Times New Roman"/>
-              </a:rPr>
-              <a:t>the</a:t>
-            </a:r>
-            <a:r>
-              <a:rPr sz="1200" i="1" spc="-25" dirty="0">
-                <a:latin typeface="Times New Roman"/>
-                <a:cs typeface="Times New Roman"/>
-              </a:rPr>
-              <a:t> </a:t>
-            </a:r>
-            <a:r>
-              <a:rPr sz="1200" i="1" spc="-10" dirty="0">
-                <a:latin typeface="Times New Roman"/>
-                <a:cs typeface="Times New Roman"/>
-              </a:rPr>
-              <a:t>page.)</a:t>
-            </a:r>
-            <a:endParaRPr sz="1200">
+              <a:rPr lang="en-US" sz="1400" dirty="0">
+                <a:latin typeface="Times New Roman"/>
+                <a:cs typeface="Times New Roman"/>
+              </a:rPr>
+              <a:t>The footer provides a professional closing to the page, offering support channels and legal ownership information</a:t>
+            </a:r>
+            <a:endParaRPr sz="1400" dirty="0">
               <a:latin typeface="Times New Roman"/>
               <a:cs typeface="Times New Roman"/>
             </a:endParaRPr>
           </a:p>
           <a:p>
-            <a:pPr>
+            <a:pPr marL="113664">
               <a:lnSpc>
                 <a:spcPct val="100000"/>
               </a:lnSpc>
               <a:spcBef>
-                <a:spcPts val="45"/>
+                <a:spcPts val="5"/>
               </a:spcBef>
             </a:pPr>
-            <a:endParaRPr sz="1200">
+            <a:endParaRPr lang="en-US" sz="1300" b="1" spc="-10" dirty="0">
               <a:latin typeface="Times New Roman"/>
               <a:cs typeface="Times New Roman"/>
             </a:endParaRPr>
@@ -6153,18 +4784,46 @@
               </a:spcBef>
             </a:pPr>
             <a:r>
+              <a:rPr lang="en-US" sz="1300" b="1" spc="-10" dirty="0">
+                <a:latin typeface="Times New Roman"/>
+                <a:cs typeface="Times New Roman"/>
+              </a:rPr>
+              <a:t>Example</a:t>
+            </a:r>
+            <a:r>
               <a:rPr sz="1300" b="1" spc="-10" dirty="0">
                 <a:latin typeface="Times New Roman"/>
                 <a:cs typeface="Times New Roman"/>
               </a:rPr>
-              <a:t>Sample:</a:t>
-            </a:r>
-            <a:endParaRPr sz="1300">
+              <a:t>:</a:t>
+            </a:r>
+            <a:endParaRPr lang="en-US" sz="1300" b="1" spc="-10" dirty="0">
               <a:latin typeface="Times New Roman"/>
               <a:cs typeface="Times New Roman"/>
             </a:endParaRPr>
           </a:p>
           <a:p>
+            <a:pPr marL="113664">
+              <a:lnSpc>
+                <a:spcPct val="100000"/>
+              </a:lnSpc>
+              <a:spcBef>
+                <a:spcPts val="5"/>
+              </a:spcBef>
+            </a:pPr>
+            <a:r>
+              <a:rPr lang="en-US" sz="1300" b="1" spc="-10" dirty="0">
+                <a:latin typeface="Times New Roman"/>
+                <a:cs typeface="Times New Roman"/>
+              </a:rPr>
+              <a:t>              Contact Details(Organizer)</a:t>
+            </a:r>
+            <a:endParaRPr lang="en-US" sz="1300" b="1" dirty="0">
+              <a:latin typeface="Times New Roman"/>
+              <a:cs typeface="Times New Roman"/>
+            </a:endParaRPr>
+          </a:p>
+          <a:p>
             <a:pPr marL="679450">
               <a:lnSpc>
                 <a:spcPct val="100000"/>
@@ -6195,21 +4854,20 @@
               <a:t>Email:</a:t>
             </a:r>
             <a:r>
-              <a:rPr sz="1300" b="1" spc="-60" dirty="0">
+              <a:rPr lang="en-US" sz="1300" b="1" dirty="0">
                 <a:latin typeface="Times New Roman"/>
                 <a:cs typeface="Times New Roman"/>
               </a:rPr>
               <a:t> </a:t>
             </a:r>
             <a:r>
-              <a:rPr sz="1300" spc="-10" dirty="0">
-                <a:latin typeface="Times New Roman"/>
-                <a:cs typeface="Times New Roman"/>
-                <a:hlinkClick r:id="rId5"/>
-              </a:rPr>
-              <a:t>events@abccollege.edu</a:t>
-            </a:r>
-            <a:endParaRPr sz="1300">
+              <a:rPr lang="en-US" sz="1300" dirty="0">
+                <a:latin typeface="Times New Roman"/>
+                <a:cs typeface="Times New Roman"/>
+              </a:rPr>
+              <a:t>kumaravelat2005@gmail.com</a:t>
+            </a:r>
+            <a:endParaRPr sz="1300" dirty="0">
               <a:latin typeface="Times New Roman"/>
               <a:cs typeface="Times New Roman"/>
             </a:endParaRPr>
@@ -6224,83 +4882,48 @@
               </a:spcBef>
             </a:pPr>
             <a:r>
+              <a:rPr lang="en-US" sz="1300" b="1" dirty="0">
+                <a:latin typeface="Times New Roman"/>
+                <a:cs typeface="Times New Roman"/>
+              </a:rPr>
+              <a:t>Contact </a:t>
+            </a:r>
+            <a:r>
               <a:rPr sz="1300" b="1" dirty="0">
                 <a:latin typeface="Times New Roman"/>
                 <a:cs typeface="Times New Roman"/>
               </a:rPr>
-              <a:t>Help</a:t>
-            </a:r>
-            <a:r>
-              <a:rPr sz="1300" b="1" spc="-40" dirty="0">
+              <a:t>Number:</a:t>
+            </a:r>
+            <a:r>
+              <a:rPr sz="1300" b="1" spc="-35" dirty="0">
                 <a:latin typeface="Times New Roman"/>
                 <a:cs typeface="Times New Roman"/>
               </a:rPr>
               <a:t> </a:t>
             </a:r>
             <a:r>
-              <a:rPr sz="1300" b="1" dirty="0">
-                <a:latin typeface="Times New Roman"/>
-                <a:cs typeface="Times New Roman"/>
-              </a:rPr>
-              <a:t>Desk</a:t>
-            </a:r>
-            <a:r>
-              <a:rPr sz="1300" b="1" spc="-35" dirty="0">
+              <a:rPr sz="1300" dirty="0">
+                <a:latin typeface="Times New Roman"/>
+                <a:cs typeface="Times New Roman"/>
+              </a:rPr>
+              <a:t>+91</a:t>
+            </a:r>
+            <a:r>
+              <a:rPr sz="1300" spc="-35" dirty="0">
                 <a:latin typeface="Times New Roman"/>
                 <a:cs typeface="Times New Roman"/>
               </a:rPr>
               <a:t> </a:t>
             </a:r>
             <a:r>
-              <a:rPr sz="1300" b="1" dirty="0">
-                <a:latin typeface="Times New Roman"/>
-                <a:cs typeface="Times New Roman"/>
-              </a:rPr>
-              <a:t>Number:</a:t>
-            </a:r>
-            <a:r>
-              <a:rPr sz="1300" b="1" spc="-35" dirty="0">
-                <a:latin typeface="Times New Roman"/>
-                <a:cs typeface="Times New Roman"/>
-              </a:rPr>
-              <a:t> </a:t>
-            </a:r>
-            <a:r>
-              <a:rPr sz="1300" dirty="0">
-                <a:latin typeface="Times New Roman"/>
-                <a:cs typeface="Times New Roman"/>
-              </a:rPr>
-              <a:t>+91</a:t>
-            </a:r>
-            <a:r>
-              <a:rPr sz="1300" spc="-35" dirty="0">
-                <a:latin typeface="Times New Roman"/>
-                <a:cs typeface="Times New Roman"/>
-              </a:rPr>
-              <a:t> </a:t>
-            </a:r>
-            <a:r>
-              <a:rPr sz="1300" dirty="0">
-                <a:latin typeface="Times New Roman"/>
-                <a:cs typeface="Times New Roman"/>
-              </a:rPr>
-              <a:t>94444</a:t>
-            </a:r>
-            <a:r>
-              <a:rPr sz="1300" spc="-35" dirty="0">
-                <a:latin typeface="Times New Roman"/>
-                <a:cs typeface="Times New Roman"/>
-              </a:rPr>
-              <a:t> </a:t>
-            </a:r>
-            <a:r>
-              <a:rPr sz="1300" spc="-10" dirty="0">
-                <a:latin typeface="Times New Roman"/>
-                <a:cs typeface="Times New Roman"/>
-              </a:rPr>
-              <a:t>12345</a:t>
-            </a:r>
-            <a:endParaRPr sz="1300">
+              <a:rPr lang="en-US" sz="1300" spc="-35" dirty="0">
+                <a:latin typeface="Times New Roman"/>
+                <a:cs typeface="Times New Roman"/>
+              </a:rPr>
+              <a:t>8056194886</a:t>
+            </a:r>
+            <a:endParaRPr sz="1300" dirty="0">
               <a:latin typeface="Times New Roman"/>
               <a:cs typeface="Times New Roman"/>
             </a:endParaRPr>
@@ -6343,11 +4966,32 @@
               <a:t> </a:t>
             </a:r>
             <a:r>
+              <a:rPr lang="en-US" sz="1300" spc="-20" dirty="0">
+                <a:latin typeface="Times New Roman"/>
+                <a:cs typeface="Times New Roman"/>
+              </a:rPr>
+              <a:t>8</a:t>
+            </a:r>
+            <a:r>
               <a:rPr sz="1300" dirty="0">
                 <a:latin typeface="Times New Roman"/>
                 <a:cs typeface="Times New Roman"/>
               </a:rPr>
-              <a:t>9:00</a:t>
+              <a:t>:</a:t>
+            </a:r>
+            <a:r>
+              <a:rPr lang="en-US" sz="1300" dirty="0">
+                <a:latin typeface="Times New Roman"/>
+                <a:cs typeface="Times New Roman"/>
+              </a:rPr>
+              <a:t>3</a:t>
+            </a:r>
+            <a:r>
+              <a:rPr sz="1300" dirty="0">
+                <a:latin typeface="Times New Roman"/>
+                <a:cs typeface="Times New Roman"/>
+              </a:rPr>
+              <a:t>0</a:t>
             </a:r>
             <a:r>
               <a:rPr sz="1300" spc="-20" dirty="0">
@@ -6385,55 +5029,55 @@
               <a:t> </a:t>
             </a:r>
             <a:r>
+              <a:rPr lang="en-US" sz="1300" spc="-20" dirty="0">
+                <a:latin typeface="Times New Roman"/>
+                <a:cs typeface="Times New Roman"/>
+              </a:rPr>
+              <a:t>2:30</a:t>
+            </a:r>
+            <a:r>
+              <a:rPr sz="1300" spc="-20" dirty="0">
+                <a:latin typeface="Times New Roman"/>
+                <a:cs typeface="Times New Roman"/>
+              </a:rPr>
+              <a:t> </a:t>
+            </a:r>
+            <a:r>
               <a:rPr sz="1300" dirty="0">
                 <a:latin typeface="Times New Roman"/>
                 <a:cs typeface="Times New Roman"/>
               </a:rPr>
-              <a:t>4:30</a:t>
+              <a:t>PM</a:t>
             </a:r>
             <a:r>
               <a:rPr sz="1300" spc="-20" dirty="0">
                 <a:latin typeface="Times New Roman"/>
                 <a:cs typeface="Times New Roman"/>
               </a:rPr>
+              <a:t> (Working </a:t>
+            </a:r>
+            <a:r>
+              <a:rPr sz="1300" dirty="0">
+                <a:latin typeface="Times New Roman"/>
+                <a:cs typeface="Times New Roman"/>
+              </a:rPr>
+              <a:t>Days</a:t>
+            </a:r>
+            <a:r>
+              <a:rPr sz="1300" spc="-20" dirty="0">
+                <a:latin typeface="Times New Roman"/>
+                <a:cs typeface="Times New Roman"/>
+              </a:rPr>
               <a:t> </a:t>
             </a:r>
             <a:r>
-              <a:rPr sz="1300" dirty="0">
-                <a:latin typeface="Times New Roman"/>
-                <a:cs typeface="Times New Roman"/>
-              </a:rPr>
-              <a:t>PM</a:t>
-            </a:r>
-            <a:r>
-              <a:rPr sz="1300" spc="-20" dirty="0">
-                <a:latin typeface="Times New Roman"/>
-                <a:cs typeface="Times New Roman"/>
-              </a:rPr>
-              <a:t> (Working </a:t>
-            </a:r>
-            <a:r>
-              <a:rPr sz="1300" dirty="0">
-                <a:latin typeface="Times New Roman"/>
-                <a:cs typeface="Times New Roman"/>
-              </a:rPr>
-              <a:t>Days</a:t>
-            </a:r>
-            <a:r>
-              <a:rPr sz="1300" spc="-20" dirty="0">
-                <a:latin typeface="Times New Roman"/>
-                <a:cs typeface="Times New Roman"/>
-              </a:rPr>
-              <a:t> </a:t>
-            </a:r>
-            <a:r>
               <a:rPr sz="1300" spc="-10" dirty="0">
                 <a:latin typeface="Times New Roman"/>
                 <a:cs typeface="Times New Roman"/>
               </a:rPr>
               <a:t>Only)</a:t>
             </a:r>
-            <a:endParaRPr sz="1300">
+            <a:endParaRPr sz="1300" dirty="0">
               <a:latin typeface="Times New Roman"/>
               <a:cs typeface="Times New Roman"/>
             </a:endParaRPr>
@@ -6448,167 +5092,20 @@
               </a:spcBef>
             </a:pPr>
             <a:r>
-              <a:rPr sz="1300" b="1" spc="-10" dirty="0">
-                <a:latin typeface="Times New Roman"/>
-                <a:cs typeface="Times New Roman"/>
-              </a:rPr>
-              <a:t>Copyright:</a:t>
-            </a:r>
-            <a:r>
-              <a:rPr sz="1300" spc="-10" dirty="0">
-                <a:latin typeface="Times New Roman"/>
-                <a:cs typeface="Times New Roman"/>
-              </a:rPr>
-              <a:t>©</a:t>
-            </a:r>
-            <a:r>
-              <a:rPr sz="1300" spc="-40" dirty="0">
-                <a:latin typeface="Times New Roman"/>
-                <a:cs typeface="Times New Roman"/>
-              </a:rPr>
-              <a:t> </a:t>
-            </a:r>
-            <a:r>
-              <a:rPr sz="1300" dirty="0">
-                <a:latin typeface="Times New Roman"/>
-                <a:cs typeface="Times New Roman"/>
-              </a:rPr>
-              <a:t>2026</a:t>
-            </a:r>
-            <a:r>
-              <a:rPr sz="1300" spc="-40" dirty="0">
-                <a:latin typeface="Times New Roman"/>
-                <a:cs typeface="Times New Roman"/>
-              </a:rPr>
-              <a:t> </a:t>
-            </a:r>
-            <a:r>
-              <a:rPr sz="1300" dirty="0">
-                <a:latin typeface="Times New Roman"/>
-                <a:cs typeface="Times New Roman"/>
-              </a:rPr>
-              <a:t>Department</a:t>
-            </a:r>
-            <a:r>
-              <a:rPr sz="1300" spc="-40" dirty="0">
-                <a:latin typeface="Times New Roman"/>
-                <a:cs typeface="Times New Roman"/>
-              </a:rPr>
-              <a:t> </a:t>
-            </a:r>
-            <a:r>
-              <a:rPr sz="1300" dirty="0">
-                <a:latin typeface="Times New Roman"/>
-                <a:cs typeface="Times New Roman"/>
-              </a:rPr>
-              <a:t>of</a:t>
-            </a:r>
-            <a:r>
-              <a:rPr sz="1300" spc="-40" dirty="0">
-                <a:latin typeface="Times New Roman"/>
-                <a:cs typeface="Times New Roman"/>
-              </a:rPr>
-              <a:t> </a:t>
-            </a:r>
-            <a:r>
-              <a:rPr sz="1300" dirty="0">
-                <a:latin typeface="Times New Roman"/>
-                <a:cs typeface="Times New Roman"/>
-              </a:rPr>
-              <a:t>Computer</a:t>
-            </a:r>
-            <a:r>
-              <a:rPr sz="1300" spc="-35" dirty="0">
-                <a:latin typeface="Times New Roman"/>
-                <a:cs typeface="Times New Roman"/>
-              </a:rPr>
-              <a:t> </a:t>
-            </a:r>
-            <a:r>
-              <a:rPr sz="1300" dirty="0">
-                <a:latin typeface="Times New Roman"/>
-                <a:cs typeface="Times New Roman"/>
-              </a:rPr>
-              <a:t>Science,</a:t>
-            </a:r>
-            <a:r>
-              <a:rPr sz="1300" spc="-40" dirty="0">
-                <a:latin typeface="Times New Roman"/>
-                <a:cs typeface="Times New Roman"/>
-              </a:rPr>
-              <a:t> </a:t>
-            </a:r>
-            <a:r>
-              <a:rPr sz="1300" dirty="0">
-                <a:latin typeface="Times New Roman"/>
-                <a:cs typeface="Times New Roman"/>
-              </a:rPr>
-              <a:t>ABC</a:t>
-            </a:r>
-            <a:r>
-              <a:rPr sz="1300" spc="-40" dirty="0">
-                <a:latin typeface="Times New Roman"/>
-                <a:cs typeface="Times New Roman"/>
-              </a:rPr>
-              <a:t> </a:t>
-            </a:r>
-            <a:r>
-              <a:rPr sz="1300" dirty="0">
-                <a:latin typeface="Times New Roman"/>
-                <a:cs typeface="Times New Roman"/>
-              </a:rPr>
-              <a:t>Engineering</a:t>
-            </a:r>
-            <a:r>
-              <a:rPr sz="1300" spc="-40" dirty="0">
-                <a:latin typeface="Times New Roman"/>
-                <a:cs typeface="Times New Roman"/>
-              </a:rPr>
-              <a:t> </a:t>
-            </a:r>
-            <a:r>
-              <a:rPr sz="1300" dirty="0">
-                <a:latin typeface="Times New Roman"/>
-                <a:cs typeface="Times New Roman"/>
-              </a:rPr>
-              <a:t>College.</a:t>
-            </a:r>
-            <a:r>
-              <a:rPr sz="1300" spc="-40" dirty="0">
-                <a:latin typeface="Times New Roman"/>
-                <a:cs typeface="Times New Roman"/>
-              </a:rPr>
-              <a:t> </a:t>
-            </a:r>
-            <a:r>
-              <a:rPr sz="1300" spc="-25" dirty="0">
-                <a:latin typeface="Times New Roman"/>
-                <a:cs typeface="Times New Roman"/>
-              </a:rPr>
-              <a:t>All </a:t>
-            </a:r>
-            <a:r>
-              <a:rPr sz="1300" dirty="0">
-                <a:latin typeface="Times New Roman"/>
-                <a:cs typeface="Times New Roman"/>
-              </a:rPr>
-              <a:t>Rights</a:t>
-            </a:r>
-            <a:r>
-              <a:rPr sz="1300" spc="-35" dirty="0">
-                <a:latin typeface="Times New Roman"/>
-                <a:cs typeface="Times New Roman"/>
-              </a:rPr>
-              <a:t> </a:t>
-            </a:r>
-            <a:r>
-              <a:rPr sz="1300" spc="-10" dirty="0">
-                <a:latin typeface="Times New Roman"/>
-                <a:cs typeface="Times New Roman"/>
-              </a:rPr>
-              <a:t>Reserved.</a:t>
-            </a:r>
-            <a:endParaRPr sz="1300">
+              <a:rPr lang="en-US" sz="1300" b="1" spc="-10" dirty="0">
+                <a:latin typeface="Times New Roman"/>
+                <a:cs typeface="Times New Roman"/>
+              </a:rPr>
+              <a:t>Department: </a:t>
+            </a:r>
+            <a:r>
+              <a:rPr lang="en-US" sz="1300" spc="-10" dirty="0">
+                <a:latin typeface="Times New Roman"/>
+                <a:cs typeface="Times New Roman"/>
+              </a:rPr>
+              <a:t>Department of Computer Science </a:t>
+            </a:r>
+            <a:endParaRPr sz="1300" dirty="0">
               <a:latin typeface="Times New Roman"/>
               <a:cs typeface="Times New Roman"/>
             </a:endParaRPr>
@@ -6622,7 +5119,7 @@
           <p:nvPr/>
         </p:nvPicPr>
         <p:blipFill>
-          <a:blip r:embed="rId6" cstate="print"/>
+          <a:blip r:embed="rId5" cstate="print"/>
           <a:stretch>
             <a:fillRect/>
           </a:stretch>
@@ -6644,7 +5141,7 @@
           <p:nvPr/>
         </p:nvPicPr>
         <p:blipFill>
-          <a:blip r:embed="rId7" cstate="print"/>
+          <a:blip r:embed="rId6" cstate="print"/>
           <a:stretch>
             <a:fillRect/>
           </a:stretch>
@@ -6730,13 +5227,13 @@
       </p:pic>
       <p:sp>
         <p:nvSpPr>
-          <p:cNvPr id="4" name="object 4"/>
+          <p:cNvPr id="5" name="object 5"/>
           <p:cNvSpPr/>
           <p:nvPr/>
         </p:nvSpPr>
         <p:spPr>
           <a:xfrm>
-            <a:off x="660400" y="2279655"/>
+            <a:off x="565784" y="9994900"/>
             <a:ext cx="6502400" cy="0"/>
           </a:xfrm>
           <a:custGeom>
@@ -6772,13 +5269,13 @@
       </p:sp>
       <p:sp>
         <p:nvSpPr>
-          <p:cNvPr id="5" name="object 5"/>
+          <p:cNvPr id="7" name="object 7"/>
           <p:cNvSpPr/>
           <p:nvPr/>
         </p:nvSpPr>
         <p:spPr>
           <a:xfrm>
-            <a:off x="660400" y="3486155"/>
+            <a:off x="565784" y="8394700"/>
             <a:ext cx="6502400" cy="0"/>
           </a:xfrm>
           <a:custGeom>
@@ -6814,98 +5311,14 @@
       </p:sp>
       <p:sp>
         <p:nvSpPr>
-          <p:cNvPr id="6" name="object 6"/>
-          <p:cNvSpPr/>
-          <p:nvPr/>
-        </p:nvSpPr>
-        <p:spPr>
-          <a:xfrm>
-            <a:off x="660400" y="4832355"/>
-            <a:ext cx="6502400" cy="0"/>
-          </a:xfrm>
-          <a:custGeom>
-            <a:avLst/>
-            <a:gdLst/>
-            <a:ahLst/>
-            <a:cxnLst/>
-            <a:rect l="l" t="t" r="r" b="b"/>
-            <a:pathLst>
-              <a:path w="6502400">
-                <a:moveTo>
-                  <a:pt x="0" y="0"/>
-                </a:moveTo>
-                <a:lnTo>
-                  <a:pt x="6502403" y="0"/>
-                </a:lnTo>
-              </a:path>
-            </a:pathLst>
-          </a:custGeom>
-          <a:ln w="12699">
-            <a:solidFill>
-              <a:srgbClr val="878787"/>
-            </a:solidFill>
-          </a:ln>
-        </p:spPr>
-        <p:txBody>
-          <a:bodyPr wrap="square" lIns="0" tIns="0" rIns="0" bIns="0" rtlCol="0"/>
-          <a:lstStyle/>
-          <a:p>
-            <a:endParaRPr/>
-          </a:p>
-        </p:txBody>
-      </p:sp>
-      <p:sp>
-        <p:nvSpPr>
-          <p:cNvPr id="7" name="object 7"/>
-          <p:cNvSpPr/>
-          <p:nvPr/>
-        </p:nvSpPr>
-        <p:spPr>
-          <a:xfrm>
-            <a:off x="660400" y="6026155"/>
-            <a:ext cx="6502400" cy="0"/>
-          </a:xfrm>
-          <a:custGeom>
-            <a:avLst/>
-            <a:gdLst/>
-            <a:ahLst/>
-            <a:cxnLst/>
-            <a:rect l="l" t="t" r="r" b="b"/>
-            <a:pathLst>
-              <a:path w="6502400">
-                <a:moveTo>
-                  <a:pt x="0" y="0"/>
-                </a:moveTo>
-                <a:lnTo>
-                  <a:pt x="6502403" y="0"/>
-                </a:lnTo>
-              </a:path>
-            </a:pathLst>
-          </a:custGeom>
-          <a:ln w="12699">
-            <a:solidFill>
-              <a:srgbClr val="878787"/>
-            </a:solidFill>
-          </a:ln>
-        </p:spPr>
-        <p:txBody>
-          <a:bodyPr wrap="square" lIns="0" tIns="0" rIns="0" bIns="0" rtlCol="0"/>
-          <a:lstStyle/>
-          <a:p>
-            <a:endParaRPr/>
-          </a:p>
-        </p:txBody>
-      </p:sp>
-      <p:sp>
-        <p:nvSpPr>
           <p:cNvPr id="8" name="object 8"/>
           <p:cNvSpPr txBox="1"/>
           <p:nvPr/>
         </p:nvSpPr>
         <p:spPr>
           <a:xfrm>
-            <a:off x="565710" y="1243773"/>
-            <a:ext cx="5901055" cy="5688965"/>
+            <a:off x="736600" y="1841500"/>
+            <a:ext cx="5901055" cy="8413842"/>
           </a:xfrm>
           <a:prstGeom prst="rect">
             <a:avLst/>
@@ -6964,186 +5377,357 @@
               </a:rPr>
               <a:t>Steps:</a:t>
             </a:r>
-            <a:endParaRPr sz="2300">
+            <a:endParaRPr lang="en-US" sz="2300" b="1" spc="-10" dirty="0">
+              <a:solidFill>
+                <a:srgbClr val="3C78D8"/>
+              </a:solidFill>
               <a:latin typeface="Times New Roman"/>
               <a:cs typeface="Times New Roman"/>
             </a:endParaRPr>
           </a:p>
           <a:p>
-            <a:pPr marL="22225">
+            <a:pPr marL="351154" indent="-342900">
               <a:lnSpc>
                 <a:spcPct val="100000"/>
               </a:lnSpc>
               <a:spcBef>
-                <a:spcPts val="555"/>
+                <a:spcPts val="1170"/>
               </a:spcBef>
-            </a:pPr>
-            <a:r>
-              <a:rPr sz="1200" i="1" dirty="0">
-                <a:latin typeface="Times New Roman"/>
-                <a:cs typeface="Times New Roman"/>
-              </a:rPr>
-              <a:t>(Explain</a:t>
-            </a:r>
-            <a:r>
-              <a:rPr sz="1200" i="1" spc="-35" dirty="0">
-                <a:latin typeface="Times New Roman"/>
-                <a:cs typeface="Times New Roman"/>
-              </a:rPr>
-              <a:t> </a:t>
-            </a:r>
-            <a:r>
-              <a:rPr sz="1200" i="1" dirty="0">
-                <a:latin typeface="Times New Roman"/>
-                <a:cs typeface="Times New Roman"/>
-              </a:rPr>
-              <a:t>the</a:t>
-            </a:r>
-            <a:r>
-              <a:rPr sz="1200" i="1" spc="-30" dirty="0">
-                <a:latin typeface="Times New Roman"/>
-                <a:cs typeface="Times New Roman"/>
-              </a:rPr>
-              <a:t> </a:t>
-            </a:r>
-            <a:r>
-              <a:rPr sz="1200" i="1" spc="-10" dirty="0">
-                <a:latin typeface="Times New Roman"/>
-                <a:cs typeface="Times New Roman"/>
-              </a:rPr>
-              <a:t>step-by-</a:t>
-            </a:r>
-            <a:r>
-              <a:rPr sz="1200" i="1" dirty="0">
-                <a:latin typeface="Times New Roman"/>
-                <a:cs typeface="Times New Roman"/>
-              </a:rPr>
-              <a:t>step</a:t>
-            </a:r>
-            <a:r>
-              <a:rPr sz="1200" i="1" spc="-35" dirty="0">
-                <a:latin typeface="Times New Roman"/>
-                <a:cs typeface="Times New Roman"/>
-              </a:rPr>
-              <a:t> </a:t>
-            </a:r>
-            <a:r>
-              <a:rPr sz="1200" i="1" dirty="0">
-                <a:latin typeface="Times New Roman"/>
-                <a:cs typeface="Times New Roman"/>
-              </a:rPr>
-              <a:t>process</a:t>
-            </a:r>
-            <a:r>
-              <a:rPr sz="1200" i="1" spc="-30" dirty="0">
-                <a:latin typeface="Times New Roman"/>
-                <a:cs typeface="Times New Roman"/>
-              </a:rPr>
-              <a:t> </a:t>
-            </a:r>
-            <a:r>
-              <a:rPr sz="1200" i="1" dirty="0">
-                <a:latin typeface="Times New Roman"/>
-                <a:cs typeface="Times New Roman"/>
-              </a:rPr>
-              <a:t>followed</a:t>
-            </a:r>
-            <a:r>
-              <a:rPr sz="1200" i="1" spc="-30" dirty="0">
-                <a:latin typeface="Times New Roman"/>
-                <a:cs typeface="Times New Roman"/>
-              </a:rPr>
-              <a:t> </a:t>
-            </a:r>
-            <a:r>
-              <a:rPr sz="1200" i="1" dirty="0">
-                <a:latin typeface="Times New Roman"/>
-                <a:cs typeface="Times New Roman"/>
-              </a:rPr>
-              <a:t>to</a:t>
-            </a:r>
-            <a:r>
-              <a:rPr sz="1200" i="1" spc="-30" dirty="0">
-                <a:latin typeface="Times New Roman"/>
-                <a:cs typeface="Times New Roman"/>
-              </a:rPr>
-              <a:t> </a:t>
-            </a:r>
-            <a:r>
-              <a:rPr sz="1200" i="1" dirty="0">
-                <a:latin typeface="Times New Roman"/>
-                <a:cs typeface="Times New Roman"/>
-              </a:rPr>
-              <a:t>develop</a:t>
-            </a:r>
-            <a:r>
-              <a:rPr sz="1200" i="1" spc="-35" dirty="0">
-                <a:latin typeface="Times New Roman"/>
-                <a:cs typeface="Times New Roman"/>
-              </a:rPr>
-              <a:t> </a:t>
-            </a:r>
-            <a:r>
-              <a:rPr sz="1200" i="1" dirty="0">
-                <a:latin typeface="Times New Roman"/>
-                <a:cs typeface="Times New Roman"/>
-              </a:rPr>
-              <a:t>the</a:t>
-            </a:r>
-            <a:r>
-              <a:rPr sz="1200" i="1" spc="-30" dirty="0">
-                <a:latin typeface="Times New Roman"/>
-                <a:cs typeface="Times New Roman"/>
-              </a:rPr>
-              <a:t> </a:t>
-            </a:r>
-            <a:r>
-              <a:rPr sz="1200" i="1" dirty="0">
-                <a:latin typeface="Times New Roman"/>
-                <a:cs typeface="Times New Roman"/>
-              </a:rPr>
-              <a:t>project</a:t>
-            </a:r>
-            <a:r>
-              <a:rPr sz="1200" i="1" spc="-30" dirty="0">
-                <a:latin typeface="Times New Roman"/>
-                <a:cs typeface="Times New Roman"/>
-              </a:rPr>
-              <a:t> </a:t>
-            </a:r>
-            <a:r>
-              <a:rPr sz="1200" i="1" spc="-25" dirty="0">
-                <a:latin typeface="Times New Roman"/>
-                <a:cs typeface="Times New Roman"/>
-              </a:rPr>
-              <a:t>.)</a:t>
-            </a:r>
-            <a:endParaRPr sz="1200">
+              <a:buClr>
+                <a:schemeClr val="tx1"/>
+              </a:buClr>
+              <a:buSzPct val="95652"/>
+              <a:buFont typeface="+mj-lt"/>
+              <a:buAutoNum type="arabicPeriod"/>
+              <a:tabLst>
+                <a:tab pos="230504" algn="l"/>
+              </a:tabLst>
+            </a:pPr>
+            <a:endParaRPr lang="en-US" sz="1500" b="1" dirty="0">
               <a:latin typeface="Times New Roman"/>
               <a:cs typeface="Times New Roman"/>
             </a:endParaRPr>
           </a:p>
           <a:p>
-            <a:pPr>
-              <a:lnSpc>
-                <a:spcPct val="100000"/>
-              </a:lnSpc>
-            </a:pPr>
-            <a:endParaRPr sz="1200">
-              <a:latin typeface="Times New Roman"/>
-              <a:cs typeface="Times New Roman"/>
-            </a:endParaRPr>
-          </a:p>
-          <a:p>
-            <a:pPr>
+            <a:pPr marL="351154" indent="-342900">
               <a:lnSpc>
                 <a:spcPct val="100000"/>
               </a:lnSpc>
               <a:spcBef>
-                <a:spcPts val="1130"/>
+                <a:spcPts val="1170"/>
               </a:spcBef>
-            </a:pPr>
-            <a:endParaRPr sz="1200">
+              <a:buClr>
+                <a:schemeClr val="tx1"/>
+              </a:buClr>
+              <a:buSzPct val="95652"/>
+              <a:buFont typeface="+mj-lt"/>
+              <a:buAutoNum type="arabicPeriod"/>
+              <a:tabLst>
+                <a:tab pos="230504" algn="l"/>
+              </a:tabLst>
+            </a:pPr>
+            <a:r>
+              <a:rPr lang="en-US" sz="1500" b="1" dirty="0">
+                <a:latin typeface="Times New Roman"/>
+                <a:cs typeface="Times New Roman"/>
+              </a:rPr>
+              <a:t>Requirement Analysis</a:t>
+            </a:r>
+            <a:r>
+              <a:rPr lang="en-US" sz="1500" dirty="0">
+                <a:latin typeface="Times New Roman"/>
+                <a:cs typeface="Times New Roman"/>
+              </a:rPr>
+              <a:t>: Analyzed the registration needs to determine the necessary data fields and structural components.</a:t>
+            </a:r>
+          </a:p>
+          <a:p>
+            <a:pPr marL="351154" indent="-342900">
+              <a:lnSpc>
+                <a:spcPct val="100000"/>
+              </a:lnSpc>
+              <a:spcBef>
+                <a:spcPts val="1170"/>
+              </a:spcBef>
+              <a:buClr>
+                <a:schemeClr val="tx1"/>
+              </a:buClr>
+              <a:buSzPct val="95652"/>
+              <a:buFont typeface="+mj-lt"/>
+              <a:buAutoNum type="arabicPeriod"/>
+              <a:tabLst>
+                <a:tab pos="230504" algn="l"/>
+              </a:tabLst>
+            </a:pPr>
+            <a:r>
+              <a:rPr lang="en-US" sz="1500" b="1" dirty="0">
+                <a:latin typeface="Times New Roman"/>
+                <a:cs typeface="Times New Roman"/>
+              </a:rPr>
+              <a:t>Semantic Skeleton Construction: </a:t>
+            </a:r>
+            <a:r>
+              <a:rPr lang="en-US" sz="1500" dirty="0">
+                <a:latin typeface="Times New Roman"/>
+                <a:cs typeface="Times New Roman"/>
+              </a:rPr>
+              <a:t>Built the page using HTML5 semantic tags, ensuring that the title (&lt;h2&gt;), informational text (&lt;p&gt;), and form sections were logically nested.</a:t>
+            </a:r>
+          </a:p>
+          <a:p>
+            <a:pPr marL="351154" indent="-342900">
+              <a:lnSpc>
+                <a:spcPct val="100000"/>
+              </a:lnSpc>
+              <a:spcBef>
+                <a:spcPts val="1170"/>
+              </a:spcBef>
+              <a:buClr>
+                <a:schemeClr val="tx1"/>
+              </a:buClr>
+              <a:buSzPct val="95652"/>
+              <a:buFont typeface="+mj-lt"/>
+              <a:buAutoNum type="arabicPeriod"/>
+              <a:tabLst>
+                <a:tab pos="230504" algn="l"/>
+              </a:tabLst>
+            </a:pPr>
+            <a:r>
+              <a:rPr lang="en-IN" sz="1500" b="1" dirty="0">
+                <a:latin typeface="Times New Roman"/>
+                <a:cs typeface="Times New Roman"/>
+              </a:rPr>
+              <a:t>Form Development</a:t>
+            </a:r>
+            <a:r>
+              <a:rPr lang="en-IN" sz="1500" dirty="0">
+                <a:latin typeface="Times New Roman"/>
+                <a:cs typeface="Times New Roman"/>
+              </a:rPr>
+              <a:t>:	</a:t>
+            </a:r>
+          </a:p>
+          <a:p>
+            <a:pPr marL="294004" indent="-285750">
+              <a:lnSpc>
+                <a:spcPct val="100000"/>
+              </a:lnSpc>
+              <a:spcBef>
+                <a:spcPts val="1170"/>
+              </a:spcBef>
+              <a:buClr>
+                <a:schemeClr val="tx1"/>
+              </a:buClr>
+              <a:buSzPct val="95652"/>
+              <a:buFont typeface="Arial" panose="020B0604020202020204" pitchFamily="34" charset="0"/>
+              <a:buChar char="•"/>
+              <a:tabLst>
+                <a:tab pos="230504" algn="l"/>
+              </a:tabLst>
+            </a:pPr>
+            <a:r>
+              <a:rPr lang="en-US" sz="1500" dirty="0">
+                <a:latin typeface="Times New Roman"/>
+                <a:cs typeface="Times New Roman"/>
+              </a:rPr>
+              <a:t>Implemented the &lt;form&gt; element with unique IDs for future scripting.</a:t>
+            </a:r>
+          </a:p>
+          <a:p>
+            <a:pPr marL="294004" indent="-285750">
+              <a:lnSpc>
+                <a:spcPct val="100000"/>
+              </a:lnSpc>
+              <a:spcBef>
+                <a:spcPts val="1170"/>
+              </a:spcBef>
+              <a:buClr>
+                <a:schemeClr val="tx1"/>
+              </a:buClr>
+              <a:buSzPct val="95652"/>
+              <a:buFont typeface="Arial" panose="020B0604020202020204" pitchFamily="34" charset="0"/>
+              <a:buChar char="•"/>
+              <a:tabLst>
+                <a:tab pos="230504" algn="l"/>
+              </a:tabLst>
+            </a:pPr>
+            <a:r>
+              <a:rPr lang="en-US" sz="1500" dirty="0">
+                <a:latin typeface="Times New Roman"/>
+                <a:cs typeface="Times New Roman"/>
+              </a:rPr>
+              <a:t>Utilized the &lt;</a:t>
+            </a:r>
+            <a:r>
+              <a:rPr lang="en-US" sz="1500" dirty="0" err="1">
+                <a:latin typeface="Times New Roman"/>
+                <a:cs typeface="Times New Roman"/>
+              </a:rPr>
+              <a:t>fieldset</a:t>
+            </a:r>
+            <a:r>
+              <a:rPr lang="en-US" sz="1500" dirty="0">
+                <a:latin typeface="Times New Roman"/>
+                <a:cs typeface="Times New Roman"/>
+              </a:rPr>
+              <a:t>&gt; and &lt;legend&gt; tags to create clear visual and structural boundaries between personal data and event preferences.</a:t>
+            </a:r>
+          </a:p>
+          <a:p>
+            <a:pPr marL="294004" indent="-285750">
+              <a:lnSpc>
+                <a:spcPct val="100000"/>
+              </a:lnSpc>
+              <a:spcBef>
+                <a:spcPts val="1170"/>
+              </a:spcBef>
+              <a:buClr>
+                <a:schemeClr val="tx1"/>
+              </a:buClr>
+              <a:buSzPct val="95652"/>
+              <a:buFont typeface="Arial" panose="020B0604020202020204" pitchFamily="34" charset="0"/>
+              <a:buChar char="•"/>
+              <a:tabLst>
+                <a:tab pos="230504" algn="l"/>
+              </a:tabLst>
+            </a:pPr>
+            <a:r>
+              <a:rPr lang="en-US" sz="1500" dirty="0">
+                <a:latin typeface="Times New Roman"/>
+                <a:cs typeface="Times New Roman"/>
+              </a:rPr>
+              <a:t>Applied specialized input types like type="email" and type="</a:t>
+            </a:r>
+            <a:r>
+              <a:rPr lang="en-US" sz="1500" dirty="0" err="1">
+                <a:latin typeface="Times New Roman"/>
+                <a:cs typeface="Times New Roman"/>
+              </a:rPr>
+              <a:t>tel</a:t>
+            </a:r>
+            <a:r>
+              <a:rPr lang="en-US" sz="1500" dirty="0">
+                <a:latin typeface="Times New Roman"/>
+                <a:cs typeface="Times New Roman"/>
+              </a:rPr>
+              <a:t>" to enable automatic browser-side validation and improve mobile keyboard layouts</a:t>
+            </a:r>
+          </a:p>
+          <a:p>
+            <a:pPr marL="351154" lvl="2" indent="-342900">
+              <a:spcBef>
+                <a:spcPts val="1170"/>
+              </a:spcBef>
+              <a:buClr>
+                <a:schemeClr val="tx1"/>
+              </a:buClr>
+              <a:buSzPct val="95652"/>
+              <a:buAutoNum type="arabicPeriod" startAt="4"/>
+              <a:tabLst>
+                <a:tab pos="230504" algn="l"/>
+              </a:tabLst>
+            </a:pPr>
+            <a:r>
+              <a:rPr lang="en-US" sz="1500" b="1" dirty="0">
+                <a:latin typeface="Times New Roman"/>
+                <a:cs typeface="Times New Roman"/>
+              </a:rPr>
+              <a:t>Selection Logic: </a:t>
+            </a:r>
+            <a:r>
+              <a:rPr lang="en-US" sz="1500" dirty="0">
+                <a:latin typeface="Times New Roman"/>
+                <a:cs typeface="Times New Roman"/>
+              </a:rPr>
+              <a:t>Created a &lt;select&gt; dropdown for workshop choices and used radio buttons (type="radio") with matching name attributes to ensure only one participation mode could be selected at a time.</a:t>
+            </a:r>
+          </a:p>
+          <a:p>
+            <a:pPr marL="351154" lvl="2" indent="-342900">
+              <a:spcBef>
+                <a:spcPts val="1170"/>
+              </a:spcBef>
+              <a:buClr>
+                <a:schemeClr val="tx1"/>
+              </a:buClr>
+              <a:buSzPct val="95652"/>
+              <a:buAutoNum type="arabicPeriod" startAt="4"/>
+              <a:tabLst>
+                <a:tab pos="230504" algn="l"/>
+              </a:tabLst>
+            </a:pPr>
+            <a:r>
+              <a:rPr lang="en-US" sz="1500" b="1" dirty="0">
+                <a:latin typeface="Times New Roman"/>
+                <a:cs typeface="Times New Roman"/>
+              </a:rPr>
+              <a:t>Table Construction</a:t>
+            </a:r>
+            <a:r>
+              <a:rPr lang="en-US" sz="1500" dirty="0">
+                <a:latin typeface="Times New Roman"/>
+                <a:cs typeface="Times New Roman"/>
+              </a:rPr>
+              <a:t>: Built a &lt;table&gt; with a defined header (&lt;</a:t>
+            </a:r>
+            <a:r>
+              <a:rPr lang="en-US" sz="1500" dirty="0" err="1">
+                <a:latin typeface="Times New Roman"/>
+                <a:cs typeface="Times New Roman"/>
+              </a:rPr>
+              <a:t>thead</a:t>
+            </a:r>
+            <a:r>
+              <a:rPr lang="en-US" sz="1500" dirty="0">
+                <a:latin typeface="Times New Roman"/>
+                <a:cs typeface="Times New Roman"/>
+              </a:rPr>
+              <a:t>&gt;) to display participant records</a:t>
+            </a:r>
+          </a:p>
+          <a:p>
+            <a:pPr marL="351154" lvl="2" indent="-342900">
+              <a:spcBef>
+                <a:spcPts val="1170"/>
+              </a:spcBef>
+              <a:buClr>
+                <a:schemeClr val="tx1"/>
+              </a:buClr>
+              <a:buSzPct val="95652"/>
+              <a:buAutoNum type="arabicPeriod" startAt="4"/>
+              <a:tabLst>
+                <a:tab pos="230504" algn="l"/>
+              </a:tabLst>
+            </a:pPr>
+            <a:r>
+              <a:rPr lang="en-US" sz="1500" b="1" dirty="0">
+                <a:latin typeface="Times New Roman"/>
+                <a:cs typeface="Times New Roman"/>
+              </a:rPr>
+              <a:t>Footer Integration</a:t>
+            </a:r>
+            <a:r>
+              <a:rPr lang="en-US" sz="1500" dirty="0">
+                <a:latin typeface="Times New Roman"/>
+                <a:cs typeface="Times New Roman"/>
+              </a:rPr>
+              <a:t>: Added contact details to mark the end of the page.</a:t>
+            </a:r>
+          </a:p>
+          <a:p>
+            <a:pPr marL="8254" lvl="2">
+              <a:spcBef>
+                <a:spcPts val="1170"/>
+              </a:spcBef>
+              <a:buClr>
+                <a:schemeClr val="tx1"/>
+              </a:buClr>
+              <a:buSzPct val="95652"/>
+              <a:tabLst>
+                <a:tab pos="230504" algn="l"/>
+              </a:tabLst>
+            </a:pPr>
+            <a:endParaRPr sz="1200" dirty="0">
               <a:latin typeface="Times New Roman"/>
               <a:cs typeface="Times New Roman"/>
             </a:endParaRPr>
@@ -7193,884 +5777,75 @@
               </a:rPr>
               <a:t>Used:</a:t>
             </a:r>
-            <a:endParaRPr sz="2300">
+            <a:endParaRPr sz="2300" dirty="0">
               <a:latin typeface="Times New Roman"/>
               <a:cs typeface="Times New Roman"/>
             </a:endParaRPr>
           </a:p>
           <a:p>
-            <a:pPr marL="22225">
+            <a:pPr marL="193675" indent="-171450">
               <a:lnSpc>
                 <a:spcPct val="100000"/>
               </a:lnSpc>
               <a:spcBef>
                 <a:spcPts val="1225"/>
               </a:spcBef>
-            </a:pPr>
-            <a:r>
-              <a:rPr sz="1200" i="1" dirty="0">
-                <a:latin typeface="Times New Roman"/>
-                <a:cs typeface="Times New Roman"/>
-              </a:rPr>
-              <a:t>(Mention</a:t>
-            </a:r>
-            <a:r>
-              <a:rPr sz="1200" i="1" spc="-25" dirty="0">
-                <a:latin typeface="Times New Roman"/>
-                <a:cs typeface="Times New Roman"/>
-              </a:rPr>
-              <a:t> </a:t>
-            </a:r>
-            <a:r>
-              <a:rPr sz="1200" i="1" dirty="0">
-                <a:latin typeface="Times New Roman"/>
-                <a:cs typeface="Times New Roman"/>
-              </a:rPr>
-              <a:t>the</a:t>
-            </a:r>
-            <a:r>
-              <a:rPr sz="1200" i="1" spc="-25" dirty="0">
-                <a:latin typeface="Times New Roman"/>
-                <a:cs typeface="Times New Roman"/>
-              </a:rPr>
-              <a:t> </a:t>
-            </a:r>
-            <a:r>
-              <a:rPr sz="1200" i="1" dirty="0">
-                <a:latin typeface="Times New Roman"/>
-                <a:cs typeface="Times New Roman"/>
-              </a:rPr>
-              <a:t>technologies</a:t>
-            </a:r>
-            <a:r>
-              <a:rPr sz="1200" i="1" spc="-20" dirty="0">
-                <a:latin typeface="Times New Roman"/>
-                <a:cs typeface="Times New Roman"/>
-              </a:rPr>
-              <a:t> </a:t>
-            </a:r>
-            <a:r>
-              <a:rPr sz="1200" i="1" dirty="0">
-                <a:latin typeface="Times New Roman"/>
-                <a:cs typeface="Times New Roman"/>
-              </a:rPr>
-              <a:t>used</a:t>
-            </a:r>
-            <a:r>
-              <a:rPr sz="1200" i="1" spc="-25" dirty="0">
-                <a:latin typeface="Times New Roman"/>
-                <a:cs typeface="Times New Roman"/>
-              </a:rPr>
-              <a:t> </a:t>
-            </a:r>
-            <a:r>
-              <a:rPr sz="1200" i="1" dirty="0">
-                <a:latin typeface="Times New Roman"/>
-                <a:cs typeface="Times New Roman"/>
-              </a:rPr>
-              <a:t>to</a:t>
-            </a:r>
-            <a:r>
-              <a:rPr sz="1200" i="1" spc="-25" dirty="0">
-                <a:latin typeface="Times New Roman"/>
-                <a:cs typeface="Times New Roman"/>
-              </a:rPr>
-              <a:t> </a:t>
-            </a:r>
-            <a:r>
-              <a:rPr sz="1200" i="1" dirty="0">
-                <a:latin typeface="Times New Roman"/>
-                <a:cs typeface="Times New Roman"/>
-              </a:rPr>
-              <a:t>build</a:t>
-            </a:r>
-            <a:r>
-              <a:rPr sz="1200" i="1" spc="-20" dirty="0">
-                <a:latin typeface="Times New Roman"/>
-                <a:cs typeface="Times New Roman"/>
-              </a:rPr>
-              <a:t> </a:t>
-            </a:r>
-            <a:r>
-              <a:rPr sz="1200" i="1" dirty="0">
-                <a:latin typeface="Times New Roman"/>
-                <a:cs typeface="Times New Roman"/>
-              </a:rPr>
-              <a:t>the</a:t>
-            </a:r>
-            <a:r>
-              <a:rPr sz="1200" i="1" spc="-30" dirty="0">
-                <a:latin typeface="Times New Roman"/>
-                <a:cs typeface="Times New Roman"/>
-              </a:rPr>
-              <a:t> </a:t>
-            </a:r>
-            <a:r>
-              <a:rPr sz="1200" i="1" dirty="0">
-                <a:latin typeface="Times New Roman"/>
-                <a:cs typeface="Times New Roman"/>
-              </a:rPr>
-              <a:t>project</a:t>
-            </a:r>
-            <a:r>
-              <a:rPr sz="1200" i="1" spc="254" dirty="0">
-                <a:latin typeface="Times New Roman"/>
-                <a:cs typeface="Times New Roman"/>
-              </a:rPr>
-              <a:t> </a:t>
-            </a:r>
-            <a:r>
-              <a:rPr sz="1200" i="1" dirty="0">
-                <a:latin typeface="Times New Roman"/>
-                <a:cs typeface="Times New Roman"/>
-              </a:rPr>
-              <a:t>with</a:t>
-            </a:r>
-            <a:r>
-              <a:rPr sz="1200" i="1" spc="-25" dirty="0">
-                <a:latin typeface="Times New Roman"/>
-                <a:cs typeface="Times New Roman"/>
-              </a:rPr>
-              <a:t> </a:t>
-            </a:r>
-            <a:r>
-              <a:rPr sz="1200" i="1" dirty="0">
-                <a:latin typeface="Times New Roman"/>
-                <a:cs typeface="Times New Roman"/>
-              </a:rPr>
-              <a:t>code</a:t>
-            </a:r>
-            <a:r>
-              <a:rPr sz="1200" i="1" spc="-25" dirty="0">
-                <a:latin typeface="Times New Roman"/>
-                <a:cs typeface="Times New Roman"/>
-              </a:rPr>
-              <a:t> </a:t>
-            </a:r>
-            <a:r>
-              <a:rPr sz="1200" i="1" dirty="0">
-                <a:latin typeface="Times New Roman"/>
-                <a:cs typeface="Times New Roman"/>
-              </a:rPr>
-              <a:t>(HTML,</a:t>
-            </a:r>
-            <a:r>
-              <a:rPr sz="1200" i="1" spc="-25" dirty="0">
-                <a:latin typeface="Times New Roman"/>
-                <a:cs typeface="Times New Roman"/>
-              </a:rPr>
-              <a:t> </a:t>
-            </a:r>
-            <a:r>
-              <a:rPr sz="1200" i="1" dirty="0">
-                <a:latin typeface="Times New Roman"/>
-                <a:cs typeface="Times New Roman"/>
-              </a:rPr>
-              <a:t>CSS,</a:t>
-            </a:r>
-            <a:r>
-              <a:rPr sz="1200" i="1" spc="-25" dirty="0">
-                <a:latin typeface="Times New Roman"/>
-                <a:cs typeface="Times New Roman"/>
-              </a:rPr>
-              <a:t> </a:t>
-            </a:r>
-            <a:r>
-              <a:rPr sz="1200" i="1" spc="-10" dirty="0">
-                <a:latin typeface="Times New Roman"/>
-                <a:cs typeface="Times New Roman"/>
-              </a:rPr>
-              <a:t>JavaScript)).</a:t>
-            </a:r>
-            <a:endParaRPr sz="1200">
-              <a:latin typeface="Times New Roman"/>
-              <a:cs typeface="Times New Roman"/>
-            </a:endParaRPr>
-          </a:p>
-          <a:p>
-            <a:pPr>
-              <a:lnSpc>
-                <a:spcPct val="100000"/>
-              </a:lnSpc>
-            </a:pPr>
-            <a:endParaRPr sz="1200">
-              <a:latin typeface="Times New Roman"/>
-              <a:cs typeface="Times New Roman"/>
-            </a:endParaRPr>
-          </a:p>
-          <a:p>
-            <a:pPr>
+              <a:buFont typeface="Arial" panose="020B0604020202020204" pitchFamily="34" charset="0"/>
+              <a:buChar char="•"/>
+            </a:pPr>
+            <a:r>
+              <a:rPr lang="en-US" sz="1400" b="1" dirty="0">
+                <a:latin typeface="Times New Roman"/>
+                <a:cs typeface="Times New Roman"/>
+              </a:rPr>
+              <a:t>HTML5: </a:t>
+            </a:r>
+            <a:r>
+              <a:rPr lang="en-US" sz="1400" dirty="0">
+                <a:latin typeface="Times New Roman"/>
+                <a:cs typeface="Times New Roman"/>
+              </a:rPr>
+              <a:t>Used to create the semantic structure and all form elements.</a:t>
+            </a:r>
+          </a:p>
+          <a:p>
+            <a:pPr marL="193675" indent="-171450">
               <a:lnSpc>
                 <a:spcPct val="100000"/>
               </a:lnSpc>
               <a:spcBef>
-                <a:spcPts val="1130"/>
+                <a:spcPts val="1225"/>
               </a:spcBef>
-            </a:pPr>
-            <a:endParaRPr sz="1200">
-              <a:latin typeface="Times New Roman"/>
-              <a:cs typeface="Times New Roman"/>
-            </a:endParaRPr>
-          </a:p>
-          <a:p>
-            <a:pPr marL="230504" indent="-222250">
-              <a:lnSpc>
-                <a:spcPct val="100000"/>
-              </a:lnSpc>
-              <a:buSzPct val="95652"/>
-              <a:buAutoNum type="arabicPeriod" startAt="6"/>
-              <a:tabLst>
-                <a:tab pos="230504" algn="l"/>
-              </a:tabLst>
-            </a:pPr>
-            <a:r>
-              <a:rPr sz="2300" b="1" spc="-10" dirty="0">
-                <a:solidFill>
-                  <a:srgbClr val="3C78D8"/>
-                </a:solidFill>
-                <a:latin typeface="Times New Roman"/>
-                <a:cs typeface="Times New Roman"/>
-              </a:rPr>
-              <a:t>Output:</a:t>
-            </a:r>
-            <a:endParaRPr sz="2300">
-              <a:latin typeface="Times New Roman"/>
-              <a:cs typeface="Times New Roman"/>
-            </a:endParaRPr>
-          </a:p>
-          <a:p>
-            <a:pPr marL="60325" marR="5080">
-              <a:lnSpc>
-                <a:spcPts val="1380"/>
+              <a:buFont typeface="Arial" panose="020B0604020202020204" pitchFamily="34" charset="0"/>
+              <a:buChar char="•"/>
+            </a:pPr>
+            <a:r>
+              <a:rPr lang="en-US" sz="1400" b="1" dirty="0">
+                <a:latin typeface="Times New Roman"/>
+                <a:cs typeface="Times New Roman"/>
+              </a:rPr>
+              <a:t>Browser-native Validation</a:t>
+            </a:r>
+            <a:r>
+              <a:rPr lang="en-US" sz="1400" dirty="0">
+                <a:latin typeface="Times New Roman"/>
+                <a:cs typeface="Times New Roman"/>
+              </a:rPr>
+              <a:t>: Used for basic data verification through input attributes.</a:t>
+            </a:r>
+          </a:p>
+          <a:p>
+            <a:pPr marL="193675" indent="-171450">
+              <a:lnSpc>
+                <a:spcPct val="100000"/>
               </a:lnSpc>
               <a:spcBef>
-                <a:spcPts val="1380"/>
+                <a:spcPts val="1225"/>
               </a:spcBef>
-            </a:pPr>
-            <a:r>
-              <a:rPr sz="1200" i="1" dirty="0">
-                <a:latin typeface="Times New Roman"/>
-                <a:cs typeface="Times New Roman"/>
-              </a:rPr>
-              <a:t>(Attach</a:t>
-            </a:r>
-            <a:r>
-              <a:rPr sz="1200" i="1" spc="-25" dirty="0">
-                <a:latin typeface="Times New Roman"/>
-                <a:cs typeface="Times New Roman"/>
-              </a:rPr>
-              <a:t> </a:t>
-            </a:r>
-            <a:r>
-              <a:rPr sz="1200" i="1" spc="-10" dirty="0">
-                <a:latin typeface="Times New Roman"/>
-                <a:cs typeface="Times New Roman"/>
-              </a:rPr>
-              <a:t>screenshots</a:t>
-            </a:r>
-            <a:r>
-              <a:rPr sz="1200" i="1" spc="-20" dirty="0">
-                <a:latin typeface="Times New Roman"/>
-                <a:cs typeface="Times New Roman"/>
-              </a:rPr>
-              <a:t> </a:t>
-            </a:r>
-            <a:r>
-              <a:rPr sz="1200" i="1" dirty="0">
-                <a:latin typeface="Times New Roman"/>
-                <a:cs typeface="Times New Roman"/>
-              </a:rPr>
-              <a:t>showing</a:t>
-            </a:r>
-            <a:r>
-              <a:rPr sz="1200" i="1" spc="-20" dirty="0">
-                <a:latin typeface="Times New Roman"/>
-                <a:cs typeface="Times New Roman"/>
-              </a:rPr>
-              <a:t> </a:t>
-            </a:r>
-            <a:r>
-              <a:rPr sz="1200" i="1" dirty="0">
-                <a:latin typeface="Times New Roman"/>
-                <a:cs typeface="Times New Roman"/>
-              </a:rPr>
-              <a:t>the</a:t>
-            </a:r>
-            <a:r>
-              <a:rPr sz="1200" i="1" spc="-20" dirty="0">
-                <a:latin typeface="Times New Roman"/>
-                <a:cs typeface="Times New Roman"/>
-              </a:rPr>
-              <a:t> </a:t>
-            </a:r>
-            <a:r>
-              <a:rPr sz="1200" i="1" dirty="0">
-                <a:latin typeface="Times New Roman"/>
-                <a:cs typeface="Times New Roman"/>
-              </a:rPr>
-              <a:t>final</a:t>
-            </a:r>
-            <a:r>
-              <a:rPr sz="1200" i="1" spc="-20" dirty="0">
-                <a:latin typeface="Times New Roman"/>
-                <a:cs typeface="Times New Roman"/>
-              </a:rPr>
-              <a:t> </a:t>
-            </a:r>
-            <a:r>
-              <a:rPr sz="1200" i="1" dirty="0">
-                <a:latin typeface="Times New Roman"/>
-                <a:cs typeface="Times New Roman"/>
-              </a:rPr>
-              <a:t>working</a:t>
-            </a:r>
-            <a:r>
-              <a:rPr sz="1200" i="1" spc="-20" dirty="0">
-                <a:latin typeface="Times New Roman"/>
-                <a:cs typeface="Times New Roman"/>
-              </a:rPr>
-              <a:t> </a:t>
-            </a:r>
-            <a:r>
-              <a:rPr sz="1200" i="1" dirty="0">
-                <a:latin typeface="Times New Roman"/>
-                <a:cs typeface="Times New Roman"/>
-              </a:rPr>
-              <a:t>output</a:t>
-            </a:r>
-            <a:r>
-              <a:rPr sz="1200" i="1" spc="-20" dirty="0">
-                <a:latin typeface="Times New Roman"/>
-                <a:cs typeface="Times New Roman"/>
-              </a:rPr>
-              <a:t> </a:t>
-            </a:r>
-            <a:r>
-              <a:rPr sz="1200" i="1" dirty="0">
-                <a:latin typeface="Times New Roman"/>
-                <a:cs typeface="Times New Roman"/>
-              </a:rPr>
-              <a:t>of</a:t>
-            </a:r>
-            <a:r>
-              <a:rPr sz="1200" i="1" spc="-20" dirty="0">
-                <a:latin typeface="Times New Roman"/>
-                <a:cs typeface="Times New Roman"/>
-              </a:rPr>
-              <a:t> </a:t>
-            </a:r>
-            <a:r>
-              <a:rPr sz="1200" i="1" dirty="0">
-                <a:latin typeface="Times New Roman"/>
-                <a:cs typeface="Times New Roman"/>
-              </a:rPr>
-              <a:t>the</a:t>
-            </a:r>
-            <a:r>
-              <a:rPr sz="1200" i="1" spc="-20" dirty="0">
-                <a:latin typeface="Times New Roman"/>
-                <a:cs typeface="Times New Roman"/>
-              </a:rPr>
-              <a:t> </a:t>
-            </a:r>
-            <a:r>
-              <a:rPr sz="1200" i="1" dirty="0">
-                <a:latin typeface="Times New Roman"/>
-                <a:cs typeface="Times New Roman"/>
-              </a:rPr>
-              <a:t>application,</a:t>
-            </a:r>
-            <a:r>
-              <a:rPr sz="1200" i="1" spc="-20" dirty="0">
-                <a:latin typeface="Times New Roman"/>
-                <a:cs typeface="Times New Roman"/>
-              </a:rPr>
-              <a:t> </a:t>
-            </a:r>
-            <a:r>
-              <a:rPr sz="1200" i="1" dirty="0">
-                <a:latin typeface="Times New Roman"/>
-                <a:cs typeface="Times New Roman"/>
-              </a:rPr>
-              <a:t>including</a:t>
-            </a:r>
-            <a:r>
-              <a:rPr sz="1200" i="1" spc="-20" dirty="0">
-                <a:latin typeface="Times New Roman"/>
-                <a:cs typeface="Times New Roman"/>
-              </a:rPr>
-              <a:t> </a:t>
-            </a:r>
-            <a:r>
-              <a:rPr sz="1200" i="1" dirty="0">
-                <a:latin typeface="Times New Roman"/>
-                <a:cs typeface="Times New Roman"/>
-              </a:rPr>
-              <a:t>the</a:t>
-            </a:r>
-            <a:r>
-              <a:rPr sz="1200" i="1" spc="-20" dirty="0">
-                <a:latin typeface="Times New Roman"/>
-                <a:cs typeface="Times New Roman"/>
-              </a:rPr>
-              <a:t> </a:t>
-            </a:r>
-            <a:r>
-              <a:rPr sz="1200" i="1" dirty="0">
-                <a:latin typeface="Times New Roman"/>
-                <a:cs typeface="Times New Roman"/>
-              </a:rPr>
-              <a:t>form</a:t>
-            </a:r>
-            <a:r>
-              <a:rPr sz="1200" i="1" spc="-20" dirty="0">
-                <a:latin typeface="Times New Roman"/>
-                <a:cs typeface="Times New Roman"/>
-              </a:rPr>
-              <a:t> </a:t>
-            </a:r>
-            <a:r>
-              <a:rPr sz="1200" i="1" spc="-25" dirty="0">
-                <a:latin typeface="Times New Roman"/>
-                <a:cs typeface="Times New Roman"/>
-              </a:rPr>
-              <a:t>and </a:t>
-            </a:r>
-            <a:r>
-              <a:rPr sz="1200" i="1" dirty="0">
-                <a:latin typeface="Times New Roman"/>
-                <a:cs typeface="Times New Roman"/>
-              </a:rPr>
-              <a:t>participants</a:t>
-            </a:r>
-            <a:r>
-              <a:rPr sz="1200" i="1" spc="-60" dirty="0">
-                <a:latin typeface="Times New Roman"/>
-                <a:cs typeface="Times New Roman"/>
-              </a:rPr>
-              <a:t> </a:t>
-            </a:r>
-            <a:r>
-              <a:rPr sz="1200" i="1" spc="-10" dirty="0">
-                <a:latin typeface="Times New Roman"/>
-                <a:cs typeface="Times New Roman"/>
-              </a:rPr>
-              <a:t>table.)</a:t>
-            </a:r>
-            <a:endParaRPr sz="1200">
-              <a:latin typeface="Times New Roman"/>
-              <a:cs typeface="Times New Roman"/>
-            </a:endParaRPr>
-          </a:p>
-          <a:p>
-            <a:pPr>
-              <a:lnSpc>
-                <a:spcPct val="100000"/>
-              </a:lnSpc>
-            </a:pPr>
-            <a:endParaRPr sz="1200">
-              <a:latin typeface="Times New Roman"/>
-              <a:cs typeface="Times New Roman"/>
-            </a:endParaRPr>
-          </a:p>
-          <a:p>
-            <a:pPr>
-              <a:lnSpc>
-                <a:spcPct val="100000"/>
-              </a:lnSpc>
-              <a:spcBef>
-                <a:spcPts val="980"/>
-              </a:spcBef>
-            </a:pPr>
-            <a:endParaRPr sz="1200">
-              <a:latin typeface="Times New Roman"/>
-              <a:cs typeface="Times New Roman"/>
-            </a:endParaRPr>
-          </a:p>
-          <a:p>
-            <a:pPr marL="278130" indent="-222250">
-              <a:lnSpc>
-                <a:spcPct val="100000"/>
-              </a:lnSpc>
-              <a:buClr>
-                <a:srgbClr val="3C78D8"/>
-              </a:buClr>
-              <a:buSzPct val="95652"/>
-              <a:buFont typeface="Times New Roman"/>
-              <a:buAutoNum type="arabicPeriod" startAt="7"/>
-              <a:tabLst>
-                <a:tab pos="278130" algn="l"/>
-              </a:tabLst>
-            </a:pPr>
-            <a:r>
-              <a:rPr sz="2300" b="1" dirty="0">
-                <a:solidFill>
-                  <a:srgbClr val="3C78D8"/>
-                </a:solidFill>
-                <a:latin typeface="Times New Roman"/>
-                <a:cs typeface="Times New Roman"/>
-              </a:rPr>
-              <a:t>Learning</a:t>
-            </a:r>
-            <a:r>
-              <a:rPr sz="2300" b="1" spc="-80" dirty="0">
-                <a:solidFill>
-                  <a:srgbClr val="3C78D8"/>
-                </a:solidFill>
-                <a:latin typeface="Times New Roman"/>
-                <a:cs typeface="Times New Roman"/>
-              </a:rPr>
-              <a:t> </a:t>
-            </a:r>
-            <a:r>
-              <a:rPr sz="2300" b="1" spc="-10" dirty="0">
-                <a:solidFill>
-                  <a:srgbClr val="3C78D8"/>
-                </a:solidFill>
-                <a:latin typeface="Times New Roman"/>
-                <a:cs typeface="Times New Roman"/>
-              </a:rPr>
-              <a:t>Outcome:</a:t>
-            </a:r>
-            <a:endParaRPr sz="2300">
-              <a:latin typeface="Times New Roman"/>
-              <a:cs typeface="Times New Roman"/>
-            </a:endParaRPr>
-          </a:p>
-          <a:p>
-            <a:pPr marL="60325">
-              <a:lnSpc>
-                <a:spcPct val="100000"/>
-              </a:lnSpc>
-              <a:spcBef>
-                <a:spcPts val="1335"/>
-              </a:spcBef>
-            </a:pPr>
-            <a:r>
-              <a:rPr sz="1200" i="1" dirty="0">
-                <a:latin typeface="Times New Roman"/>
-                <a:cs typeface="Times New Roman"/>
-              </a:rPr>
-              <a:t>(Explain</a:t>
-            </a:r>
-            <a:r>
-              <a:rPr sz="1200" i="1" spc="-35" dirty="0">
-                <a:latin typeface="Times New Roman"/>
-                <a:cs typeface="Times New Roman"/>
-              </a:rPr>
-              <a:t> </a:t>
-            </a:r>
-            <a:r>
-              <a:rPr sz="1200" i="1" dirty="0">
-                <a:latin typeface="Times New Roman"/>
-                <a:cs typeface="Times New Roman"/>
-              </a:rPr>
-              <a:t>the</a:t>
-            </a:r>
-            <a:r>
-              <a:rPr sz="1200" i="1" spc="-30" dirty="0">
-                <a:latin typeface="Times New Roman"/>
-                <a:cs typeface="Times New Roman"/>
-              </a:rPr>
-              <a:t> </a:t>
-            </a:r>
-            <a:r>
-              <a:rPr sz="1200" i="1" dirty="0">
-                <a:latin typeface="Times New Roman"/>
-                <a:cs typeface="Times New Roman"/>
-              </a:rPr>
-              <a:t>skills</a:t>
-            </a:r>
-            <a:r>
-              <a:rPr sz="1200" i="1" spc="-30" dirty="0">
-                <a:latin typeface="Times New Roman"/>
-                <a:cs typeface="Times New Roman"/>
-              </a:rPr>
-              <a:t> </a:t>
-            </a:r>
-            <a:r>
-              <a:rPr sz="1200" i="1" dirty="0">
-                <a:latin typeface="Times New Roman"/>
-                <a:cs typeface="Times New Roman"/>
-              </a:rPr>
-              <a:t>and</a:t>
-            </a:r>
-            <a:r>
-              <a:rPr sz="1200" i="1" spc="-30" dirty="0">
-                <a:latin typeface="Times New Roman"/>
-                <a:cs typeface="Times New Roman"/>
-              </a:rPr>
-              <a:t> </a:t>
-            </a:r>
-            <a:r>
-              <a:rPr sz="1200" i="1" dirty="0">
-                <a:latin typeface="Times New Roman"/>
-                <a:cs typeface="Times New Roman"/>
-              </a:rPr>
-              <a:t>knowledge</a:t>
-            </a:r>
-            <a:r>
-              <a:rPr sz="1200" i="1" spc="-35" dirty="0">
-                <a:latin typeface="Times New Roman"/>
-                <a:cs typeface="Times New Roman"/>
-              </a:rPr>
-              <a:t> </a:t>
-            </a:r>
-            <a:r>
-              <a:rPr sz="1200" i="1" dirty="0">
-                <a:latin typeface="Times New Roman"/>
-                <a:cs typeface="Times New Roman"/>
-              </a:rPr>
-              <a:t>gained</a:t>
-            </a:r>
-            <a:r>
-              <a:rPr sz="1200" i="1" spc="-30" dirty="0">
-                <a:latin typeface="Times New Roman"/>
-                <a:cs typeface="Times New Roman"/>
-              </a:rPr>
-              <a:t> </a:t>
-            </a:r>
-            <a:r>
-              <a:rPr sz="1200" i="1" dirty="0">
-                <a:latin typeface="Times New Roman"/>
-                <a:cs typeface="Times New Roman"/>
-              </a:rPr>
-              <a:t>from</a:t>
-            </a:r>
-            <a:r>
-              <a:rPr sz="1200" i="1" spc="-30" dirty="0">
-                <a:latin typeface="Times New Roman"/>
-                <a:cs typeface="Times New Roman"/>
-              </a:rPr>
-              <a:t> </a:t>
-            </a:r>
-            <a:r>
-              <a:rPr sz="1200" i="1" dirty="0">
-                <a:latin typeface="Times New Roman"/>
-                <a:cs typeface="Times New Roman"/>
-              </a:rPr>
-              <a:t>completing</a:t>
-            </a:r>
-            <a:r>
-              <a:rPr sz="1200" i="1" spc="-30" dirty="0">
-                <a:latin typeface="Times New Roman"/>
-                <a:cs typeface="Times New Roman"/>
-              </a:rPr>
-              <a:t> </a:t>
-            </a:r>
-            <a:r>
-              <a:rPr sz="1200" i="1" dirty="0">
-                <a:latin typeface="Times New Roman"/>
-                <a:cs typeface="Times New Roman"/>
-              </a:rPr>
-              <a:t>this</a:t>
-            </a:r>
-            <a:r>
-              <a:rPr sz="1200" i="1" spc="-35" dirty="0">
-                <a:latin typeface="Times New Roman"/>
-                <a:cs typeface="Times New Roman"/>
-              </a:rPr>
-              <a:t> </a:t>
-            </a:r>
-            <a:r>
-              <a:rPr sz="1200" i="1" spc="-10" dirty="0">
-                <a:latin typeface="Times New Roman"/>
-                <a:cs typeface="Times New Roman"/>
-              </a:rPr>
-              <a:t>assignment.)</a:t>
-            </a:r>
-            <a:endParaRPr sz="1200">
-              <a:latin typeface="Times New Roman"/>
-              <a:cs typeface="Times New Roman"/>
-            </a:endParaRPr>
-          </a:p>
-          <a:p>
-            <a:pPr>
-              <a:lnSpc>
-                <a:spcPct val="100000"/>
-              </a:lnSpc>
-            </a:pPr>
-            <a:endParaRPr sz="1200">
-              <a:latin typeface="Times New Roman"/>
-              <a:cs typeface="Times New Roman"/>
-            </a:endParaRPr>
-          </a:p>
-          <a:p>
-            <a:pPr>
-              <a:lnSpc>
-                <a:spcPct val="100000"/>
-              </a:lnSpc>
-              <a:spcBef>
-                <a:spcPts val="1265"/>
-              </a:spcBef>
-            </a:pPr>
-            <a:endParaRPr sz="1200">
-              <a:latin typeface="Times New Roman"/>
-              <a:cs typeface="Times New Roman"/>
-            </a:endParaRPr>
-          </a:p>
-          <a:p>
-            <a:pPr marL="332105" indent="-290830">
-              <a:lnSpc>
-                <a:spcPct val="100000"/>
-              </a:lnSpc>
-              <a:spcBef>
-                <a:spcPts val="5"/>
-              </a:spcBef>
-              <a:buClr>
-                <a:srgbClr val="3C78D8"/>
-              </a:buClr>
-              <a:buSzPct val="95652"/>
-              <a:buFont typeface="Times New Roman"/>
-              <a:buAutoNum type="arabicPeriod" startAt="8"/>
-              <a:tabLst>
-                <a:tab pos="332105" algn="l"/>
-              </a:tabLst>
-            </a:pPr>
-            <a:r>
-              <a:rPr sz="2300" b="1" spc="-10" dirty="0">
-                <a:solidFill>
-                  <a:srgbClr val="3C78D8"/>
-                </a:solidFill>
-                <a:latin typeface="Times New Roman"/>
-                <a:cs typeface="Times New Roman"/>
-              </a:rPr>
-              <a:t>Conclusion:</a:t>
-            </a:r>
-            <a:endParaRPr sz="2300">
-              <a:latin typeface="Times New Roman"/>
-              <a:cs typeface="Times New Roman"/>
-            </a:endParaRPr>
-          </a:p>
-          <a:p>
-            <a:pPr marL="60325">
-              <a:lnSpc>
-                <a:spcPct val="100000"/>
-              </a:lnSpc>
-              <a:spcBef>
-                <a:spcPts val="1155"/>
-              </a:spcBef>
-            </a:pPr>
-            <a:r>
-              <a:rPr sz="1200" i="1" dirty="0">
-                <a:latin typeface="Times New Roman"/>
-                <a:cs typeface="Times New Roman"/>
-              </a:rPr>
-              <a:t>(Summarize</a:t>
-            </a:r>
-            <a:r>
-              <a:rPr sz="1200" i="1" spc="-25" dirty="0">
-                <a:latin typeface="Times New Roman"/>
-                <a:cs typeface="Times New Roman"/>
-              </a:rPr>
-              <a:t> </a:t>
-            </a:r>
-            <a:r>
-              <a:rPr sz="1200" i="1" dirty="0">
-                <a:latin typeface="Times New Roman"/>
-                <a:cs typeface="Times New Roman"/>
-              </a:rPr>
-              <a:t>the</a:t>
-            </a:r>
-            <a:r>
-              <a:rPr sz="1200" i="1" spc="-30" dirty="0">
-                <a:latin typeface="Times New Roman"/>
-                <a:cs typeface="Times New Roman"/>
-              </a:rPr>
-              <a:t> </a:t>
-            </a:r>
-            <a:r>
-              <a:rPr sz="1200" i="1" dirty="0">
-                <a:latin typeface="Times New Roman"/>
-                <a:cs typeface="Times New Roman"/>
-              </a:rPr>
-              <a:t>project</a:t>
-            </a:r>
-            <a:r>
-              <a:rPr sz="1200" i="1" spc="-25" dirty="0">
-                <a:latin typeface="Times New Roman"/>
-                <a:cs typeface="Times New Roman"/>
-              </a:rPr>
-              <a:t> </a:t>
-            </a:r>
-            <a:r>
-              <a:rPr sz="1200" i="1" dirty="0">
-                <a:latin typeface="Times New Roman"/>
-                <a:cs typeface="Times New Roman"/>
-              </a:rPr>
-              <a:t>and</a:t>
-            </a:r>
-            <a:r>
-              <a:rPr sz="1200" i="1" spc="-25" dirty="0">
-                <a:latin typeface="Times New Roman"/>
-                <a:cs typeface="Times New Roman"/>
-              </a:rPr>
-              <a:t> </a:t>
-            </a:r>
-            <a:r>
-              <a:rPr sz="1200" i="1" dirty="0">
-                <a:latin typeface="Times New Roman"/>
-                <a:cs typeface="Times New Roman"/>
-              </a:rPr>
-              <a:t>briefly</a:t>
-            </a:r>
-            <a:r>
-              <a:rPr sz="1200" i="1" spc="-25" dirty="0">
-                <a:latin typeface="Times New Roman"/>
-                <a:cs typeface="Times New Roman"/>
-              </a:rPr>
-              <a:t> </a:t>
-            </a:r>
-            <a:r>
-              <a:rPr sz="1200" i="1" dirty="0">
-                <a:latin typeface="Times New Roman"/>
-                <a:cs typeface="Times New Roman"/>
-              </a:rPr>
-              <a:t>describe</a:t>
-            </a:r>
-            <a:r>
-              <a:rPr sz="1200" i="1" spc="-20" dirty="0">
-                <a:latin typeface="Times New Roman"/>
-                <a:cs typeface="Times New Roman"/>
-              </a:rPr>
-              <a:t> </a:t>
-            </a:r>
-            <a:r>
-              <a:rPr sz="1200" i="1" dirty="0">
-                <a:latin typeface="Times New Roman"/>
-                <a:cs typeface="Times New Roman"/>
-              </a:rPr>
-              <a:t>the</a:t>
-            </a:r>
-            <a:r>
-              <a:rPr sz="1200" i="1" spc="-25" dirty="0">
-                <a:latin typeface="Times New Roman"/>
-                <a:cs typeface="Times New Roman"/>
-              </a:rPr>
-              <a:t> </a:t>
-            </a:r>
-            <a:r>
-              <a:rPr sz="1200" i="1" dirty="0">
-                <a:latin typeface="Times New Roman"/>
-                <a:cs typeface="Times New Roman"/>
-              </a:rPr>
-              <a:t>final</a:t>
-            </a:r>
-            <a:r>
-              <a:rPr sz="1200" i="1" spc="-30" dirty="0">
-                <a:latin typeface="Times New Roman"/>
-                <a:cs typeface="Times New Roman"/>
-              </a:rPr>
-              <a:t> </a:t>
-            </a:r>
-            <a:r>
-              <a:rPr sz="1200" i="1" spc="-10" dirty="0">
-                <a:latin typeface="Times New Roman"/>
-                <a:cs typeface="Times New Roman"/>
-              </a:rPr>
-              <a:t>outcome.)</a:t>
-            </a:r>
-            <a:endParaRPr sz="1200">
+              <a:buFont typeface="Arial" panose="020B0604020202020204" pitchFamily="34" charset="0"/>
+              <a:buChar char="•"/>
+            </a:pPr>
+            <a:endParaRPr sz="1200" dirty="0">
               <a:latin typeface="Times New Roman"/>
               <a:cs typeface="Times New Roman"/>
             </a:endParaRPr>
@@ -8122,6 +5897,822 @@
         </p:spPr>
       </p:pic>
     </p:spTree>
+  </p:cSld>
+  <p:clrMapOvr>
+    <a:masterClrMapping/>
+  </p:clrMapOvr>
+</p:sld>
+</file>
+
+<file path=ppt/slides/slide5.xml><?xml version="1.0" encoding="utf-8"?>
+<p:sld xmlns:a="http://schemas.openxmlformats.org/drawingml/2006/main" xmlns:r="http://schemas.openxmlformats.org/officeDocument/2006/relationships" xmlns:p="http://schemas.openxmlformats.org/presentationml/2006/main" showMasterSp="0">
+  <p:cSld>
+    <p:spTree>
+      <p:nvGrpSpPr>
+        <p:cNvPr id="1" name="">
+          <a:extLst>
+            <a:ext uri="{FF2B5EF4-FFF2-40B4-BE49-F238E27FC236}">
+              <a16:creationId xmlns:a16="http://schemas.microsoft.com/office/drawing/2014/main" id="{9A68B943-8BF0-F6C7-4127-2EBC10FF0743}"/>
+            </a:ext>
+          </a:extLst>
+        </p:cNvPr>
+        <p:cNvGrpSpPr/>
+        <p:nvPr/>
+      </p:nvGrpSpPr>
+      <p:grpSpPr>
+        <a:xfrm>
+          <a:off x="0" y="0"/>
+          <a:ext cx="0" cy="0"/>
+          <a:chOff x="0" y="0"/>
+          <a:chExt cx="0" cy="0"/>
+        </a:xfrm>
+      </p:grpSpPr>
+      <p:pic>
+        <p:nvPicPr>
+          <p:cNvPr id="2" name="object 2">
+            <a:extLst>
+              <a:ext uri="{FF2B5EF4-FFF2-40B4-BE49-F238E27FC236}">
+                <a16:creationId xmlns:a16="http://schemas.microsoft.com/office/drawing/2014/main" id="{251574EB-4766-B6AD-06D8-1A254855D4A9}"/>
+              </a:ext>
+            </a:extLst>
+          </p:cNvPr>
+          <p:cNvPicPr/>
+          <p:nvPr/>
+        </p:nvPicPr>
+        <p:blipFill>
+          <a:blip r:embed="rId2" cstate="print"/>
+          <a:stretch>
+            <a:fillRect/>
+          </a:stretch>
+        </p:blipFill>
+        <p:spPr>
+          <a:xfrm>
+            <a:off x="5779134" y="689594"/>
+            <a:ext cx="1076324" cy="400050"/>
+          </a:xfrm>
+          <a:prstGeom prst="rect">
+            <a:avLst/>
+          </a:prstGeom>
+        </p:spPr>
+      </p:pic>
+      <p:pic>
+        <p:nvPicPr>
+          <p:cNvPr id="3" name="object 3">
+            <a:extLst>
+              <a:ext uri="{FF2B5EF4-FFF2-40B4-BE49-F238E27FC236}">
+                <a16:creationId xmlns:a16="http://schemas.microsoft.com/office/drawing/2014/main" id="{7E2ED9E9-9FEB-FD85-2687-B2C263B71420}"/>
+              </a:ext>
+            </a:extLst>
+          </p:cNvPr>
+          <p:cNvPicPr/>
+          <p:nvPr/>
+        </p:nvPicPr>
+        <p:blipFill>
+          <a:blip r:embed="rId3" cstate="print"/>
+          <a:stretch>
+            <a:fillRect/>
+          </a:stretch>
+        </p:blipFill>
+        <p:spPr>
+          <a:xfrm>
+            <a:off x="3816984" y="670544"/>
+            <a:ext cx="1000125" cy="438150"/>
+          </a:xfrm>
+          <a:prstGeom prst="rect">
+            <a:avLst/>
+          </a:prstGeom>
+        </p:spPr>
+      </p:pic>
+      <p:sp>
+        <p:nvSpPr>
+          <p:cNvPr id="4" name="object 4">
+            <a:extLst>
+              <a:ext uri="{FF2B5EF4-FFF2-40B4-BE49-F238E27FC236}">
+                <a16:creationId xmlns:a16="http://schemas.microsoft.com/office/drawing/2014/main" id="{21AEA0ED-D254-83F2-D080-86B07DA6EF68}"/>
+              </a:ext>
+            </a:extLst>
+          </p:cNvPr>
+          <p:cNvSpPr/>
+          <p:nvPr/>
+        </p:nvSpPr>
+        <p:spPr>
+          <a:xfrm>
+            <a:off x="712468" y="8775700"/>
+            <a:ext cx="6502400" cy="0"/>
+          </a:xfrm>
+          <a:custGeom>
+            <a:avLst/>
+            <a:gdLst/>
+            <a:ahLst/>
+            <a:cxnLst/>
+            <a:rect l="l" t="t" r="r" b="b"/>
+            <a:pathLst>
+              <a:path w="6502400">
+                <a:moveTo>
+                  <a:pt x="0" y="0"/>
+                </a:moveTo>
+                <a:lnTo>
+                  <a:pt x="6502403" y="0"/>
+                </a:lnTo>
+              </a:path>
+            </a:pathLst>
+          </a:custGeom>
+          <a:ln w="12699">
+            <a:solidFill>
+              <a:srgbClr val="878787"/>
+            </a:solidFill>
+          </a:ln>
+        </p:spPr>
+        <p:txBody>
+          <a:bodyPr wrap="square" lIns="0" tIns="0" rIns="0" bIns="0" rtlCol="0"/>
+          <a:lstStyle/>
+          <a:p>
+            <a:endParaRPr/>
+          </a:p>
+        </p:txBody>
+      </p:sp>
+      <p:sp>
+        <p:nvSpPr>
+          <p:cNvPr id="5" name="object 5">
+            <a:extLst>
+              <a:ext uri="{FF2B5EF4-FFF2-40B4-BE49-F238E27FC236}">
+                <a16:creationId xmlns:a16="http://schemas.microsoft.com/office/drawing/2014/main" id="{C1A2E1C9-345D-E173-54A8-33219DBCCCE7}"/>
+              </a:ext>
+            </a:extLst>
+          </p:cNvPr>
+          <p:cNvSpPr/>
+          <p:nvPr/>
+        </p:nvSpPr>
+        <p:spPr>
+          <a:xfrm>
+            <a:off x="670558" y="7099300"/>
+            <a:ext cx="6502400" cy="0"/>
+          </a:xfrm>
+          <a:custGeom>
+            <a:avLst/>
+            <a:gdLst/>
+            <a:ahLst/>
+            <a:cxnLst/>
+            <a:rect l="l" t="t" r="r" b="b"/>
+            <a:pathLst>
+              <a:path w="6502400">
+                <a:moveTo>
+                  <a:pt x="0" y="0"/>
+                </a:moveTo>
+                <a:lnTo>
+                  <a:pt x="6502403" y="0"/>
+                </a:lnTo>
+              </a:path>
+            </a:pathLst>
+          </a:custGeom>
+          <a:ln w="12699">
+            <a:solidFill>
+              <a:srgbClr val="878787"/>
+            </a:solidFill>
+          </a:ln>
+        </p:spPr>
+        <p:txBody>
+          <a:bodyPr wrap="square" lIns="0" tIns="0" rIns="0" bIns="0" rtlCol="0"/>
+          <a:lstStyle/>
+          <a:p>
+            <a:endParaRPr/>
+          </a:p>
+        </p:txBody>
+      </p:sp>
+      <p:sp>
+        <p:nvSpPr>
+          <p:cNvPr id="6" name="object 6">
+            <a:extLst>
+              <a:ext uri="{FF2B5EF4-FFF2-40B4-BE49-F238E27FC236}">
+                <a16:creationId xmlns:a16="http://schemas.microsoft.com/office/drawing/2014/main" id="{2C51B95F-5BD8-7674-A166-6DE8C751BF92}"/>
+              </a:ext>
+            </a:extLst>
+          </p:cNvPr>
+          <p:cNvSpPr/>
+          <p:nvPr/>
+        </p:nvSpPr>
+        <p:spPr>
+          <a:xfrm>
+            <a:off x="670558" y="10490639"/>
+            <a:ext cx="6502400" cy="0"/>
+          </a:xfrm>
+          <a:custGeom>
+            <a:avLst/>
+            <a:gdLst/>
+            <a:ahLst/>
+            <a:cxnLst/>
+            <a:rect l="l" t="t" r="r" b="b"/>
+            <a:pathLst>
+              <a:path w="6502400">
+                <a:moveTo>
+                  <a:pt x="0" y="0"/>
+                </a:moveTo>
+                <a:lnTo>
+                  <a:pt x="6502403" y="0"/>
+                </a:lnTo>
+              </a:path>
+            </a:pathLst>
+          </a:custGeom>
+          <a:ln w="12699">
+            <a:solidFill>
+              <a:srgbClr val="878787"/>
+            </a:solidFill>
+          </a:ln>
+        </p:spPr>
+        <p:txBody>
+          <a:bodyPr wrap="square" lIns="0" tIns="0" rIns="0" bIns="0" rtlCol="0"/>
+          <a:lstStyle/>
+          <a:p>
+            <a:endParaRPr/>
+          </a:p>
+        </p:txBody>
+      </p:sp>
+      <p:sp>
+        <p:nvSpPr>
+          <p:cNvPr id="7" name="object 7">
+            <a:extLst>
+              <a:ext uri="{FF2B5EF4-FFF2-40B4-BE49-F238E27FC236}">
+                <a16:creationId xmlns:a16="http://schemas.microsoft.com/office/drawing/2014/main" id="{8E5F7AF8-A460-526F-3C66-645D25B6695E}"/>
+              </a:ext>
+            </a:extLst>
+          </p:cNvPr>
+          <p:cNvSpPr/>
+          <p:nvPr/>
+        </p:nvSpPr>
+        <p:spPr>
+          <a:xfrm>
+            <a:off x="670558" y="1384300"/>
+            <a:ext cx="6502400" cy="0"/>
+          </a:xfrm>
+          <a:custGeom>
+            <a:avLst/>
+            <a:gdLst/>
+            <a:ahLst/>
+            <a:cxnLst/>
+            <a:rect l="l" t="t" r="r" b="b"/>
+            <a:pathLst>
+              <a:path w="6502400">
+                <a:moveTo>
+                  <a:pt x="0" y="0"/>
+                </a:moveTo>
+                <a:lnTo>
+                  <a:pt x="6502403" y="0"/>
+                </a:lnTo>
+              </a:path>
+            </a:pathLst>
+          </a:custGeom>
+          <a:ln w="12699">
+            <a:solidFill>
+              <a:srgbClr val="878787"/>
+            </a:solidFill>
+          </a:ln>
+        </p:spPr>
+        <p:txBody>
+          <a:bodyPr wrap="square" lIns="0" tIns="0" rIns="0" bIns="0" rtlCol="0"/>
+          <a:lstStyle/>
+          <a:p>
+            <a:endParaRPr/>
+          </a:p>
+        </p:txBody>
+      </p:sp>
+      <p:sp>
+        <p:nvSpPr>
+          <p:cNvPr id="8" name="object 8">
+            <a:extLst>
+              <a:ext uri="{FF2B5EF4-FFF2-40B4-BE49-F238E27FC236}">
+                <a16:creationId xmlns:a16="http://schemas.microsoft.com/office/drawing/2014/main" id="{B42D7FC8-DEB4-2176-171B-5830F651B2C3}"/>
+              </a:ext>
+            </a:extLst>
+          </p:cNvPr>
+          <p:cNvSpPr txBox="1"/>
+          <p:nvPr/>
+        </p:nvSpPr>
+        <p:spPr>
+          <a:xfrm>
+            <a:off x="749299" y="1371600"/>
+            <a:ext cx="5901055" cy="9106339"/>
+          </a:xfrm>
+          <a:prstGeom prst="rect">
+            <a:avLst/>
+          </a:prstGeom>
+        </p:spPr>
+        <p:txBody>
+          <a:bodyPr vert="horz" wrap="square" lIns="0" tIns="148590" rIns="0" bIns="0" rtlCol="0">
+            <a:spAutoFit/>
+          </a:bodyPr>
+          <a:lstStyle/>
+          <a:p>
+            <a:pPr marL="230504" indent="-222250">
+              <a:lnSpc>
+                <a:spcPct val="100000"/>
+              </a:lnSpc>
+              <a:buSzPct val="95652"/>
+              <a:buAutoNum type="arabicPeriod" startAt="6"/>
+              <a:tabLst>
+                <a:tab pos="230504" algn="l"/>
+              </a:tabLst>
+            </a:pPr>
+            <a:r>
+              <a:rPr sz="2300" b="1" spc="-10" dirty="0">
+                <a:solidFill>
+                  <a:srgbClr val="3C78D8"/>
+                </a:solidFill>
+                <a:latin typeface="Times New Roman"/>
+                <a:cs typeface="Times New Roman"/>
+              </a:rPr>
+              <a:t>Output:</a:t>
+            </a:r>
+            <a:endParaRPr lang="en-US" sz="2300" b="1" spc="-10" dirty="0">
+              <a:solidFill>
+                <a:srgbClr val="3C78D8"/>
+              </a:solidFill>
+              <a:latin typeface="Times New Roman"/>
+              <a:cs typeface="Times New Roman"/>
+            </a:endParaRPr>
+          </a:p>
+          <a:p>
+            <a:pPr marL="230504" indent="-222250">
+              <a:lnSpc>
+                <a:spcPct val="100000"/>
+              </a:lnSpc>
+              <a:buSzPct val="95652"/>
+              <a:buAutoNum type="arabicPeriod" startAt="6"/>
+              <a:tabLst>
+                <a:tab pos="230504" algn="l"/>
+              </a:tabLst>
+            </a:pPr>
+            <a:endParaRPr lang="en-US" sz="2300" b="1" spc="-10" dirty="0">
+              <a:solidFill>
+                <a:srgbClr val="3C78D8"/>
+              </a:solidFill>
+              <a:latin typeface="Times New Roman"/>
+              <a:cs typeface="Times New Roman"/>
+            </a:endParaRPr>
+          </a:p>
+          <a:p>
+            <a:pPr marL="230504" indent="-222250">
+              <a:lnSpc>
+                <a:spcPct val="100000"/>
+              </a:lnSpc>
+              <a:buSzPct val="95652"/>
+              <a:buAutoNum type="arabicPeriod" startAt="6"/>
+              <a:tabLst>
+                <a:tab pos="230504" algn="l"/>
+              </a:tabLst>
+            </a:pPr>
+            <a:endParaRPr lang="en-US" sz="2300" b="1" spc="-10" dirty="0">
+              <a:solidFill>
+                <a:srgbClr val="3C78D8"/>
+              </a:solidFill>
+              <a:latin typeface="Times New Roman"/>
+              <a:cs typeface="Times New Roman"/>
+            </a:endParaRPr>
+          </a:p>
+          <a:p>
+            <a:pPr marL="230504" indent="-222250">
+              <a:lnSpc>
+                <a:spcPct val="100000"/>
+              </a:lnSpc>
+              <a:buSzPct val="95652"/>
+              <a:buAutoNum type="arabicPeriod" startAt="6"/>
+              <a:tabLst>
+                <a:tab pos="230504" algn="l"/>
+              </a:tabLst>
+            </a:pPr>
+            <a:endParaRPr lang="en-US" sz="2300" b="1" spc="-10" dirty="0">
+              <a:solidFill>
+                <a:srgbClr val="3C78D8"/>
+              </a:solidFill>
+              <a:latin typeface="Times New Roman"/>
+              <a:cs typeface="Times New Roman"/>
+            </a:endParaRPr>
+          </a:p>
+          <a:p>
+            <a:pPr marL="230504" indent="-222250">
+              <a:lnSpc>
+                <a:spcPct val="100000"/>
+              </a:lnSpc>
+              <a:buSzPct val="95652"/>
+              <a:buAutoNum type="arabicPeriod" startAt="6"/>
+              <a:tabLst>
+                <a:tab pos="230504" algn="l"/>
+              </a:tabLst>
+            </a:pPr>
+            <a:endParaRPr lang="en-US" sz="2300" b="1" spc="-10" dirty="0">
+              <a:solidFill>
+                <a:srgbClr val="3C78D8"/>
+              </a:solidFill>
+              <a:latin typeface="Times New Roman"/>
+              <a:cs typeface="Times New Roman"/>
+            </a:endParaRPr>
+          </a:p>
+          <a:p>
+            <a:pPr marL="230504" indent="-222250">
+              <a:lnSpc>
+                <a:spcPct val="100000"/>
+              </a:lnSpc>
+              <a:buSzPct val="95652"/>
+              <a:buAutoNum type="arabicPeriod" startAt="6"/>
+              <a:tabLst>
+                <a:tab pos="230504" algn="l"/>
+              </a:tabLst>
+            </a:pPr>
+            <a:endParaRPr lang="en-US" sz="2300" b="1" spc="-10" dirty="0">
+              <a:solidFill>
+                <a:srgbClr val="3C78D8"/>
+              </a:solidFill>
+              <a:latin typeface="Times New Roman"/>
+              <a:cs typeface="Times New Roman"/>
+            </a:endParaRPr>
+          </a:p>
+          <a:p>
+            <a:pPr marL="230504" indent="-222250">
+              <a:lnSpc>
+                <a:spcPct val="100000"/>
+              </a:lnSpc>
+              <a:buSzPct val="95652"/>
+              <a:buAutoNum type="arabicPeriod" startAt="6"/>
+              <a:tabLst>
+                <a:tab pos="230504" algn="l"/>
+              </a:tabLst>
+            </a:pPr>
+            <a:endParaRPr lang="en-US" sz="2300" b="1" spc="-10" dirty="0">
+              <a:solidFill>
+                <a:srgbClr val="3C78D8"/>
+              </a:solidFill>
+              <a:latin typeface="Times New Roman"/>
+              <a:cs typeface="Times New Roman"/>
+            </a:endParaRPr>
+          </a:p>
+          <a:p>
+            <a:pPr marL="230504" indent="-222250">
+              <a:lnSpc>
+                <a:spcPct val="100000"/>
+              </a:lnSpc>
+              <a:buSzPct val="95652"/>
+              <a:buAutoNum type="arabicPeriod" startAt="6"/>
+              <a:tabLst>
+                <a:tab pos="230504" algn="l"/>
+              </a:tabLst>
+            </a:pPr>
+            <a:endParaRPr lang="en-US" sz="2300" b="1" spc="-10" dirty="0">
+              <a:solidFill>
+                <a:srgbClr val="3C78D8"/>
+              </a:solidFill>
+              <a:latin typeface="Times New Roman"/>
+              <a:cs typeface="Times New Roman"/>
+            </a:endParaRPr>
+          </a:p>
+          <a:p>
+            <a:pPr marL="230504" indent="-222250">
+              <a:lnSpc>
+                <a:spcPct val="100000"/>
+              </a:lnSpc>
+              <a:buSzPct val="95652"/>
+              <a:buAutoNum type="arabicPeriod" startAt="6"/>
+              <a:tabLst>
+                <a:tab pos="230504" algn="l"/>
+              </a:tabLst>
+            </a:pPr>
+            <a:endParaRPr lang="en-US" sz="2300" b="1" spc="-10" dirty="0">
+              <a:solidFill>
+                <a:srgbClr val="3C78D8"/>
+              </a:solidFill>
+              <a:latin typeface="Times New Roman"/>
+              <a:cs typeface="Times New Roman"/>
+            </a:endParaRPr>
+          </a:p>
+          <a:p>
+            <a:pPr marL="230504" indent="-222250">
+              <a:lnSpc>
+                <a:spcPct val="100000"/>
+              </a:lnSpc>
+              <a:buSzPct val="95652"/>
+              <a:buAutoNum type="arabicPeriod" startAt="6"/>
+              <a:tabLst>
+                <a:tab pos="230504" algn="l"/>
+              </a:tabLst>
+            </a:pPr>
+            <a:endParaRPr lang="en-US" sz="2300" b="1" spc="-10" dirty="0">
+              <a:solidFill>
+                <a:srgbClr val="3C78D8"/>
+              </a:solidFill>
+              <a:latin typeface="Times New Roman"/>
+              <a:cs typeface="Times New Roman"/>
+            </a:endParaRPr>
+          </a:p>
+          <a:p>
+            <a:pPr marL="8254">
+              <a:lnSpc>
+                <a:spcPct val="100000"/>
+              </a:lnSpc>
+              <a:buSzPct val="95652"/>
+              <a:tabLst>
+                <a:tab pos="230504" algn="l"/>
+              </a:tabLst>
+            </a:pPr>
+            <a:endParaRPr lang="en-US" sz="2300" b="1" spc="-10" dirty="0">
+              <a:solidFill>
+                <a:srgbClr val="3C78D8"/>
+              </a:solidFill>
+              <a:latin typeface="Times New Roman"/>
+              <a:cs typeface="Times New Roman"/>
+            </a:endParaRPr>
+          </a:p>
+          <a:p>
+            <a:pPr marL="8254">
+              <a:lnSpc>
+                <a:spcPct val="100000"/>
+              </a:lnSpc>
+              <a:buSzPct val="95652"/>
+              <a:tabLst>
+                <a:tab pos="230504" algn="l"/>
+              </a:tabLst>
+            </a:pPr>
+            <a:endParaRPr lang="en-US" sz="2300" b="1" spc="-10" dirty="0">
+              <a:solidFill>
+                <a:srgbClr val="3C78D8"/>
+              </a:solidFill>
+              <a:latin typeface="Times New Roman"/>
+              <a:cs typeface="Times New Roman"/>
+            </a:endParaRPr>
+          </a:p>
+          <a:p>
+            <a:pPr marL="8254">
+              <a:lnSpc>
+                <a:spcPct val="100000"/>
+              </a:lnSpc>
+              <a:buSzPct val="95652"/>
+              <a:tabLst>
+                <a:tab pos="230504" algn="l"/>
+              </a:tabLst>
+            </a:pPr>
+            <a:endParaRPr lang="en-US" sz="2300" b="1" spc="-10" dirty="0">
+              <a:solidFill>
+                <a:srgbClr val="3C78D8"/>
+              </a:solidFill>
+              <a:latin typeface="Times New Roman"/>
+              <a:cs typeface="Times New Roman"/>
+            </a:endParaRPr>
+          </a:p>
+          <a:p>
+            <a:pPr marL="8254">
+              <a:lnSpc>
+                <a:spcPct val="100000"/>
+              </a:lnSpc>
+              <a:buSzPct val="95652"/>
+              <a:tabLst>
+                <a:tab pos="230504" algn="l"/>
+              </a:tabLst>
+            </a:pPr>
+            <a:endParaRPr lang="en-US" sz="2300" b="1" spc="-10" dirty="0">
+              <a:solidFill>
+                <a:srgbClr val="3C78D8"/>
+              </a:solidFill>
+              <a:latin typeface="Times New Roman"/>
+              <a:cs typeface="Times New Roman"/>
+            </a:endParaRPr>
+          </a:p>
+          <a:p>
+            <a:pPr marL="8254">
+              <a:lnSpc>
+                <a:spcPct val="100000"/>
+              </a:lnSpc>
+              <a:buSzPct val="95652"/>
+              <a:tabLst>
+                <a:tab pos="230504" algn="l"/>
+              </a:tabLst>
+            </a:pPr>
+            <a:endParaRPr lang="en-US" sz="2300" b="1" spc="-10" dirty="0">
+              <a:solidFill>
+                <a:srgbClr val="3C78D8"/>
+              </a:solidFill>
+              <a:latin typeface="Times New Roman"/>
+              <a:cs typeface="Times New Roman"/>
+            </a:endParaRPr>
+          </a:p>
+          <a:p>
+            <a:pPr marL="8254">
+              <a:lnSpc>
+                <a:spcPct val="100000"/>
+              </a:lnSpc>
+              <a:buSzPct val="95652"/>
+              <a:tabLst>
+                <a:tab pos="230504" algn="l"/>
+              </a:tabLst>
+            </a:pPr>
+            <a:endParaRPr lang="en-US" sz="2300" b="1" spc="-10" dirty="0">
+              <a:solidFill>
+                <a:srgbClr val="3C78D8"/>
+              </a:solidFill>
+              <a:latin typeface="Times New Roman"/>
+              <a:cs typeface="Times New Roman"/>
+            </a:endParaRPr>
+          </a:p>
+          <a:p>
+            <a:pPr marL="278130" indent="-222250">
+              <a:lnSpc>
+                <a:spcPct val="100000"/>
+              </a:lnSpc>
+              <a:buClr>
+                <a:srgbClr val="3C78D8"/>
+              </a:buClr>
+              <a:buSzPct val="95652"/>
+              <a:buFont typeface="Times New Roman"/>
+              <a:buAutoNum type="arabicPeriod" startAt="7"/>
+              <a:tabLst>
+                <a:tab pos="278130" algn="l"/>
+              </a:tabLst>
+            </a:pPr>
+            <a:r>
+              <a:rPr lang="en-US" sz="2300" b="1" dirty="0">
+                <a:solidFill>
+                  <a:srgbClr val="3C78D8"/>
+                </a:solidFill>
+                <a:latin typeface="Times New Roman"/>
+                <a:cs typeface="Times New Roman"/>
+              </a:rPr>
+              <a:t>Learning</a:t>
+            </a:r>
+            <a:r>
+              <a:rPr lang="en-US" sz="2300" b="1" spc="-80" dirty="0">
+                <a:solidFill>
+                  <a:srgbClr val="3C78D8"/>
+                </a:solidFill>
+                <a:latin typeface="Times New Roman"/>
+                <a:cs typeface="Times New Roman"/>
+              </a:rPr>
+              <a:t> </a:t>
+            </a:r>
+            <a:r>
+              <a:rPr lang="en-US" sz="2300" b="1" spc="-10" dirty="0">
+                <a:solidFill>
+                  <a:srgbClr val="3C78D8"/>
+                </a:solidFill>
+                <a:latin typeface="Times New Roman"/>
+                <a:cs typeface="Times New Roman"/>
+              </a:rPr>
+              <a:t>Outcome:</a:t>
+            </a:r>
+            <a:endParaRPr lang="en-US" sz="2300" dirty="0">
+              <a:latin typeface="Times New Roman"/>
+              <a:cs typeface="Times New Roman"/>
+            </a:endParaRPr>
+          </a:p>
+          <a:p>
+            <a:pPr>
+              <a:lnSpc>
+                <a:spcPct val="100000"/>
+              </a:lnSpc>
+            </a:pPr>
+            <a:endParaRPr lang="en-US" sz="1500" dirty="0">
+              <a:latin typeface="Times New Roman"/>
+              <a:cs typeface="Times New Roman"/>
+            </a:endParaRPr>
+          </a:p>
+          <a:p>
+            <a:pPr>
+              <a:lnSpc>
+                <a:spcPct val="100000"/>
+              </a:lnSpc>
+            </a:pPr>
+            <a:r>
+              <a:rPr lang="en-US" sz="1500" dirty="0">
+                <a:latin typeface="Times New Roman"/>
+                <a:cs typeface="Times New Roman"/>
+              </a:rPr>
+              <a:t>Through this assignment, I learned how to create accessible web forms and how to group related data using semantic tags. I also gained a better understanding of how different input types improve the user experience on both desktop and mobile devices.</a:t>
+            </a:r>
+          </a:p>
+          <a:p>
+            <a:pPr>
+              <a:lnSpc>
+                <a:spcPct val="100000"/>
+              </a:lnSpc>
+            </a:pPr>
+            <a:endParaRPr lang="en-US" sz="1500" dirty="0">
+              <a:latin typeface="Times New Roman"/>
+              <a:cs typeface="Times New Roman"/>
+            </a:endParaRPr>
+          </a:p>
+          <a:p>
+            <a:pPr marL="332105" indent="-290830">
+              <a:lnSpc>
+                <a:spcPct val="100000"/>
+              </a:lnSpc>
+              <a:spcBef>
+                <a:spcPts val="5"/>
+              </a:spcBef>
+              <a:buClr>
+                <a:srgbClr val="3C78D8"/>
+              </a:buClr>
+              <a:buSzPct val="95652"/>
+              <a:buFont typeface="Times New Roman"/>
+              <a:buAutoNum type="arabicPeriod" startAt="8"/>
+              <a:tabLst>
+                <a:tab pos="332105" algn="l"/>
+              </a:tabLst>
+            </a:pPr>
+            <a:r>
+              <a:rPr lang="en-US" sz="2300" b="1" spc="-10" dirty="0">
+                <a:solidFill>
+                  <a:srgbClr val="3C78D8"/>
+                </a:solidFill>
+                <a:latin typeface="Times New Roman"/>
+                <a:cs typeface="Times New Roman"/>
+              </a:rPr>
+              <a:t>Conclusion:</a:t>
+            </a:r>
+            <a:endParaRPr lang="en-US" sz="2300" dirty="0">
+              <a:latin typeface="Times New Roman"/>
+              <a:cs typeface="Times New Roman"/>
+            </a:endParaRPr>
+          </a:p>
+          <a:p>
+            <a:pPr marL="60325">
+              <a:lnSpc>
+                <a:spcPct val="100000"/>
+              </a:lnSpc>
+              <a:spcBef>
+                <a:spcPts val="1155"/>
+              </a:spcBef>
+            </a:pPr>
+            <a:r>
+              <a:rPr lang="en-US" sz="1500" dirty="0">
+                <a:latin typeface="Times New Roman" panose="02020603050405020304" pitchFamily="18" charset="0"/>
+                <a:cs typeface="Times New Roman" panose="02020603050405020304" pitchFamily="18" charset="0"/>
+              </a:rPr>
+              <a:t>The project successfully delivers a clean, functional HTML-based registration page. It effectively captures user data and provides a clear overview of the event, serving as a solid base for future styling and interactivity. </a:t>
+            </a:r>
+            <a:endParaRPr lang="en-US" sz="1500" i="1" spc="-10" dirty="0">
+              <a:latin typeface="Times New Roman" panose="02020603050405020304" pitchFamily="18" charset="0"/>
+              <a:cs typeface="Times New Roman" panose="02020603050405020304" pitchFamily="18" charset="0"/>
+            </a:endParaRPr>
+          </a:p>
+        </p:txBody>
+      </p:sp>
+      <p:pic>
+        <p:nvPicPr>
+          <p:cNvPr id="9" name="object 9">
+            <a:extLst>
+              <a:ext uri="{FF2B5EF4-FFF2-40B4-BE49-F238E27FC236}">
+                <a16:creationId xmlns:a16="http://schemas.microsoft.com/office/drawing/2014/main" id="{78FA269F-C182-1398-9691-1985A4D19864}"/>
+              </a:ext>
+            </a:extLst>
+          </p:cNvPr>
+          <p:cNvPicPr/>
+          <p:nvPr/>
+        </p:nvPicPr>
+        <p:blipFill>
+          <a:blip r:embed="rId4" cstate="print"/>
+          <a:stretch>
+            <a:fillRect/>
+          </a:stretch>
+        </p:blipFill>
+        <p:spPr>
+          <a:xfrm>
+            <a:off x="378459" y="689594"/>
+            <a:ext cx="1495425" cy="371475"/>
+          </a:xfrm>
+          <a:prstGeom prst="rect">
+            <a:avLst/>
+          </a:prstGeom>
+        </p:spPr>
+      </p:pic>
+      <p:pic>
+        <p:nvPicPr>
+          <p:cNvPr id="10" name="object 10">
+            <a:extLst>
+              <a:ext uri="{FF2B5EF4-FFF2-40B4-BE49-F238E27FC236}">
+                <a16:creationId xmlns:a16="http://schemas.microsoft.com/office/drawing/2014/main" id="{D2A37EBB-AD31-117C-7141-5A60E679277E}"/>
+              </a:ext>
+            </a:extLst>
+          </p:cNvPr>
+          <p:cNvPicPr/>
+          <p:nvPr/>
+        </p:nvPicPr>
+        <p:blipFill>
+          <a:blip r:embed="rId5" cstate="print"/>
+          <a:stretch>
+            <a:fillRect/>
+          </a:stretch>
+        </p:blipFill>
+        <p:spPr>
+          <a:xfrm>
+            <a:off x="2283460" y="670544"/>
+            <a:ext cx="1009650" cy="571500"/>
+          </a:xfrm>
+          <a:prstGeom prst="rect">
+            <a:avLst/>
+          </a:prstGeom>
+        </p:spPr>
+      </p:pic>
+    </p:spTree>
+    <p:extLst>
+      <p:ext uri="{BB962C8B-B14F-4D97-AF65-F5344CB8AC3E}">
+        <p14:creationId xmlns:p14="http://schemas.microsoft.com/office/powerpoint/2010/main" val="3731142560"/>
+      </p:ext>
+    </p:extLst>
   </p:cSld>
   <p:clrMapOvr>
     <a:masterClrMapping/>

--- a/ppt/FE Assignment-1 Template.pptx
+++ b/ppt/FE Assignment-1 Template.pptx
@@ -188,7 +188,7 @@
           <a:p>
             <a:fld id="{1D8BD707-D9CF-40AE-B4C6-C98DA3205C09}" type="datetimeFigureOut">
               <a:rPr lang="en-US"/>
-              <a:t>3/5/2026</a:t>
+              <a:t>3/6/2026</a:t>
             </a:fld>
             <a:endParaRPr lang="en-US"/>
           </a:p>
@@ -365,7 +365,7 @@
           <a:p>
             <a:fld id="{1D8BD707-D9CF-40AE-B4C6-C98DA3205C09}" type="datetimeFigureOut">
               <a:rPr lang="en-US"/>
-              <a:t>3/5/2026</a:t>
+              <a:t>3/6/2026</a:t>
             </a:fld>
             <a:endParaRPr lang="en-US"/>
           </a:p>
@@ -579,7 +579,7 @@
           <a:p>
             <a:fld id="{1D8BD707-D9CF-40AE-B4C6-C98DA3205C09}" type="datetimeFigureOut">
               <a:rPr lang="en-US"/>
-              <a:t>3/5/2026</a:t>
+              <a:t>3/6/2026</a:t>
             </a:fld>
             <a:endParaRPr lang="en-US"/>
           </a:p>
@@ -727,7 +727,7 @@
           <a:p>
             <a:fld id="{1D8BD707-D9CF-40AE-B4C6-C98DA3205C09}" type="datetimeFigureOut">
               <a:rPr lang="en-US"/>
-              <a:t>3/5/2026</a:t>
+              <a:t>3/6/2026</a:t>
             </a:fld>
             <a:endParaRPr lang="en-US"/>
           </a:p>
@@ -846,7 +846,7 @@
           <a:p>
             <a:fld id="{1D8BD707-D9CF-40AE-B4C6-C98DA3205C09}" type="datetimeFigureOut">
               <a:rPr lang="en-US"/>
-              <a:t>3/5/2026</a:t>
+              <a:t>3/6/2026</a:t>
             </a:fld>
             <a:endParaRPr lang="en-US"/>
           </a:p>
@@ -1071,7 +1071,7 @@
           <a:p>
             <a:fld id="{1D8BD707-D9CF-40AE-B4C6-C98DA3205C09}" type="datetimeFigureOut">
               <a:rPr lang="en-US"/>
-              <a:t>3/5/2026</a:t>
+              <a:t>3/6/2026</a:t>
             </a:fld>
             <a:endParaRPr lang="en-US"/>
           </a:p>
@@ -1642,11 +1642,15 @@
             </a:pPr>
             <a:r>
               <a:rPr sz="1200" spc="-10" dirty="0"/>
-              <a:t>NMID:</a:t>
-            </a:r>
-            <a:r>
-              <a:rPr lang="en-US" sz="1200" spc="-10" dirty="0"/>
-              <a:t> </a:t>
+              <a:t>NMID</a:t>
+            </a:r>
+            <a:r>
+              <a:rPr sz="1200" spc="-10"/>
+              <a:t>:</a:t>
+            </a:r>
+            <a:r>
+              <a:rPr lang="en-US" sz="1200" spc="-10"/>
+              <a:t> 614D89761591EB584744FC4BCEE6FE5F</a:t>
             </a:r>
             <a:endParaRPr sz="1200" dirty="0"/>
           </a:p>

--- a/ppt/FE Assignment-1 Template.pptx
+++ b/ppt/FE Assignment-1 Template.pptx
@@ -4003,11 +4003,18 @@
               </a:lnSpc>
             </a:pPr>
             <a:r>
+              <a:rPr lang="en-US" sz="1200" b="1" spc="-10" dirty="0">
+                <a:latin typeface="Times New Roman"/>
+                <a:cs typeface="Times New Roman"/>
+              </a:rPr>
+              <a:t>Example</a:t>
+            </a:r>
+            <a:r>
               <a:rPr sz="1200" b="1" spc="-10" dirty="0">
                 <a:latin typeface="Times New Roman"/>
                 <a:cs typeface="Times New Roman"/>
               </a:rPr>
-              <a:t>Sample:</a:t>
+              <a:t>:</a:t>
             </a:r>
             <a:endParaRPr sz="1200" dirty="0">
               <a:latin typeface="Times New Roman"/>
@@ -4683,7 +4690,7 @@
         <p:spPr>
           <a:xfrm>
             <a:off x="461484" y="6841660"/>
-            <a:ext cx="6341110" cy="2776401"/>
+            <a:ext cx="6341110" cy="3155992"/>
           </a:xfrm>
           <a:prstGeom prst="rect">
             <a:avLst/>
@@ -4821,6 +4828,34 @@
                 <a:cs typeface="Times New Roman"/>
               </a:rPr>
               <a:t>              Contact Details(Organizer)</a:t>
+            </a:r>
+            <a:endParaRPr lang="en-US" sz="1300" b="1" dirty="0">
+              <a:latin typeface="Times New Roman"/>
+              <a:cs typeface="Times New Roman"/>
+            </a:endParaRPr>
+          </a:p>
+          <a:p>
+            <a:pPr marL="679450">
+              <a:lnSpc>
+                <a:spcPct val="100000"/>
+              </a:lnSpc>
+              <a:spcBef>
+                <a:spcPts val="1430"/>
+              </a:spcBef>
+            </a:pPr>
+            <a:r>
+              <a:rPr lang="en-US" sz="1300" b="1" dirty="0">
+                <a:latin typeface="Times New Roman"/>
+                <a:cs typeface="Times New Roman"/>
+              </a:rPr>
+              <a:t>Name : </a:t>
+            </a:r>
+            <a:r>
+              <a:rPr lang="en-US" sz="1300" dirty="0">
+                <a:latin typeface="Times New Roman"/>
+                <a:cs typeface="Times New Roman"/>
+              </a:rPr>
+              <a:t>Hariharan S</a:t>
             </a:r>
             <a:endParaRPr lang="en-US" sz="1300" b="1" dirty="0">
               <a:latin typeface="Times New Roman"/>

--- a/ppt/FE Assignment-1 Template.pptx
+++ b/ppt/FE Assignment-1 Template.pptx
@@ -188,7 +188,7 @@
           <a:p>
             <a:fld id="{1D8BD707-D9CF-40AE-B4C6-C98DA3205C09}" type="datetimeFigureOut">
               <a:rPr lang="en-US"/>
-              <a:t>3/6/2026</a:t>
+              <a:t>3/10/2026</a:t>
             </a:fld>
             <a:endParaRPr lang="en-US"/>
           </a:p>
@@ -365,7 +365,7 @@
           <a:p>
             <a:fld id="{1D8BD707-D9CF-40AE-B4C6-C98DA3205C09}" type="datetimeFigureOut">
               <a:rPr lang="en-US"/>
-              <a:t>3/6/2026</a:t>
+              <a:t>3/10/2026</a:t>
             </a:fld>
             <a:endParaRPr lang="en-US"/>
           </a:p>
@@ -579,7 +579,7 @@
           <a:p>
             <a:fld id="{1D8BD707-D9CF-40AE-B4C6-C98DA3205C09}" type="datetimeFigureOut">
               <a:rPr lang="en-US"/>
-              <a:t>3/6/2026</a:t>
+              <a:t>3/10/2026</a:t>
             </a:fld>
             <a:endParaRPr lang="en-US"/>
           </a:p>
@@ -727,7 +727,7 @@
           <a:p>
             <a:fld id="{1D8BD707-D9CF-40AE-B4C6-C98DA3205C09}" type="datetimeFigureOut">
               <a:rPr lang="en-US"/>
-              <a:t>3/6/2026</a:t>
+              <a:t>3/10/2026</a:t>
             </a:fld>
             <a:endParaRPr lang="en-US"/>
           </a:p>
@@ -846,7 +846,7 @@
           <a:p>
             <a:fld id="{1D8BD707-D9CF-40AE-B4C6-C98DA3205C09}" type="datetimeFigureOut">
               <a:rPr lang="en-US"/>
-              <a:t>3/6/2026</a:t>
+              <a:t>3/10/2026</a:t>
             </a:fld>
             <a:endParaRPr lang="en-US"/>
           </a:p>
@@ -1071,7 +1071,7 @@
           <a:p>
             <a:fld id="{1D8BD707-D9CF-40AE-B4C6-C98DA3205C09}" type="datetimeFigureOut">
               <a:rPr lang="en-US"/>
-              <a:t>3/6/2026</a:t>
+              <a:t>3/10/2026</a:t>
             </a:fld>
             <a:endParaRPr lang="en-US"/>
           </a:p>
@@ -1397,7 +1397,7 @@
         <p:spPr>
           <a:xfrm>
             <a:off x="442158" y="1742023"/>
-            <a:ext cx="6466642" cy="8799845"/>
+            <a:ext cx="6923842" cy="8799845"/>
           </a:xfrm>
           <a:prstGeom prst="rect">
             <a:avLst/>
@@ -1542,11 +1542,7 @@
             </a:r>
             <a:r>
               <a:rPr lang="en-US" sz="1300" spc="-10" dirty="0"/>
-              <a:t>Tagore College of Arts And Science ,</a:t>
-            </a:r>
-            <a:r>
-              <a:rPr lang="en-US" sz="1300" spc="-10" dirty="0" err="1"/>
-              <a:t>Chrompet</a:t>
+              <a:t>Tagore College of Arts And Science.</a:t>
             </a:r>
             <a:endParaRPr sz="1300" dirty="0"/>
           </a:p>
@@ -1623,7 +1619,7 @@
             </a:r>
             <a:r>
               <a:rPr lang="en-US" sz="1200" spc="-25" dirty="0"/>
-              <a:t>  </a:t>
+              <a:t>  unm1455</a:t>
             </a:r>
             <a:r>
               <a:rPr lang="en-US" sz="1300" spc="-25" dirty="0"/>
@@ -1642,14 +1638,10 @@
             </a:pPr>
             <a:r>
               <a:rPr sz="1200" spc="-10" dirty="0"/>
-              <a:t>NMID</a:t>
-            </a:r>
-            <a:r>
-              <a:rPr sz="1200" spc="-10"/>
-              <a:t>:</a:t>
-            </a:r>
-            <a:r>
-              <a:rPr lang="en-US" sz="1200" spc="-10"/>
+              <a:t>NMID:</a:t>
+            </a:r>
+            <a:r>
+              <a:rPr lang="en-US" sz="1200" spc="-10" dirty="0"/>
               <a:t> 614D89761591EB584744FC4BCEE6FE5F</a:t>
             </a:r>
             <a:endParaRPr sz="1200" dirty="0"/>
@@ -1673,7 +1665,7 @@
             </a:r>
             <a:r>
               <a:rPr lang="en-US" sz="1300" spc="-10" dirty="0"/>
-              <a:t>06/03/2026</a:t>
+              <a:t>10/03/2026</a:t>
             </a:r>
             <a:endParaRPr sz="1300" dirty="0"/>
           </a:p>
@@ -1698,7 +1690,11 @@
               <a:rPr lang="en-US" sz="1200" spc="-10" dirty="0"/>
               <a:t> </a:t>
             </a:r>
-            <a:endParaRPr sz="1200" dirty="0"/>
+            <a:r>
+              <a:rPr lang="en-US" sz="1400" spc="-10" dirty="0"/>
+              <a:t>HTML Structure for Event Registration</a:t>
+            </a:r>
+            <a:endParaRPr sz="1400" dirty="0"/>
           </a:p>
           <a:p>
             <a:pPr marL="10795">
@@ -1870,11 +1866,18 @@
               </a:tabLst>
             </a:pPr>
             <a:r>
+              <a:rPr lang="en-US" sz="1500" b="1" dirty="0">
+                <a:latin typeface="Times New Roman"/>
+                <a:cs typeface="Times New Roman"/>
+              </a:rPr>
+              <a:t>Structural Architecture</a:t>
+            </a:r>
+            <a:r>
               <a:rPr lang="en-US" sz="1500" dirty="0">
                 <a:latin typeface="Times New Roman"/>
                 <a:cs typeface="Times New Roman"/>
               </a:rPr>
-              <a:t>Structural Architecture: Defining a clear hierarchy of information using </a:t>
+              <a:t>: Defining a clear hierarchy of information using </a:t>
             </a:r>
             <a:r>
               <a:rPr lang="en-US" sz="1500" u="sng" dirty="0">
@@ -1900,11 +1903,18 @@
               </a:tabLst>
             </a:pPr>
             <a:r>
+              <a:rPr lang="en-US" sz="1500" b="1" dirty="0">
+                <a:latin typeface="Times New Roman"/>
+                <a:cs typeface="Times New Roman"/>
+              </a:rPr>
+              <a:t>User Information Capture</a:t>
+            </a:r>
+            <a:r>
               <a:rPr lang="en-US" sz="1500" dirty="0">
                 <a:latin typeface="Times New Roman"/>
                 <a:cs typeface="Times New Roman"/>
               </a:rPr>
-              <a:t>User Information Capture: Designing a multi-section form to collect personal, event, and college-specific data.</a:t>
+              <a:t>: Designing a multi-section form to collect personal, event, and college-specific data.</a:t>
             </a:r>
           </a:p>
           <a:p>
@@ -1923,11 +1933,18 @@
               </a:tabLst>
             </a:pPr>
             <a:r>
+              <a:rPr lang="en-US" sz="1500" b="1" dirty="0">
+                <a:latin typeface="Times New Roman"/>
+                <a:cs typeface="Times New Roman"/>
+              </a:rPr>
+              <a:t>Data Organization:</a:t>
+            </a:r>
+            <a:r>
               <a:rPr lang="en-US" sz="1500" dirty="0">
                 <a:latin typeface="Times New Roman"/>
                 <a:cs typeface="Times New Roman"/>
               </a:rPr>
-              <a:t>Data Organization: Implementing selection menus and radio buttons to standardize user responses.</a:t>
+              <a:t> Implementing selection menus and radio buttons to standardize user responses.</a:t>
             </a:r>
           </a:p>
           <a:p>
@@ -1946,11 +1963,18 @@
               </a:tabLst>
             </a:pPr>
             <a:r>
+              <a:rPr lang="en-US" sz="1500" b="1" dirty="0">
+                <a:latin typeface="Times New Roman"/>
+                <a:cs typeface="Times New Roman"/>
+              </a:rPr>
+              <a:t>Reporting Interface: </a:t>
+            </a:r>
+            <a:r>
               <a:rPr lang="en-US" sz="1500" dirty="0">
                 <a:latin typeface="Times New Roman"/>
                 <a:cs typeface="Times New Roman"/>
               </a:rPr>
-              <a:t>Reporting Interface: Creating a static table to represent how registered participant data is displayed to administrators.</a:t>
+              <a:t>Creating a static table to represent how registered participant data is displayed to administrators.</a:t>
             </a:r>
           </a:p>
         </p:txBody>
@@ -6229,7 +6253,7 @@
         <p:spPr>
           <a:xfrm>
             <a:off x="749299" y="1371600"/>
-            <a:ext cx="5901055" cy="9106339"/>
+            <a:ext cx="5901055" cy="8983228"/>
           </a:xfrm>
           <a:prstGeom prst="rect">
             <a:avLst/>
@@ -6289,12 +6313,11 @@
             </a:endParaRPr>
           </a:p>
           <a:p>
-            <a:pPr marL="230504" indent="-222250">
+            <a:pPr marL="8254">
               <a:lnSpc>
                 <a:spcPct val="100000"/>
               </a:lnSpc>
               <a:buSzPct val="95652"/>
-              <a:buAutoNum type="arabicPeriod" startAt="6"/>
               <a:tabLst>
                 <a:tab pos="230504" algn="l"/>
               </a:tabLst>
@@ -6308,12 +6331,11 @@
             </a:endParaRPr>
           </a:p>
           <a:p>
-            <a:pPr marL="230504" indent="-222250">
+            <a:pPr marL="8254">
               <a:lnSpc>
                 <a:spcPct val="100000"/>
               </a:lnSpc>
               <a:buSzPct val="95652"/>
-              <a:buAutoNum type="arabicPeriod" startAt="6"/>
               <a:tabLst>
                 <a:tab pos="230504" algn="l"/>
               </a:tabLst>
@@ -6740,6 +6762,78 @@
           <a:xfrm>
             <a:off x="2283460" y="670544"/>
             <a:ext cx="1009650" cy="571500"/>
+          </a:xfrm>
+          <a:prstGeom prst="rect">
+            <a:avLst/>
+          </a:prstGeom>
+        </p:spPr>
+      </p:pic>
+      <p:pic>
+        <p:nvPicPr>
+          <p:cNvPr id="16" name="Picture 15">
+            <a:extLst>
+              <a:ext uri="{FF2B5EF4-FFF2-40B4-BE49-F238E27FC236}">
+                <a16:creationId xmlns:a16="http://schemas.microsoft.com/office/drawing/2014/main" id="{0928229D-2B59-AB0F-8BC4-001B89096957}"/>
+              </a:ext>
+            </a:extLst>
+          </p:cNvPr>
+          <p:cNvPicPr>
+            <a:picLocks noChangeAspect="1"/>
+          </p:cNvPicPr>
+          <p:nvPr/>
+        </p:nvPicPr>
+        <p:blipFill>
+          <a:blip r:embed="rId6">
+            <a:extLst>
+              <a:ext uri="{28A0092B-C50C-407E-A947-70E740481C1C}">
+                <a14:useLocalDpi xmlns:a14="http://schemas.microsoft.com/office/drawing/2010/main" val="0"/>
+              </a:ext>
+            </a:extLst>
+          </a:blip>
+          <a:stretch>
+            <a:fillRect/>
+          </a:stretch>
+        </p:blipFill>
+        <p:spPr>
+          <a:xfrm>
+            <a:off x="43180" y="2023391"/>
+            <a:ext cx="3495042" cy="4858032"/>
+          </a:xfrm>
+          <a:prstGeom prst="rect">
+            <a:avLst/>
+          </a:prstGeom>
+        </p:spPr>
+      </p:pic>
+      <p:pic>
+        <p:nvPicPr>
+          <p:cNvPr id="18" name="Picture 17">
+            <a:extLst>
+              <a:ext uri="{FF2B5EF4-FFF2-40B4-BE49-F238E27FC236}">
+                <a16:creationId xmlns:a16="http://schemas.microsoft.com/office/drawing/2014/main" id="{6BA4371F-9DDF-E7FD-3E40-AFFC27FB4D8F}"/>
+              </a:ext>
+            </a:extLst>
+          </p:cNvPr>
+          <p:cNvPicPr>
+            <a:picLocks noChangeAspect="1"/>
+          </p:cNvPicPr>
+          <p:nvPr/>
+        </p:nvPicPr>
+        <p:blipFill>
+          <a:blip r:embed="rId7">
+            <a:extLst>
+              <a:ext uri="{28A0092B-C50C-407E-A947-70E740481C1C}">
+                <a14:useLocalDpi xmlns:a14="http://schemas.microsoft.com/office/drawing/2010/main" val="0"/>
+              </a:ext>
+            </a:extLst>
+          </a:blip>
+          <a:stretch>
+            <a:fillRect/>
+          </a:stretch>
+        </p:blipFill>
+        <p:spPr>
+          <a:xfrm>
+            <a:off x="3431678" y="2064849"/>
+            <a:ext cx="4137522" cy="4870366"/>
           </a:xfrm>
           <a:prstGeom prst="rect">
             <a:avLst/>
